--- a/ocm_presentation.pptx
+++ b/ocm_presentation.pptx
@@ -4533,8 +4533,8 @@
         </p:nvSpPr>
         <p:spPr>
           <a:xfrm>
-            <a:off x="6675120" y="5989320"/>
-            <a:ext cx="5212080" cy="365760"/>
+            <a:off x="6675120" y="5897880"/>
+            <a:ext cx="5212080" cy="502920"/>
           </a:xfrm>
           <a:prstGeom prst="rect">
             <a:avLst/>
@@ -4549,12 +4549,12 @@
           <a:p>
             <a:pPr algn="l"/>
             <a:r>
-              <a:rPr sz="1000" b="0" i="1">
+              <a:rPr sz="900" b="0" i="1">
                 <a:solidFill>
                   <a:srgbClr val="50596E"/>
                 </a:solidFill>
               </a:rPr>
-              <a:t>Root cause: GHSV, CH₄/O₂ ratio, pressure absent from dataset.</a:t>
+              <a:t>Root cause: GHSV, CH₄/O₂ ratio, pressure absent from dataset. SHAP reference: Lundberg &amp; Lee (2017, NeurIPS); Shapley (1953).</a:t>
             </a:r>
           </a:p>
         </p:txBody>
@@ -7727,12 +7727,12 @@
           <a:p>
             <a:pPr algn="l"/>
             <a:r>
-              <a:rPr sz="1200" b="0" i="0">
+              <a:rPr sz="1100" b="0" i="0">
                 <a:solidFill>
                   <a:srgbClr val="50596E"/>
                 </a:solidFill>
               </a:rPr>
-              <a:t>Literature mean is 3.42 pp higher (t = −32.2, p &lt; 10⁻²⁰⁰) — a real systematic offset, not noise.</a:t>
+              <a:t>Literature mean is 3.42 pp higher (t = −32.2, p &lt; 10⁻²⁰⁰) — systematic offset from publication bias and optimised conditions (Fanelli, 2012).</a:t>
             </a:r>
           </a:p>
         </p:txBody>
@@ -7745,7 +7745,7 @@
         </p:nvSpPr>
         <p:spPr>
           <a:xfrm>
-            <a:off x="365760" y="4754880"/>
+            <a:off x="365760" y="4681728"/>
             <a:ext cx="2468880" cy="384048"/>
           </a:xfrm>
           <a:prstGeom prst="rect">
@@ -7788,7 +7788,7 @@
         </p:nvSpPr>
         <p:spPr>
           <a:xfrm>
-            <a:off x="411480" y="4773168"/>
+            <a:off x="411480" y="4700016"/>
             <a:ext cx="2377440" cy="347472"/>
           </a:xfrm>
           <a:prstGeom prst="rect">
@@ -7822,7 +7822,7 @@
         </p:nvSpPr>
         <p:spPr>
           <a:xfrm>
-            <a:off x="2971800" y="4791456"/>
+            <a:off x="2971800" y="4718304"/>
             <a:ext cx="8869680" cy="365760"/>
           </a:xfrm>
           <a:prstGeom prst="rect">
@@ -7838,12 +7838,12 @@
           <a:p>
             <a:pPr algn="l"/>
             <a:r>
-              <a:rPr sz="1200" b="0" i="0">
+              <a:rPr sz="1100" b="0" i="0">
                 <a:solidFill>
                   <a:srgbClr val="50596E"/>
                 </a:solidFill>
               </a:rPr>
-              <a:t>78.5% of literature samples describe chemistry our lab has never tested.</a:t>
+              <a:t>78.5% of literature samples describe chemistry our lab has never tested (Pan &amp; Yang, 2010, IEEE TKDE).</a:t>
             </a:r>
           </a:p>
         </p:txBody>
@@ -7856,7 +7856,7 @@
         </p:nvSpPr>
         <p:spPr>
           <a:xfrm>
-            <a:off x="365760" y="5394960"/>
+            <a:off x="365760" y="5248656"/>
             <a:ext cx="2468880" cy="384048"/>
           </a:xfrm>
           <a:prstGeom prst="rect">
@@ -7899,7 +7899,7 @@
         </p:nvSpPr>
         <p:spPr>
           <a:xfrm>
-            <a:off x="411480" y="5413248"/>
+            <a:off x="411480" y="5266944"/>
             <a:ext cx="2377440" cy="347472"/>
           </a:xfrm>
           <a:prstGeom prst="rect">
@@ -7933,7 +7933,7 @@
         </p:nvSpPr>
         <p:spPr>
           <a:xfrm>
-            <a:off x="2971800" y="5431536"/>
+            <a:off x="2971800" y="5285232"/>
             <a:ext cx="8869680" cy="365760"/>
           </a:xfrm>
           <a:prstGeom prst="rect">
@@ -7949,12 +7949,91 @@
           <a:p>
             <a:pPr algn="l"/>
             <a:r>
-              <a:rPr sz="1200" b="0" i="0">
+              <a:rPr sz="1100" b="0" i="0">
                 <a:solidFill>
                   <a:srgbClr val="50596E"/>
                 </a:solidFill>
               </a:rPr>
-              <a:t>Papers report only successful runs — the literature distribution is skewed, not just shifted.</a:t>
+              <a:t>Literature is skewed, not just shifted — failed experiments are rarely reported, over-weighting high yields.</a:t>
+            </a:r>
+          </a:p>
+        </p:txBody>
+      </p:sp>
+      <p:sp>
+        <p:nvSpPr>
+          <p:cNvPr id="43" name="Rectangle 42"/>
+          <p:cNvSpPr/>
+          <p:nvPr/>
+        </p:nvSpPr>
+        <p:spPr>
+          <a:xfrm>
+            <a:off x="365760" y="5870448"/>
+            <a:ext cx="11430000" cy="621792"/>
+          </a:xfrm>
+          <a:prstGeom prst="rect">
+            <a:avLst/>
+          </a:prstGeom>
+          <a:solidFill>
+            <a:srgbClr val="F5F6F8"/>
+          </a:solidFill>
+          <a:ln w="9525">
+            <a:solidFill>
+              <a:srgbClr val="0F1E42"/>
+            </a:solidFill>
+          </a:ln>
+        </p:spPr>
+        <p:style>
+          <a:lnRef idx="1">
+            <a:schemeClr val="accent1"/>
+          </a:lnRef>
+          <a:fillRef idx="3">
+            <a:schemeClr val="accent1"/>
+          </a:fillRef>
+          <a:effectRef idx="2">
+            <a:schemeClr val="accent1"/>
+          </a:effectRef>
+          <a:fontRef idx="minor">
+            <a:schemeClr val="lt1"/>
+          </a:fontRef>
+        </p:style>
+        <p:txBody>
+          <a:bodyPr rtlCol="0" anchor="ctr"/>
+          <a:lstStyle/>
+          <a:p>
+            <a:pPr algn="ctr"/>
+          </a:p>
+        </p:txBody>
+      </p:sp>
+      <p:sp>
+        <p:nvSpPr>
+          <p:cNvPr id="44" name="TextBox 43"/>
+          <p:cNvSpPr txBox="1"/>
+          <p:nvPr/>
+        </p:nvSpPr>
+        <p:spPr>
+          <a:xfrm>
+            <a:off x="475488" y="5943600"/>
+            <a:ext cx="11210544" cy="475488"/>
+          </a:xfrm>
+          <a:prstGeom prst="rect">
+            <a:avLst/>
+          </a:prstGeom>
+          <a:noFill/>
+        </p:spPr>
+        <p:txBody>
+          <a:bodyPr wrap="square">
+            <a:spAutoFit/>
+          </a:bodyPr>
+          <a:lstStyle/>
+          <a:p>
+            <a:pPr algn="l"/>
+            <a:r>
+              <a:rPr sz="1000" b="0" i="0">
+                <a:solidFill>
+                  <a:srgbClr val="50596E"/>
+                </a:solidFill>
+              </a:rPr>
+              <a:t>Why ML? The catalyst search space (65 elements × varying loadings × temperature) is too large to screen physically. A surrogate model guides experiments toward high-yield compositions (Lookman et al., 2019, npj Comput. Mater.).</a:t>
             </a:r>
           </a:p>
         </p:txBody>
@@ -11095,8 +11174,8 @@
         </p:nvSpPr>
         <p:spPr>
           <a:xfrm>
-            <a:off x="6400800" y="4160520"/>
-            <a:ext cx="5486400" cy="1463040"/>
+            <a:off x="6400800" y="3977639"/>
+            <a:ext cx="5486400" cy="1737360"/>
           </a:xfrm>
           <a:prstGeom prst="rect">
             <a:avLst/>
@@ -11140,8 +11219,8 @@
         </p:nvSpPr>
         <p:spPr>
           <a:xfrm>
-            <a:off x="6510528" y="4233672"/>
-            <a:ext cx="5266944" cy="1316736"/>
+            <a:off x="6510528" y="4050791"/>
+            <a:ext cx="5266944" cy="1591056"/>
           </a:xfrm>
           <a:prstGeom prst="rect">
             <a:avLst/>
@@ -11156,12 +11235,13 @@
           <a:p>
             <a:pPr algn="l"/>
             <a:r>
-              <a:rPr sz="1200" b="0" i="0">
+              <a:rPr sz="1100" b="0" i="0">
                 <a:solidFill>
                   <a:srgbClr val="6B3A00"/>
                 </a:solidFill>
               </a:rPr>
               <a:t>The 3.42 pp offset is a SYSTEMATIC signal the model cannot account for — and incorrectly tries to fit.
+Ben-David et al. (2010, Mach. Learn.): when source and target distributions differ significantly, naive combination can perform WORSE than target-only training.
 ⇒ We need to be much more selective.</a:t>
             </a:r>
           </a:p>
@@ -11546,7 +11626,7 @@
                   <a:srgbClr val="1A1A2E"/>
                 </a:solidFill>
               </a:rPr>
-              <a:t>•  Train logistic classifier:  ours=1, lit=0</a:t>
+              <a:t>•  Train logistic classifier (finds element-space boundary):  ours=1, lit=0</a:t>
             </a:r>
           </a:p>
         </p:txBody>
@@ -11621,13 +11701,92 @@
       </p:sp>
       <p:sp>
         <p:nvSpPr>
-          <p:cNvPr id="14" name="TextBox 13"/>
-          <p:cNvSpPr txBox="1"/>
-          <p:nvPr/>
-        </p:nvSpPr>
-        <p:spPr>
-          <a:xfrm>
-            <a:off x="7132320" y="2926080"/>
+          <p:cNvPr id="14" name="Rectangle 13"/>
+          <p:cNvSpPr/>
+          <p:nvPr/>
+        </p:nvSpPr>
+        <p:spPr>
+          <a:xfrm>
+            <a:off x="7132320" y="2743200"/>
+            <a:ext cx="4754880" cy="594360"/>
+          </a:xfrm>
+          <a:prstGeom prst="rect">
+            <a:avLst/>
+          </a:prstGeom>
+          <a:solidFill>
+            <a:srgbClr val="E8F5FF"/>
+          </a:solidFill>
+          <a:ln w="9525">
+            <a:solidFill>
+              <a:srgbClr val="0078C8"/>
+            </a:solidFill>
+          </a:ln>
+        </p:spPr>
+        <p:style>
+          <a:lnRef idx="1">
+            <a:schemeClr val="accent1"/>
+          </a:lnRef>
+          <a:fillRef idx="3">
+            <a:schemeClr val="accent1"/>
+          </a:fillRef>
+          <a:effectRef idx="2">
+            <a:schemeClr val="accent1"/>
+          </a:effectRef>
+          <a:fontRef idx="minor">
+            <a:schemeClr val="lt1"/>
+          </a:fontRef>
+        </p:style>
+        <p:txBody>
+          <a:bodyPr rtlCol="0" anchor="ctr"/>
+          <a:lstStyle/>
+          <a:p>
+            <a:pPr algn="ctr"/>
+          </a:p>
+        </p:txBody>
+      </p:sp>
+      <p:sp>
+        <p:nvSpPr>
+          <p:cNvPr id="15" name="TextBox 14"/>
+          <p:cNvSpPr txBox="1"/>
+          <p:nvPr/>
+        </p:nvSpPr>
+        <p:spPr>
+          <a:xfrm>
+            <a:off x="7242048" y="2816352"/>
+            <a:ext cx="4535424" cy="448056"/>
+          </a:xfrm>
+          <a:prstGeom prst="rect">
+            <a:avLst/>
+          </a:prstGeom>
+          <a:noFill/>
+        </p:spPr>
+        <p:txBody>
+          <a:bodyPr wrap="square">
+            <a:spAutoFit/>
+          </a:bodyPr>
+          <a:lstStyle/>
+          <a:p>
+            <a:pPr algn="l"/>
+            <a:r>
+              <a:rPr sz="900" b="0" i="0">
+                <a:solidFill>
+                  <a:srgbClr val="50596E"/>
+                </a:solidFill>
+              </a:rPr>
+              <a:t>Logistic regression = finds a hyperplane in 67-dimensional feature space that best separates our samples from literature. Ref: Huang et al. (2006, NeurIPS); Sugiyama et al. (2007, JMLR).</a:t>
+            </a:r>
+          </a:p>
+        </p:txBody>
+      </p:sp>
+      <p:sp>
+        <p:nvSpPr>
+          <p:cNvPr id="16" name="TextBox 15"/>
+          <p:cNvSpPr txBox="1"/>
+          <p:nvPr/>
+        </p:nvSpPr>
+        <p:spPr>
+          <a:xfrm>
+            <a:off x="7132320" y="3429000"/>
             <a:ext cx="4754880" cy="365760"/>
           </a:xfrm>
           <a:prstGeom prst="rect">
@@ -11655,13 +11814,13 @@
       </p:sp>
       <p:sp>
         <p:nvSpPr>
-          <p:cNvPr id="15" name="Rectangle 14"/>
+          <p:cNvPr id="17" name="Rectangle 16"/>
           <p:cNvSpPr/>
           <p:nvPr/>
         </p:nvSpPr>
         <p:spPr>
           <a:xfrm>
-            <a:off x="7132320" y="3337560"/>
+            <a:off x="7132320" y="3840480"/>
             <a:ext cx="4754880" cy="365760"/>
           </a:xfrm>
           <a:prstGeom prst="rect">
@@ -11698,13 +11857,13 @@
       </p:sp>
       <p:sp>
         <p:nvSpPr>
-          <p:cNvPr id="16" name="TextBox 15"/>
-          <p:cNvSpPr txBox="1"/>
-          <p:nvPr/>
-        </p:nvSpPr>
-        <p:spPr>
-          <a:xfrm>
-            <a:off x="7269480" y="3364992"/>
+          <p:cNvPr id="18" name="TextBox 17"/>
+          <p:cNvSpPr txBox="1"/>
+          <p:nvPr/>
+        </p:nvSpPr>
+        <p:spPr>
+          <a:xfrm>
+            <a:off x="7269480" y="3867912"/>
             <a:ext cx="1188720" cy="310896"/>
           </a:xfrm>
           <a:prstGeom prst="rect">
@@ -11732,13 +11891,13 @@
       </p:sp>
       <p:sp>
         <p:nvSpPr>
-          <p:cNvPr id="17" name="TextBox 16"/>
-          <p:cNvSpPr txBox="1"/>
-          <p:nvPr/>
-        </p:nvSpPr>
-        <p:spPr>
-          <a:xfrm>
-            <a:off x="8503920" y="3364992"/>
+          <p:cNvPr id="19" name="TextBox 18"/>
+          <p:cNvSpPr txBox="1"/>
+          <p:nvPr/>
+        </p:nvSpPr>
+        <p:spPr>
+          <a:xfrm>
+            <a:off x="8503920" y="3867912"/>
             <a:ext cx="1828800" cy="310896"/>
           </a:xfrm>
           <a:prstGeom prst="rect">
@@ -11766,13 +11925,13 @@
       </p:sp>
       <p:sp>
         <p:nvSpPr>
-          <p:cNvPr id="18" name="TextBox 17"/>
-          <p:cNvSpPr txBox="1"/>
-          <p:nvPr/>
-        </p:nvSpPr>
-        <p:spPr>
-          <a:xfrm>
-            <a:off x="10424160" y="3364992"/>
+          <p:cNvPr id="20" name="TextBox 19"/>
+          <p:cNvSpPr txBox="1"/>
+          <p:nvPr/>
+        </p:nvSpPr>
+        <p:spPr>
+          <a:xfrm>
+            <a:off x="10424160" y="3867912"/>
             <a:ext cx="1371600" cy="310896"/>
           </a:xfrm>
           <a:prstGeom prst="rect">
@@ -11800,14 +11959,14 @@
       </p:sp>
       <p:sp>
         <p:nvSpPr>
-          <p:cNvPr id="19" name="Rectangle 18"/>
+          <p:cNvPr id="21" name="Rectangle 20"/>
           <p:cNvSpPr/>
           <p:nvPr/>
         </p:nvSpPr>
         <p:spPr>
           <a:xfrm>
-            <a:off x="7132320" y="3703320"/>
-            <a:ext cx="4754880" cy="384048"/>
+            <a:off x="7132320" y="4206240"/>
+            <a:ext cx="4754880" cy="365760"/>
           </a:xfrm>
           <a:prstGeom prst="rect">
             <a:avLst/>
@@ -11845,13 +12004,13 @@
       </p:sp>
       <p:sp>
         <p:nvSpPr>
-          <p:cNvPr id="20" name="TextBox 19"/>
-          <p:cNvSpPr txBox="1"/>
-          <p:nvPr/>
-        </p:nvSpPr>
-        <p:spPr>
-          <a:xfrm>
-            <a:off x="7269480" y="3739896"/>
+          <p:cNvPr id="22" name="TextBox 21"/>
+          <p:cNvSpPr txBox="1"/>
+          <p:nvPr/>
+        </p:nvSpPr>
+        <p:spPr>
+          <a:xfrm>
+            <a:off x="7269480" y="4242816"/>
             <a:ext cx="1188720" cy="310896"/>
           </a:xfrm>
           <a:prstGeom prst="rect">
@@ -11879,13 +12038,13 @@
       </p:sp>
       <p:sp>
         <p:nvSpPr>
-          <p:cNvPr id="21" name="TextBox 20"/>
-          <p:cNvSpPr txBox="1"/>
-          <p:nvPr/>
-        </p:nvSpPr>
-        <p:spPr>
-          <a:xfrm>
-            <a:off x="8503920" y="3739896"/>
+          <p:cNvPr id="23" name="TextBox 22"/>
+          <p:cNvSpPr txBox="1"/>
+          <p:nvPr/>
+        </p:nvSpPr>
+        <p:spPr>
+          <a:xfrm>
+            <a:off x="8503920" y="4242816"/>
             <a:ext cx="1828800" cy="310896"/>
           </a:xfrm>
           <a:prstGeom prst="rect">
@@ -11913,13 +12072,13 @@
       </p:sp>
       <p:sp>
         <p:nvSpPr>
-          <p:cNvPr id="22" name="TextBox 21"/>
-          <p:cNvSpPr txBox="1"/>
-          <p:nvPr/>
-        </p:nvSpPr>
-        <p:spPr>
-          <a:xfrm>
-            <a:off x="10424160" y="3739896"/>
+          <p:cNvPr id="24" name="TextBox 23"/>
+          <p:cNvSpPr txBox="1"/>
+          <p:nvPr/>
+        </p:nvSpPr>
+        <p:spPr>
+          <a:xfrm>
+            <a:off x="10424160" y="4242816"/>
             <a:ext cx="1371600" cy="310896"/>
           </a:xfrm>
           <a:prstGeom prst="rect">
@@ -11947,14 +12106,14 @@
       </p:sp>
       <p:sp>
         <p:nvSpPr>
-          <p:cNvPr id="23" name="Rectangle 22"/>
+          <p:cNvPr id="25" name="Rectangle 24"/>
           <p:cNvSpPr/>
           <p:nvPr/>
         </p:nvSpPr>
         <p:spPr>
           <a:xfrm>
-            <a:off x="7132320" y="4087368"/>
-            <a:ext cx="4754880" cy="384048"/>
+            <a:off x="7132320" y="4572000"/>
+            <a:ext cx="4754880" cy="365760"/>
           </a:xfrm>
           <a:prstGeom prst="rect">
             <a:avLst/>
@@ -11992,13 +12151,13 @@
       </p:sp>
       <p:sp>
         <p:nvSpPr>
-          <p:cNvPr id="24" name="TextBox 23"/>
-          <p:cNvSpPr txBox="1"/>
-          <p:nvPr/>
-        </p:nvSpPr>
-        <p:spPr>
-          <a:xfrm>
-            <a:off x="7269480" y="4123944"/>
+          <p:cNvPr id="26" name="TextBox 25"/>
+          <p:cNvSpPr txBox="1"/>
+          <p:nvPr/>
+        </p:nvSpPr>
+        <p:spPr>
+          <a:xfrm>
+            <a:off x="7269480" y="4608576"/>
             <a:ext cx="1188720" cy="310896"/>
           </a:xfrm>
           <a:prstGeom prst="rect">
@@ -12026,13 +12185,13 @@
       </p:sp>
       <p:sp>
         <p:nvSpPr>
-          <p:cNvPr id="25" name="TextBox 24"/>
-          <p:cNvSpPr txBox="1"/>
-          <p:nvPr/>
-        </p:nvSpPr>
-        <p:spPr>
-          <a:xfrm>
-            <a:off x="8503920" y="4123944"/>
+          <p:cNvPr id="27" name="TextBox 26"/>
+          <p:cNvSpPr txBox="1"/>
+          <p:nvPr/>
+        </p:nvSpPr>
+        <p:spPr>
+          <a:xfrm>
+            <a:off x="8503920" y="4608576"/>
             <a:ext cx="1828800" cy="310896"/>
           </a:xfrm>
           <a:prstGeom prst="rect">
@@ -12060,13 +12219,13 @@
       </p:sp>
       <p:sp>
         <p:nvSpPr>
-          <p:cNvPr id="26" name="TextBox 25"/>
-          <p:cNvSpPr txBox="1"/>
-          <p:nvPr/>
-        </p:nvSpPr>
-        <p:spPr>
-          <a:xfrm>
-            <a:off x="10424160" y="4123944"/>
+          <p:cNvPr id="28" name="TextBox 27"/>
+          <p:cNvSpPr txBox="1"/>
+          <p:nvPr/>
+        </p:nvSpPr>
+        <p:spPr>
+          <a:xfrm>
+            <a:off x="10424160" y="4608576"/>
             <a:ext cx="1371600" cy="310896"/>
           </a:xfrm>
           <a:prstGeom prst="rect">
@@ -12094,14 +12253,14 @@
       </p:sp>
       <p:sp>
         <p:nvSpPr>
-          <p:cNvPr id="27" name="Rectangle 26"/>
+          <p:cNvPr id="29" name="Rectangle 28"/>
           <p:cNvSpPr/>
           <p:nvPr/>
         </p:nvSpPr>
         <p:spPr>
           <a:xfrm>
-            <a:off x="7132320" y="4471416"/>
-            <a:ext cx="4754880" cy="384048"/>
+            <a:off x="7132320" y="4937760"/>
+            <a:ext cx="4754880" cy="365760"/>
           </a:xfrm>
           <a:prstGeom prst="rect">
             <a:avLst/>
@@ -12139,13 +12298,13 @@
       </p:sp>
       <p:sp>
         <p:nvSpPr>
-          <p:cNvPr id="28" name="TextBox 27"/>
-          <p:cNvSpPr txBox="1"/>
-          <p:nvPr/>
-        </p:nvSpPr>
-        <p:spPr>
-          <a:xfrm>
-            <a:off x="7269480" y="4507992"/>
+          <p:cNvPr id="30" name="TextBox 29"/>
+          <p:cNvSpPr txBox="1"/>
+          <p:nvPr/>
+        </p:nvSpPr>
+        <p:spPr>
+          <a:xfrm>
+            <a:off x="7269480" y="4974336"/>
             <a:ext cx="1188720" cy="310896"/>
           </a:xfrm>
           <a:prstGeom prst="rect">
@@ -12173,13 +12332,13 @@
       </p:sp>
       <p:sp>
         <p:nvSpPr>
-          <p:cNvPr id="29" name="TextBox 28"/>
-          <p:cNvSpPr txBox="1"/>
-          <p:nvPr/>
-        </p:nvSpPr>
-        <p:spPr>
-          <a:xfrm>
-            <a:off x="8503920" y="4507992"/>
+          <p:cNvPr id="31" name="TextBox 30"/>
+          <p:cNvSpPr txBox="1"/>
+          <p:nvPr/>
+        </p:nvSpPr>
+        <p:spPr>
+          <a:xfrm>
+            <a:off x="8503920" y="4974336"/>
             <a:ext cx="1828800" cy="310896"/>
           </a:xfrm>
           <a:prstGeom prst="rect">
@@ -12207,13 +12366,13 @@
       </p:sp>
       <p:sp>
         <p:nvSpPr>
-          <p:cNvPr id="30" name="TextBox 29"/>
-          <p:cNvSpPr txBox="1"/>
-          <p:nvPr/>
-        </p:nvSpPr>
-        <p:spPr>
-          <a:xfrm>
-            <a:off x="10424160" y="4507992"/>
+          <p:cNvPr id="32" name="TextBox 31"/>
+          <p:cNvSpPr txBox="1"/>
+          <p:nvPr/>
+        </p:nvSpPr>
+        <p:spPr>
+          <a:xfrm>
+            <a:off x="10424160" y="4974336"/>
             <a:ext cx="1371600" cy="310896"/>
           </a:xfrm>
           <a:prstGeom prst="rect">
@@ -12241,14 +12400,14 @@
       </p:sp>
       <p:sp>
         <p:nvSpPr>
-          <p:cNvPr id="31" name="Rectangle 30"/>
+          <p:cNvPr id="33" name="Rectangle 32"/>
           <p:cNvSpPr/>
           <p:nvPr/>
         </p:nvSpPr>
         <p:spPr>
           <a:xfrm>
-            <a:off x="7132320" y="4855464"/>
-            <a:ext cx="4754880" cy="384048"/>
+            <a:off x="7132320" y="5303520"/>
+            <a:ext cx="4754880" cy="365760"/>
           </a:xfrm>
           <a:prstGeom prst="rect">
             <a:avLst/>
@@ -12286,13 +12445,13 @@
       </p:sp>
       <p:sp>
         <p:nvSpPr>
-          <p:cNvPr id="32" name="TextBox 31"/>
-          <p:cNvSpPr txBox="1"/>
-          <p:nvPr/>
-        </p:nvSpPr>
-        <p:spPr>
-          <a:xfrm>
-            <a:off x="7269480" y="4892040"/>
+          <p:cNvPr id="34" name="TextBox 33"/>
+          <p:cNvSpPr txBox="1"/>
+          <p:nvPr/>
+        </p:nvSpPr>
+        <p:spPr>
+          <a:xfrm>
+            <a:off x="7269480" y="5340096"/>
             <a:ext cx="1188720" cy="310896"/>
           </a:xfrm>
           <a:prstGeom prst="rect">
@@ -12320,13 +12479,13 @@
       </p:sp>
       <p:sp>
         <p:nvSpPr>
-          <p:cNvPr id="33" name="TextBox 32"/>
-          <p:cNvSpPr txBox="1"/>
-          <p:nvPr/>
-        </p:nvSpPr>
-        <p:spPr>
-          <a:xfrm>
-            <a:off x="8503920" y="4892040"/>
+          <p:cNvPr id="35" name="TextBox 34"/>
+          <p:cNvSpPr txBox="1"/>
+          <p:nvPr/>
+        </p:nvSpPr>
+        <p:spPr>
+          <a:xfrm>
+            <a:off x="8503920" y="5340096"/>
             <a:ext cx="1828800" cy="310896"/>
           </a:xfrm>
           <a:prstGeom prst="rect">
@@ -12354,13 +12513,13 @@
       </p:sp>
       <p:sp>
         <p:nvSpPr>
-          <p:cNvPr id="34" name="TextBox 33"/>
-          <p:cNvSpPr txBox="1"/>
-          <p:nvPr/>
-        </p:nvSpPr>
-        <p:spPr>
-          <a:xfrm>
-            <a:off x="10424160" y="4892040"/>
+          <p:cNvPr id="36" name="TextBox 35"/>
+          <p:cNvSpPr txBox="1"/>
+          <p:nvPr/>
+        </p:nvSpPr>
+        <p:spPr>
+          <a:xfrm>
+            <a:off x="10424160" y="5340096"/>
             <a:ext cx="1371600" cy="310896"/>
           </a:xfrm>
           <a:prstGeom prst="rect">
@@ -12388,14 +12547,14 @@
       </p:sp>
       <p:sp>
         <p:nvSpPr>
-          <p:cNvPr id="35" name="Rectangle 34"/>
+          <p:cNvPr id="37" name="Rectangle 36"/>
           <p:cNvSpPr/>
           <p:nvPr/>
         </p:nvSpPr>
         <p:spPr>
           <a:xfrm>
-            <a:off x="7132320" y="5532120"/>
-            <a:ext cx="4754880" cy="777240"/>
+            <a:off x="7132320" y="5715000"/>
+            <a:ext cx="4754880" cy="685800"/>
           </a:xfrm>
           <a:prstGeom prst="rect">
             <a:avLst/>
@@ -12433,14 +12592,14 @@
       </p:sp>
       <p:sp>
         <p:nvSpPr>
-          <p:cNvPr id="36" name="TextBox 35"/>
-          <p:cNvSpPr txBox="1"/>
-          <p:nvPr/>
-        </p:nvSpPr>
-        <p:spPr>
-          <a:xfrm>
-            <a:off x="7242048" y="5605272"/>
-            <a:ext cx="4535424" cy="630936"/>
+          <p:cNvPr id="38" name="TextBox 37"/>
+          <p:cNvSpPr txBox="1"/>
+          <p:nvPr/>
+        </p:nvSpPr>
+        <p:spPr>
+          <a:xfrm>
+            <a:off x="7242048" y="5788152"/>
+            <a:ext cx="4535424" cy="539496"/>
           </a:xfrm>
           <a:prstGeom prst="rect">
             <a:avLst/>
@@ -12790,7 +12949,7 @@
         <p:spPr>
           <a:xfrm>
             <a:off x="7543800" y="1600200"/>
-            <a:ext cx="4297680" cy="429768"/>
+            <a:ext cx="4297680" cy="393192"/>
           </a:xfrm>
           <a:prstGeom prst="rect">
             <a:avLst/>
@@ -12823,8 +12982,8 @@
         </p:nvSpPr>
         <p:spPr>
           <a:xfrm>
-            <a:off x="7543800" y="1984248"/>
-            <a:ext cx="4297680" cy="429768"/>
+            <a:off x="7543800" y="1947672"/>
+            <a:ext cx="4297680" cy="393192"/>
           </a:xfrm>
           <a:prstGeom prst="rect">
             <a:avLst/>
@@ -12844,6 +13003,40 @@
                   <a:srgbClr val="1A1A2E"/>
                 </a:solidFill>
               </a:rPr>
+              <a:t>•  RBF kernel similarity: K(x,x′) = exp(−‖x−x′‖²/2σ²)</a:t>
+            </a:r>
+          </a:p>
+        </p:txBody>
+      </p:sp>
+      <p:sp>
+        <p:nvSpPr>
+          <p:cNvPr id="12" name="TextBox 11"/>
+          <p:cNvSpPr txBox="1"/>
+          <p:nvPr/>
+        </p:nvSpPr>
+        <p:spPr>
+          <a:xfrm>
+            <a:off x="7543800" y="2295144"/>
+            <a:ext cx="4297680" cy="393192"/>
+          </a:xfrm>
+          <a:prstGeom prst="rect">
+            <a:avLst/>
+          </a:prstGeom>
+          <a:noFill/>
+        </p:spPr>
+        <p:txBody>
+          <a:bodyPr wrap="square">
+            <a:spAutoFit/>
+          </a:bodyPr>
+          <a:lstStyle/>
+          <a:p>
+            <a:pPr algn="l"/>
+            <a:r>
+              <a:rPr sz="1100" b="0" i="0">
+                <a:solidFill>
+                  <a:srgbClr val="1A1A2E"/>
+                </a:solidFill>
+              </a:rPr>
               <a:t>•  Solve QP:  ½ wᵀK_ss w − κᵀw</a:t>
             </a:r>
           </a:p>
@@ -12851,14 +13044,14 @@
       </p:sp>
       <p:sp>
         <p:nvSpPr>
-          <p:cNvPr id="12" name="TextBox 11"/>
-          <p:cNvSpPr txBox="1"/>
-          <p:nvPr/>
-        </p:nvSpPr>
-        <p:spPr>
-          <a:xfrm>
-            <a:off x="7543800" y="2368296"/>
-            <a:ext cx="4297680" cy="429768"/>
+          <p:cNvPr id="13" name="TextBox 12"/>
+          <p:cNvSpPr txBox="1"/>
+          <p:nvPr/>
+        </p:nvSpPr>
+        <p:spPr>
+          <a:xfrm>
+            <a:off x="7543800" y="2642616"/>
+            <a:ext cx="4297680" cy="393192"/>
           </a:xfrm>
           <a:prstGeom prst="rect">
             <a:avLst/>
@@ -12878,41 +13071,7 @@
                   <a:srgbClr val="1A1A2E"/>
                 </a:solidFill>
               </a:rPr>
-              <a:t>•  RBF kernel σ via median heuristic</a:t>
-            </a:r>
-          </a:p>
-        </p:txBody>
-      </p:sp>
-      <p:sp>
-        <p:nvSpPr>
-          <p:cNvPr id="13" name="TextBox 12"/>
-          <p:cNvSpPr txBox="1"/>
-          <p:nvPr/>
-        </p:nvSpPr>
-        <p:spPr>
-          <a:xfrm>
-            <a:off x="7498079" y="2926080"/>
-            <a:ext cx="4389120" cy="365760"/>
-          </a:xfrm>
-          <a:prstGeom prst="rect">
-            <a:avLst/>
-          </a:prstGeom>
-          <a:noFill/>
-        </p:spPr>
-        <p:txBody>
-          <a:bodyPr wrap="square">
-            <a:spAutoFit/>
-          </a:bodyPr>
-          <a:lstStyle/>
-          <a:p>
-            <a:pPr algn="l"/>
-            <a:r>
-              <a:rPr sz="1300" b="1" i="0">
-                <a:solidFill>
-                  <a:srgbClr val="0F1E42"/>
-                </a:solidFill>
-              </a:rPr>
-              <a:t>Result</a:t>
+              <a:t>•  σ via median heuristic (parameter-free)</a:t>
             </a:r>
           </a:p>
         </p:txBody>
@@ -12925,8 +13084,121 @@
         </p:nvSpPr>
         <p:spPr>
           <a:xfrm>
-            <a:off x="7498079" y="3310128"/>
-            <a:ext cx="4389120" cy="411480"/>
+            <a:off x="7498079" y="3063240"/>
+            <a:ext cx="4389120" cy="566928"/>
+          </a:xfrm>
+          <a:prstGeom prst="rect">
+            <a:avLst/>
+          </a:prstGeom>
+          <a:solidFill>
+            <a:srgbClr val="E8F5FF"/>
+          </a:solidFill>
+          <a:ln w="9525">
+            <a:solidFill>
+              <a:srgbClr val="0078C8"/>
+            </a:solidFill>
+          </a:ln>
+        </p:spPr>
+        <p:style>
+          <a:lnRef idx="1">
+            <a:schemeClr val="accent1"/>
+          </a:lnRef>
+          <a:fillRef idx="3">
+            <a:schemeClr val="accent1"/>
+          </a:fillRef>
+          <a:effectRef idx="2">
+            <a:schemeClr val="accent1"/>
+          </a:effectRef>
+          <a:fontRef idx="minor">
+            <a:schemeClr val="lt1"/>
+          </a:fontRef>
+        </p:style>
+        <p:txBody>
+          <a:bodyPr rtlCol="0" anchor="ctr"/>
+          <a:lstStyle/>
+          <a:p>
+            <a:pPr algn="ctr"/>
+          </a:p>
+        </p:txBody>
+      </p:sp>
+      <p:sp>
+        <p:nvSpPr>
+          <p:cNvPr id="15" name="TextBox 14"/>
+          <p:cNvSpPr txBox="1"/>
+          <p:nvPr/>
+        </p:nvSpPr>
+        <p:spPr>
+          <a:xfrm>
+            <a:off x="7607807" y="3136392"/>
+            <a:ext cx="4169664" cy="420624"/>
+          </a:xfrm>
+          <a:prstGeom prst="rect">
+            <a:avLst/>
+          </a:prstGeom>
+          <a:noFill/>
+        </p:spPr>
+        <p:txBody>
+          <a:bodyPr wrap="square">
+            <a:spAutoFit/>
+          </a:bodyPr>
+          <a:lstStyle/>
+          <a:p>
+            <a:pPr algn="l"/>
+            <a:r>
+              <a:rPr sz="900" b="0" i="0">
+                <a:solidFill>
+                  <a:srgbClr val="50596E"/>
+                </a:solidFill>
+              </a:rPr>
+              <a:t>RBF kernel = chemical similarity based on distance in element-composition space. Ref: Huang et al. (2006, NeurIPS); Gretton et al. (2009, Dataset Shift in ML).</a:t>
+            </a:r>
+          </a:p>
+        </p:txBody>
+      </p:sp>
+      <p:sp>
+        <p:nvSpPr>
+          <p:cNvPr id="16" name="TextBox 15"/>
+          <p:cNvSpPr txBox="1"/>
+          <p:nvPr/>
+        </p:nvSpPr>
+        <p:spPr>
+          <a:xfrm>
+            <a:off x="7498079" y="3730752"/>
+            <a:ext cx="4389120" cy="365760"/>
+          </a:xfrm>
+          <a:prstGeom prst="rect">
+            <a:avLst/>
+          </a:prstGeom>
+          <a:noFill/>
+        </p:spPr>
+        <p:txBody>
+          <a:bodyPr wrap="square">
+            <a:spAutoFit/>
+          </a:bodyPr>
+          <a:lstStyle/>
+          <a:p>
+            <a:pPr algn="l"/>
+            <a:r>
+              <a:rPr sz="1300" b="1" i="0">
+                <a:solidFill>
+                  <a:srgbClr val="0F1E42"/>
+                </a:solidFill>
+              </a:rPr>
+              <a:t>Result</a:t>
+            </a:r>
+          </a:p>
+        </p:txBody>
+      </p:sp>
+      <p:sp>
+        <p:nvSpPr>
+          <p:cNvPr id="17" name="Rectangle 16"/>
+          <p:cNvSpPr/>
+          <p:nvPr/>
+        </p:nvSpPr>
+        <p:spPr>
+          <a:xfrm>
+            <a:off x="7498079" y="4114800"/>
+            <a:ext cx="4389120" cy="365760"/>
           </a:xfrm>
           <a:prstGeom prst="rect">
             <a:avLst/>
@@ -12964,14 +13236,14 @@
       </p:sp>
       <p:sp>
         <p:nvSpPr>
-          <p:cNvPr id="15" name="TextBox 14"/>
-          <p:cNvSpPr txBox="1"/>
-          <p:nvPr/>
-        </p:nvSpPr>
-        <p:spPr>
-          <a:xfrm>
-            <a:off x="7635240" y="3364992"/>
-            <a:ext cx="2743200" cy="329184"/>
+          <p:cNvPr id="18" name="TextBox 17"/>
+          <p:cNvSpPr txBox="1"/>
+          <p:nvPr/>
+        </p:nvSpPr>
+        <p:spPr>
+          <a:xfrm>
+            <a:off x="7635240" y="4160520"/>
+            <a:ext cx="2743200" cy="310896"/>
           </a:xfrm>
           <a:prstGeom prst="rect">
             <a:avLst/>
@@ -12998,14 +13270,14 @@
       </p:sp>
       <p:sp>
         <p:nvSpPr>
-          <p:cNvPr id="16" name="TextBox 15"/>
-          <p:cNvSpPr txBox="1"/>
-          <p:nvPr/>
-        </p:nvSpPr>
-        <p:spPr>
-          <a:xfrm>
-            <a:off x="10424160" y="3364992"/>
-            <a:ext cx="1371600" cy="329184"/>
+          <p:cNvPr id="19" name="TextBox 18"/>
+          <p:cNvSpPr txBox="1"/>
+          <p:nvPr/>
+        </p:nvSpPr>
+        <p:spPr>
+          <a:xfrm>
+            <a:off x="10424160" y="4160520"/>
+            <a:ext cx="1371600" cy="310896"/>
           </a:xfrm>
           <a:prstGeom prst="rect">
             <a:avLst/>
@@ -13032,14 +13304,14 @@
       </p:sp>
       <p:sp>
         <p:nvSpPr>
-          <p:cNvPr id="17" name="Rectangle 16"/>
+          <p:cNvPr id="20" name="Rectangle 19"/>
           <p:cNvSpPr/>
           <p:nvPr/>
         </p:nvSpPr>
         <p:spPr>
           <a:xfrm>
-            <a:off x="7498079" y="3721608"/>
-            <a:ext cx="4389120" cy="411480"/>
+            <a:off x="7498079" y="4480560"/>
+            <a:ext cx="4389120" cy="365760"/>
           </a:xfrm>
           <a:prstGeom prst="rect">
             <a:avLst/>
@@ -13077,14 +13349,14 @@
       </p:sp>
       <p:sp>
         <p:nvSpPr>
-          <p:cNvPr id="18" name="TextBox 17"/>
-          <p:cNvSpPr txBox="1"/>
-          <p:nvPr/>
-        </p:nvSpPr>
-        <p:spPr>
-          <a:xfrm>
-            <a:off x="7635240" y="3776472"/>
-            <a:ext cx="2743200" cy="329184"/>
+          <p:cNvPr id="21" name="TextBox 20"/>
+          <p:cNvSpPr txBox="1"/>
+          <p:nvPr/>
+        </p:nvSpPr>
+        <p:spPr>
+          <a:xfrm>
+            <a:off x="7635240" y="4526280"/>
+            <a:ext cx="2743200" cy="310896"/>
           </a:xfrm>
           <a:prstGeom prst="rect">
             <a:avLst/>
@@ -13111,14 +13383,14 @@
       </p:sp>
       <p:sp>
         <p:nvSpPr>
-          <p:cNvPr id="19" name="TextBox 18"/>
-          <p:cNvSpPr txBox="1"/>
-          <p:nvPr/>
-        </p:nvSpPr>
-        <p:spPr>
-          <a:xfrm>
-            <a:off x="10424160" y="3776472"/>
-            <a:ext cx="1371600" cy="329184"/>
+          <p:cNvPr id="22" name="TextBox 21"/>
+          <p:cNvSpPr txBox="1"/>
+          <p:nvPr/>
+        </p:nvSpPr>
+        <p:spPr>
+          <a:xfrm>
+            <a:off x="10424160" y="4526280"/>
+            <a:ext cx="1371600" cy="310896"/>
           </a:xfrm>
           <a:prstGeom prst="rect">
             <a:avLst/>
@@ -13145,14 +13417,14 @@
       </p:sp>
       <p:sp>
         <p:nvSpPr>
-          <p:cNvPr id="20" name="Rectangle 19"/>
+          <p:cNvPr id="23" name="Rectangle 22"/>
           <p:cNvSpPr/>
           <p:nvPr/>
         </p:nvSpPr>
         <p:spPr>
           <a:xfrm>
-            <a:off x="7498079" y="4133088"/>
-            <a:ext cx="4389120" cy="411480"/>
+            <a:off x="7498079" y="4846320"/>
+            <a:ext cx="4389120" cy="365760"/>
           </a:xfrm>
           <a:prstGeom prst="rect">
             <a:avLst/>
@@ -13190,14 +13462,14 @@
       </p:sp>
       <p:sp>
         <p:nvSpPr>
-          <p:cNvPr id="21" name="TextBox 20"/>
-          <p:cNvSpPr txBox="1"/>
-          <p:nvPr/>
-        </p:nvSpPr>
-        <p:spPr>
-          <a:xfrm>
-            <a:off x="7635240" y="4187952"/>
-            <a:ext cx="2743200" cy="329184"/>
+          <p:cNvPr id="24" name="TextBox 23"/>
+          <p:cNvSpPr txBox="1"/>
+          <p:nvPr/>
+        </p:nvSpPr>
+        <p:spPr>
+          <a:xfrm>
+            <a:off x="7635240" y="4892040"/>
+            <a:ext cx="2743200" cy="310896"/>
           </a:xfrm>
           <a:prstGeom prst="rect">
             <a:avLst/>
@@ -13224,14 +13496,14 @@
       </p:sp>
       <p:sp>
         <p:nvSpPr>
-          <p:cNvPr id="22" name="TextBox 21"/>
-          <p:cNvSpPr txBox="1"/>
-          <p:nvPr/>
-        </p:nvSpPr>
-        <p:spPr>
-          <a:xfrm>
-            <a:off x="10424160" y="4187952"/>
-            <a:ext cx="1371600" cy="329184"/>
+          <p:cNvPr id="25" name="TextBox 24"/>
+          <p:cNvSpPr txBox="1"/>
+          <p:nvPr/>
+        </p:nvSpPr>
+        <p:spPr>
+          <a:xfrm>
+            <a:off x="10424160" y="4892040"/>
+            <a:ext cx="1371600" cy="310896"/>
           </a:xfrm>
           <a:prstGeom prst="rect">
             <a:avLst/>
@@ -13258,14 +13530,14 @@
       </p:sp>
       <p:sp>
         <p:nvSpPr>
-          <p:cNvPr id="23" name="Rectangle 22"/>
+          <p:cNvPr id="26" name="Rectangle 25"/>
           <p:cNvSpPr/>
           <p:nvPr/>
         </p:nvSpPr>
         <p:spPr>
           <a:xfrm>
-            <a:off x="7498079" y="4544568"/>
-            <a:ext cx="4389120" cy="411480"/>
+            <a:off x="7498079" y="5212080"/>
+            <a:ext cx="4389120" cy="365760"/>
           </a:xfrm>
           <a:prstGeom prst="rect">
             <a:avLst/>
@@ -13303,14 +13575,14 @@
       </p:sp>
       <p:sp>
         <p:nvSpPr>
-          <p:cNvPr id="24" name="TextBox 23"/>
-          <p:cNvSpPr txBox="1"/>
-          <p:nvPr/>
-        </p:nvSpPr>
-        <p:spPr>
-          <a:xfrm>
-            <a:off x="7635240" y="4599432"/>
-            <a:ext cx="2743200" cy="329184"/>
+          <p:cNvPr id="27" name="TextBox 26"/>
+          <p:cNvSpPr txBox="1"/>
+          <p:nvPr/>
+        </p:nvSpPr>
+        <p:spPr>
+          <a:xfrm>
+            <a:off x="7635240" y="5257800"/>
+            <a:ext cx="2743200" cy="310896"/>
           </a:xfrm>
           <a:prstGeom prst="rect">
             <a:avLst/>
@@ -13337,14 +13609,14 @@
       </p:sp>
       <p:sp>
         <p:nvSpPr>
-          <p:cNvPr id="25" name="TextBox 24"/>
-          <p:cNvSpPr txBox="1"/>
-          <p:nvPr/>
-        </p:nvSpPr>
-        <p:spPr>
-          <a:xfrm>
-            <a:off x="10424160" y="4599432"/>
-            <a:ext cx="1371600" cy="329184"/>
+          <p:cNvPr id="28" name="TextBox 27"/>
+          <p:cNvSpPr txBox="1"/>
+          <p:nvPr/>
+        </p:nvSpPr>
+        <p:spPr>
+          <a:xfrm>
+            <a:off x="10424160" y="5257800"/>
+            <a:ext cx="1371600" cy="310896"/>
           </a:xfrm>
           <a:prstGeom prst="rect">
             <a:avLst/>
@@ -13371,14 +13643,14 @@
       </p:sp>
       <p:sp>
         <p:nvSpPr>
-          <p:cNvPr id="26" name="Rectangle 25"/>
+          <p:cNvPr id="29" name="Rectangle 28"/>
           <p:cNvSpPr/>
           <p:nvPr/>
         </p:nvSpPr>
         <p:spPr>
           <a:xfrm>
-            <a:off x="7498079" y="5074920"/>
-            <a:ext cx="4389120" cy="1280160"/>
+            <a:off x="7498079" y="5669280"/>
+            <a:ext cx="4389120" cy="777240"/>
           </a:xfrm>
           <a:prstGeom prst="rect">
             <a:avLst/>
@@ -13416,14 +13688,14 @@
       </p:sp>
       <p:sp>
         <p:nvSpPr>
-          <p:cNvPr id="27" name="TextBox 26"/>
-          <p:cNvSpPr txBox="1"/>
-          <p:nvPr/>
-        </p:nvSpPr>
-        <p:spPr>
-          <a:xfrm>
-            <a:off x="7607807" y="5148072"/>
-            <a:ext cx="4169664" cy="1133856"/>
+          <p:cNvPr id="30" name="TextBox 29"/>
+          <p:cNvSpPr txBox="1"/>
+          <p:nvPr/>
+        </p:nvSpPr>
+        <p:spPr>
+          <a:xfrm>
+            <a:off x="7607807" y="5742432"/>
+            <a:ext cx="4169664" cy="630936"/>
           </a:xfrm>
           <a:prstGeom prst="rect">
             <a:avLst/>
@@ -13443,7 +13715,7 @@
                   <a:srgbClr val="50596E"/>
                 </a:solidFill>
               </a:rPr>
-              <a:t>Reassuring: two unrelated methods flag the same 78.5% of samples ⇒ real signal.
+              <a:t>Reassuring: two unrelated methods flag the same 78.5% of samples ⇒ real signal, not artifact.
 Still unsolved: literature labels remain in training, so the 3.42 pp offset still bleeds in.</a:t>
             </a:r>
           </a:p>
@@ -14745,8 +15017,8 @@
         </p:nvSpPr>
         <p:spPr>
           <a:xfrm>
-            <a:off x="365760" y="5486400"/>
-            <a:ext cx="11430000" cy="914400"/>
+            <a:off x="365760" y="5166360"/>
+            <a:ext cx="11430000" cy="1325880"/>
           </a:xfrm>
           <a:prstGeom prst="rect">
             <a:avLst/>
@@ -14790,7 +15062,7 @@
         </p:nvSpPr>
         <p:spPr>
           <a:xfrm>
-            <a:off x="502920" y="5559552"/>
+            <a:off x="502920" y="5230368"/>
             <a:ext cx="11155680" cy="365760"/>
           </a:xfrm>
           <a:prstGeom prst="rect">
@@ -14811,7 +15083,7 @@
                   <a:srgbClr val="0F1E42"/>
                 </a:solidFill>
               </a:rPr>
-              <a:t>Key property</a:t>
+              <a:t>Key property — feature-based transfer learning  (Pan &amp; Yang, 2010, IEEE TKDE)</a:t>
             </a:r>
           </a:p>
         </p:txBody>
@@ -14824,8 +15096,8 @@
         </p:nvSpPr>
         <p:spPr>
           <a:xfrm>
-            <a:off x="502920" y="5897880"/>
-            <a:ext cx="11155680" cy="457200"/>
+            <a:off x="502920" y="5596128"/>
+            <a:ext cx="11155680" cy="822960"/>
           </a:xfrm>
           <a:prstGeom prst="rect">
             <a:avLst/>
@@ -14840,12 +15112,12 @@
           <a:p>
             <a:pPr algn="l"/>
             <a:r>
-              <a:rPr sz="1100" b="0" i="0">
+              <a:rPr sz="1000" b="0" i="0">
                 <a:solidFill>
                   <a:srgbClr val="50596E"/>
                 </a:solidFill>
               </a:rPr>
-              <a:t>Stage 2 NEVER sees literature labels. The prior enters as one input feature, so the 3.42 pp offset becomes a calibration problem Stage 2 can learn — not a corruption of the loss.</a:t>
+              <a:t>Stage 2 NEVER sees literature labels. The 3.42 pp offset affects the VALUE of the 68th feature — which Stage 2 can calibrate: "when expert says X, my lab gets ~X − 3.4". It does NOT corrupt the training loss (which it could not fix). Stage 1 uses XGBoost (Chen &amp; Guestrin, 2016) for conservative behaviour on 782 samples; Stage 2 uses LightGBM (Ke et al., 2017) for efficiency on 89,074 rows.</a:t>
             </a:r>
           </a:p>
         </p:txBody>

--- a/ocm_presentation.pptx
+++ b/ocm_presentation.pptx
@@ -4554,7 +4554,7 @@
                   <a:srgbClr val="50596E"/>
                 </a:solidFill>
               </a:rPr>
-              <a:t>Root cause: GHSV, CH₄/O₂ ratio, pressure absent from dataset. SHAP reference: Lundberg &amp; Lee (2017, NeurIPS); Shapley (1953).</a:t>
+              <a:t>Root cause: GHSV, CH₄/O₂ ratio, pressure absent from dataset — a data limit, not a model failure.</a:t>
             </a:r>
           </a:p>
         </p:txBody>
@@ -4692,7 +4692,7 @@
                   <a:srgbClr val="FFFFFF"/>
                 </a:solidFill>
               </a:rPr>
-              <a:t>Limitations &amp; Next Steps</a:t>
+              <a:t>Critical Analysis &amp; Next Steps</a:t>
             </a:r>
           </a:p>
         </p:txBody>
@@ -4776,14 +4776,159 @@
       </p:sp>
       <p:sp>
         <p:nvSpPr>
-          <p:cNvPr id="7" name="Rectangle 6"/>
+          <p:cNvPr id="7" name="TextBox 6"/>
+          <p:cNvSpPr txBox="1"/>
+          <p:nvPr/>
+        </p:nvSpPr>
+        <p:spPr>
+          <a:xfrm>
+            <a:off x="365760" y="1097280"/>
+            <a:ext cx="6400800" cy="365760"/>
+          </a:xfrm>
+          <a:prstGeom prst="rect">
+            <a:avLst/>
+          </a:prstGeom>
+          <a:noFill/>
+        </p:spPr>
+        <p:txBody>
+          <a:bodyPr wrap="square">
+            <a:spAutoFit/>
+          </a:bodyPr>
+          <a:lstStyle/>
+          <a:p>
+            <a:pPr algn="l"/>
+            <a:r>
+              <a:rPr sz="1400" b="1" i="0">
+                <a:solidFill>
+                  <a:srgbClr val="0F1E42"/>
+                </a:solidFill>
+              </a:rPr>
+              <a:t>Honest critique of each method</a:t>
+            </a:r>
+          </a:p>
+        </p:txBody>
+      </p:sp>
+      <p:sp>
+        <p:nvSpPr>
+          <p:cNvPr id="8" name="Rectangle 7"/>
           <p:cNvSpPr/>
           <p:nvPr/>
         </p:nvSpPr>
         <p:spPr>
           <a:xfrm>
-            <a:off x="365760" y="1143000"/>
-            <a:ext cx="3749039" cy="3108960"/>
+            <a:off x="365760" y="1508760"/>
+            <a:ext cx="6400800" cy="365760"/>
+          </a:xfrm>
+          <a:prstGeom prst="rect">
+            <a:avLst/>
+          </a:prstGeom>
+          <a:solidFill>
+            <a:srgbClr val="0F1E42"/>
+          </a:solidFill>
+          <a:ln>
+            <a:noFill/>
+          </a:ln>
+        </p:spPr>
+        <p:style>
+          <a:lnRef idx="1">
+            <a:schemeClr val="accent1"/>
+          </a:lnRef>
+          <a:fillRef idx="3">
+            <a:schemeClr val="accent1"/>
+          </a:fillRef>
+          <a:effectRef idx="2">
+            <a:schemeClr val="accent1"/>
+          </a:effectRef>
+          <a:fontRef idx="minor">
+            <a:schemeClr val="lt1"/>
+          </a:fontRef>
+        </p:style>
+        <p:txBody>
+          <a:bodyPr rtlCol="0" anchor="ctr"/>
+          <a:lstStyle/>
+          <a:p>
+            <a:pPr algn="ctr"/>
+          </a:p>
+        </p:txBody>
+      </p:sp>
+      <p:sp>
+        <p:nvSpPr>
+          <p:cNvPr id="9" name="TextBox 8"/>
+          <p:cNvSpPr txBox="1"/>
+          <p:nvPr/>
+        </p:nvSpPr>
+        <p:spPr>
+          <a:xfrm>
+            <a:off x="457200" y="1536192"/>
+            <a:ext cx="1645920" cy="310896"/>
+          </a:xfrm>
+          <a:prstGeom prst="rect">
+            <a:avLst/>
+          </a:prstGeom>
+          <a:noFill/>
+        </p:spPr>
+        <p:txBody>
+          <a:bodyPr wrap="square">
+            <a:spAutoFit/>
+          </a:bodyPr>
+          <a:lstStyle/>
+          <a:p>
+            <a:pPr algn="l"/>
+            <a:r>
+              <a:rPr sz="1100" b="1" i="0">
+                <a:solidFill>
+                  <a:srgbClr val="FFFFFF"/>
+                </a:solidFill>
+              </a:rPr>
+              <a:t>Method</a:t>
+            </a:r>
+          </a:p>
+        </p:txBody>
+      </p:sp>
+      <p:sp>
+        <p:nvSpPr>
+          <p:cNvPr id="10" name="TextBox 9"/>
+          <p:cNvSpPr txBox="1"/>
+          <p:nvPr/>
+        </p:nvSpPr>
+        <p:spPr>
+          <a:xfrm>
+            <a:off x="2103120" y="1536192"/>
+            <a:ext cx="4572000" cy="310896"/>
+          </a:xfrm>
+          <a:prstGeom prst="rect">
+            <a:avLst/>
+          </a:prstGeom>
+          <a:noFill/>
+        </p:spPr>
+        <p:txBody>
+          <a:bodyPr wrap="square">
+            <a:spAutoFit/>
+          </a:bodyPr>
+          <a:lstStyle/>
+          <a:p>
+            <a:pPr algn="l"/>
+            <a:r>
+              <a:rPr sz="1100" b="1" i="0">
+                <a:solidFill>
+                  <a:srgbClr val="FFFFFF"/>
+                </a:solidFill>
+              </a:rPr>
+              <a:t>Main limitation</a:t>
+            </a:r>
+          </a:p>
+        </p:txBody>
+      </p:sp>
+      <p:sp>
+        <p:nvSpPr>
+          <p:cNvPr id="11" name="Rectangle 10"/>
+          <p:cNvSpPr/>
+          <p:nvPr/>
+        </p:nvSpPr>
+        <p:spPr>
+          <a:xfrm>
+            <a:off x="365760" y="1874519"/>
+            <a:ext cx="6400800" cy="457200"/>
           </a:xfrm>
           <a:prstGeom prst="rect">
             <a:avLst/>
@@ -4793,7 +4938,7 @@
           </a:solidFill>
           <a:ln w="9525">
             <a:solidFill>
-              <a:srgbClr val="10B981"/>
+              <a:srgbClr val="D0D5DF"/>
             </a:solidFill>
           </a:ln>
         </p:spPr>
@@ -4821,14 +4966,557 @@
       </p:sp>
       <p:sp>
         <p:nvSpPr>
-          <p:cNvPr id="8" name="Rectangle 7"/>
+          <p:cNvPr id="12" name="TextBox 11"/>
+          <p:cNvSpPr txBox="1"/>
+          <p:nvPr/>
+        </p:nvSpPr>
+        <p:spPr>
+          <a:xfrm>
+            <a:off x="457200" y="1911095"/>
+            <a:ext cx="1645920" cy="457200"/>
+          </a:xfrm>
+          <a:prstGeom prst="rect">
+            <a:avLst/>
+          </a:prstGeom>
+          <a:noFill/>
+        </p:spPr>
+        <p:txBody>
+          <a:bodyPr wrap="square">
+            <a:spAutoFit/>
+          </a:bodyPr>
+          <a:lstStyle/>
+          <a:p>
+            <a:pPr algn="l"/>
+            <a:r>
+              <a:rPr sz="1000" b="1" i="0">
+                <a:solidFill>
+                  <a:srgbClr val="1A1A2E"/>
+                </a:solidFill>
+              </a:rPr>
+              <a:t>Naive merge</a:t>
+            </a:r>
+          </a:p>
+        </p:txBody>
+      </p:sp>
+      <p:sp>
+        <p:nvSpPr>
+          <p:cNvPr id="13" name="TextBox 12"/>
+          <p:cNvSpPr txBox="1"/>
+          <p:nvPr/>
+        </p:nvSpPr>
+        <p:spPr>
+          <a:xfrm>
+            <a:off x="2103120" y="1911095"/>
+            <a:ext cx="4572000" cy="411480"/>
+          </a:xfrm>
+          <a:prstGeom prst="rect">
+            <a:avLst/>
+          </a:prstGeom>
+          <a:noFill/>
+        </p:spPr>
+        <p:txBody>
+          <a:bodyPr wrap="square">
+            <a:spAutoFit/>
+          </a:bodyPr>
+          <a:lstStyle/>
+          <a:p>
+            <a:pPr algn="l"/>
+            <a:r>
+              <a:rPr sz="1000" b="0" i="0">
+                <a:solidFill>
+                  <a:srgbClr val="50596E"/>
+                </a:solidFill>
+              </a:rPr>
+              <a:t>Negative control only — harms the model</a:t>
+            </a:r>
+          </a:p>
+        </p:txBody>
+      </p:sp>
+      <p:sp>
+        <p:nvSpPr>
+          <p:cNvPr id="14" name="Rectangle 13"/>
           <p:cNvSpPr/>
           <p:nvPr/>
         </p:nvSpPr>
         <p:spPr>
           <a:xfrm>
-            <a:off x="365760" y="1143000"/>
-            <a:ext cx="3749039" cy="411480"/>
+            <a:off x="365760" y="2377439"/>
+            <a:ext cx="6400800" cy="566928"/>
+          </a:xfrm>
+          <a:prstGeom prst="rect">
+            <a:avLst/>
+          </a:prstGeom>
+          <a:solidFill>
+            <a:srgbClr val="F5F6F8"/>
+          </a:solidFill>
+          <a:ln w="9525">
+            <a:solidFill>
+              <a:srgbClr val="D0D5DF"/>
+            </a:solidFill>
+          </a:ln>
+        </p:spPr>
+        <p:style>
+          <a:lnRef idx="1">
+            <a:schemeClr val="accent1"/>
+          </a:lnRef>
+          <a:fillRef idx="3">
+            <a:schemeClr val="accent1"/>
+          </a:fillRef>
+          <a:effectRef idx="2">
+            <a:schemeClr val="accent1"/>
+          </a:effectRef>
+          <a:fontRef idx="minor">
+            <a:schemeClr val="lt1"/>
+          </a:fontRef>
+        </p:style>
+        <p:txBody>
+          <a:bodyPr rtlCol="0" anchor="ctr"/>
+          <a:lstStyle/>
+          <a:p>
+            <a:pPr algn="ctr"/>
+          </a:p>
+        </p:txBody>
+      </p:sp>
+      <p:sp>
+        <p:nvSpPr>
+          <p:cNvPr id="15" name="TextBox 14"/>
+          <p:cNvSpPr txBox="1"/>
+          <p:nvPr/>
+        </p:nvSpPr>
+        <p:spPr>
+          <a:xfrm>
+            <a:off x="457200" y="2414015"/>
+            <a:ext cx="1645920" cy="457200"/>
+          </a:xfrm>
+          <a:prstGeom prst="rect">
+            <a:avLst/>
+          </a:prstGeom>
+          <a:noFill/>
+        </p:spPr>
+        <p:txBody>
+          <a:bodyPr wrap="square">
+            <a:spAutoFit/>
+          </a:bodyPr>
+          <a:lstStyle/>
+          <a:p>
+            <a:pPr algn="l"/>
+            <a:r>
+              <a:rPr sz="1000" b="1" i="0">
+                <a:solidFill>
+                  <a:srgbClr val="1A1A2E"/>
+                </a:solidFill>
+              </a:rPr>
+              <a:t>DRST</a:t>
+            </a:r>
+          </a:p>
+        </p:txBody>
+      </p:sp>
+      <p:sp>
+        <p:nvSpPr>
+          <p:cNvPr id="16" name="TextBox 15"/>
+          <p:cNvSpPr txBox="1"/>
+          <p:nvPr/>
+        </p:nvSpPr>
+        <p:spPr>
+          <a:xfrm>
+            <a:off x="2103120" y="2414015"/>
+            <a:ext cx="4572000" cy="521207"/>
+          </a:xfrm>
+          <a:prstGeom prst="rect">
+            <a:avLst/>
+          </a:prstGeom>
+          <a:noFill/>
+        </p:spPr>
+        <p:txBody>
+          <a:bodyPr wrap="square">
+            <a:spAutoFit/>
+          </a:bodyPr>
+          <a:lstStyle/>
+          <a:p>
+            <a:pPr algn="l"/>
+            <a:r>
+              <a:rPr sz="1000" b="0" i="0">
+                <a:solidFill>
+                  <a:srgbClr val="50596E"/>
+                </a:solidFill>
+              </a:rPr>
+              <a:t>Hard cliff; discards ~80% of lit; τ tuned on the reported CV</a:t>
+            </a:r>
+          </a:p>
+        </p:txBody>
+      </p:sp>
+      <p:sp>
+        <p:nvSpPr>
+          <p:cNvPr id="17" name="Rectangle 16"/>
+          <p:cNvSpPr/>
+          <p:nvPr/>
+        </p:nvSpPr>
+        <p:spPr>
+          <a:xfrm>
+            <a:off x="365760" y="2990087"/>
+            <a:ext cx="6400800" cy="566928"/>
+          </a:xfrm>
+          <a:prstGeom prst="rect">
+            <a:avLst/>
+          </a:prstGeom>
+          <a:solidFill>
+            <a:srgbClr val="F5F6F8"/>
+          </a:solidFill>
+          <a:ln w="9525">
+            <a:solidFill>
+              <a:srgbClr val="D0D5DF"/>
+            </a:solidFill>
+          </a:ln>
+        </p:spPr>
+        <p:style>
+          <a:lnRef idx="1">
+            <a:schemeClr val="accent1"/>
+          </a:lnRef>
+          <a:fillRef idx="3">
+            <a:schemeClr val="accent1"/>
+          </a:fillRef>
+          <a:effectRef idx="2">
+            <a:schemeClr val="accent1"/>
+          </a:effectRef>
+          <a:fontRef idx="minor">
+            <a:schemeClr val="lt1"/>
+          </a:fontRef>
+        </p:style>
+        <p:txBody>
+          <a:bodyPr rtlCol="0" anchor="ctr"/>
+          <a:lstStyle/>
+          <a:p>
+            <a:pPr algn="ctr"/>
+          </a:p>
+        </p:txBody>
+      </p:sp>
+      <p:sp>
+        <p:nvSpPr>
+          <p:cNvPr id="18" name="TextBox 17"/>
+          <p:cNvSpPr txBox="1"/>
+          <p:nvPr/>
+        </p:nvSpPr>
+        <p:spPr>
+          <a:xfrm>
+            <a:off x="457200" y="3026663"/>
+            <a:ext cx="1645920" cy="457200"/>
+          </a:xfrm>
+          <a:prstGeom prst="rect">
+            <a:avLst/>
+          </a:prstGeom>
+          <a:noFill/>
+        </p:spPr>
+        <p:txBody>
+          <a:bodyPr wrap="square">
+            <a:spAutoFit/>
+          </a:bodyPr>
+          <a:lstStyle/>
+          <a:p>
+            <a:pPr algn="l"/>
+            <a:r>
+              <a:rPr sz="1000" b="1" i="0">
+                <a:solidFill>
+                  <a:srgbClr val="1A1A2E"/>
+                </a:solidFill>
+              </a:rPr>
+              <a:t>KMM</a:t>
+            </a:r>
+          </a:p>
+        </p:txBody>
+      </p:sp>
+      <p:sp>
+        <p:nvSpPr>
+          <p:cNvPr id="19" name="TextBox 18"/>
+          <p:cNvSpPr txBox="1"/>
+          <p:nvPr/>
+        </p:nvSpPr>
+        <p:spPr>
+          <a:xfrm>
+            <a:off x="2103120" y="3026663"/>
+            <a:ext cx="4572000" cy="521207"/>
+          </a:xfrm>
+          <a:prstGeom prst="rect">
+            <a:avLst/>
+          </a:prstGeom>
+          <a:noFill/>
+        </p:spPr>
+        <p:txBody>
+          <a:bodyPr wrap="square">
+            <a:spAutoFit/>
+          </a:bodyPr>
+          <a:lstStyle/>
+          <a:p>
+            <a:pPr algn="l"/>
+            <a:r>
+              <a:rPr sz="1000" b="0" i="0">
+                <a:solidFill>
+                  <a:srgbClr val="50596E"/>
+                </a:solidFill>
+              </a:rPr>
+              <a:t>Slow n×n kernel; σ-sensitive; still uses labels; ties DRST</a:t>
+            </a:r>
+          </a:p>
+        </p:txBody>
+      </p:sp>
+      <p:sp>
+        <p:nvSpPr>
+          <p:cNvPr id="20" name="Rectangle 19"/>
+          <p:cNvSpPr/>
+          <p:nvPr/>
+        </p:nvSpPr>
+        <p:spPr>
+          <a:xfrm>
+            <a:off x="365760" y="3602735"/>
+            <a:ext cx="6400800" cy="566928"/>
+          </a:xfrm>
+          <a:prstGeom prst="rect">
+            <a:avLst/>
+          </a:prstGeom>
+          <a:solidFill>
+            <a:srgbClr val="E8F5E9"/>
+          </a:solidFill>
+          <a:ln w="9525">
+            <a:solidFill>
+              <a:srgbClr val="D0D5DF"/>
+            </a:solidFill>
+          </a:ln>
+        </p:spPr>
+        <p:style>
+          <a:lnRef idx="1">
+            <a:schemeClr val="accent1"/>
+          </a:lnRef>
+          <a:fillRef idx="3">
+            <a:schemeClr val="accent1"/>
+          </a:fillRef>
+          <a:effectRef idx="2">
+            <a:schemeClr val="accent1"/>
+          </a:effectRef>
+          <a:fontRef idx="minor">
+            <a:schemeClr val="lt1"/>
+          </a:fontRef>
+        </p:style>
+        <p:txBody>
+          <a:bodyPr rtlCol="0" anchor="ctr"/>
+          <a:lstStyle/>
+          <a:p>
+            <a:pPr algn="ctr"/>
+          </a:p>
+        </p:txBody>
+      </p:sp>
+      <p:sp>
+        <p:nvSpPr>
+          <p:cNvPr id="21" name="TextBox 20"/>
+          <p:cNvSpPr txBox="1"/>
+          <p:nvPr/>
+        </p:nvSpPr>
+        <p:spPr>
+          <a:xfrm>
+            <a:off x="457200" y="3639311"/>
+            <a:ext cx="1645920" cy="457200"/>
+          </a:xfrm>
+          <a:prstGeom prst="rect">
+            <a:avLst/>
+          </a:prstGeom>
+          <a:noFill/>
+        </p:spPr>
+        <p:txBody>
+          <a:bodyPr wrap="square">
+            <a:spAutoFit/>
+          </a:bodyPr>
+          <a:lstStyle/>
+          <a:p>
+            <a:pPr algn="l"/>
+            <a:r>
+              <a:rPr sz="1000" b="1" i="0">
+                <a:solidFill>
+                  <a:srgbClr val="1B5E20"/>
+                </a:solidFill>
+              </a:rPr>
+              <a:t>Prior FT</a:t>
+            </a:r>
+          </a:p>
+        </p:txBody>
+      </p:sp>
+      <p:sp>
+        <p:nvSpPr>
+          <p:cNvPr id="22" name="TextBox 21"/>
+          <p:cNvSpPr txBox="1"/>
+          <p:nvPr/>
+        </p:nvSpPr>
+        <p:spPr>
+          <a:xfrm>
+            <a:off x="2103120" y="3639311"/>
+            <a:ext cx="4572000" cy="521207"/>
+          </a:xfrm>
+          <a:prstGeom prst="rect">
+            <a:avLst/>
+          </a:prstGeom>
+          <a:noFill/>
+        </p:spPr>
+        <p:txBody>
+          <a:bodyPr wrap="square">
+            <a:spAutoFit/>
+          </a:bodyPr>
+          <a:lstStyle/>
+          <a:p>
+            <a:pPr algn="l"/>
+            <a:r>
+              <a:rPr sz="1000" b="0" i="0">
+                <a:solidFill>
+                  <a:srgbClr val="1B5E20"/>
+                </a:solidFill>
+              </a:rPr>
+              <a:t>Best — but Stage-1 on 782 rows → high variance; two models</a:t>
+            </a:r>
+          </a:p>
+        </p:txBody>
+      </p:sp>
+      <p:sp>
+        <p:nvSpPr>
+          <p:cNvPr id="23" name="TextBox 22"/>
+          <p:cNvSpPr txBox="1"/>
+          <p:nvPr/>
+        </p:nvSpPr>
+        <p:spPr>
+          <a:xfrm>
+            <a:off x="365760" y="4261103"/>
+            <a:ext cx="6400800" cy="365760"/>
+          </a:xfrm>
+          <a:prstGeom prst="rect">
+            <a:avLst/>
+          </a:prstGeom>
+          <a:noFill/>
+        </p:spPr>
+        <p:txBody>
+          <a:bodyPr wrap="square">
+            <a:spAutoFit/>
+          </a:bodyPr>
+          <a:lstStyle/>
+          <a:p>
+            <a:pPr algn="l"/>
+            <a:r>
+              <a:rPr sz="1300" b="1" i="0">
+                <a:solidFill>
+                  <a:srgbClr val="0F1E42"/>
+                </a:solidFill>
+              </a:rPr>
+              <a:t>Cross-cutting limits</a:t>
+            </a:r>
+          </a:p>
+        </p:txBody>
+      </p:sp>
+      <p:sp>
+        <p:nvSpPr>
+          <p:cNvPr id="24" name="TextBox 23"/>
+          <p:cNvSpPr txBox="1"/>
+          <p:nvPr/>
+        </p:nvSpPr>
+        <p:spPr>
+          <a:xfrm>
+            <a:off x="411480" y="4672583"/>
+            <a:ext cx="6400800" cy="356616"/>
+          </a:xfrm>
+          <a:prstGeom prst="rect">
+            <a:avLst/>
+          </a:prstGeom>
+          <a:noFill/>
+        </p:spPr>
+        <p:txBody>
+          <a:bodyPr wrap="square">
+            <a:spAutoFit/>
+          </a:bodyPr>
+          <a:lstStyle/>
+          <a:p>
+            <a:pPr algn="l"/>
+            <a:r>
+              <a:rPr sz="1000" b="0" i="0">
+                <a:solidFill>
+                  <a:srgbClr val="50596E"/>
+                </a:solidFill>
+              </a:rPr>
+              <a:t>•  Scored on our-data CV only; OOD checked for Prior FT alone</a:t>
+            </a:r>
+          </a:p>
+        </p:txBody>
+      </p:sp>
+      <p:sp>
+        <p:nvSpPr>
+          <p:cNvPr id="25" name="TextBox 24"/>
+          <p:cNvSpPr txBox="1"/>
+          <p:nvPr/>
+        </p:nvSpPr>
+        <p:spPr>
+          <a:xfrm>
+            <a:off x="411480" y="4983479"/>
+            <a:ext cx="6400800" cy="356616"/>
+          </a:xfrm>
+          <a:prstGeom prst="rect">
+            <a:avLst/>
+          </a:prstGeom>
+          <a:noFill/>
+        </p:spPr>
+        <p:txBody>
+          <a:bodyPr wrap="square">
+            <a:spAutoFit/>
+          </a:bodyPr>
+          <a:lstStyle/>
+          <a:p>
+            <a:pPr algn="l"/>
+            <a:r>
+              <a:rPr sz="1000" b="0" i="0">
+                <a:solidFill>
+                  <a:srgbClr val="50596E"/>
+                </a:solidFill>
+              </a:rPr>
+              <a:t>•  Point predictions — no uncertainty for picking experiments</a:t>
+            </a:r>
+          </a:p>
+        </p:txBody>
+      </p:sp>
+      <p:sp>
+        <p:nvSpPr>
+          <p:cNvPr id="26" name="TextBox 25"/>
+          <p:cNvSpPr txBox="1"/>
+          <p:nvPr/>
+        </p:nvSpPr>
+        <p:spPr>
+          <a:xfrm>
+            <a:off x="411480" y="5294375"/>
+            <a:ext cx="6400800" cy="356616"/>
+          </a:xfrm>
+          <a:prstGeom prst="rect">
+            <a:avLst/>
+          </a:prstGeom>
+          <a:noFill/>
+        </p:spPr>
+        <p:txBody>
+          <a:bodyPr wrap="square">
+            <a:spAutoFit/>
+          </a:bodyPr>
+          <a:lstStyle/>
+          <a:p>
+            <a:pPr algn="l"/>
+            <a:r>
+              <a:rPr sz="1000" b="0" i="0">
+                <a:solidFill>
+                  <a:srgbClr val="50596E"/>
+                </a:solidFill>
+              </a:rPr>
+              <a:t>•  Y&gt;15% ceiling is DATA-bound, not model-bound</a:t>
+            </a:r>
+          </a:p>
+        </p:txBody>
+      </p:sp>
+      <p:sp>
+        <p:nvSpPr>
+          <p:cNvPr id="27" name="Rectangle 26"/>
+          <p:cNvSpPr/>
+          <p:nvPr/>
+        </p:nvSpPr>
+        <p:spPr>
+          <a:xfrm>
+            <a:off x="7040880" y="1097280"/>
+            <a:ext cx="4846320" cy="384048"/>
           </a:xfrm>
           <a:prstGeom prst="rect">
             <a:avLst/>
@@ -4864,14 +5552,14 @@
       </p:sp>
       <p:sp>
         <p:nvSpPr>
-          <p:cNvPr id="9" name="TextBox 8"/>
-          <p:cNvSpPr txBox="1"/>
-          <p:nvPr/>
-        </p:nvSpPr>
-        <p:spPr>
-          <a:xfrm>
-            <a:off x="502920" y="1170432"/>
-            <a:ext cx="3474719" cy="365760"/>
+          <p:cNvPr id="28" name="TextBox 27"/>
+          <p:cNvSpPr txBox="1"/>
+          <p:nvPr/>
+        </p:nvSpPr>
+        <p:spPr>
+          <a:xfrm>
+            <a:off x="7178040" y="1124712"/>
+            <a:ext cx="4572000" cy="329184"/>
           </a:xfrm>
           <a:prstGeom prst="rect">
             <a:avLst/>
@@ -4891,133 +5579,31 @@
                   <a:srgbClr val="FFFFFF"/>
                 </a:solidFill>
               </a:rPr>
-              <a:t>Option A — Easy</a:t>
-            </a:r>
-          </a:p>
-        </p:txBody>
-      </p:sp>
-      <p:sp>
-        <p:nvSpPr>
-          <p:cNvPr id="10" name="TextBox 9"/>
-          <p:cNvSpPr txBox="1"/>
-          <p:nvPr/>
-        </p:nvSpPr>
-        <p:spPr>
-          <a:xfrm>
-            <a:off x="502920" y="1645920"/>
-            <a:ext cx="3474719" cy="365760"/>
-          </a:xfrm>
-          <a:prstGeom prst="rect">
-            <a:avLst/>
-          </a:prstGeom>
-          <a:noFill/>
-        </p:spPr>
-        <p:txBody>
-          <a:bodyPr wrap="square">
-            <a:spAutoFit/>
-          </a:bodyPr>
-          <a:lstStyle/>
-          <a:p>
-            <a:pPr algn="l"/>
-            <a:r>
-              <a:rPr sz="1300" b="1" i="0">
-                <a:solidFill>
-                  <a:srgbClr val="0F1E42"/>
-                </a:solidFill>
-              </a:rPr>
-              <a:t>Add reaction conditions</a:t>
-            </a:r>
-          </a:p>
-        </p:txBody>
-      </p:sp>
-      <p:sp>
-        <p:nvSpPr>
-          <p:cNvPr id="11" name="TextBox 10"/>
-          <p:cNvSpPr txBox="1"/>
-          <p:nvPr/>
-        </p:nvSpPr>
-        <p:spPr>
-          <a:xfrm>
-            <a:off x="502920" y="2057400"/>
-            <a:ext cx="3474719" cy="731520"/>
-          </a:xfrm>
-          <a:prstGeom prst="rect">
-            <a:avLst/>
-          </a:prstGeom>
-          <a:noFill/>
-        </p:spPr>
-        <p:txBody>
-          <a:bodyPr wrap="square">
-            <a:spAutoFit/>
-          </a:bodyPr>
-          <a:lstStyle/>
-          <a:p>
-            <a:pPr algn="l"/>
-            <a:r>
-              <a:rPr sz="1100" b="0" i="0">
-                <a:solidFill>
-                  <a:srgbClr val="50596E"/>
-                </a:solidFill>
-              </a:rPr>
-              <a:t>Include GHSV, CH₄/O₂, and pressure as features.</a:t>
-            </a:r>
-          </a:p>
-        </p:txBody>
-      </p:sp>
-      <p:sp>
-        <p:nvSpPr>
-          <p:cNvPr id="12" name="TextBox 11"/>
-          <p:cNvSpPr txBox="1"/>
-          <p:nvPr/>
-        </p:nvSpPr>
-        <p:spPr>
-          <a:xfrm>
-            <a:off x="502920" y="2834640"/>
-            <a:ext cx="3474719" cy="1280160"/>
-          </a:xfrm>
-          <a:prstGeom prst="rect">
-            <a:avLst/>
-          </a:prstGeom>
-          <a:noFill/>
-        </p:spPr>
-        <p:txBody>
-          <a:bodyPr wrap="square">
-            <a:spAutoFit/>
-          </a:bodyPr>
-          <a:lstStyle/>
-          <a:p>
-            <a:pPr algn="l"/>
-            <a:r>
-              <a:rPr sz="1100" b="0" i="1">
-                <a:solidFill>
-                  <a:srgbClr val="50596E"/>
-                </a:solidFill>
-              </a:rPr>
-              <a:t>Expected to fix the &gt;15% ceiling effect and reduce high-yield RMSE from 4.70 to ~2.5.</a:t>
-            </a:r>
-          </a:p>
-        </p:txBody>
-      </p:sp>
-      <p:sp>
-        <p:nvSpPr>
-          <p:cNvPr id="13" name="Rectangle 12"/>
+              <a:t>What's next (priority-ordered)</a:t>
+            </a:r>
+          </a:p>
+        </p:txBody>
+      </p:sp>
+      <p:sp>
+        <p:nvSpPr>
+          <p:cNvPr id="29" name="Rectangle 28"/>
           <p:cNvSpPr/>
           <p:nvPr/>
         </p:nvSpPr>
         <p:spPr>
           <a:xfrm>
-            <a:off x="4343399" y="1143000"/>
-            <a:ext cx="3749039" cy="3108960"/>
+            <a:off x="7040880" y="1691640"/>
+            <a:ext cx="4846320" cy="658368"/>
           </a:xfrm>
           <a:prstGeom prst="rect">
             <a:avLst/>
           </a:prstGeom>
           <a:solidFill>
-            <a:srgbClr val="F5F6F8"/>
+            <a:srgbClr val="E8F5E9"/>
           </a:solidFill>
           <a:ln w="9525">
             <a:solidFill>
-              <a:srgbClr val="F59E0B"/>
+              <a:srgbClr val="D0D5DF"/>
             </a:solidFill>
           </a:ln>
         </p:spPr>
@@ -5045,20 +5631,88 @@
       </p:sp>
       <p:sp>
         <p:nvSpPr>
-          <p:cNvPr id="14" name="Rectangle 13"/>
+          <p:cNvPr id="30" name="TextBox 29"/>
+          <p:cNvSpPr txBox="1"/>
+          <p:nvPr/>
+        </p:nvSpPr>
+        <p:spPr>
+          <a:xfrm>
+            <a:off x="7132320" y="1737360"/>
+            <a:ext cx="365760" cy="365760"/>
+          </a:xfrm>
+          <a:prstGeom prst="rect">
+            <a:avLst/>
+          </a:prstGeom>
+          <a:noFill/>
+        </p:spPr>
+        <p:txBody>
+          <a:bodyPr wrap="square">
+            <a:spAutoFit/>
+          </a:bodyPr>
+          <a:lstStyle/>
+          <a:p>
+            <a:pPr algn="l"/>
+            <a:r>
+              <a:rPr sz="1200" b="1" i="0">
+                <a:solidFill>
+                  <a:srgbClr val="1B5E20"/>
+                </a:solidFill>
+              </a:rPr>
+              <a:t>1.</a:t>
+            </a:r>
+          </a:p>
+        </p:txBody>
+      </p:sp>
+      <p:sp>
+        <p:nvSpPr>
+          <p:cNvPr id="31" name="TextBox 30"/>
+          <p:cNvSpPr txBox="1"/>
+          <p:nvPr/>
+        </p:nvSpPr>
+        <p:spPr>
+          <a:xfrm>
+            <a:off x="7543800" y="1737360"/>
+            <a:ext cx="4206240" cy="612647"/>
+          </a:xfrm>
+          <a:prstGeom prst="rect">
+            <a:avLst/>
+          </a:prstGeom>
+          <a:noFill/>
+        </p:spPr>
+        <p:txBody>
+          <a:bodyPr wrap="square">
+            <a:spAutoFit/>
+          </a:bodyPr>
+          <a:lstStyle/>
+          <a:p>
+            <a:pPr algn="l"/>
+            <a:r>
+              <a:rPr sz="1100" b="1" i="0">
+                <a:solidFill>
+                  <a:srgbClr val="1B5E20"/>
+                </a:solidFill>
+              </a:rPr>
+              <a:t>Add GHSV, CH₄:O₂, pressure — fixes the ceiling and likely the label shift</a:t>
+            </a:r>
+          </a:p>
+        </p:txBody>
+      </p:sp>
+      <p:sp>
+        <p:nvSpPr>
+          <p:cNvPr id="32" name="Rectangle 31"/>
           <p:cNvSpPr/>
           <p:nvPr/>
         </p:nvSpPr>
         <p:spPr>
           <a:xfrm>
-            <a:off x="4343399" y="1143000"/>
-            <a:ext cx="3749039" cy="411480"/>
+            <a:off x="7543800" y="2093976"/>
+            <a:ext cx="1554480" cy="219456"/>
           </a:xfrm>
           <a:prstGeom prst="rect">
             <a:avLst/>
           </a:prstGeom>
           <a:solidFill>
-            <a:srgbClr val="F59E0B"/>
+            <a:srgbClr val="10B981"/>
           </a:solidFill>
           <a:ln>
             <a:noFill/>
@@ -5088,160 +5742,58 @@
       </p:sp>
       <p:sp>
         <p:nvSpPr>
-          <p:cNvPr id="15" name="TextBox 14"/>
-          <p:cNvSpPr txBox="1"/>
-          <p:nvPr/>
-        </p:nvSpPr>
-        <p:spPr>
-          <a:xfrm>
-            <a:off x="4480559" y="1170432"/>
-            <a:ext cx="3474719" cy="365760"/>
-          </a:xfrm>
-          <a:prstGeom prst="rect">
-            <a:avLst/>
-          </a:prstGeom>
-          <a:noFill/>
-        </p:spPr>
-        <p:txBody>
-          <a:bodyPr wrap="square">
-            <a:spAutoFit/>
-          </a:bodyPr>
-          <a:lstStyle/>
-          <a:p>
-            <a:pPr algn="l"/>
-            <a:r>
-              <a:rPr sz="1300" b="1" i="0">
+          <p:cNvPr id="33" name="TextBox 32"/>
+          <p:cNvSpPr txBox="1"/>
+          <p:nvPr/>
+        </p:nvSpPr>
+        <p:spPr>
+          <a:xfrm>
+            <a:off x="7589520" y="2112264"/>
+            <a:ext cx="1463040" cy="182880"/>
+          </a:xfrm>
+          <a:prstGeom prst="rect">
+            <a:avLst/>
+          </a:prstGeom>
+          <a:noFill/>
+        </p:spPr>
+        <p:txBody>
+          <a:bodyPr wrap="square">
+            <a:spAutoFit/>
+          </a:bodyPr>
+          <a:lstStyle/>
+          <a:p>
+            <a:pPr algn="ctr"/>
+            <a:r>
+              <a:rPr sz="800" b="1" i="0">
                 <a:solidFill>
                   <a:srgbClr val="FFFFFF"/>
                 </a:solidFill>
               </a:rPr>
-              <a:t>Option B — Medium</a:t>
-            </a:r>
-          </a:p>
-        </p:txBody>
-      </p:sp>
-      <p:sp>
-        <p:nvSpPr>
-          <p:cNvPr id="16" name="TextBox 15"/>
-          <p:cNvSpPr txBox="1"/>
-          <p:nvPr/>
-        </p:nvSpPr>
-        <p:spPr>
-          <a:xfrm>
-            <a:off x="4480559" y="1645920"/>
-            <a:ext cx="3474719" cy="365760"/>
-          </a:xfrm>
-          <a:prstGeom prst="rect">
-            <a:avLst/>
-          </a:prstGeom>
-          <a:noFill/>
-        </p:spPr>
-        <p:txBody>
-          <a:bodyPr wrap="square">
-            <a:spAutoFit/>
-          </a:bodyPr>
-          <a:lstStyle/>
-          <a:p>
-            <a:pPr algn="l"/>
-            <a:r>
-              <a:rPr sz="1300" b="1" i="0">
-                <a:solidFill>
-                  <a:srgbClr val="0F1E42"/>
-                </a:solidFill>
-              </a:rPr>
-              <a:t>Tune transfer threshold</a:t>
-            </a:r>
-          </a:p>
-        </p:txBody>
-      </p:sp>
-      <p:sp>
-        <p:nvSpPr>
-          <p:cNvPr id="17" name="TextBox 16"/>
-          <p:cNvSpPr txBox="1"/>
-          <p:nvPr/>
-        </p:nvSpPr>
-        <p:spPr>
-          <a:xfrm>
-            <a:off x="4480559" y="2057400"/>
-            <a:ext cx="3474719" cy="731520"/>
-          </a:xfrm>
-          <a:prstGeom prst="rect">
-            <a:avLst/>
-          </a:prstGeom>
-          <a:noFill/>
-        </p:spPr>
-        <p:txBody>
-          <a:bodyPr wrap="square">
-            <a:spAutoFit/>
-          </a:bodyPr>
-          <a:lstStyle/>
-          <a:p>
-            <a:pPr algn="l"/>
-            <a:r>
-              <a:rPr sz="1100" b="0" i="0">
-                <a:solidFill>
-                  <a:srgbClr val="50596E"/>
-                </a:solidFill>
-              </a:rPr>
-              <a:t>Sweep DRST τ and Stage 1 sample size jointly.</a:t>
-            </a:r>
-          </a:p>
-        </p:txBody>
-      </p:sp>
-      <p:sp>
-        <p:nvSpPr>
-          <p:cNvPr id="18" name="TextBox 17"/>
-          <p:cNvSpPr txBox="1"/>
-          <p:nvPr/>
-        </p:nvSpPr>
-        <p:spPr>
-          <a:xfrm>
-            <a:off x="4480559" y="2834640"/>
-            <a:ext cx="3474719" cy="1280160"/>
-          </a:xfrm>
-          <a:prstGeom prst="rect">
-            <a:avLst/>
-          </a:prstGeom>
-          <a:noFill/>
-        </p:spPr>
-        <p:txBody>
-          <a:bodyPr wrap="square">
-            <a:spAutoFit/>
-          </a:bodyPr>
-          <a:lstStyle/>
-          <a:p>
-            <a:pPr algn="l"/>
-            <a:r>
-              <a:rPr sz="1100" b="0" i="1">
-                <a:solidFill>
-                  <a:srgbClr val="50596E"/>
-                </a:solidFill>
-              </a:rPr>
-              <a:t>Current best: τ = 0.30 (782 samples). Grid search may recover 0.3–0.5% additional RMSE.</a:t>
-            </a:r>
-          </a:p>
-        </p:txBody>
-      </p:sp>
-      <p:sp>
-        <p:nvSpPr>
-          <p:cNvPr id="19" name="Rectangle 18"/>
+              <a:t>Highest impact</a:t>
+            </a:r>
+          </a:p>
+        </p:txBody>
+      </p:sp>
+      <p:sp>
+        <p:nvSpPr>
+          <p:cNvPr id="34" name="Rectangle 33"/>
           <p:cNvSpPr/>
           <p:nvPr/>
         </p:nvSpPr>
         <p:spPr>
           <a:xfrm>
-            <a:off x="8321038" y="1143000"/>
-            <a:ext cx="3749039" cy="3108960"/>
+            <a:off x="7040880" y="2423160"/>
+            <a:ext cx="4846320" cy="502920"/>
           </a:xfrm>
           <a:prstGeom prst="rect">
             <a:avLst/>
           </a:prstGeom>
           <a:solidFill>
-            <a:srgbClr val="F5F6F8"/>
+            <a:srgbClr val="FFFFFF"/>
           </a:solidFill>
           <a:ln w="9525">
             <a:solidFill>
-              <a:srgbClr val="DC3C3C"/>
+              <a:srgbClr val="D0D5DF"/>
             </a:solidFill>
           </a:ln>
         </p:spPr>
@@ -5269,23 +5821,93 @@
       </p:sp>
       <p:sp>
         <p:nvSpPr>
-          <p:cNvPr id="20" name="Rectangle 19"/>
+          <p:cNvPr id="35" name="TextBox 34"/>
+          <p:cNvSpPr txBox="1"/>
+          <p:nvPr/>
+        </p:nvSpPr>
+        <p:spPr>
+          <a:xfrm>
+            <a:off x="7132320" y="2468879"/>
+            <a:ext cx="365760" cy="365760"/>
+          </a:xfrm>
+          <a:prstGeom prst="rect">
+            <a:avLst/>
+          </a:prstGeom>
+          <a:noFill/>
+        </p:spPr>
+        <p:txBody>
+          <a:bodyPr wrap="square">
+            <a:spAutoFit/>
+          </a:bodyPr>
+          <a:lstStyle/>
+          <a:p>
+            <a:pPr algn="l"/>
+            <a:r>
+              <a:rPr sz="1200" b="1" i="0">
+                <a:solidFill>
+                  <a:srgbClr val="0078C8"/>
+                </a:solidFill>
+              </a:rPr>
+              <a:t>2.</a:t>
+            </a:r>
+          </a:p>
+        </p:txBody>
+      </p:sp>
+      <p:sp>
+        <p:nvSpPr>
+          <p:cNvPr id="36" name="TextBox 35"/>
+          <p:cNvSpPr txBox="1"/>
+          <p:nvPr/>
+        </p:nvSpPr>
+        <p:spPr>
+          <a:xfrm>
+            <a:off x="7543800" y="2468879"/>
+            <a:ext cx="4206240" cy="457200"/>
+          </a:xfrm>
+          <a:prstGeom prst="rect">
+            <a:avLst/>
+          </a:prstGeom>
+          <a:noFill/>
+        </p:spPr>
+        <p:txBody>
+          <a:bodyPr wrap="square">
+            <a:spAutoFit/>
+          </a:bodyPr>
+          <a:lstStyle/>
+          <a:p>
+            <a:pPr algn="l"/>
+            <a:r>
+              <a:rPr sz="1100" b="0" i="0">
+                <a:solidFill>
+                  <a:srgbClr val="1A1A2E"/>
+                </a:solidFill>
+              </a:rPr>
+              <a:t>Bag the Stage-1 expert to cut its variance</a:t>
+            </a:r>
+          </a:p>
+        </p:txBody>
+      </p:sp>
+      <p:sp>
+        <p:nvSpPr>
+          <p:cNvPr id="37" name="Rectangle 36"/>
           <p:cNvSpPr/>
           <p:nvPr/>
         </p:nvSpPr>
         <p:spPr>
           <a:xfrm>
-            <a:off x="8321038" y="1143000"/>
-            <a:ext cx="3749039" cy="411480"/>
+            <a:off x="7040880" y="2999232"/>
+            <a:ext cx="4846320" cy="658368"/>
           </a:xfrm>
           <a:prstGeom prst="rect">
             <a:avLst/>
           </a:prstGeom>
           <a:solidFill>
-            <a:srgbClr val="DC3C3C"/>
+            <a:srgbClr val="FFFFFF"/>
           </a:solidFill>
-          <a:ln>
-            <a:noFill/>
+          <a:ln w="9525">
+            <a:solidFill>
+              <a:srgbClr val="D0D5DF"/>
+            </a:solidFill>
           </a:ln>
         </p:spPr>
         <p:style>
@@ -5312,14 +5934,14 @@
       </p:sp>
       <p:sp>
         <p:nvSpPr>
-          <p:cNvPr id="21" name="TextBox 20"/>
-          <p:cNvSpPr txBox="1"/>
-          <p:nvPr/>
-        </p:nvSpPr>
-        <p:spPr>
-          <a:xfrm>
-            <a:off x="8458198" y="1170432"/>
-            <a:ext cx="3474719" cy="365760"/>
+          <p:cNvPr id="38" name="TextBox 37"/>
+          <p:cNvSpPr txBox="1"/>
+          <p:nvPr/>
+        </p:nvSpPr>
+        <p:spPr>
+          <a:xfrm>
+            <a:off x="7132320" y="3044951"/>
+            <a:ext cx="365760" cy="365760"/>
           </a:xfrm>
           <a:prstGeom prst="rect">
             <a:avLst/>
@@ -5334,26 +5956,26 @@
           <a:p>
             <a:pPr algn="l"/>
             <a:r>
-              <a:rPr sz="1300" b="1" i="0">
-                <a:solidFill>
-                  <a:srgbClr val="FFFFFF"/>
-                </a:solidFill>
-              </a:rPr>
-              <a:t>Option C — Hard</a:t>
-            </a:r>
-          </a:p>
-        </p:txBody>
-      </p:sp>
-      <p:sp>
-        <p:nvSpPr>
-          <p:cNvPr id="22" name="TextBox 21"/>
-          <p:cNvSpPr txBox="1"/>
-          <p:nvPr/>
-        </p:nvSpPr>
-        <p:spPr>
-          <a:xfrm>
-            <a:off x="8458198" y="1645920"/>
-            <a:ext cx="3474719" cy="365760"/>
+              <a:rPr sz="1200" b="1" i="0">
+                <a:solidFill>
+                  <a:srgbClr val="0078C8"/>
+                </a:solidFill>
+              </a:rPr>
+              <a:t>3.</a:t>
+            </a:r>
+          </a:p>
+        </p:txBody>
+      </p:sp>
+      <p:sp>
+        <p:nvSpPr>
+          <p:cNvPr id="39" name="TextBox 38"/>
+          <p:cNvSpPr txBox="1"/>
+          <p:nvPr/>
+        </p:nvSpPr>
+        <p:spPr>
+          <a:xfrm>
+            <a:off x="7543800" y="3044951"/>
+            <a:ext cx="4206240" cy="612647"/>
           </a:xfrm>
           <a:prstGeom prst="rect">
             <a:avLst/>
@@ -5368,104 +5990,36 @@
           <a:p>
             <a:pPr algn="l"/>
             <a:r>
-              <a:rPr sz="1300" b="1" i="0">
-                <a:solidFill>
-                  <a:srgbClr val="0F1E42"/>
-                </a:solidFill>
-              </a:rPr>
-              <a:t>Neural domain adaptation</a:t>
-            </a:r>
-          </a:p>
-        </p:txBody>
-      </p:sp>
-      <p:sp>
-        <p:nvSpPr>
-          <p:cNvPr id="23" name="TextBox 22"/>
-          <p:cNvSpPr txBox="1"/>
-          <p:nvPr/>
-        </p:nvSpPr>
-        <p:spPr>
-          <a:xfrm>
-            <a:off x="8458198" y="2057400"/>
-            <a:ext cx="3474719" cy="731520"/>
-          </a:xfrm>
-          <a:prstGeom prst="rect">
-            <a:avLst/>
-          </a:prstGeom>
-          <a:noFill/>
-        </p:spPr>
-        <p:txBody>
-          <a:bodyPr wrap="square">
-            <a:spAutoFit/>
-          </a:bodyPr>
-          <a:lstStyle/>
-          <a:p>
-            <a:pPr algn="l"/>
-            <a:r>
               <a:rPr sz="1100" b="0" i="0">
                 <a:solidFill>
-                  <a:srgbClr val="50596E"/>
-                </a:solidFill>
-              </a:rPr>
-              <a:t>Replace LightGBM with DANN or CORAL.</a:t>
-            </a:r>
-          </a:p>
-        </p:txBody>
-      </p:sp>
-      <p:sp>
-        <p:nvSpPr>
-          <p:cNvPr id="24" name="TextBox 23"/>
-          <p:cNvSpPr txBox="1"/>
-          <p:nvPr/>
-        </p:nvSpPr>
-        <p:spPr>
-          <a:xfrm>
-            <a:off x="8458198" y="2834640"/>
-            <a:ext cx="3474719" cy="1280160"/>
-          </a:xfrm>
-          <a:prstGeom prst="rect">
-            <a:avLst/>
-          </a:prstGeom>
-          <a:noFill/>
-        </p:spPr>
-        <p:txBody>
-          <a:bodyPr wrap="square">
-            <a:spAutoFit/>
-          </a:bodyPr>
-          <a:lstStyle/>
-          <a:p>
-            <a:pPr algn="l"/>
-            <a:r>
-              <a:rPr sz="1100" b="0" i="1">
-                <a:solidFill>
-                  <a:srgbClr val="50596E"/>
-                </a:solidFill>
-              </a:rPr>
-              <a:t>High complexity — only justified after reaction conditions are added.</a:t>
-            </a:r>
-          </a:p>
-        </p:txBody>
-      </p:sp>
-      <p:sp>
-        <p:nvSpPr>
-          <p:cNvPr id="25" name="Rectangle 24"/>
+                  <a:srgbClr val="1A1A2E"/>
+                </a:solidFill>
+              </a:rPr>
+              <a:t>Add uncertainty (quantile / conformal) for experiment selection</a:t>
+            </a:r>
+          </a:p>
+        </p:txBody>
+      </p:sp>
+      <p:sp>
+        <p:nvSpPr>
+          <p:cNvPr id="40" name="Rectangle 39"/>
           <p:cNvSpPr/>
           <p:nvPr/>
         </p:nvSpPr>
         <p:spPr>
           <a:xfrm>
-            <a:off x="365760" y="4480560"/>
-            <a:ext cx="5669280" cy="1828800"/>
+            <a:off x="7040880" y="3730752"/>
+            <a:ext cx="4846320" cy="658368"/>
           </a:xfrm>
           <a:prstGeom prst="rect">
             <a:avLst/>
           </a:prstGeom>
           <a:solidFill>
-            <a:srgbClr val="F5F5FF"/>
+            <a:srgbClr val="FFFFFF"/>
           </a:solidFill>
           <a:ln w="9525">
             <a:solidFill>
-              <a:srgbClr val="0078C8"/>
+              <a:srgbClr val="D0D5DF"/>
             </a:solidFill>
           </a:ln>
         </p:spPr>
@@ -5493,14 +6047,14 @@
       </p:sp>
       <p:sp>
         <p:nvSpPr>
-          <p:cNvPr id="26" name="TextBox 25"/>
-          <p:cNvSpPr txBox="1"/>
-          <p:nvPr/>
-        </p:nvSpPr>
-        <p:spPr>
-          <a:xfrm>
-            <a:off x="502920" y="4544568"/>
-            <a:ext cx="5394960" cy="365760"/>
+          <p:cNvPr id="41" name="TextBox 40"/>
+          <p:cNvSpPr txBox="1"/>
+          <p:nvPr/>
+        </p:nvSpPr>
+        <p:spPr>
+          <a:xfrm>
+            <a:off x="7132320" y="3776472"/>
+            <a:ext cx="365760" cy="365760"/>
           </a:xfrm>
           <a:prstGeom prst="rect">
             <a:avLst/>
@@ -5515,26 +6069,26 @@
           <a:p>
             <a:pPr algn="l"/>
             <a:r>
-              <a:rPr sz="1300" b="1" i="0">
-                <a:solidFill>
-                  <a:srgbClr val="0F1E42"/>
-                </a:solidFill>
-              </a:rPr>
-              <a:t>Key Limitations</a:t>
-            </a:r>
-          </a:p>
-        </p:txBody>
-      </p:sp>
-      <p:sp>
-        <p:nvSpPr>
-          <p:cNvPr id="27" name="TextBox 26"/>
-          <p:cNvSpPr txBox="1"/>
-          <p:nvPr/>
-        </p:nvSpPr>
-        <p:spPr>
-          <a:xfrm>
-            <a:off x="457200" y="4937760"/>
-            <a:ext cx="5577840" cy="374904"/>
+              <a:rPr sz="1200" b="1" i="0">
+                <a:solidFill>
+                  <a:srgbClr val="0078C8"/>
+                </a:solidFill>
+              </a:rPr>
+              <a:t>4.</a:t>
+            </a:r>
+          </a:p>
+        </p:txBody>
+      </p:sp>
+      <p:sp>
+        <p:nvSpPr>
+          <p:cNvPr id="42" name="TextBox 41"/>
+          <p:cNvSpPr txBox="1"/>
+          <p:nvPr/>
+        </p:nvSpPr>
+        <p:spPr>
+          <a:xfrm>
+            <a:off x="7543800" y="3776472"/>
+            <a:ext cx="4206240" cy="612647"/>
           </a:xfrm>
           <a:prstGeom prst="rect">
             <a:avLst/>
@@ -5551,136 +6105,34 @@
             <a:r>
               <a:rPr sz="1100" b="0" i="0">
                 <a:solidFill>
-                  <a:srgbClr val="50596E"/>
-                </a:solidFill>
-              </a:rPr>
-              <a:t>•  Missing GHSV / CH₄:O₂ / pressure features</a:t>
-            </a:r>
-          </a:p>
-        </p:txBody>
-      </p:sp>
-      <p:sp>
-        <p:nvSpPr>
-          <p:cNvPr id="28" name="TextBox 27"/>
-          <p:cNvSpPr txBox="1"/>
-          <p:nvPr/>
-        </p:nvSpPr>
-        <p:spPr>
-          <a:xfrm>
-            <a:off x="457200" y="5266944"/>
-            <a:ext cx="5577840" cy="374904"/>
-          </a:xfrm>
-          <a:prstGeom prst="rect">
-            <a:avLst/>
-          </a:prstGeom>
-          <a:noFill/>
-        </p:spPr>
-        <p:txBody>
-          <a:bodyPr wrap="square">
-            <a:spAutoFit/>
-          </a:bodyPr>
-          <a:lstStyle/>
-          <a:p>
-            <a:pPr algn="l"/>
-            <a:r>
-              <a:rPr sz="1100" b="0" i="0">
-                <a:solidFill>
-                  <a:srgbClr val="50596E"/>
-                </a:solidFill>
-              </a:rPr>
-              <a:t>•  Literature has 15+ prep methods — coverage uneven</a:t>
-            </a:r>
-          </a:p>
-        </p:txBody>
-      </p:sp>
-      <p:sp>
-        <p:nvSpPr>
-          <p:cNvPr id="29" name="TextBox 28"/>
-          <p:cNvSpPr txBox="1"/>
-          <p:nvPr/>
-        </p:nvSpPr>
-        <p:spPr>
-          <a:xfrm>
-            <a:off x="457200" y="5596128"/>
-            <a:ext cx="5577840" cy="374904"/>
-          </a:xfrm>
-          <a:prstGeom prst="rect">
-            <a:avLst/>
-          </a:prstGeom>
-          <a:noFill/>
-        </p:spPr>
-        <p:txBody>
-          <a:bodyPr wrap="square">
-            <a:spAutoFit/>
-          </a:bodyPr>
-          <a:lstStyle/>
-          <a:p>
-            <a:pPr algn="l"/>
-            <a:r>
-              <a:rPr sz="1100" b="0" i="0">
-                <a:solidFill>
-                  <a:srgbClr val="50596E"/>
-                </a:solidFill>
-              </a:rPr>
-              <a:t>•  Publication bias: only successful experiments published</a:t>
-            </a:r>
-          </a:p>
-        </p:txBody>
-      </p:sp>
-      <p:sp>
-        <p:nvSpPr>
-          <p:cNvPr id="30" name="TextBox 29"/>
-          <p:cNvSpPr txBox="1"/>
-          <p:nvPr/>
-        </p:nvSpPr>
-        <p:spPr>
-          <a:xfrm>
-            <a:off x="457200" y="5925312"/>
-            <a:ext cx="5577840" cy="374904"/>
-          </a:xfrm>
-          <a:prstGeom prst="rect">
-            <a:avLst/>
-          </a:prstGeom>
-          <a:noFill/>
-        </p:spPr>
-        <p:txBody>
-          <a:bodyPr wrap="square">
-            <a:spAutoFit/>
-          </a:bodyPr>
-          <a:lstStyle/>
-          <a:p>
-            <a:pPr algn="l"/>
-            <a:r>
-              <a:rPr sz="1100" b="0" i="0">
-                <a:solidFill>
-                  <a:srgbClr val="50596E"/>
-                </a:solidFill>
-              </a:rPr>
-              <a:t>•  OOD improvement may not generalise to new catalyst families</a:t>
-            </a:r>
-          </a:p>
-        </p:txBody>
-      </p:sp>
-      <p:sp>
-        <p:nvSpPr>
-          <p:cNvPr id="31" name="Rectangle 30"/>
+                  <a:srgbClr val="1A1A2E"/>
+                </a:solidFill>
+              </a:rPr>
+              <a:t>Stack DRST + KMM into the Prior FT pipeline</a:t>
+            </a:r>
+          </a:p>
+        </p:txBody>
+      </p:sp>
+      <p:sp>
+        <p:nvSpPr>
+          <p:cNvPr id="43" name="Rectangle 42"/>
           <p:cNvSpPr/>
           <p:nvPr/>
         </p:nvSpPr>
         <p:spPr>
           <a:xfrm>
-            <a:off x="6217920" y="4480560"/>
-            <a:ext cx="5669280" cy="1828800"/>
+            <a:off x="7040880" y="4462272"/>
+            <a:ext cx="4846320" cy="658368"/>
           </a:xfrm>
           <a:prstGeom prst="rect">
             <a:avLst/>
           </a:prstGeom>
           <a:solidFill>
-            <a:srgbClr val="E8F5E9"/>
+            <a:srgbClr val="FFFFFF"/>
           </a:solidFill>
           <a:ln w="9525">
             <a:solidFill>
-              <a:srgbClr val="10B981"/>
+              <a:srgbClr val="D0D5DF"/>
             </a:solidFill>
           </a:ln>
         </p:spPr>
@@ -5708,14 +6160,14 @@
       </p:sp>
       <p:sp>
         <p:nvSpPr>
-          <p:cNvPr id="32" name="TextBox 31"/>
-          <p:cNvSpPr txBox="1"/>
-          <p:nvPr/>
-        </p:nvSpPr>
-        <p:spPr>
-          <a:xfrm>
-            <a:off x="6355080" y="4544568"/>
-            <a:ext cx="5394960" cy="365760"/>
+          <p:cNvPr id="44" name="TextBox 43"/>
+          <p:cNvSpPr txBox="1"/>
+          <p:nvPr/>
+        </p:nvSpPr>
+        <p:spPr>
+          <a:xfrm>
+            <a:off x="7132320" y="4507992"/>
+            <a:ext cx="365760" cy="365760"/>
           </a:xfrm>
           <a:prstGeom prst="rect">
             <a:avLst/>
@@ -5730,26 +6182,26 @@
           <a:p>
             <a:pPr algn="l"/>
             <a:r>
-              <a:rPr sz="1300" b="1" i="0">
-                <a:solidFill>
-                  <a:srgbClr val="1B5E20"/>
-                </a:solidFill>
-              </a:rPr>
-              <a:t>Recommended Priority</a:t>
-            </a:r>
-          </a:p>
-        </p:txBody>
-      </p:sp>
-      <p:sp>
-        <p:nvSpPr>
-          <p:cNvPr id="33" name="TextBox 32"/>
-          <p:cNvSpPr txBox="1"/>
-          <p:nvPr/>
-        </p:nvSpPr>
-        <p:spPr>
-          <a:xfrm>
-            <a:off x="6309360" y="4937760"/>
-            <a:ext cx="5577840" cy="429768"/>
+              <a:rPr sz="1200" b="1" i="0">
+                <a:solidFill>
+                  <a:srgbClr val="0078C8"/>
+                </a:solidFill>
+              </a:rPr>
+              <a:t>5.</a:t>
+            </a:r>
+          </a:p>
+        </p:txBody>
+      </p:sp>
+      <p:sp>
+        <p:nvSpPr>
+          <p:cNvPr id="45" name="TextBox 44"/>
+          <p:cNvSpPr txBox="1"/>
+          <p:nvPr/>
+        </p:nvSpPr>
+        <p:spPr>
+          <a:xfrm>
+            <a:off x="7543800" y="4507992"/>
+            <a:ext cx="4206240" cy="612647"/>
           </a:xfrm>
           <a:prstGeom prst="rect">
             <a:avLst/>
@@ -5766,24 +6218,69 @@
             <a:r>
               <a:rPr sz="1100" b="0" i="0">
                 <a:solidFill>
-                  <a:srgbClr val="1B5E20"/>
-                </a:solidFill>
-              </a:rPr>
-              <a:t>•  1. Collect GHSV + CH₄/O₂  (highest impact)</a:t>
-            </a:r>
-          </a:p>
-        </p:txBody>
-      </p:sp>
-      <p:sp>
-        <p:nvSpPr>
-          <p:cNvPr id="34" name="TextBox 33"/>
-          <p:cNvSpPr txBox="1"/>
-          <p:nvPr/>
-        </p:nvSpPr>
-        <p:spPr>
-          <a:xfrm>
-            <a:off x="6309360" y="5321808"/>
-            <a:ext cx="5577840" cy="429768"/>
+                  <a:srgbClr val="1A1A2E"/>
+                </a:solidFill>
+              </a:rPr>
+              <a:t>Neural domain adaptation (DANN / CORAL) once features are richer</a:t>
+            </a:r>
+          </a:p>
+        </p:txBody>
+      </p:sp>
+      <p:sp>
+        <p:nvSpPr>
+          <p:cNvPr id="46" name="Rectangle 45"/>
+          <p:cNvSpPr/>
+          <p:nvPr/>
+        </p:nvSpPr>
+        <p:spPr>
+          <a:xfrm>
+            <a:off x="7040880" y="5193792"/>
+            <a:ext cx="4846320" cy="658368"/>
+          </a:xfrm>
+          <a:prstGeom prst="rect">
+            <a:avLst/>
+          </a:prstGeom>
+          <a:solidFill>
+            <a:srgbClr val="FFFFFF"/>
+          </a:solidFill>
+          <a:ln w="9525">
+            <a:solidFill>
+              <a:srgbClr val="D0D5DF"/>
+            </a:solidFill>
+          </a:ln>
+        </p:spPr>
+        <p:style>
+          <a:lnRef idx="1">
+            <a:schemeClr val="accent1"/>
+          </a:lnRef>
+          <a:fillRef idx="3">
+            <a:schemeClr val="accent1"/>
+          </a:fillRef>
+          <a:effectRef idx="2">
+            <a:schemeClr val="accent1"/>
+          </a:effectRef>
+          <a:fontRef idx="minor">
+            <a:schemeClr val="lt1"/>
+          </a:fontRef>
+        </p:style>
+        <p:txBody>
+          <a:bodyPr rtlCol="0" anchor="ctr"/>
+          <a:lstStyle/>
+          <a:p>
+            <a:pPr algn="ctr"/>
+          </a:p>
+        </p:txBody>
+      </p:sp>
+      <p:sp>
+        <p:nvSpPr>
+          <p:cNvPr id="47" name="TextBox 46"/>
+          <p:cNvSpPr txBox="1"/>
+          <p:nvPr/>
+        </p:nvSpPr>
+        <p:spPr>
+          <a:xfrm>
+            <a:off x="7132320" y="5239512"/>
+            <a:ext cx="365760" cy="365760"/>
           </a:xfrm>
           <a:prstGeom prst="rect">
             <a:avLst/>
@@ -5798,46 +6295,46 @@
           <a:p>
             <a:pPr algn="l"/>
             <a:r>
+              <a:rPr sz="1200" b="1" i="0">
+                <a:solidFill>
+                  <a:srgbClr val="0078C8"/>
+                </a:solidFill>
+              </a:rPr>
+              <a:t>6.</a:t>
+            </a:r>
+          </a:p>
+        </p:txBody>
+      </p:sp>
+      <p:sp>
+        <p:nvSpPr>
+          <p:cNvPr id="48" name="TextBox 47"/>
+          <p:cNvSpPr txBox="1"/>
+          <p:nvPr/>
+        </p:nvSpPr>
+        <p:spPr>
+          <a:xfrm>
+            <a:off x="7543800" y="5239512"/>
+            <a:ext cx="4206240" cy="612647"/>
+          </a:xfrm>
+          <a:prstGeom prst="rect">
+            <a:avLst/>
+          </a:prstGeom>
+          <a:noFill/>
+        </p:spPr>
+        <p:txBody>
+          <a:bodyPr wrap="square">
+            <a:spAutoFit/>
+          </a:bodyPr>
+          <a:lstStyle/>
+          <a:p>
+            <a:pPr algn="l"/>
+            <a:r>
               <a:rPr sz="1100" b="0" i="0">
                 <a:solidFill>
-                  <a:srgbClr val="1B5E20"/>
-                </a:solidFill>
-              </a:rPr>
-              <a:t>•  2. Re-run Prior FT with expanded features</a:t>
-            </a:r>
-          </a:p>
-        </p:txBody>
-      </p:sp>
-      <p:sp>
-        <p:nvSpPr>
-          <p:cNvPr id="35" name="TextBox 34"/>
-          <p:cNvSpPr txBox="1"/>
-          <p:nvPr/>
-        </p:nvSpPr>
-        <p:spPr>
-          <a:xfrm>
-            <a:off x="6309360" y="5705856"/>
-            <a:ext cx="5577840" cy="429768"/>
-          </a:xfrm>
-          <a:prstGeom prst="rect">
-            <a:avLst/>
-          </a:prstGeom>
-          <a:noFill/>
-        </p:spPr>
-        <p:txBody>
-          <a:bodyPr wrap="square">
-            <a:spAutoFit/>
-          </a:bodyPr>
-          <a:lstStyle/>
-          <a:p>
-            <a:pPr algn="l"/>
-            <a:r>
-              <a:rPr sz="1100" b="0" i="0">
-                <a:solidFill>
-                  <a:srgbClr val="1B5E20"/>
-                </a:solidFill>
-              </a:rPr>
-              <a:t>•  3. Revisit τ tuning with updated data</a:t>
+                  <a:srgbClr val="1A1A2E"/>
+                </a:solidFill>
+              </a:rPr>
+              <a:t>Close the active-learning loop: propose → measure → retrain</a:t>
             </a:r>
           </a:p>
         </p:txBody>
@@ -7732,7 +8229,7 @@
                   <a:srgbClr val="50596E"/>
                 </a:solidFill>
               </a:rPr>
-              <a:t>Literature mean is 3.42 pp higher (t = −32.2, p &lt; 10⁻²⁰⁰) — systematic offset from publication bias and optimised conditions (Fanelli, 2012).</a:t>
+              <a:t>Literature mean is 3.42 pp higher (t = −32.2, p &lt; 10⁻²⁰⁰) — a systematic offset from publication bias and optimised conditions.</a:t>
             </a:r>
           </a:p>
         </p:txBody>
@@ -7843,7 +8340,7 @@
                   <a:srgbClr val="50596E"/>
                 </a:solidFill>
               </a:rPr>
-              <a:t>78.5% of literature samples describe chemistry our lab has never tested (Pan &amp; Yang, 2010, IEEE TKDE).</a:t>
+              <a:t>78.5% of literature samples describe chemistry our lab has never tested.</a:t>
             </a:r>
           </a:p>
         </p:txBody>
@@ -8033,7 +8530,7 @@
                   <a:srgbClr val="50596E"/>
                 </a:solidFill>
               </a:rPr>
-              <a:t>Why ML? The catalyst search space (65 elements × varying loadings × temperature) is too large to screen physically. A surrogate model guides experiments toward high-yield compositions (Lookman et al., 2019, npj Comput. Mater.).</a:t>
+              <a:t>Why ML? The catalyst search space (65 elements × varying loadings × temperature) is too large to screen physically. A surrogate model guides experiments toward high-yield compositions.</a:t>
             </a:r>
           </a:p>
         </p:txBody>
@@ -11240,8 +11737,7 @@
                   <a:srgbClr val="6B3A00"/>
                 </a:solidFill>
               </a:rPr>
-              <a:t>The 3.42 pp offset is a SYSTEMATIC signal the model cannot account for — and incorrectly tries to fit.
-Ben-David et al. (2010, Mach. Learn.): when source and target distributions differ significantly, naive combination can perform WORSE than target-only training.
+              <a:t>The 3.42 pp offset is a SYSTEMATIC signal the model cannot account for — and incorrectly tries to fit. Mixing the two datasets can perform WORSE than using ours alone.
 ⇒ We need to be much more selective.</a:t>
             </a:r>
           </a:p>
@@ -11773,7 +12269,7 @@
                   <a:srgbClr val="50596E"/>
                 </a:solidFill>
               </a:rPr>
-              <a:t>Logistic regression = finds a hyperplane in 67-dimensional feature space that best separates our samples from literature. Ref: Huang et al. (2006, NeurIPS); Sugiyama et al. (2007, JMLR).</a:t>
+              <a:t>The classifier's confidence P(ours | x) is a similarity score: high = looks like our chemistry, low = foreign. We keep only literature scoring above τ.</a:t>
             </a:r>
           </a:p>
         </p:txBody>
@@ -13150,7 +13646,7 @@
                   <a:srgbClr val="50596E"/>
                 </a:solidFill>
               </a:rPr>
-              <a:t>RBF kernel = chemical similarity based on distance in element-composition space. Ref: Huang et al. (2006, NeurIPS); Gretton et al. (2009, Dataset Shift in ML).</a:t>
+              <a:t>KMM picks weights so the weighted literature cloud matches our data cloud. Samples inside our chemistry earn weight; those outside fade to zero.</a:t>
             </a:r>
           </a:p>
         </p:txBody>
@@ -15083,7 +15579,7 @@
                   <a:srgbClr val="0F1E42"/>
                 </a:solidFill>
               </a:rPr>
-              <a:t>Key property — feature-based transfer learning  (Pan &amp; Yang, 2010, IEEE TKDE)</a:t>
+              <a:t>Key property — literature enters as a feature, not a label</a:t>
             </a:r>
           </a:p>
         </p:txBody>
@@ -15117,7 +15613,7 @@
                   <a:srgbClr val="50596E"/>
                 </a:solidFill>
               </a:rPr>
-              <a:t>Stage 2 NEVER sees literature labels. The 3.42 pp offset affects the VALUE of the 68th feature — which Stage 2 can calibrate: "when expert says X, my lab gets ~X − 3.4". It does NOT corrupt the training loss (which it could not fix). Stage 1 uses XGBoost (Chen &amp; Guestrin, 2016) for conservative behaviour on 782 samples; Stage 2 uses LightGBM (Ke et al., 2017) for efficiency on 89,074 rows.</a:t>
+              <a:t>Stage 2 NEVER sees literature labels. The 3.42 pp offset affects the VALUE of the 68th feature — which Stage 2 can calibrate: "when the expert says 8, my lab gets ~4.5". It does NOT corrupt the training loss, which it could not fix. A corrupted label can't be un-corrupted; a feature value is just another thing to learn around. Stage 1 uses XGBoost (conservative on 782 rows); Stage 2 uses LightGBM (fast on 89,074 rows).</a:t>
             </a:r>
           </a:p>
         </p:txBody>

--- a/ocm_presentation.pptx
+++ b/ocm_presentation.pptx
@@ -17,6 +17,7 @@
     <p:sldId id="265" r:id="rId16"/>
     <p:sldId id="266" r:id="rId17"/>
     <p:sldId id="267" r:id="rId18"/>
+    <p:sldId id="268" r:id="rId19"/>
   </p:sldIdLst>
   <p:sldSz cx="12188952" cy="6858000" type="screen4x3"/>
   <p:notesSz cx="6858000" cy="9144000"/>
@@ -3471,7 +3472,7 @@
                   <a:srgbClr val="CCCCCC"/>
                 </a:solidFill>
               </a:rPr>
-              <a:t>OCM Dataset Integration   |   Slide 1 / 12</a:t>
+              <a:t>OCM Dataset Integration   |   Slide 1 / 13</a:t>
             </a:r>
           </a:p>
         </p:txBody>
@@ -3546,7 +3547,7 @@
         <p:spPr>
           <a:xfrm>
             <a:off x="0" y="0"/>
-            <a:ext cx="12188952" cy="868680"/>
+            <a:ext cx="12188952" cy="1097280"/>
           </a:xfrm>
           <a:prstGeom prst="rect">
             <a:avLst/>
@@ -3616,7 +3617,41 @@
       </p:sp>
       <p:sp>
         <p:nvSpPr>
-          <p:cNvPr id="5" name="Rectangle 4"/>
+          <p:cNvPr id="5" name="TextBox 4"/>
+          <p:cNvSpPr txBox="1"/>
+          <p:nvPr/>
+        </p:nvSpPr>
+        <p:spPr>
+          <a:xfrm>
+            <a:off x="365760" y="658368"/>
+            <a:ext cx="11457432" cy="365760"/>
+          </a:xfrm>
+          <a:prstGeom prst="rect">
+            <a:avLst/>
+          </a:prstGeom>
+          <a:noFill/>
+        </p:spPr>
+        <p:txBody>
+          <a:bodyPr wrap="square">
+            <a:spAutoFit/>
+          </a:bodyPr>
+          <a:lstStyle/>
+          <a:p>
+            <a:pPr algn="l"/>
+            <a:r>
+              <a:rPr sz="1100" b="0" i="1">
+                <a:solidFill>
+                  <a:srgbClr val="BBCCEE"/>
+                </a:solidFill>
+              </a:rPr>
+              <a:t>Chapter 8</a:t>
+            </a:r>
+          </a:p>
+        </p:txBody>
+      </p:sp>
+      <p:sp>
+        <p:nvSpPr>
+          <p:cNvPr id="6" name="Rectangle 5"/>
           <p:cNvSpPr/>
           <p:nvPr/>
         </p:nvSpPr>
@@ -3659,7 +3694,7 @@
       </p:sp>
       <p:sp>
         <p:nvSpPr>
-          <p:cNvPr id="6" name="TextBox 5"/>
+          <p:cNvPr id="7" name="TextBox 6"/>
           <p:cNvSpPr txBox="1"/>
           <p:nvPr/>
         </p:nvSpPr>
@@ -3686,14 +3721,14 @@
                   <a:srgbClr val="CCCCCC"/>
                 </a:solidFill>
               </a:rPr>
-              <a:t>OCM Dataset Integration   |   Slide 10 / 12</a:t>
+              <a:t>OCM Dataset Integration   |   Slide 10 / 13</a:t>
             </a:r>
           </a:p>
         </p:txBody>
       </p:sp>
       <p:pic>
         <p:nvPicPr>
-          <p:cNvPr id="7" name="Picture 6" descr="fig_shap_beeswarm.png"/>
+          <p:cNvPr id="8" name="Picture 7" descr="fig_shap_beeswarm.png"/>
           <p:cNvPicPr>
             <a:picLocks noChangeAspect="1"/>
           </p:cNvPicPr>
@@ -3717,7 +3752,7 @@
       </p:pic>
       <p:sp>
         <p:nvSpPr>
-          <p:cNvPr id="8" name="Rectangle 7"/>
+          <p:cNvPr id="9" name="Rectangle 8"/>
           <p:cNvSpPr/>
           <p:nvPr/>
         </p:nvSpPr>
@@ -3760,7 +3795,7 @@
       </p:sp>
       <p:sp>
         <p:nvSpPr>
-          <p:cNvPr id="9" name="TextBox 8"/>
+          <p:cNvPr id="10" name="TextBox 9"/>
           <p:cNvSpPr txBox="1"/>
           <p:nvPr/>
         </p:nvSpPr>
@@ -3794,7 +3829,7 @@
       </p:sp>
       <p:sp>
         <p:nvSpPr>
-          <p:cNvPr id="10" name="TextBox 9"/>
+          <p:cNvPr id="11" name="TextBox 10"/>
           <p:cNvSpPr txBox="1"/>
           <p:nvPr/>
         </p:nvSpPr>
@@ -3828,7 +3863,7 @@
       </p:sp>
       <p:sp>
         <p:nvSpPr>
-          <p:cNvPr id="11" name="TextBox 10"/>
+          <p:cNvPr id="12" name="TextBox 11"/>
           <p:cNvSpPr txBox="1"/>
           <p:nvPr/>
         </p:nvSpPr>
@@ -3862,7 +3897,7 @@
       </p:sp>
       <p:sp>
         <p:nvSpPr>
-          <p:cNvPr id="12" name="TextBox 11"/>
+          <p:cNvPr id="13" name="TextBox 12"/>
           <p:cNvSpPr txBox="1"/>
           <p:nvPr/>
         </p:nvSpPr>
@@ -3896,7 +3931,7 @@
       </p:sp>
       <p:sp>
         <p:nvSpPr>
-          <p:cNvPr id="13" name="TextBox 12"/>
+          <p:cNvPr id="14" name="TextBox 13"/>
           <p:cNvSpPr txBox="1"/>
           <p:nvPr/>
         </p:nvSpPr>
@@ -3930,7 +3965,7 @@
       </p:sp>
       <p:sp>
         <p:nvSpPr>
-          <p:cNvPr id="14" name="TextBox 13"/>
+          <p:cNvPr id="15" name="TextBox 14"/>
           <p:cNvSpPr txBox="1"/>
           <p:nvPr/>
         </p:nvSpPr>
@@ -3964,7 +3999,7 @@
       </p:sp>
       <p:sp>
         <p:nvSpPr>
-          <p:cNvPr id="15" name="Rectangle 14"/>
+          <p:cNvPr id="16" name="Rectangle 15"/>
           <p:cNvSpPr/>
           <p:nvPr/>
         </p:nvSpPr>
@@ -4007,7 +4042,7 @@
       </p:sp>
       <p:sp>
         <p:nvSpPr>
-          <p:cNvPr id="16" name="TextBox 15"/>
+          <p:cNvPr id="17" name="TextBox 16"/>
           <p:cNvSpPr txBox="1"/>
           <p:nvPr/>
         </p:nvSpPr>
@@ -4041,7 +4076,7 @@
       </p:sp>
       <p:sp>
         <p:nvSpPr>
-          <p:cNvPr id="17" name="TextBox 16"/>
+          <p:cNvPr id="18" name="TextBox 17"/>
           <p:cNvSpPr txBox="1"/>
           <p:nvPr/>
         </p:nvSpPr>
@@ -4075,7 +4110,7 @@
       </p:sp>
       <p:sp>
         <p:nvSpPr>
-          <p:cNvPr id="18" name="Rectangle 17"/>
+          <p:cNvPr id="19" name="Rectangle 18"/>
           <p:cNvSpPr/>
           <p:nvPr/>
         </p:nvSpPr>
@@ -4120,7 +4155,7 @@
       </p:sp>
       <p:sp>
         <p:nvSpPr>
-          <p:cNvPr id="19" name="TextBox 18"/>
+          <p:cNvPr id="20" name="TextBox 19"/>
           <p:cNvSpPr txBox="1"/>
           <p:nvPr/>
         </p:nvSpPr>
@@ -4154,7 +4189,7 @@
       </p:sp>
       <p:sp>
         <p:nvSpPr>
-          <p:cNvPr id="20" name="TextBox 19"/>
+          <p:cNvPr id="21" name="TextBox 20"/>
           <p:cNvSpPr txBox="1"/>
           <p:nvPr/>
         </p:nvSpPr>
@@ -4188,7 +4223,7 @@
       </p:sp>
       <p:sp>
         <p:nvSpPr>
-          <p:cNvPr id="21" name="Rectangle 20"/>
+          <p:cNvPr id="22" name="Rectangle 21"/>
           <p:cNvSpPr/>
           <p:nvPr/>
         </p:nvSpPr>
@@ -4233,7 +4268,7 @@
       </p:sp>
       <p:sp>
         <p:nvSpPr>
-          <p:cNvPr id="22" name="TextBox 21"/>
+          <p:cNvPr id="23" name="TextBox 22"/>
           <p:cNvSpPr txBox="1"/>
           <p:nvPr/>
         </p:nvSpPr>
@@ -4267,7 +4302,7 @@
       </p:sp>
       <p:sp>
         <p:nvSpPr>
-          <p:cNvPr id="23" name="TextBox 22"/>
+          <p:cNvPr id="24" name="TextBox 23"/>
           <p:cNvSpPr txBox="1"/>
           <p:nvPr/>
         </p:nvSpPr>
@@ -4301,7 +4336,7 @@
       </p:sp>
       <p:sp>
         <p:nvSpPr>
-          <p:cNvPr id="24" name="Rectangle 23"/>
+          <p:cNvPr id="25" name="Rectangle 24"/>
           <p:cNvSpPr/>
           <p:nvPr/>
         </p:nvSpPr>
@@ -4346,7 +4381,7 @@
       </p:sp>
       <p:sp>
         <p:nvSpPr>
-          <p:cNvPr id="25" name="TextBox 24"/>
+          <p:cNvPr id="26" name="TextBox 25"/>
           <p:cNvSpPr txBox="1"/>
           <p:nvPr/>
         </p:nvSpPr>
@@ -4380,7 +4415,7 @@
       </p:sp>
       <p:sp>
         <p:nvSpPr>
-          <p:cNvPr id="26" name="TextBox 25"/>
+          <p:cNvPr id="27" name="TextBox 26"/>
           <p:cNvSpPr txBox="1"/>
           <p:nvPr/>
         </p:nvSpPr>
@@ -4414,7 +4449,7 @@
       </p:sp>
       <p:sp>
         <p:nvSpPr>
-          <p:cNvPr id="27" name="Rectangle 26"/>
+          <p:cNvPr id="28" name="Rectangle 27"/>
           <p:cNvSpPr/>
           <p:nvPr/>
         </p:nvSpPr>
@@ -4459,7 +4494,7 @@
       </p:sp>
       <p:sp>
         <p:nvSpPr>
-          <p:cNvPr id="28" name="TextBox 27"/>
+          <p:cNvPr id="29" name="TextBox 28"/>
           <p:cNvSpPr txBox="1"/>
           <p:nvPr/>
         </p:nvSpPr>
@@ -4493,7 +4528,7 @@
       </p:sp>
       <p:sp>
         <p:nvSpPr>
-          <p:cNvPr id="29" name="TextBox 28"/>
+          <p:cNvPr id="30" name="TextBox 29"/>
           <p:cNvSpPr txBox="1"/>
           <p:nvPr/>
         </p:nvSpPr>
@@ -4527,7 +4562,7 @@
       </p:sp>
       <p:sp>
         <p:nvSpPr>
-          <p:cNvPr id="30" name="TextBox 29"/>
+          <p:cNvPr id="31" name="TextBox 30"/>
           <p:cNvSpPr txBox="1"/>
           <p:nvPr/>
         </p:nvSpPr>
@@ -4629,7 +4664,7 @@
         <p:spPr>
           <a:xfrm>
             <a:off x="0" y="0"/>
-            <a:ext cx="12188952" cy="868680"/>
+            <a:ext cx="12188952" cy="1097280"/>
           </a:xfrm>
           <a:prstGeom prst="rect">
             <a:avLst/>
@@ -4692,14 +4727,48 @@
                   <a:srgbClr val="FFFFFF"/>
                 </a:solidFill>
               </a:rPr>
-              <a:t>Critical Analysis &amp; Next Steps</a:t>
-            </a:r>
-          </a:p>
-        </p:txBody>
-      </p:sp>
-      <p:sp>
-        <p:nvSpPr>
-          <p:cNvPr id="5" name="Rectangle 4"/>
+              <a:t>Critical Analysis — Per-Method Review</a:t>
+            </a:r>
+          </a:p>
+        </p:txBody>
+      </p:sp>
+      <p:sp>
+        <p:nvSpPr>
+          <p:cNvPr id="5" name="TextBox 4"/>
+          <p:cNvSpPr txBox="1"/>
+          <p:nvPr/>
+        </p:nvSpPr>
+        <p:spPr>
+          <a:xfrm>
+            <a:off x="365760" y="658368"/>
+            <a:ext cx="11457432" cy="365760"/>
+          </a:xfrm>
+          <a:prstGeom prst="rect">
+            <a:avLst/>
+          </a:prstGeom>
+          <a:noFill/>
+        </p:spPr>
+        <p:txBody>
+          <a:bodyPr wrap="square">
+            <a:spAutoFit/>
+          </a:bodyPr>
+          <a:lstStyle/>
+          <a:p>
+            <a:pPr algn="l"/>
+            <a:r>
+              <a:rPr sz="1100" b="0" i="1">
+                <a:solidFill>
+                  <a:srgbClr val="BBCCEE"/>
+                </a:solidFill>
+              </a:rPr>
+              <a:t>Chapter 9</a:t>
+            </a:r>
+          </a:p>
+        </p:txBody>
+      </p:sp>
+      <p:sp>
+        <p:nvSpPr>
+          <p:cNvPr id="6" name="Rectangle 5"/>
           <p:cNvSpPr/>
           <p:nvPr/>
         </p:nvSpPr>
@@ -4742,7 +4811,7 @@
       </p:sp>
       <p:sp>
         <p:nvSpPr>
-          <p:cNvPr id="6" name="TextBox 5"/>
+          <p:cNvPr id="7" name="TextBox 6"/>
           <p:cNvSpPr txBox="1"/>
           <p:nvPr/>
         </p:nvSpPr>
@@ -4769,20 +4838,20 @@
                   <a:srgbClr val="CCCCCC"/>
                 </a:solidFill>
               </a:rPr>
-              <a:t>OCM Dataset Integration   |   Slide 11 / 12</a:t>
-            </a:r>
-          </a:p>
-        </p:txBody>
-      </p:sp>
-      <p:sp>
-        <p:nvSpPr>
-          <p:cNvPr id="7" name="TextBox 6"/>
-          <p:cNvSpPr txBox="1"/>
-          <p:nvPr/>
-        </p:nvSpPr>
-        <p:spPr>
-          <a:xfrm>
-            <a:off x="365760" y="1097280"/>
+              <a:t>OCM Dataset Integration   |   Slide 11 / 13</a:t>
+            </a:r>
+          </a:p>
+        </p:txBody>
+      </p:sp>
+      <p:sp>
+        <p:nvSpPr>
+          <p:cNvPr id="8" name="TextBox 7"/>
+          <p:cNvSpPr txBox="1"/>
+          <p:nvPr/>
+        </p:nvSpPr>
+        <p:spPr>
+          <a:xfrm>
+            <a:off x="365760" y="1234440"/>
             <a:ext cx="6400800" cy="365760"/>
           </a:xfrm>
           <a:prstGeom prst="rect">
@@ -4810,13 +4879,13 @@
       </p:sp>
       <p:sp>
         <p:nvSpPr>
-          <p:cNvPr id="8" name="Rectangle 7"/>
+          <p:cNvPr id="9" name="Rectangle 8"/>
           <p:cNvSpPr/>
           <p:nvPr/>
         </p:nvSpPr>
         <p:spPr>
           <a:xfrm>
-            <a:off x="365760" y="1508760"/>
+            <a:off x="365760" y="1664208"/>
             <a:ext cx="6400800" cy="365760"/>
           </a:xfrm>
           <a:prstGeom prst="rect">
@@ -4853,13 +4922,13 @@
       </p:sp>
       <p:sp>
         <p:nvSpPr>
-          <p:cNvPr id="9" name="TextBox 8"/>
-          <p:cNvSpPr txBox="1"/>
-          <p:nvPr/>
-        </p:nvSpPr>
-        <p:spPr>
-          <a:xfrm>
-            <a:off x="457200" y="1536192"/>
+          <p:cNvPr id="10" name="TextBox 9"/>
+          <p:cNvSpPr txBox="1"/>
+          <p:nvPr/>
+        </p:nvSpPr>
+        <p:spPr>
+          <a:xfrm>
+            <a:off x="457200" y="1691640"/>
             <a:ext cx="1645920" cy="310896"/>
           </a:xfrm>
           <a:prstGeom prst="rect">
@@ -4887,14 +4956,14 @@
       </p:sp>
       <p:sp>
         <p:nvSpPr>
-          <p:cNvPr id="10" name="TextBox 9"/>
-          <p:cNvSpPr txBox="1"/>
-          <p:nvPr/>
-        </p:nvSpPr>
-        <p:spPr>
-          <a:xfrm>
-            <a:off x="2103120" y="1536192"/>
-            <a:ext cx="4572000" cy="310896"/>
+          <p:cNvPr id="11" name="TextBox 10"/>
+          <p:cNvSpPr txBox="1"/>
+          <p:nvPr/>
+        </p:nvSpPr>
+        <p:spPr>
+          <a:xfrm>
+            <a:off x="2148840" y="1691640"/>
+            <a:ext cx="4480560" cy="310896"/>
           </a:xfrm>
           <a:prstGeom prst="rect">
             <a:avLst/>
@@ -4921,14 +4990,14 @@
       </p:sp>
       <p:sp>
         <p:nvSpPr>
-          <p:cNvPr id="11" name="Rectangle 10"/>
+          <p:cNvPr id="12" name="Rectangle 11"/>
           <p:cNvSpPr/>
           <p:nvPr/>
         </p:nvSpPr>
         <p:spPr>
           <a:xfrm>
-            <a:off x="365760" y="1874519"/>
-            <a:ext cx="6400800" cy="457200"/>
+            <a:off x="365760" y="2029968"/>
+            <a:ext cx="6400800" cy="530352"/>
           </a:xfrm>
           <a:prstGeom prst="rect">
             <a:avLst/>
@@ -4966,14 +5035,14 @@
       </p:sp>
       <p:sp>
         <p:nvSpPr>
-          <p:cNvPr id="12" name="TextBox 11"/>
-          <p:cNvSpPr txBox="1"/>
-          <p:nvPr/>
-        </p:nvSpPr>
-        <p:spPr>
-          <a:xfrm>
-            <a:off x="457200" y="1911095"/>
-            <a:ext cx="1645920" cy="457200"/>
+          <p:cNvPr id="13" name="TextBox 12"/>
+          <p:cNvSpPr txBox="1"/>
+          <p:nvPr/>
+        </p:nvSpPr>
+        <p:spPr>
+          <a:xfrm>
+            <a:off x="457200" y="2075688"/>
+            <a:ext cx="1645920" cy="457199"/>
           </a:xfrm>
           <a:prstGeom prst="rect">
             <a:avLst/>
@@ -5000,14 +5069,14 @@
       </p:sp>
       <p:sp>
         <p:nvSpPr>
-          <p:cNvPr id="13" name="TextBox 12"/>
-          <p:cNvSpPr txBox="1"/>
-          <p:nvPr/>
-        </p:nvSpPr>
-        <p:spPr>
-          <a:xfrm>
-            <a:off x="2103120" y="1911095"/>
-            <a:ext cx="4572000" cy="411480"/>
+          <p:cNvPr id="14" name="TextBox 13"/>
+          <p:cNvSpPr txBox="1"/>
+          <p:nvPr/>
+        </p:nvSpPr>
+        <p:spPr>
+          <a:xfrm>
+            <a:off x="2148840" y="2075688"/>
+            <a:ext cx="4480560" cy="457199"/>
           </a:xfrm>
           <a:prstGeom prst="rect">
             <a:avLst/>
@@ -5027,21 +5096,21 @@
                   <a:srgbClr val="50596E"/>
                 </a:solidFill>
               </a:rPr>
-              <a:t>Negative control only — harms the model</a:t>
-            </a:r>
-          </a:p>
-        </p:txBody>
-      </p:sp>
-      <p:sp>
-        <p:nvSpPr>
-          <p:cNvPr id="14" name="Rectangle 13"/>
+              <a:t>Negative control — makes the model worse</a:t>
+            </a:r>
+          </a:p>
+        </p:txBody>
+      </p:sp>
+      <p:sp>
+        <p:nvSpPr>
+          <p:cNvPr id="15" name="Rectangle 14"/>
           <p:cNvSpPr/>
           <p:nvPr/>
         </p:nvSpPr>
         <p:spPr>
           <a:xfrm>
-            <a:off x="365760" y="2377439"/>
-            <a:ext cx="6400800" cy="566928"/>
+            <a:off x="365760" y="2596896"/>
+            <a:ext cx="6400800" cy="530352"/>
           </a:xfrm>
           <a:prstGeom prst="rect">
             <a:avLst/>
@@ -5079,14 +5148,14 @@
       </p:sp>
       <p:sp>
         <p:nvSpPr>
-          <p:cNvPr id="15" name="TextBox 14"/>
-          <p:cNvSpPr txBox="1"/>
-          <p:nvPr/>
-        </p:nvSpPr>
-        <p:spPr>
-          <a:xfrm>
-            <a:off x="457200" y="2414015"/>
-            <a:ext cx="1645920" cy="457200"/>
+          <p:cNvPr id="16" name="TextBox 15"/>
+          <p:cNvSpPr txBox="1"/>
+          <p:nvPr/>
+        </p:nvSpPr>
+        <p:spPr>
+          <a:xfrm>
+            <a:off x="457200" y="2642616"/>
+            <a:ext cx="1645920" cy="457199"/>
           </a:xfrm>
           <a:prstGeom prst="rect">
             <a:avLst/>
@@ -5113,14 +5182,14 @@
       </p:sp>
       <p:sp>
         <p:nvSpPr>
-          <p:cNvPr id="16" name="TextBox 15"/>
-          <p:cNvSpPr txBox="1"/>
-          <p:nvPr/>
-        </p:nvSpPr>
-        <p:spPr>
-          <a:xfrm>
-            <a:off x="2103120" y="2414015"/>
-            <a:ext cx="4572000" cy="521207"/>
+          <p:cNvPr id="17" name="TextBox 16"/>
+          <p:cNvSpPr txBox="1"/>
+          <p:nvPr/>
+        </p:nvSpPr>
+        <p:spPr>
+          <a:xfrm>
+            <a:off x="2148840" y="2642616"/>
+            <a:ext cx="4480560" cy="457199"/>
           </a:xfrm>
           <a:prstGeom prst="rect">
             <a:avLst/>
@@ -5140,21 +5209,21 @@
                   <a:srgbClr val="50596E"/>
                 </a:solidFill>
               </a:rPr>
-              <a:t>Hard cliff; discards ~80% of lit; τ tuned on the reported CV</a:t>
-            </a:r>
-          </a:p>
-        </p:txBody>
-      </p:sp>
-      <p:sp>
-        <p:nvSpPr>
-          <p:cNvPr id="17" name="Rectangle 16"/>
+              <a:t>Hard cliff; discards ~80%; τ tuned on the reported CV</a:t>
+            </a:r>
+          </a:p>
+        </p:txBody>
+      </p:sp>
+      <p:sp>
+        <p:nvSpPr>
+          <p:cNvPr id="18" name="Rectangle 17"/>
           <p:cNvSpPr/>
           <p:nvPr/>
         </p:nvSpPr>
         <p:spPr>
           <a:xfrm>
-            <a:off x="365760" y="2990087"/>
-            <a:ext cx="6400800" cy="566928"/>
+            <a:off x="365760" y="3163824"/>
+            <a:ext cx="6400800" cy="530352"/>
           </a:xfrm>
           <a:prstGeom prst="rect">
             <a:avLst/>
@@ -5192,14 +5261,14 @@
       </p:sp>
       <p:sp>
         <p:nvSpPr>
-          <p:cNvPr id="18" name="TextBox 17"/>
-          <p:cNvSpPr txBox="1"/>
-          <p:nvPr/>
-        </p:nvSpPr>
-        <p:spPr>
-          <a:xfrm>
-            <a:off x="457200" y="3026663"/>
-            <a:ext cx="1645920" cy="457200"/>
+          <p:cNvPr id="19" name="TextBox 18"/>
+          <p:cNvSpPr txBox="1"/>
+          <p:nvPr/>
+        </p:nvSpPr>
+        <p:spPr>
+          <a:xfrm>
+            <a:off x="457200" y="3209544"/>
+            <a:ext cx="1645920" cy="457199"/>
           </a:xfrm>
           <a:prstGeom prst="rect">
             <a:avLst/>
@@ -5226,14 +5295,14 @@
       </p:sp>
       <p:sp>
         <p:nvSpPr>
-          <p:cNvPr id="19" name="TextBox 18"/>
-          <p:cNvSpPr txBox="1"/>
-          <p:nvPr/>
-        </p:nvSpPr>
-        <p:spPr>
-          <a:xfrm>
-            <a:off x="2103120" y="3026663"/>
-            <a:ext cx="4572000" cy="521207"/>
+          <p:cNvPr id="20" name="TextBox 19"/>
+          <p:cNvSpPr txBox="1"/>
+          <p:nvPr/>
+        </p:nvSpPr>
+        <p:spPr>
+          <a:xfrm>
+            <a:off x="2148840" y="3209544"/>
+            <a:ext cx="4480560" cy="457199"/>
           </a:xfrm>
           <a:prstGeom prst="rect">
             <a:avLst/>
@@ -5253,21 +5322,21 @@
                   <a:srgbClr val="50596E"/>
                 </a:solidFill>
               </a:rPr>
-              <a:t>Slow n×n kernel; σ-sensitive; still uses labels; ties DRST</a:t>
-            </a:r>
-          </a:p>
-        </p:txBody>
-      </p:sp>
-      <p:sp>
-        <p:nvSpPr>
-          <p:cNvPr id="20" name="Rectangle 19"/>
+              <a:t>O(n²) kernel; σ-sensitive; labels still in loss; ties DRST</a:t>
+            </a:r>
+          </a:p>
+        </p:txBody>
+      </p:sp>
+      <p:sp>
+        <p:nvSpPr>
+          <p:cNvPr id="21" name="Rectangle 20"/>
           <p:cNvSpPr/>
           <p:nvPr/>
         </p:nvSpPr>
         <p:spPr>
           <a:xfrm>
-            <a:off x="365760" y="3602735"/>
-            <a:ext cx="6400800" cy="566928"/>
+            <a:off x="365760" y="3730752"/>
+            <a:ext cx="6400800" cy="530352"/>
           </a:xfrm>
           <a:prstGeom prst="rect">
             <a:avLst/>
@@ -5305,14 +5374,14 @@
       </p:sp>
       <p:sp>
         <p:nvSpPr>
-          <p:cNvPr id="21" name="TextBox 20"/>
-          <p:cNvSpPr txBox="1"/>
-          <p:nvPr/>
-        </p:nvSpPr>
-        <p:spPr>
-          <a:xfrm>
-            <a:off x="457200" y="3639311"/>
-            <a:ext cx="1645920" cy="457200"/>
+          <p:cNvPr id="22" name="TextBox 21"/>
+          <p:cNvSpPr txBox="1"/>
+          <p:nvPr/>
+        </p:nvSpPr>
+        <p:spPr>
+          <a:xfrm>
+            <a:off x="457200" y="3776472"/>
+            <a:ext cx="1645920" cy="457199"/>
           </a:xfrm>
           <a:prstGeom prst="rect">
             <a:avLst/>
@@ -5339,14 +5408,14 @@
       </p:sp>
       <p:sp>
         <p:nvSpPr>
-          <p:cNvPr id="22" name="TextBox 21"/>
-          <p:cNvSpPr txBox="1"/>
-          <p:nvPr/>
-        </p:nvSpPr>
-        <p:spPr>
-          <a:xfrm>
-            <a:off x="2103120" y="3639311"/>
-            <a:ext cx="4572000" cy="521207"/>
+          <p:cNvPr id="23" name="TextBox 22"/>
+          <p:cNvSpPr txBox="1"/>
+          <p:nvPr/>
+        </p:nvSpPr>
+        <p:spPr>
+          <a:xfrm>
+            <a:off x="2148840" y="3776472"/>
+            <a:ext cx="4480560" cy="457199"/>
           </a:xfrm>
           <a:prstGeom prst="rect">
             <a:avLst/>
@@ -5366,163 +5435,27 @@
                   <a:srgbClr val="1B5E20"/>
                 </a:solidFill>
               </a:rPr>
-              <a:t>Best — but Stage-1 on 782 rows → high variance; two models</a:t>
-            </a:r>
-          </a:p>
-        </p:txBody>
-      </p:sp>
-      <p:sp>
-        <p:nvSpPr>
-          <p:cNvPr id="23" name="TextBox 22"/>
-          <p:cNvSpPr txBox="1"/>
-          <p:nvPr/>
-        </p:nvSpPr>
-        <p:spPr>
-          <a:xfrm>
-            <a:off x="365760" y="4261103"/>
-            <a:ext cx="6400800" cy="365760"/>
-          </a:xfrm>
-          <a:prstGeom prst="rect">
-            <a:avLst/>
-          </a:prstGeom>
-          <a:noFill/>
-        </p:spPr>
-        <p:txBody>
-          <a:bodyPr wrap="square">
-            <a:spAutoFit/>
-          </a:bodyPr>
-          <a:lstStyle/>
-          <a:p>
-            <a:pPr algn="l"/>
-            <a:r>
-              <a:rPr sz="1300" b="1" i="0">
-                <a:solidFill>
-                  <a:srgbClr val="0F1E42"/>
-                </a:solidFill>
-              </a:rPr>
-              <a:t>Cross-cutting limits</a:t>
-            </a:r>
-          </a:p>
-        </p:txBody>
-      </p:sp>
-      <p:sp>
-        <p:nvSpPr>
-          <p:cNvPr id="24" name="TextBox 23"/>
-          <p:cNvSpPr txBox="1"/>
-          <p:nvPr/>
-        </p:nvSpPr>
-        <p:spPr>
-          <a:xfrm>
-            <a:off x="411480" y="4672583"/>
-            <a:ext cx="6400800" cy="356616"/>
-          </a:xfrm>
-          <a:prstGeom prst="rect">
-            <a:avLst/>
-          </a:prstGeom>
-          <a:noFill/>
-        </p:spPr>
-        <p:txBody>
-          <a:bodyPr wrap="square">
-            <a:spAutoFit/>
-          </a:bodyPr>
-          <a:lstStyle/>
-          <a:p>
-            <a:pPr algn="l"/>
-            <a:r>
-              <a:rPr sz="1000" b="0" i="0">
-                <a:solidFill>
-                  <a:srgbClr val="50596E"/>
-                </a:solidFill>
-              </a:rPr>
-              <a:t>•  Scored on our-data CV only; OOD checked for Prior FT alone</a:t>
-            </a:r>
-          </a:p>
-        </p:txBody>
-      </p:sp>
-      <p:sp>
-        <p:nvSpPr>
-          <p:cNvPr id="25" name="TextBox 24"/>
-          <p:cNvSpPr txBox="1"/>
-          <p:nvPr/>
-        </p:nvSpPr>
-        <p:spPr>
-          <a:xfrm>
-            <a:off x="411480" y="4983479"/>
-            <a:ext cx="6400800" cy="356616"/>
-          </a:xfrm>
-          <a:prstGeom prst="rect">
-            <a:avLst/>
-          </a:prstGeom>
-          <a:noFill/>
-        </p:spPr>
-        <p:txBody>
-          <a:bodyPr wrap="square">
-            <a:spAutoFit/>
-          </a:bodyPr>
-          <a:lstStyle/>
-          <a:p>
-            <a:pPr algn="l"/>
-            <a:r>
-              <a:rPr sz="1000" b="0" i="0">
-                <a:solidFill>
-                  <a:srgbClr val="50596E"/>
-                </a:solidFill>
-              </a:rPr>
-              <a:t>•  Point predictions — no uncertainty for picking experiments</a:t>
-            </a:r>
-          </a:p>
-        </p:txBody>
-      </p:sp>
-      <p:sp>
-        <p:nvSpPr>
-          <p:cNvPr id="26" name="TextBox 25"/>
-          <p:cNvSpPr txBox="1"/>
-          <p:nvPr/>
-        </p:nvSpPr>
-        <p:spPr>
-          <a:xfrm>
-            <a:off x="411480" y="5294375"/>
-            <a:ext cx="6400800" cy="356616"/>
-          </a:xfrm>
-          <a:prstGeom prst="rect">
-            <a:avLst/>
-          </a:prstGeom>
-          <a:noFill/>
-        </p:spPr>
-        <p:txBody>
-          <a:bodyPr wrap="square">
-            <a:spAutoFit/>
-          </a:bodyPr>
-          <a:lstStyle/>
-          <a:p>
-            <a:pPr algn="l"/>
-            <a:r>
-              <a:rPr sz="1000" b="0" i="0">
-                <a:solidFill>
-                  <a:srgbClr val="50596E"/>
-                </a:solidFill>
-              </a:rPr>
-              <a:t>•  Y&gt;15% ceiling is DATA-bound, not model-bound</a:t>
-            </a:r>
-          </a:p>
-        </p:txBody>
-      </p:sp>
-      <p:sp>
-        <p:nvSpPr>
-          <p:cNvPr id="27" name="Rectangle 26"/>
+              <a:t>Best — Stage-1 on 782 rows → high variance; two models</a:t>
+            </a:r>
+          </a:p>
+        </p:txBody>
+      </p:sp>
+      <p:sp>
+        <p:nvSpPr>
+          <p:cNvPr id="24" name="Rectangle 23"/>
           <p:cNvSpPr/>
           <p:nvPr/>
         </p:nvSpPr>
         <p:spPr>
           <a:xfrm>
-            <a:off x="7040880" y="1097280"/>
+            <a:off x="7040880" y="1234440"/>
             <a:ext cx="4846320" cy="384048"/>
           </a:xfrm>
           <a:prstGeom prst="rect">
             <a:avLst/>
           </a:prstGeom>
           <a:solidFill>
-            <a:srgbClr val="10B981"/>
+            <a:srgbClr val="0078C8"/>
           </a:solidFill>
           <a:ln>
             <a:noFill/>
@@ -5552,14 +5485,116 @@
       </p:sp>
       <p:sp>
         <p:nvSpPr>
+          <p:cNvPr id="25" name="TextBox 24"/>
+          <p:cNvSpPr txBox="1"/>
+          <p:nvPr/>
+        </p:nvSpPr>
+        <p:spPr>
+          <a:xfrm>
+            <a:off x="7178040" y="1261872"/>
+            <a:ext cx="4572000" cy="329184"/>
+          </a:xfrm>
+          <a:prstGeom prst="rect">
+            <a:avLst/>
+          </a:prstGeom>
+          <a:noFill/>
+        </p:spPr>
+        <p:txBody>
+          <a:bodyPr wrap="square">
+            <a:spAutoFit/>
+          </a:bodyPr>
+          <a:lstStyle/>
+          <a:p>
+            <a:pPr algn="l"/>
+            <a:r>
+              <a:rPr sz="1300" b="1" i="0">
+                <a:solidFill>
+                  <a:srgbClr val="FFFFFF"/>
+                </a:solidFill>
+              </a:rPr>
+              <a:t>Cross-cutting limits</a:t>
+            </a:r>
+          </a:p>
+        </p:txBody>
+      </p:sp>
+      <p:sp>
+        <p:nvSpPr>
+          <p:cNvPr id="26" name="TextBox 25"/>
+          <p:cNvSpPr txBox="1"/>
+          <p:nvPr/>
+        </p:nvSpPr>
+        <p:spPr>
+          <a:xfrm>
+            <a:off x="7086600" y="1719072"/>
+            <a:ext cx="4754880" cy="429768"/>
+          </a:xfrm>
+          <a:prstGeom prst="rect">
+            <a:avLst/>
+          </a:prstGeom>
+          <a:noFill/>
+        </p:spPr>
+        <p:txBody>
+          <a:bodyPr wrap="square">
+            <a:spAutoFit/>
+          </a:bodyPr>
+          <a:lstStyle/>
+          <a:p>
+            <a:pPr algn="l"/>
+            <a:r>
+              <a:rPr sz="1000" b="0" i="0">
+                <a:solidFill>
+                  <a:srgbClr val="1A1A2E"/>
+                </a:solidFill>
+              </a:rPr>
+              <a:t>•  All methods evaluated on our-data CV only; OOD tested for Prior FT alone</a:t>
+            </a:r>
+          </a:p>
+        </p:txBody>
+      </p:sp>
+      <p:sp>
+        <p:nvSpPr>
+          <p:cNvPr id="27" name="TextBox 26"/>
+          <p:cNvSpPr txBox="1"/>
+          <p:nvPr/>
+        </p:nvSpPr>
+        <p:spPr>
+          <a:xfrm>
+            <a:off x="7086600" y="2103120"/>
+            <a:ext cx="4754880" cy="429768"/>
+          </a:xfrm>
+          <a:prstGeom prst="rect">
+            <a:avLst/>
+          </a:prstGeom>
+          <a:noFill/>
+        </p:spPr>
+        <p:txBody>
+          <a:bodyPr wrap="square">
+            <a:spAutoFit/>
+          </a:bodyPr>
+          <a:lstStyle/>
+          <a:p>
+            <a:pPr algn="l"/>
+            <a:r>
+              <a:rPr sz="1000" b="0" i="0">
+                <a:solidFill>
+                  <a:srgbClr val="1A1A2E"/>
+                </a:solidFill>
+              </a:rPr>
+              <a:t>•  Point predictions — no uncertainty estimates to guide experiment selection</a:t>
+            </a:r>
+          </a:p>
+        </p:txBody>
+      </p:sp>
+      <p:sp>
+        <p:nvSpPr>
           <p:cNvPr id="28" name="TextBox 27"/>
           <p:cNvSpPr txBox="1"/>
           <p:nvPr/>
         </p:nvSpPr>
         <p:spPr>
           <a:xfrm>
-            <a:off x="7178040" y="1124712"/>
-            <a:ext cx="4572000" cy="329184"/>
+            <a:off x="7086600" y="2487168"/>
+            <a:ext cx="4754880" cy="429768"/>
           </a:xfrm>
           <a:prstGeom prst="rect">
             <a:avLst/>
@@ -5574,12 +5609,12 @@
           <a:p>
             <a:pPr algn="l"/>
             <a:r>
-              <a:rPr sz="1300" b="1" i="0">
-                <a:solidFill>
-                  <a:srgbClr val="FFFFFF"/>
-                </a:solidFill>
-              </a:rPr>
-              <a:t>What's next (priority-ordered)</a:t>
+              <a:rPr sz="1000" b="0" i="0">
+                <a:solidFill>
+                  <a:srgbClr val="1A1A2E"/>
+                </a:solidFill>
+              </a:rPr>
+              <a:t>•  Y&gt;15% ceiling is DATA-bound (missing GHSV, CH₄:O₂, pressure), not model-bound</a:t>
             </a:r>
           </a:p>
         </p:txBody>
@@ -5592,18 +5627,18 @@
         </p:nvSpPr>
         <p:spPr>
           <a:xfrm>
-            <a:off x="7040880" y="1691640"/>
-            <a:ext cx="4846320" cy="658368"/>
+            <a:off x="7040880" y="3063240"/>
+            <a:ext cx="4846320" cy="868680"/>
           </a:xfrm>
           <a:prstGeom prst="rect">
             <a:avLst/>
           </a:prstGeom>
           <a:solidFill>
-            <a:srgbClr val="E8F5E9"/>
+            <a:srgbClr val="E8F5FF"/>
           </a:solidFill>
           <a:ln w="9525">
             <a:solidFill>
-              <a:srgbClr val="D0D5DF"/>
+              <a:srgbClr val="0078C8"/>
             </a:solidFill>
           </a:ln>
         </p:spPr>
@@ -5637,8 +5672,8 @@
         </p:nvSpPr>
         <p:spPr>
           <a:xfrm>
-            <a:off x="7132320" y="1737360"/>
-            <a:ext cx="365760" cy="365760"/>
+            <a:off x="7150608" y="3136392"/>
+            <a:ext cx="4626864" cy="722376"/>
           </a:xfrm>
           <a:prstGeom prst="rect">
             <a:avLst/>
@@ -5653,688 +5688,12 @@
           <a:p>
             <a:pPr algn="l"/>
             <a:r>
-              <a:rPr sz="1200" b="1" i="0">
-                <a:solidFill>
-                  <a:srgbClr val="1B5E20"/>
-                </a:solidFill>
-              </a:rPr>
-              <a:t>1.</a:t>
-            </a:r>
-          </a:p>
-        </p:txBody>
-      </p:sp>
-      <p:sp>
-        <p:nvSpPr>
-          <p:cNvPr id="31" name="TextBox 30"/>
-          <p:cNvSpPr txBox="1"/>
-          <p:nvPr/>
-        </p:nvSpPr>
-        <p:spPr>
-          <a:xfrm>
-            <a:off x="7543800" y="1737360"/>
-            <a:ext cx="4206240" cy="612647"/>
-          </a:xfrm>
-          <a:prstGeom prst="rect">
-            <a:avLst/>
-          </a:prstGeom>
-          <a:noFill/>
-        </p:spPr>
-        <p:txBody>
-          <a:bodyPr wrap="square">
-            <a:spAutoFit/>
-          </a:bodyPr>
-          <a:lstStyle/>
-          <a:p>
-            <a:pPr algn="l"/>
-            <a:r>
-              <a:rPr sz="1100" b="1" i="0">
-                <a:solidFill>
-                  <a:srgbClr val="1B5E20"/>
-                </a:solidFill>
-              </a:rPr>
-              <a:t>Add GHSV, CH₄:O₂, pressure — fixes the ceiling and likely the label shift</a:t>
-            </a:r>
-          </a:p>
-        </p:txBody>
-      </p:sp>
-      <p:sp>
-        <p:nvSpPr>
-          <p:cNvPr id="32" name="Rectangle 31"/>
-          <p:cNvSpPr/>
-          <p:nvPr/>
-        </p:nvSpPr>
-        <p:spPr>
-          <a:xfrm>
-            <a:off x="7543800" y="2093976"/>
-            <a:ext cx="1554480" cy="219456"/>
-          </a:xfrm>
-          <a:prstGeom prst="rect">
-            <a:avLst/>
-          </a:prstGeom>
-          <a:solidFill>
-            <a:srgbClr val="10B981"/>
-          </a:solidFill>
-          <a:ln>
-            <a:noFill/>
-          </a:ln>
-        </p:spPr>
-        <p:style>
-          <a:lnRef idx="1">
-            <a:schemeClr val="accent1"/>
-          </a:lnRef>
-          <a:fillRef idx="3">
-            <a:schemeClr val="accent1"/>
-          </a:fillRef>
-          <a:effectRef idx="2">
-            <a:schemeClr val="accent1"/>
-          </a:effectRef>
-          <a:fontRef idx="minor">
-            <a:schemeClr val="lt1"/>
-          </a:fontRef>
-        </p:style>
-        <p:txBody>
-          <a:bodyPr rtlCol="0" anchor="ctr"/>
-          <a:lstStyle/>
-          <a:p>
-            <a:pPr algn="ctr"/>
-          </a:p>
-        </p:txBody>
-      </p:sp>
-      <p:sp>
-        <p:nvSpPr>
-          <p:cNvPr id="33" name="TextBox 32"/>
-          <p:cNvSpPr txBox="1"/>
-          <p:nvPr/>
-        </p:nvSpPr>
-        <p:spPr>
-          <a:xfrm>
-            <a:off x="7589520" y="2112264"/>
-            <a:ext cx="1463040" cy="182880"/>
-          </a:xfrm>
-          <a:prstGeom prst="rect">
-            <a:avLst/>
-          </a:prstGeom>
-          <a:noFill/>
-        </p:spPr>
-        <p:txBody>
-          <a:bodyPr wrap="square">
-            <a:spAutoFit/>
-          </a:bodyPr>
-          <a:lstStyle/>
-          <a:p>
-            <a:pPr algn="ctr"/>
-            <a:r>
-              <a:rPr sz="800" b="1" i="0">
-                <a:solidFill>
-                  <a:srgbClr val="FFFFFF"/>
-                </a:solidFill>
-              </a:rPr>
-              <a:t>Highest impact</a:t>
-            </a:r>
-          </a:p>
-        </p:txBody>
-      </p:sp>
-      <p:sp>
-        <p:nvSpPr>
-          <p:cNvPr id="34" name="Rectangle 33"/>
-          <p:cNvSpPr/>
-          <p:nvPr/>
-        </p:nvSpPr>
-        <p:spPr>
-          <a:xfrm>
-            <a:off x="7040880" y="2423160"/>
-            <a:ext cx="4846320" cy="502920"/>
-          </a:xfrm>
-          <a:prstGeom prst="rect">
-            <a:avLst/>
-          </a:prstGeom>
-          <a:solidFill>
-            <a:srgbClr val="FFFFFF"/>
-          </a:solidFill>
-          <a:ln w="9525">
-            <a:solidFill>
-              <a:srgbClr val="D0D5DF"/>
-            </a:solidFill>
-          </a:ln>
-        </p:spPr>
-        <p:style>
-          <a:lnRef idx="1">
-            <a:schemeClr val="accent1"/>
-          </a:lnRef>
-          <a:fillRef idx="3">
-            <a:schemeClr val="accent1"/>
-          </a:fillRef>
-          <a:effectRef idx="2">
-            <a:schemeClr val="accent1"/>
-          </a:effectRef>
-          <a:fontRef idx="minor">
-            <a:schemeClr val="lt1"/>
-          </a:fontRef>
-        </p:style>
-        <p:txBody>
-          <a:bodyPr rtlCol="0" anchor="ctr"/>
-          <a:lstStyle/>
-          <a:p>
-            <a:pPr algn="ctr"/>
-          </a:p>
-        </p:txBody>
-      </p:sp>
-      <p:sp>
-        <p:nvSpPr>
-          <p:cNvPr id="35" name="TextBox 34"/>
-          <p:cNvSpPr txBox="1"/>
-          <p:nvPr/>
-        </p:nvSpPr>
-        <p:spPr>
-          <a:xfrm>
-            <a:off x="7132320" y="2468879"/>
-            <a:ext cx="365760" cy="365760"/>
-          </a:xfrm>
-          <a:prstGeom prst="rect">
-            <a:avLst/>
-          </a:prstGeom>
-          <a:noFill/>
-        </p:spPr>
-        <p:txBody>
-          <a:bodyPr wrap="square">
-            <a:spAutoFit/>
-          </a:bodyPr>
-          <a:lstStyle/>
-          <a:p>
-            <a:pPr algn="l"/>
-            <a:r>
-              <a:rPr sz="1200" b="1" i="0">
-                <a:solidFill>
-                  <a:srgbClr val="0078C8"/>
-                </a:solidFill>
-              </a:rPr>
-              <a:t>2.</a:t>
-            </a:r>
-          </a:p>
-        </p:txBody>
-      </p:sp>
-      <p:sp>
-        <p:nvSpPr>
-          <p:cNvPr id="36" name="TextBox 35"/>
-          <p:cNvSpPr txBox="1"/>
-          <p:nvPr/>
-        </p:nvSpPr>
-        <p:spPr>
-          <a:xfrm>
-            <a:off x="7543800" y="2468879"/>
-            <a:ext cx="4206240" cy="457200"/>
-          </a:xfrm>
-          <a:prstGeom prst="rect">
-            <a:avLst/>
-          </a:prstGeom>
-          <a:noFill/>
-        </p:spPr>
-        <p:txBody>
-          <a:bodyPr wrap="square">
-            <a:spAutoFit/>
-          </a:bodyPr>
-          <a:lstStyle/>
-          <a:p>
-            <a:pPr algn="l"/>
-            <a:r>
-              <a:rPr sz="1100" b="0" i="0">
-                <a:solidFill>
-                  <a:srgbClr val="1A1A2E"/>
-                </a:solidFill>
-              </a:rPr>
-              <a:t>Bag the Stage-1 expert to cut its variance</a:t>
-            </a:r>
-          </a:p>
-        </p:txBody>
-      </p:sp>
-      <p:sp>
-        <p:nvSpPr>
-          <p:cNvPr id="37" name="Rectangle 36"/>
-          <p:cNvSpPr/>
-          <p:nvPr/>
-        </p:nvSpPr>
-        <p:spPr>
-          <a:xfrm>
-            <a:off x="7040880" y="2999232"/>
-            <a:ext cx="4846320" cy="658368"/>
-          </a:xfrm>
-          <a:prstGeom prst="rect">
-            <a:avLst/>
-          </a:prstGeom>
-          <a:solidFill>
-            <a:srgbClr val="FFFFFF"/>
-          </a:solidFill>
-          <a:ln w="9525">
-            <a:solidFill>
-              <a:srgbClr val="D0D5DF"/>
-            </a:solidFill>
-          </a:ln>
-        </p:spPr>
-        <p:style>
-          <a:lnRef idx="1">
-            <a:schemeClr val="accent1"/>
-          </a:lnRef>
-          <a:fillRef idx="3">
-            <a:schemeClr val="accent1"/>
-          </a:fillRef>
-          <a:effectRef idx="2">
-            <a:schemeClr val="accent1"/>
-          </a:effectRef>
-          <a:fontRef idx="minor">
-            <a:schemeClr val="lt1"/>
-          </a:fontRef>
-        </p:style>
-        <p:txBody>
-          <a:bodyPr rtlCol="0" anchor="ctr"/>
-          <a:lstStyle/>
-          <a:p>
-            <a:pPr algn="ctr"/>
-          </a:p>
-        </p:txBody>
-      </p:sp>
-      <p:sp>
-        <p:nvSpPr>
-          <p:cNvPr id="38" name="TextBox 37"/>
-          <p:cNvSpPr txBox="1"/>
-          <p:nvPr/>
-        </p:nvSpPr>
-        <p:spPr>
-          <a:xfrm>
-            <a:off x="7132320" y="3044951"/>
-            <a:ext cx="365760" cy="365760"/>
-          </a:xfrm>
-          <a:prstGeom prst="rect">
-            <a:avLst/>
-          </a:prstGeom>
-          <a:noFill/>
-        </p:spPr>
-        <p:txBody>
-          <a:bodyPr wrap="square">
-            <a:spAutoFit/>
-          </a:bodyPr>
-          <a:lstStyle/>
-          <a:p>
-            <a:pPr algn="l"/>
-            <a:r>
-              <a:rPr sz="1200" b="1" i="0">
-                <a:solidFill>
-                  <a:srgbClr val="0078C8"/>
-                </a:solidFill>
-              </a:rPr>
-              <a:t>3.</a:t>
-            </a:r>
-          </a:p>
-        </p:txBody>
-      </p:sp>
-      <p:sp>
-        <p:nvSpPr>
-          <p:cNvPr id="39" name="TextBox 38"/>
-          <p:cNvSpPr txBox="1"/>
-          <p:nvPr/>
-        </p:nvSpPr>
-        <p:spPr>
-          <a:xfrm>
-            <a:off x="7543800" y="3044951"/>
-            <a:ext cx="4206240" cy="612647"/>
-          </a:xfrm>
-          <a:prstGeom prst="rect">
-            <a:avLst/>
-          </a:prstGeom>
-          <a:noFill/>
-        </p:spPr>
-        <p:txBody>
-          <a:bodyPr wrap="square">
-            <a:spAutoFit/>
-          </a:bodyPr>
-          <a:lstStyle/>
-          <a:p>
-            <a:pPr algn="l"/>
-            <a:r>
-              <a:rPr sz="1100" b="0" i="0">
-                <a:solidFill>
-                  <a:srgbClr val="1A1A2E"/>
-                </a:solidFill>
-              </a:rPr>
-              <a:t>Add uncertainty (quantile / conformal) for experiment selection</a:t>
-            </a:r>
-          </a:p>
-        </p:txBody>
-      </p:sp>
-      <p:sp>
-        <p:nvSpPr>
-          <p:cNvPr id="40" name="Rectangle 39"/>
-          <p:cNvSpPr/>
-          <p:nvPr/>
-        </p:nvSpPr>
-        <p:spPr>
-          <a:xfrm>
-            <a:off x="7040880" y="3730752"/>
-            <a:ext cx="4846320" cy="658368"/>
-          </a:xfrm>
-          <a:prstGeom prst="rect">
-            <a:avLst/>
-          </a:prstGeom>
-          <a:solidFill>
-            <a:srgbClr val="FFFFFF"/>
-          </a:solidFill>
-          <a:ln w="9525">
-            <a:solidFill>
-              <a:srgbClr val="D0D5DF"/>
-            </a:solidFill>
-          </a:ln>
-        </p:spPr>
-        <p:style>
-          <a:lnRef idx="1">
-            <a:schemeClr val="accent1"/>
-          </a:lnRef>
-          <a:fillRef idx="3">
-            <a:schemeClr val="accent1"/>
-          </a:fillRef>
-          <a:effectRef idx="2">
-            <a:schemeClr val="accent1"/>
-          </a:effectRef>
-          <a:fontRef idx="minor">
-            <a:schemeClr val="lt1"/>
-          </a:fontRef>
-        </p:style>
-        <p:txBody>
-          <a:bodyPr rtlCol="0" anchor="ctr"/>
-          <a:lstStyle/>
-          <a:p>
-            <a:pPr algn="ctr"/>
-          </a:p>
-        </p:txBody>
-      </p:sp>
-      <p:sp>
-        <p:nvSpPr>
-          <p:cNvPr id="41" name="TextBox 40"/>
-          <p:cNvSpPr txBox="1"/>
-          <p:nvPr/>
-        </p:nvSpPr>
-        <p:spPr>
-          <a:xfrm>
-            <a:off x="7132320" y="3776472"/>
-            <a:ext cx="365760" cy="365760"/>
-          </a:xfrm>
-          <a:prstGeom prst="rect">
-            <a:avLst/>
-          </a:prstGeom>
-          <a:noFill/>
-        </p:spPr>
-        <p:txBody>
-          <a:bodyPr wrap="square">
-            <a:spAutoFit/>
-          </a:bodyPr>
-          <a:lstStyle/>
-          <a:p>
-            <a:pPr algn="l"/>
-            <a:r>
-              <a:rPr sz="1200" b="1" i="0">
-                <a:solidFill>
-                  <a:srgbClr val="0078C8"/>
-                </a:solidFill>
-              </a:rPr>
-              <a:t>4.</a:t>
-            </a:r>
-          </a:p>
-        </p:txBody>
-      </p:sp>
-      <p:sp>
-        <p:nvSpPr>
-          <p:cNvPr id="42" name="TextBox 41"/>
-          <p:cNvSpPr txBox="1"/>
-          <p:nvPr/>
-        </p:nvSpPr>
-        <p:spPr>
-          <a:xfrm>
-            <a:off x="7543800" y="3776472"/>
-            <a:ext cx="4206240" cy="612647"/>
-          </a:xfrm>
-          <a:prstGeom prst="rect">
-            <a:avLst/>
-          </a:prstGeom>
-          <a:noFill/>
-        </p:spPr>
-        <p:txBody>
-          <a:bodyPr wrap="square">
-            <a:spAutoFit/>
-          </a:bodyPr>
-          <a:lstStyle/>
-          <a:p>
-            <a:pPr algn="l"/>
-            <a:r>
-              <a:rPr sz="1100" b="0" i="0">
-                <a:solidFill>
-                  <a:srgbClr val="1A1A2E"/>
-                </a:solidFill>
-              </a:rPr>
-              <a:t>Stack DRST + KMM into the Prior FT pipeline</a:t>
-            </a:r>
-          </a:p>
-        </p:txBody>
-      </p:sp>
-      <p:sp>
-        <p:nvSpPr>
-          <p:cNvPr id="43" name="Rectangle 42"/>
-          <p:cNvSpPr/>
-          <p:nvPr/>
-        </p:nvSpPr>
-        <p:spPr>
-          <a:xfrm>
-            <a:off x="7040880" y="4462272"/>
-            <a:ext cx="4846320" cy="658368"/>
-          </a:xfrm>
-          <a:prstGeom prst="rect">
-            <a:avLst/>
-          </a:prstGeom>
-          <a:solidFill>
-            <a:srgbClr val="FFFFFF"/>
-          </a:solidFill>
-          <a:ln w="9525">
-            <a:solidFill>
-              <a:srgbClr val="D0D5DF"/>
-            </a:solidFill>
-          </a:ln>
-        </p:spPr>
-        <p:style>
-          <a:lnRef idx="1">
-            <a:schemeClr val="accent1"/>
-          </a:lnRef>
-          <a:fillRef idx="3">
-            <a:schemeClr val="accent1"/>
-          </a:fillRef>
-          <a:effectRef idx="2">
-            <a:schemeClr val="accent1"/>
-          </a:effectRef>
-          <a:fontRef idx="minor">
-            <a:schemeClr val="lt1"/>
-          </a:fontRef>
-        </p:style>
-        <p:txBody>
-          <a:bodyPr rtlCol="0" anchor="ctr"/>
-          <a:lstStyle/>
-          <a:p>
-            <a:pPr algn="ctr"/>
-          </a:p>
-        </p:txBody>
-      </p:sp>
-      <p:sp>
-        <p:nvSpPr>
-          <p:cNvPr id="44" name="TextBox 43"/>
-          <p:cNvSpPr txBox="1"/>
-          <p:nvPr/>
-        </p:nvSpPr>
-        <p:spPr>
-          <a:xfrm>
-            <a:off x="7132320" y="4507992"/>
-            <a:ext cx="365760" cy="365760"/>
-          </a:xfrm>
-          <a:prstGeom prst="rect">
-            <a:avLst/>
-          </a:prstGeom>
-          <a:noFill/>
-        </p:spPr>
-        <p:txBody>
-          <a:bodyPr wrap="square">
-            <a:spAutoFit/>
-          </a:bodyPr>
-          <a:lstStyle/>
-          <a:p>
-            <a:pPr algn="l"/>
-            <a:r>
-              <a:rPr sz="1200" b="1" i="0">
-                <a:solidFill>
-                  <a:srgbClr val="0078C8"/>
-                </a:solidFill>
-              </a:rPr>
-              <a:t>5.</a:t>
-            </a:r>
-          </a:p>
-        </p:txBody>
-      </p:sp>
-      <p:sp>
-        <p:nvSpPr>
-          <p:cNvPr id="45" name="TextBox 44"/>
-          <p:cNvSpPr txBox="1"/>
-          <p:nvPr/>
-        </p:nvSpPr>
-        <p:spPr>
-          <a:xfrm>
-            <a:off x="7543800" y="4507992"/>
-            <a:ext cx="4206240" cy="612647"/>
-          </a:xfrm>
-          <a:prstGeom prst="rect">
-            <a:avLst/>
-          </a:prstGeom>
-          <a:noFill/>
-        </p:spPr>
-        <p:txBody>
-          <a:bodyPr wrap="square">
-            <a:spAutoFit/>
-          </a:bodyPr>
-          <a:lstStyle/>
-          <a:p>
-            <a:pPr algn="l"/>
-            <a:r>
-              <a:rPr sz="1100" b="0" i="0">
-                <a:solidFill>
-                  <a:srgbClr val="1A1A2E"/>
-                </a:solidFill>
-              </a:rPr>
-              <a:t>Neural domain adaptation (DANN / CORAL) once features are richer</a:t>
-            </a:r>
-          </a:p>
-        </p:txBody>
-      </p:sp>
-      <p:sp>
-        <p:nvSpPr>
-          <p:cNvPr id="46" name="Rectangle 45"/>
-          <p:cNvSpPr/>
-          <p:nvPr/>
-        </p:nvSpPr>
-        <p:spPr>
-          <a:xfrm>
-            <a:off x="7040880" y="5193792"/>
-            <a:ext cx="4846320" cy="658368"/>
-          </a:xfrm>
-          <a:prstGeom prst="rect">
-            <a:avLst/>
-          </a:prstGeom>
-          <a:solidFill>
-            <a:srgbClr val="FFFFFF"/>
-          </a:solidFill>
-          <a:ln w="9525">
-            <a:solidFill>
-              <a:srgbClr val="D0D5DF"/>
-            </a:solidFill>
-          </a:ln>
-        </p:spPr>
-        <p:style>
-          <a:lnRef idx="1">
-            <a:schemeClr val="accent1"/>
-          </a:lnRef>
-          <a:fillRef idx="3">
-            <a:schemeClr val="accent1"/>
-          </a:fillRef>
-          <a:effectRef idx="2">
-            <a:schemeClr val="accent1"/>
-          </a:effectRef>
-          <a:fontRef idx="minor">
-            <a:schemeClr val="lt1"/>
-          </a:fontRef>
-        </p:style>
-        <p:txBody>
-          <a:bodyPr rtlCol="0" anchor="ctr"/>
-          <a:lstStyle/>
-          <a:p>
-            <a:pPr algn="ctr"/>
-          </a:p>
-        </p:txBody>
-      </p:sp>
-      <p:sp>
-        <p:nvSpPr>
-          <p:cNvPr id="47" name="TextBox 46"/>
-          <p:cNvSpPr txBox="1"/>
-          <p:nvPr/>
-        </p:nvSpPr>
-        <p:spPr>
-          <a:xfrm>
-            <a:off x="7132320" y="5239512"/>
-            <a:ext cx="365760" cy="365760"/>
-          </a:xfrm>
-          <a:prstGeom prst="rect">
-            <a:avLst/>
-          </a:prstGeom>
-          <a:noFill/>
-        </p:spPr>
-        <p:txBody>
-          <a:bodyPr wrap="square">
-            <a:spAutoFit/>
-          </a:bodyPr>
-          <a:lstStyle/>
-          <a:p>
-            <a:pPr algn="l"/>
-            <a:r>
-              <a:rPr sz="1200" b="1" i="0">
-                <a:solidFill>
-                  <a:srgbClr val="0078C8"/>
-                </a:solidFill>
-              </a:rPr>
-              <a:t>6.</a:t>
-            </a:r>
-          </a:p>
-        </p:txBody>
-      </p:sp>
-      <p:sp>
-        <p:nvSpPr>
-          <p:cNvPr id="48" name="TextBox 47"/>
-          <p:cNvSpPr txBox="1"/>
-          <p:nvPr/>
-        </p:nvSpPr>
-        <p:spPr>
-          <a:xfrm>
-            <a:off x="7543800" y="5239512"/>
-            <a:ext cx="4206240" cy="612647"/>
-          </a:xfrm>
-          <a:prstGeom prst="rect">
-            <a:avLst/>
-          </a:prstGeom>
-          <a:noFill/>
-        </p:spPr>
-        <p:txBody>
-          <a:bodyPr wrap="square">
-            <a:spAutoFit/>
-          </a:bodyPr>
-          <a:lstStyle/>
-          <a:p>
-            <a:pPr algn="l"/>
-            <a:r>
-              <a:rPr sz="1100" b="0" i="0">
-                <a:solidFill>
-                  <a:srgbClr val="1A1A2E"/>
-                </a:solidFill>
-              </a:rPr>
-              <a:t>Close the active-learning loop: propose → measure → retrain</a:t>
+              <a:rPr sz="1000" b="0" i="0">
+                <a:solidFill>
+                  <a:srgbClr val="50596E"/>
+                </a:solidFill>
+              </a:rPr>
+              <a:t>Key insight: the ceiling effect and much of the label shift share the same root cause — missing operating-condition features. Fix the data; the models follow.</a:t>
             </a:r>
           </a:p>
         </p:txBody>
@@ -6409,7 +5768,7 @@
         <p:spPr>
           <a:xfrm>
             <a:off x="0" y="0"/>
-            <a:ext cx="12188952" cy="868680"/>
+            <a:ext cx="12188952" cy="1097280"/>
           </a:xfrm>
           <a:prstGeom prst="rect">
             <a:avLst/>
@@ -6472,14 +5831,48 @@
                   <a:srgbClr val="FFFFFF"/>
                 </a:solidFill>
               </a:rPr>
-              <a:t>Summary</a:t>
-            </a:r>
-          </a:p>
-        </p:txBody>
-      </p:sp>
-      <p:sp>
-        <p:nvSpPr>
-          <p:cNvPr id="5" name="Rectangle 4"/>
+              <a:t>What's Next — Priority-Ordered</a:t>
+            </a:r>
+          </a:p>
+        </p:txBody>
+      </p:sp>
+      <p:sp>
+        <p:nvSpPr>
+          <p:cNvPr id="5" name="TextBox 4"/>
+          <p:cNvSpPr txBox="1"/>
+          <p:nvPr/>
+        </p:nvSpPr>
+        <p:spPr>
+          <a:xfrm>
+            <a:off x="365760" y="658368"/>
+            <a:ext cx="11457432" cy="365760"/>
+          </a:xfrm>
+          <a:prstGeom prst="rect">
+            <a:avLst/>
+          </a:prstGeom>
+          <a:noFill/>
+        </p:spPr>
+        <p:txBody>
+          <a:bodyPr wrap="square">
+            <a:spAutoFit/>
+          </a:bodyPr>
+          <a:lstStyle/>
+          <a:p>
+            <a:pPr algn="l"/>
+            <a:r>
+              <a:rPr sz="1100" b="0" i="1">
+                <a:solidFill>
+                  <a:srgbClr val="BBCCEE"/>
+                </a:solidFill>
+              </a:rPr>
+              <a:t>Chapter 9</a:t>
+            </a:r>
+          </a:p>
+        </p:txBody>
+      </p:sp>
+      <p:sp>
+        <p:nvSpPr>
+          <p:cNvPr id="6" name="Rectangle 5"/>
           <p:cNvSpPr/>
           <p:nvPr/>
         </p:nvSpPr>
@@ -6522,7 +5915,7 @@
       </p:sp>
       <p:sp>
         <p:nvSpPr>
-          <p:cNvPr id="6" name="TextBox 5"/>
+          <p:cNvPr id="7" name="TextBox 6"/>
           <p:cNvSpPr txBox="1"/>
           <p:nvPr/>
         </p:nvSpPr>
@@ -6549,7 +5942,1439 @@
                   <a:srgbClr val="CCCCCC"/>
                 </a:solidFill>
               </a:rPr>
-              <a:t>OCM Dataset Integration   |   Slide 12 / 12</a:t>
+              <a:t>OCM Dataset Integration   |   Slide 12 / 13</a:t>
+            </a:r>
+          </a:p>
+        </p:txBody>
+      </p:sp>
+      <p:sp>
+        <p:nvSpPr>
+          <p:cNvPr id="8" name="Rectangle 7"/>
+          <p:cNvSpPr/>
+          <p:nvPr/>
+        </p:nvSpPr>
+        <p:spPr>
+          <a:xfrm>
+            <a:off x="365760" y="1325880"/>
+            <a:ext cx="5669280" cy="1417320"/>
+          </a:xfrm>
+          <a:prstGeom prst="rect">
+            <a:avLst/>
+          </a:prstGeom>
+          <a:solidFill>
+            <a:srgbClr val="E8F5E9"/>
+          </a:solidFill>
+          <a:ln w="9525">
+            <a:solidFill>
+              <a:srgbClr val="10B981"/>
+            </a:solidFill>
+          </a:ln>
+        </p:spPr>
+        <p:style>
+          <a:lnRef idx="1">
+            <a:schemeClr val="accent1"/>
+          </a:lnRef>
+          <a:fillRef idx="3">
+            <a:schemeClr val="accent1"/>
+          </a:fillRef>
+          <a:effectRef idx="2">
+            <a:schemeClr val="accent1"/>
+          </a:effectRef>
+          <a:fontRef idx="minor">
+            <a:schemeClr val="lt1"/>
+          </a:fontRef>
+        </p:style>
+        <p:txBody>
+          <a:bodyPr rtlCol="0" anchor="ctr"/>
+          <a:lstStyle/>
+          <a:p>
+            <a:pPr algn="ctr"/>
+          </a:p>
+        </p:txBody>
+      </p:sp>
+      <p:sp>
+        <p:nvSpPr>
+          <p:cNvPr id="9" name="Rectangle 8"/>
+          <p:cNvSpPr/>
+          <p:nvPr/>
+        </p:nvSpPr>
+        <p:spPr>
+          <a:xfrm>
+            <a:off x="457200" y="1417320"/>
+            <a:ext cx="329184" cy="329184"/>
+          </a:xfrm>
+          <a:prstGeom prst="rect">
+            <a:avLst/>
+          </a:prstGeom>
+          <a:solidFill>
+            <a:srgbClr val="10B981"/>
+          </a:solidFill>
+          <a:ln>
+            <a:noFill/>
+          </a:ln>
+        </p:spPr>
+        <p:style>
+          <a:lnRef idx="1">
+            <a:schemeClr val="accent1"/>
+          </a:lnRef>
+          <a:fillRef idx="3">
+            <a:schemeClr val="accent1"/>
+          </a:fillRef>
+          <a:effectRef idx="2">
+            <a:schemeClr val="accent1"/>
+          </a:effectRef>
+          <a:fontRef idx="minor">
+            <a:schemeClr val="lt1"/>
+          </a:fontRef>
+        </p:style>
+        <p:txBody>
+          <a:bodyPr rtlCol="0" anchor="ctr"/>
+          <a:lstStyle/>
+          <a:p>
+            <a:pPr algn="ctr"/>
+          </a:p>
+        </p:txBody>
+      </p:sp>
+      <p:sp>
+        <p:nvSpPr>
+          <p:cNvPr id="10" name="TextBox 9"/>
+          <p:cNvSpPr txBox="1"/>
+          <p:nvPr/>
+        </p:nvSpPr>
+        <p:spPr>
+          <a:xfrm>
+            <a:off x="502920" y="1435608"/>
+            <a:ext cx="237744" cy="292608"/>
+          </a:xfrm>
+          <a:prstGeom prst="rect">
+            <a:avLst/>
+          </a:prstGeom>
+          <a:noFill/>
+        </p:spPr>
+        <p:txBody>
+          <a:bodyPr wrap="square">
+            <a:spAutoFit/>
+          </a:bodyPr>
+          <a:lstStyle/>
+          <a:p>
+            <a:pPr algn="ctr"/>
+            <a:r>
+              <a:rPr sz="1400" b="1" i="0">
+                <a:solidFill>
+                  <a:srgbClr val="FFFFFF"/>
+                </a:solidFill>
+              </a:rPr>
+              <a:t>1</a:t>
+            </a:r>
+          </a:p>
+        </p:txBody>
+      </p:sp>
+      <p:sp>
+        <p:nvSpPr>
+          <p:cNvPr id="11" name="TextBox 10"/>
+          <p:cNvSpPr txBox="1"/>
+          <p:nvPr/>
+        </p:nvSpPr>
+        <p:spPr>
+          <a:xfrm>
+            <a:off x="868680" y="1417320"/>
+            <a:ext cx="5074920" cy="384048"/>
+          </a:xfrm>
+          <a:prstGeom prst="rect">
+            <a:avLst/>
+          </a:prstGeom>
+          <a:noFill/>
+        </p:spPr>
+        <p:txBody>
+          <a:bodyPr wrap="square">
+            <a:spAutoFit/>
+          </a:bodyPr>
+          <a:lstStyle/>
+          <a:p>
+            <a:pPr algn="l"/>
+            <a:r>
+              <a:rPr sz="1200" b="1" i="0">
+                <a:solidFill>
+                  <a:srgbClr val="1B5E20"/>
+                </a:solidFill>
+              </a:rPr>
+              <a:t>Add GHSV, CH₄:O₂, pressure to the feature set</a:t>
+            </a:r>
+          </a:p>
+        </p:txBody>
+      </p:sp>
+      <p:sp>
+        <p:nvSpPr>
+          <p:cNvPr id="12" name="TextBox 11"/>
+          <p:cNvSpPr txBox="1"/>
+          <p:nvPr/>
+        </p:nvSpPr>
+        <p:spPr>
+          <a:xfrm>
+            <a:off x="868680" y="1828800"/>
+            <a:ext cx="5074920" cy="777240"/>
+          </a:xfrm>
+          <a:prstGeom prst="rect">
+            <a:avLst/>
+          </a:prstGeom>
+          <a:noFill/>
+        </p:spPr>
+        <p:txBody>
+          <a:bodyPr wrap="square">
+            <a:spAutoFit/>
+          </a:bodyPr>
+          <a:lstStyle/>
+          <a:p>
+            <a:pPr algn="l"/>
+            <a:r>
+              <a:rPr sz="1000" b="0" i="0">
+                <a:solidFill>
+                  <a:srgbClr val="50596E"/>
+                </a:solidFill>
+              </a:rPr>
+              <a:t>Fixes the Y&gt;15% ceiling and likely resolves much of the label shift too.</a:t>
+            </a:r>
+          </a:p>
+        </p:txBody>
+      </p:sp>
+      <p:sp>
+        <p:nvSpPr>
+          <p:cNvPr id="13" name="Rectangle 12"/>
+          <p:cNvSpPr/>
+          <p:nvPr/>
+        </p:nvSpPr>
+        <p:spPr>
+          <a:xfrm>
+            <a:off x="4343400" y="1417320"/>
+            <a:ext cx="1554480" cy="274320"/>
+          </a:xfrm>
+          <a:prstGeom prst="rect">
+            <a:avLst/>
+          </a:prstGeom>
+          <a:solidFill>
+            <a:srgbClr val="10B981"/>
+          </a:solidFill>
+          <a:ln>
+            <a:noFill/>
+          </a:ln>
+        </p:spPr>
+        <p:style>
+          <a:lnRef idx="1">
+            <a:schemeClr val="accent1"/>
+          </a:lnRef>
+          <a:fillRef idx="3">
+            <a:schemeClr val="accent1"/>
+          </a:fillRef>
+          <a:effectRef idx="2">
+            <a:schemeClr val="accent1"/>
+          </a:effectRef>
+          <a:fontRef idx="minor">
+            <a:schemeClr val="lt1"/>
+          </a:fontRef>
+        </p:style>
+        <p:txBody>
+          <a:bodyPr rtlCol="0" anchor="ctr"/>
+          <a:lstStyle/>
+          <a:p>
+            <a:pPr algn="ctr"/>
+          </a:p>
+        </p:txBody>
+      </p:sp>
+      <p:sp>
+        <p:nvSpPr>
+          <p:cNvPr id="14" name="TextBox 13"/>
+          <p:cNvSpPr txBox="1"/>
+          <p:nvPr/>
+        </p:nvSpPr>
+        <p:spPr>
+          <a:xfrm>
+            <a:off x="4389120" y="1435608"/>
+            <a:ext cx="1463040" cy="237744"/>
+          </a:xfrm>
+          <a:prstGeom prst="rect">
+            <a:avLst/>
+          </a:prstGeom>
+          <a:noFill/>
+        </p:spPr>
+        <p:txBody>
+          <a:bodyPr wrap="square">
+            <a:spAutoFit/>
+          </a:bodyPr>
+          <a:lstStyle/>
+          <a:p>
+            <a:pPr algn="ctr"/>
+            <a:r>
+              <a:rPr sz="900" b="1" i="0">
+                <a:solidFill>
+                  <a:srgbClr val="FFFFFF"/>
+                </a:solidFill>
+              </a:rPr>
+              <a:t>Highest impact</a:t>
+            </a:r>
+          </a:p>
+        </p:txBody>
+      </p:sp>
+      <p:sp>
+        <p:nvSpPr>
+          <p:cNvPr id="15" name="Rectangle 14"/>
+          <p:cNvSpPr/>
+          <p:nvPr/>
+        </p:nvSpPr>
+        <p:spPr>
+          <a:xfrm>
+            <a:off x="365760" y="2834639"/>
+            <a:ext cx="5669280" cy="1417320"/>
+          </a:xfrm>
+          <a:prstGeom prst="rect">
+            <a:avLst/>
+          </a:prstGeom>
+          <a:solidFill>
+            <a:srgbClr val="F5F6F8"/>
+          </a:solidFill>
+          <a:ln w="9525">
+            <a:solidFill>
+              <a:srgbClr val="D0D5DF"/>
+            </a:solidFill>
+          </a:ln>
+        </p:spPr>
+        <p:style>
+          <a:lnRef idx="1">
+            <a:schemeClr val="accent1"/>
+          </a:lnRef>
+          <a:fillRef idx="3">
+            <a:schemeClr val="accent1"/>
+          </a:fillRef>
+          <a:effectRef idx="2">
+            <a:schemeClr val="accent1"/>
+          </a:effectRef>
+          <a:fontRef idx="minor">
+            <a:schemeClr val="lt1"/>
+          </a:fontRef>
+        </p:style>
+        <p:txBody>
+          <a:bodyPr rtlCol="0" anchor="ctr"/>
+          <a:lstStyle/>
+          <a:p>
+            <a:pPr algn="ctr"/>
+          </a:p>
+        </p:txBody>
+      </p:sp>
+      <p:sp>
+        <p:nvSpPr>
+          <p:cNvPr id="16" name="Rectangle 15"/>
+          <p:cNvSpPr/>
+          <p:nvPr/>
+        </p:nvSpPr>
+        <p:spPr>
+          <a:xfrm>
+            <a:off x="457200" y="2926079"/>
+            <a:ext cx="329184" cy="329184"/>
+          </a:xfrm>
+          <a:prstGeom prst="rect">
+            <a:avLst/>
+          </a:prstGeom>
+          <a:solidFill>
+            <a:srgbClr val="0078C8"/>
+          </a:solidFill>
+          <a:ln>
+            <a:noFill/>
+          </a:ln>
+        </p:spPr>
+        <p:style>
+          <a:lnRef idx="1">
+            <a:schemeClr val="accent1"/>
+          </a:lnRef>
+          <a:fillRef idx="3">
+            <a:schemeClr val="accent1"/>
+          </a:fillRef>
+          <a:effectRef idx="2">
+            <a:schemeClr val="accent1"/>
+          </a:effectRef>
+          <a:fontRef idx="minor">
+            <a:schemeClr val="lt1"/>
+          </a:fontRef>
+        </p:style>
+        <p:txBody>
+          <a:bodyPr rtlCol="0" anchor="ctr"/>
+          <a:lstStyle/>
+          <a:p>
+            <a:pPr algn="ctr"/>
+          </a:p>
+        </p:txBody>
+      </p:sp>
+      <p:sp>
+        <p:nvSpPr>
+          <p:cNvPr id="17" name="TextBox 16"/>
+          <p:cNvSpPr txBox="1"/>
+          <p:nvPr/>
+        </p:nvSpPr>
+        <p:spPr>
+          <a:xfrm>
+            <a:off x="502920" y="2944367"/>
+            <a:ext cx="237744" cy="292608"/>
+          </a:xfrm>
+          <a:prstGeom prst="rect">
+            <a:avLst/>
+          </a:prstGeom>
+          <a:noFill/>
+        </p:spPr>
+        <p:txBody>
+          <a:bodyPr wrap="square">
+            <a:spAutoFit/>
+          </a:bodyPr>
+          <a:lstStyle/>
+          <a:p>
+            <a:pPr algn="ctr"/>
+            <a:r>
+              <a:rPr sz="1400" b="1" i="0">
+                <a:solidFill>
+                  <a:srgbClr val="FFFFFF"/>
+                </a:solidFill>
+              </a:rPr>
+              <a:t>2</a:t>
+            </a:r>
+          </a:p>
+        </p:txBody>
+      </p:sp>
+      <p:sp>
+        <p:nvSpPr>
+          <p:cNvPr id="18" name="TextBox 17"/>
+          <p:cNvSpPr txBox="1"/>
+          <p:nvPr/>
+        </p:nvSpPr>
+        <p:spPr>
+          <a:xfrm>
+            <a:off x="868680" y="2926079"/>
+            <a:ext cx="5074920" cy="384048"/>
+          </a:xfrm>
+          <a:prstGeom prst="rect">
+            <a:avLst/>
+          </a:prstGeom>
+          <a:noFill/>
+        </p:spPr>
+        <p:txBody>
+          <a:bodyPr wrap="square">
+            <a:spAutoFit/>
+          </a:bodyPr>
+          <a:lstStyle/>
+          <a:p>
+            <a:pPr algn="l"/>
+            <a:r>
+              <a:rPr sz="1200" b="1" i="0">
+                <a:solidFill>
+                  <a:srgbClr val="0F1E42"/>
+                </a:solidFill>
+              </a:rPr>
+              <a:t>Bag the Stage-1 expert</a:t>
+            </a:r>
+          </a:p>
+        </p:txBody>
+      </p:sp>
+      <p:sp>
+        <p:nvSpPr>
+          <p:cNvPr id="19" name="TextBox 18"/>
+          <p:cNvSpPr txBox="1"/>
+          <p:nvPr/>
+        </p:nvSpPr>
+        <p:spPr>
+          <a:xfrm>
+            <a:off x="868680" y="3337559"/>
+            <a:ext cx="5074920" cy="777240"/>
+          </a:xfrm>
+          <a:prstGeom prst="rect">
+            <a:avLst/>
+          </a:prstGeom>
+          <a:noFill/>
+        </p:spPr>
+        <p:txBody>
+          <a:bodyPr wrap="square">
+            <a:spAutoFit/>
+          </a:bodyPr>
+          <a:lstStyle/>
+          <a:p>
+            <a:pPr algn="l"/>
+            <a:r>
+              <a:rPr sz="1000" b="0" i="0">
+                <a:solidFill>
+                  <a:srgbClr val="50596E"/>
+                </a:solidFill>
+              </a:rPr>
+              <a:t>Ensemble of XGBoost models reduces high variance from only 782 training samples.</a:t>
+            </a:r>
+          </a:p>
+        </p:txBody>
+      </p:sp>
+      <p:sp>
+        <p:nvSpPr>
+          <p:cNvPr id="20" name="Rectangle 19"/>
+          <p:cNvSpPr/>
+          <p:nvPr/>
+        </p:nvSpPr>
+        <p:spPr>
+          <a:xfrm>
+            <a:off x="365760" y="4343400"/>
+            <a:ext cx="5669280" cy="1417320"/>
+          </a:xfrm>
+          <a:prstGeom prst="rect">
+            <a:avLst/>
+          </a:prstGeom>
+          <a:solidFill>
+            <a:srgbClr val="F5F6F8"/>
+          </a:solidFill>
+          <a:ln w="9525">
+            <a:solidFill>
+              <a:srgbClr val="D0D5DF"/>
+            </a:solidFill>
+          </a:ln>
+        </p:spPr>
+        <p:style>
+          <a:lnRef idx="1">
+            <a:schemeClr val="accent1"/>
+          </a:lnRef>
+          <a:fillRef idx="3">
+            <a:schemeClr val="accent1"/>
+          </a:fillRef>
+          <a:effectRef idx="2">
+            <a:schemeClr val="accent1"/>
+          </a:effectRef>
+          <a:fontRef idx="minor">
+            <a:schemeClr val="lt1"/>
+          </a:fontRef>
+        </p:style>
+        <p:txBody>
+          <a:bodyPr rtlCol="0" anchor="ctr"/>
+          <a:lstStyle/>
+          <a:p>
+            <a:pPr algn="ctr"/>
+          </a:p>
+        </p:txBody>
+      </p:sp>
+      <p:sp>
+        <p:nvSpPr>
+          <p:cNvPr id="21" name="Rectangle 20"/>
+          <p:cNvSpPr/>
+          <p:nvPr/>
+        </p:nvSpPr>
+        <p:spPr>
+          <a:xfrm>
+            <a:off x="457200" y="4434840"/>
+            <a:ext cx="329184" cy="329184"/>
+          </a:xfrm>
+          <a:prstGeom prst="rect">
+            <a:avLst/>
+          </a:prstGeom>
+          <a:solidFill>
+            <a:srgbClr val="0078C8"/>
+          </a:solidFill>
+          <a:ln>
+            <a:noFill/>
+          </a:ln>
+        </p:spPr>
+        <p:style>
+          <a:lnRef idx="1">
+            <a:schemeClr val="accent1"/>
+          </a:lnRef>
+          <a:fillRef idx="3">
+            <a:schemeClr val="accent1"/>
+          </a:fillRef>
+          <a:effectRef idx="2">
+            <a:schemeClr val="accent1"/>
+          </a:effectRef>
+          <a:fontRef idx="minor">
+            <a:schemeClr val="lt1"/>
+          </a:fontRef>
+        </p:style>
+        <p:txBody>
+          <a:bodyPr rtlCol="0" anchor="ctr"/>
+          <a:lstStyle/>
+          <a:p>
+            <a:pPr algn="ctr"/>
+          </a:p>
+        </p:txBody>
+      </p:sp>
+      <p:sp>
+        <p:nvSpPr>
+          <p:cNvPr id="22" name="TextBox 21"/>
+          <p:cNvSpPr txBox="1"/>
+          <p:nvPr/>
+        </p:nvSpPr>
+        <p:spPr>
+          <a:xfrm>
+            <a:off x="502920" y="4453128"/>
+            <a:ext cx="237744" cy="292608"/>
+          </a:xfrm>
+          <a:prstGeom prst="rect">
+            <a:avLst/>
+          </a:prstGeom>
+          <a:noFill/>
+        </p:spPr>
+        <p:txBody>
+          <a:bodyPr wrap="square">
+            <a:spAutoFit/>
+          </a:bodyPr>
+          <a:lstStyle/>
+          <a:p>
+            <a:pPr algn="ctr"/>
+            <a:r>
+              <a:rPr sz="1400" b="1" i="0">
+                <a:solidFill>
+                  <a:srgbClr val="FFFFFF"/>
+                </a:solidFill>
+              </a:rPr>
+              <a:t>3</a:t>
+            </a:r>
+          </a:p>
+        </p:txBody>
+      </p:sp>
+      <p:sp>
+        <p:nvSpPr>
+          <p:cNvPr id="23" name="TextBox 22"/>
+          <p:cNvSpPr txBox="1"/>
+          <p:nvPr/>
+        </p:nvSpPr>
+        <p:spPr>
+          <a:xfrm>
+            <a:off x="868680" y="4434840"/>
+            <a:ext cx="5074920" cy="384048"/>
+          </a:xfrm>
+          <a:prstGeom prst="rect">
+            <a:avLst/>
+          </a:prstGeom>
+          <a:noFill/>
+        </p:spPr>
+        <p:txBody>
+          <a:bodyPr wrap="square">
+            <a:spAutoFit/>
+          </a:bodyPr>
+          <a:lstStyle/>
+          <a:p>
+            <a:pPr algn="l"/>
+            <a:r>
+              <a:rPr sz="1200" b="1" i="0">
+                <a:solidFill>
+                  <a:srgbClr val="0F1E42"/>
+                </a:solidFill>
+              </a:rPr>
+              <a:t>Add uncertainty quantification</a:t>
+            </a:r>
+          </a:p>
+        </p:txBody>
+      </p:sp>
+      <p:sp>
+        <p:nvSpPr>
+          <p:cNvPr id="24" name="TextBox 23"/>
+          <p:cNvSpPr txBox="1"/>
+          <p:nvPr/>
+        </p:nvSpPr>
+        <p:spPr>
+          <a:xfrm>
+            <a:off x="868680" y="4846320"/>
+            <a:ext cx="5074920" cy="777240"/>
+          </a:xfrm>
+          <a:prstGeom prst="rect">
+            <a:avLst/>
+          </a:prstGeom>
+          <a:noFill/>
+        </p:spPr>
+        <p:txBody>
+          <a:bodyPr wrap="square">
+            <a:spAutoFit/>
+          </a:bodyPr>
+          <a:lstStyle/>
+          <a:p>
+            <a:pPr algn="l"/>
+            <a:r>
+              <a:rPr sz="1000" b="0" i="0">
+                <a:solidFill>
+                  <a:srgbClr val="50596E"/>
+                </a:solidFill>
+              </a:rPr>
+              <a:t>Conformal prediction or quantile regression — flag low-confidence picks for the experiment loop.</a:t>
+            </a:r>
+          </a:p>
+        </p:txBody>
+      </p:sp>
+      <p:sp>
+        <p:nvSpPr>
+          <p:cNvPr id="25" name="Rectangle 24"/>
+          <p:cNvSpPr/>
+          <p:nvPr/>
+        </p:nvSpPr>
+        <p:spPr>
+          <a:xfrm>
+            <a:off x="6263640" y="1325880"/>
+            <a:ext cx="5669280" cy="1417320"/>
+          </a:xfrm>
+          <a:prstGeom prst="rect">
+            <a:avLst/>
+          </a:prstGeom>
+          <a:solidFill>
+            <a:srgbClr val="F5F6F8"/>
+          </a:solidFill>
+          <a:ln w="9525">
+            <a:solidFill>
+              <a:srgbClr val="D0D5DF"/>
+            </a:solidFill>
+          </a:ln>
+        </p:spPr>
+        <p:style>
+          <a:lnRef idx="1">
+            <a:schemeClr val="accent1"/>
+          </a:lnRef>
+          <a:fillRef idx="3">
+            <a:schemeClr val="accent1"/>
+          </a:fillRef>
+          <a:effectRef idx="2">
+            <a:schemeClr val="accent1"/>
+          </a:effectRef>
+          <a:fontRef idx="minor">
+            <a:schemeClr val="lt1"/>
+          </a:fontRef>
+        </p:style>
+        <p:txBody>
+          <a:bodyPr rtlCol="0" anchor="ctr"/>
+          <a:lstStyle/>
+          <a:p>
+            <a:pPr algn="ctr"/>
+          </a:p>
+        </p:txBody>
+      </p:sp>
+      <p:sp>
+        <p:nvSpPr>
+          <p:cNvPr id="26" name="Rectangle 25"/>
+          <p:cNvSpPr/>
+          <p:nvPr/>
+        </p:nvSpPr>
+        <p:spPr>
+          <a:xfrm>
+            <a:off x="6355080" y="1417320"/>
+            <a:ext cx="329184" cy="329184"/>
+          </a:xfrm>
+          <a:prstGeom prst="rect">
+            <a:avLst/>
+          </a:prstGeom>
+          <a:solidFill>
+            <a:srgbClr val="0078C8"/>
+          </a:solidFill>
+          <a:ln>
+            <a:noFill/>
+          </a:ln>
+        </p:spPr>
+        <p:style>
+          <a:lnRef idx="1">
+            <a:schemeClr val="accent1"/>
+          </a:lnRef>
+          <a:fillRef idx="3">
+            <a:schemeClr val="accent1"/>
+          </a:fillRef>
+          <a:effectRef idx="2">
+            <a:schemeClr val="accent1"/>
+          </a:effectRef>
+          <a:fontRef idx="minor">
+            <a:schemeClr val="lt1"/>
+          </a:fontRef>
+        </p:style>
+        <p:txBody>
+          <a:bodyPr rtlCol="0" anchor="ctr"/>
+          <a:lstStyle/>
+          <a:p>
+            <a:pPr algn="ctr"/>
+          </a:p>
+        </p:txBody>
+      </p:sp>
+      <p:sp>
+        <p:nvSpPr>
+          <p:cNvPr id="27" name="TextBox 26"/>
+          <p:cNvSpPr txBox="1"/>
+          <p:nvPr/>
+        </p:nvSpPr>
+        <p:spPr>
+          <a:xfrm>
+            <a:off x="6400800" y="1435608"/>
+            <a:ext cx="237744" cy="292608"/>
+          </a:xfrm>
+          <a:prstGeom prst="rect">
+            <a:avLst/>
+          </a:prstGeom>
+          <a:noFill/>
+        </p:spPr>
+        <p:txBody>
+          <a:bodyPr wrap="square">
+            <a:spAutoFit/>
+          </a:bodyPr>
+          <a:lstStyle/>
+          <a:p>
+            <a:pPr algn="ctr"/>
+            <a:r>
+              <a:rPr sz="1400" b="1" i="0">
+                <a:solidFill>
+                  <a:srgbClr val="FFFFFF"/>
+                </a:solidFill>
+              </a:rPr>
+              <a:t>4</a:t>
+            </a:r>
+          </a:p>
+        </p:txBody>
+      </p:sp>
+      <p:sp>
+        <p:nvSpPr>
+          <p:cNvPr id="28" name="TextBox 27"/>
+          <p:cNvSpPr txBox="1"/>
+          <p:nvPr/>
+        </p:nvSpPr>
+        <p:spPr>
+          <a:xfrm>
+            <a:off x="6766560" y="1417320"/>
+            <a:ext cx="5074920" cy="384048"/>
+          </a:xfrm>
+          <a:prstGeom prst="rect">
+            <a:avLst/>
+          </a:prstGeom>
+          <a:noFill/>
+        </p:spPr>
+        <p:txBody>
+          <a:bodyPr wrap="square">
+            <a:spAutoFit/>
+          </a:bodyPr>
+          <a:lstStyle/>
+          <a:p>
+            <a:pPr algn="l"/>
+            <a:r>
+              <a:rPr sz="1200" b="1" i="0">
+                <a:solidFill>
+                  <a:srgbClr val="0F1E42"/>
+                </a:solidFill>
+              </a:rPr>
+              <a:t>Stack DRST + KMM inside Prior FT</a:t>
+            </a:r>
+          </a:p>
+        </p:txBody>
+      </p:sp>
+      <p:sp>
+        <p:nvSpPr>
+          <p:cNvPr id="29" name="TextBox 28"/>
+          <p:cNvSpPr txBox="1"/>
+          <p:nvPr/>
+        </p:nvSpPr>
+        <p:spPr>
+          <a:xfrm>
+            <a:off x="6766560" y="1828800"/>
+            <a:ext cx="5074920" cy="777240"/>
+          </a:xfrm>
+          <a:prstGeom prst="rect">
+            <a:avLst/>
+          </a:prstGeom>
+          <a:noFill/>
+        </p:spPr>
+        <p:txBody>
+          <a:bodyPr wrap="square">
+            <a:spAutoFit/>
+          </a:bodyPr>
+          <a:lstStyle/>
+          <a:p>
+            <a:pPr algn="l"/>
+            <a:r>
+              <a:rPr sz="1000" b="0" i="0">
+                <a:solidFill>
+                  <a:srgbClr val="50596E"/>
+                </a:solidFill>
+              </a:rPr>
+              <a:t>Run them as one integrated pipeline rather than three separate methods.</a:t>
+            </a:r>
+          </a:p>
+        </p:txBody>
+      </p:sp>
+      <p:sp>
+        <p:nvSpPr>
+          <p:cNvPr id="30" name="Rectangle 29"/>
+          <p:cNvSpPr/>
+          <p:nvPr/>
+        </p:nvSpPr>
+        <p:spPr>
+          <a:xfrm>
+            <a:off x="6263640" y="2834639"/>
+            <a:ext cx="5669280" cy="1417320"/>
+          </a:xfrm>
+          <a:prstGeom prst="rect">
+            <a:avLst/>
+          </a:prstGeom>
+          <a:solidFill>
+            <a:srgbClr val="F5F6F8"/>
+          </a:solidFill>
+          <a:ln w="9525">
+            <a:solidFill>
+              <a:srgbClr val="D0D5DF"/>
+            </a:solidFill>
+          </a:ln>
+        </p:spPr>
+        <p:style>
+          <a:lnRef idx="1">
+            <a:schemeClr val="accent1"/>
+          </a:lnRef>
+          <a:fillRef idx="3">
+            <a:schemeClr val="accent1"/>
+          </a:fillRef>
+          <a:effectRef idx="2">
+            <a:schemeClr val="accent1"/>
+          </a:effectRef>
+          <a:fontRef idx="minor">
+            <a:schemeClr val="lt1"/>
+          </a:fontRef>
+        </p:style>
+        <p:txBody>
+          <a:bodyPr rtlCol="0" anchor="ctr"/>
+          <a:lstStyle/>
+          <a:p>
+            <a:pPr algn="ctr"/>
+          </a:p>
+        </p:txBody>
+      </p:sp>
+      <p:sp>
+        <p:nvSpPr>
+          <p:cNvPr id="31" name="Rectangle 30"/>
+          <p:cNvSpPr/>
+          <p:nvPr/>
+        </p:nvSpPr>
+        <p:spPr>
+          <a:xfrm>
+            <a:off x="6355080" y="2926079"/>
+            <a:ext cx="329184" cy="329184"/>
+          </a:xfrm>
+          <a:prstGeom prst="rect">
+            <a:avLst/>
+          </a:prstGeom>
+          <a:solidFill>
+            <a:srgbClr val="0078C8"/>
+          </a:solidFill>
+          <a:ln>
+            <a:noFill/>
+          </a:ln>
+        </p:spPr>
+        <p:style>
+          <a:lnRef idx="1">
+            <a:schemeClr val="accent1"/>
+          </a:lnRef>
+          <a:fillRef idx="3">
+            <a:schemeClr val="accent1"/>
+          </a:fillRef>
+          <a:effectRef idx="2">
+            <a:schemeClr val="accent1"/>
+          </a:effectRef>
+          <a:fontRef idx="minor">
+            <a:schemeClr val="lt1"/>
+          </a:fontRef>
+        </p:style>
+        <p:txBody>
+          <a:bodyPr rtlCol="0" anchor="ctr"/>
+          <a:lstStyle/>
+          <a:p>
+            <a:pPr algn="ctr"/>
+          </a:p>
+        </p:txBody>
+      </p:sp>
+      <p:sp>
+        <p:nvSpPr>
+          <p:cNvPr id="32" name="TextBox 31"/>
+          <p:cNvSpPr txBox="1"/>
+          <p:nvPr/>
+        </p:nvSpPr>
+        <p:spPr>
+          <a:xfrm>
+            <a:off x="6400800" y="2944367"/>
+            <a:ext cx="237744" cy="292608"/>
+          </a:xfrm>
+          <a:prstGeom prst="rect">
+            <a:avLst/>
+          </a:prstGeom>
+          <a:noFill/>
+        </p:spPr>
+        <p:txBody>
+          <a:bodyPr wrap="square">
+            <a:spAutoFit/>
+          </a:bodyPr>
+          <a:lstStyle/>
+          <a:p>
+            <a:pPr algn="ctr"/>
+            <a:r>
+              <a:rPr sz="1400" b="1" i="0">
+                <a:solidFill>
+                  <a:srgbClr val="FFFFFF"/>
+                </a:solidFill>
+              </a:rPr>
+              <a:t>5</a:t>
+            </a:r>
+          </a:p>
+        </p:txBody>
+      </p:sp>
+      <p:sp>
+        <p:nvSpPr>
+          <p:cNvPr id="33" name="TextBox 32"/>
+          <p:cNvSpPr txBox="1"/>
+          <p:nvPr/>
+        </p:nvSpPr>
+        <p:spPr>
+          <a:xfrm>
+            <a:off x="6766560" y="2926079"/>
+            <a:ext cx="5074920" cy="384048"/>
+          </a:xfrm>
+          <a:prstGeom prst="rect">
+            <a:avLst/>
+          </a:prstGeom>
+          <a:noFill/>
+        </p:spPr>
+        <p:txBody>
+          <a:bodyPr wrap="square">
+            <a:spAutoFit/>
+          </a:bodyPr>
+          <a:lstStyle/>
+          <a:p>
+            <a:pPr algn="l"/>
+            <a:r>
+              <a:rPr sz="1200" b="1" i="0">
+                <a:solidFill>
+                  <a:srgbClr val="0F1E42"/>
+                </a:solidFill>
+              </a:rPr>
+              <a:t>Neural domain adaptation (DANN, CORAL)</a:t>
+            </a:r>
+          </a:p>
+        </p:txBody>
+      </p:sp>
+      <p:sp>
+        <p:nvSpPr>
+          <p:cNvPr id="34" name="TextBox 33"/>
+          <p:cNvSpPr txBox="1"/>
+          <p:nvPr/>
+        </p:nvSpPr>
+        <p:spPr>
+          <a:xfrm>
+            <a:off x="6766560" y="3337559"/>
+            <a:ext cx="5074920" cy="777240"/>
+          </a:xfrm>
+          <a:prstGeom prst="rect">
+            <a:avLst/>
+          </a:prstGeom>
+          <a:noFill/>
+        </p:spPr>
+        <p:txBody>
+          <a:bodyPr wrap="square">
+            <a:spAutoFit/>
+          </a:bodyPr>
+          <a:lstStyle/>
+          <a:p>
+            <a:pPr algn="l"/>
+            <a:r>
+              <a:rPr sz="1000" b="0" i="0">
+                <a:solidFill>
+                  <a:srgbClr val="50596E"/>
+                </a:solidFill>
+              </a:rPr>
+              <a:t>More powerful once the feature set is richer — currently under-powered.</a:t>
+            </a:r>
+          </a:p>
+        </p:txBody>
+      </p:sp>
+      <p:sp>
+        <p:nvSpPr>
+          <p:cNvPr id="35" name="Rectangle 34"/>
+          <p:cNvSpPr/>
+          <p:nvPr/>
+        </p:nvSpPr>
+        <p:spPr>
+          <a:xfrm>
+            <a:off x="6263640" y="4343400"/>
+            <a:ext cx="5669280" cy="1417320"/>
+          </a:xfrm>
+          <a:prstGeom prst="rect">
+            <a:avLst/>
+          </a:prstGeom>
+          <a:solidFill>
+            <a:srgbClr val="F5F6F8"/>
+          </a:solidFill>
+          <a:ln w="9525">
+            <a:solidFill>
+              <a:srgbClr val="D0D5DF"/>
+            </a:solidFill>
+          </a:ln>
+        </p:spPr>
+        <p:style>
+          <a:lnRef idx="1">
+            <a:schemeClr val="accent1"/>
+          </a:lnRef>
+          <a:fillRef idx="3">
+            <a:schemeClr val="accent1"/>
+          </a:fillRef>
+          <a:effectRef idx="2">
+            <a:schemeClr val="accent1"/>
+          </a:effectRef>
+          <a:fontRef idx="minor">
+            <a:schemeClr val="lt1"/>
+          </a:fontRef>
+        </p:style>
+        <p:txBody>
+          <a:bodyPr rtlCol="0" anchor="ctr"/>
+          <a:lstStyle/>
+          <a:p>
+            <a:pPr algn="ctr"/>
+          </a:p>
+        </p:txBody>
+      </p:sp>
+      <p:sp>
+        <p:nvSpPr>
+          <p:cNvPr id="36" name="Rectangle 35"/>
+          <p:cNvSpPr/>
+          <p:nvPr/>
+        </p:nvSpPr>
+        <p:spPr>
+          <a:xfrm>
+            <a:off x="6355080" y="4434840"/>
+            <a:ext cx="329184" cy="329184"/>
+          </a:xfrm>
+          <a:prstGeom prst="rect">
+            <a:avLst/>
+          </a:prstGeom>
+          <a:solidFill>
+            <a:srgbClr val="0078C8"/>
+          </a:solidFill>
+          <a:ln>
+            <a:noFill/>
+          </a:ln>
+        </p:spPr>
+        <p:style>
+          <a:lnRef idx="1">
+            <a:schemeClr val="accent1"/>
+          </a:lnRef>
+          <a:fillRef idx="3">
+            <a:schemeClr val="accent1"/>
+          </a:fillRef>
+          <a:effectRef idx="2">
+            <a:schemeClr val="accent1"/>
+          </a:effectRef>
+          <a:fontRef idx="minor">
+            <a:schemeClr val="lt1"/>
+          </a:fontRef>
+        </p:style>
+        <p:txBody>
+          <a:bodyPr rtlCol="0" anchor="ctr"/>
+          <a:lstStyle/>
+          <a:p>
+            <a:pPr algn="ctr"/>
+          </a:p>
+        </p:txBody>
+      </p:sp>
+      <p:sp>
+        <p:nvSpPr>
+          <p:cNvPr id="37" name="TextBox 36"/>
+          <p:cNvSpPr txBox="1"/>
+          <p:nvPr/>
+        </p:nvSpPr>
+        <p:spPr>
+          <a:xfrm>
+            <a:off x="6400800" y="4453128"/>
+            <a:ext cx="237744" cy="292608"/>
+          </a:xfrm>
+          <a:prstGeom prst="rect">
+            <a:avLst/>
+          </a:prstGeom>
+          <a:noFill/>
+        </p:spPr>
+        <p:txBody>
+          <a:bodyPr wrap="square">
+            <a:spAutoFit/>
+          </a:bodyPr>
+          <a:lstStyle/>
+          <a:p>
+            <a:pPr algn="ctr"/>
+            <a:r>
+              <a:rPr sz="1400" b="1" i="0">
+                <a:solidFill>
+                  <a:srgbClr val="FFFFFF"/>
+                </a:solidFill>
+              </a:rPr>
+              <a:t>6</a:t>
+            </a:r>
+          </a:p>
+        </p:txBody>
+      </p:sp>
+      <p:sp>
+        <p:nvSpPr>
+          <p:cNvPr id="38" name="TextBox 37"/>
+          <p:cNvSpPr txBox="1"/>
+          <p:nvPr/>
+        </p:nvSpPr>
+        <p:spPr>
+          <a:xfrm>
+            <a:off x="6766560" y="4434840"/>
+            <a:ext cx="5074920" cy="384048"/>
+          </a:xfrm>
+          <a:prstGeom prst="rect">
+            <a:avLst/>
+          </a:prstGeom>
+          <a:noFill/>
+        </p:spPr>
+        <p:txBody>
+          <a:bodyPr wrap="square">
+            <a:spAutoFit/>
+          </a:bodyPr>
+          <a:lstStyle/>
+          <a:p>
+            <a:pPr algn="l"/>
+            <a:r>
+              <a:rPr sz="1200" b="1" i="0">
+                <a:solidFill>
+                  <a:srgbClr val="0F1E42"/>
+                </a:solidFill>
+              </a:rPr>
+              <a:t>Close the active-learning loop</a:t>
+            </a:r>
+          </a:p>
+        </p:txBody>
+      </p:sp>
+      <p:sp>
+        <p:nvSpPr>
+          <p:cNvPr id="39" name="TextBox 38"/>
+          <p:cNvSpPr txBox="1"/>
+          <p:nvPr/>
+        </p:nvSpPr>
+        <p:spPr>
+          <a:xfrm>
+            <a:off x="6766560" y="4846320"/>
+            <a:ext cx="5074920" cy="777240"/>
+          </a:xfrm>
+          <a:prstGeom prst="rect">
+            <a:avLst/>
+          </a:prstGeom>
+          <a:noFill/>
+        </p:spPr>
+        <p:txBody>
+          <a:bodyPr wrap="square">
+            <a:spAutoFit/>
+          </a:bodyPr>
+          <a:lstStyle/>
+          <a:p>
+            <a:pPr algn="l"/>
+            <a:r>
+              <a:rPr sz="1000" b="0" i="0">
+                <a:solidFill>
+                  <a:srgbClr val="50596E"/>
+                </a:solidFill>
+              </a:rPr>
+              <a:t>Model proposes → lab measures → model retrains. Reduces label shift over time.</a:t>
+            </a:r>
+          </a:p>
+        </p:txBody>
+      </p:sp>
+    </p:spTree>
+  </p:cSld>
+  <p:clrMapOvr>
+    <a:masterClrMapping/>
+  </p:clrMapOvr>
+</p:sld>
+</file>
+
+<file path=ppt/slides/slide13.xml><?xml version="1.0" encoding="utf-8"?>
+<p:sld xmlns:a="http://schemas.openxmlformats.org/drawingml/2006/main" xmlns:p="http://schemas.openxmlformats.org/presentationml/2006/main" xmlns:r="http://schemas.openxmlformats.org/officeDocument/2006/relationships">
+  <p:cSld>
+    <p:spTree>
+      <p:nvGrpSpPr>
+        <p:cNvPr id="1" name=""/>
+        <p:cNvGrpSpPr/>
+        <p:nvPr/>
+      </p:nvGrpSpPr>
+      <p:grpSpPr/>
+      <p:sp>
+        <p:nvSpPr>
+          <p:cNvPr id="2" name="Rectangle 1"/>
+          <p:cNvSpPr/>
+          <p:nvPr/>
+        </p:nvSpPr>
+        <p:spPr>
+          <a:xfrm>
+            <a:off x="0" y="0"/>
+            <a:ext cx="12188952" cy="6858000"/>
+          </a:xfrm>
+          <a:prstGeom prst="rect">
+            <a:avLst/>
+          </a:prstGeom>
+          <a:solidFill>
+            <a:srgbClr val="FFFFFF"/>
+          </a:solidFill>
+          <a:ln>
+            <a:noFill/>
+          </a:ln>
+        </p:spPr>
+        <p:style>
+          <a:lnRef idx="1">
+            <a:schemeClr val="accent1"/>
+          </a:lnRef>
+          <a:fillRef idx="3">
+            <a:schemeClr val="accent1"/>
+          </a:fillRef>
+          <a:effectRef idx="2">
+            <a:schemeClr val="accent1"/>
+          </a:effectRef>
+          <a:fontRef idx="minor">
+            <a:schemeClr val="lt1"/>
+          </a:fontRef>
+        </p:style>
+        <p:txBody>
+          <a:bodyPr rtlCol="0" anchor="ctr"/>
+          <a:lstStyle/>
+          <a:p>
+            <a:pPr algn="ctr"/>
+          </a:p>
+        </p:txBody>
+      </p:sp>
+      <p:sp>
+        <p:nvSpPr>
+          <p:cNvPr id="3" name="Rectangle 2"/>
+          <p:cNvSpPr/>
+          <p:nvPr/>
+        </p:nvSpPr>
+        <p:spPr>
+          <a:xfrm>
+            <a:off x="0" y="0"/>
+            <a:ext cx="12188952" cy="868680"/>
+          </a:xfrm>
+          <a:prstGeom prst="rect">
+            <a:avLst/>
+          </a:prstGeom>
+          <a:solidFill>
+            <a:srgbClr val="0F1E42"/>
+          </a:solidFill>
+          <a:ln>
+            <a:noFill/>
+          </a:ln>
+        </p:spPr>
+        <p:style>
+          <a:lnRef idx="1">
+            <a:schemeClr val="accent1"/>
+          </a:lnRef>
+          <a:fillRef idx="3">
+            <a:schemeClr val="accent1"/>
+          </a:fillRef>
+          <a:effectRef idx="2">
+            <a:schemeClr val="accent1"/>
+          </a:effectRef>
+          <a:fontRef idx="minor">
+            <a:schemeClr val="lt1"/>
+          </a:fontRef>
+        </p:style>
+        <p:txBody>
+          <a:bodyPr rtlCol="0" anchor="ctr"/>
+          <a:lstStyle/>
+          <a:p>
+            <a:pPr algn="ctr"/>
+          </a:p>
+        </p:txBody>
+      </p:sp>
+      <p:sp>
+        <p:nvSpPr>
+          <p:cNvPr id="4" name="TextBox 3"/>
+          <p:cNvSpPr txBox="1"/>
+          <p:nvPr/>
+        </p:nvSpPr>
+        <p:spPr>
+          <a:xfrm>
+            <a:off x="365760" y="164592"/>
+            <a:ext cx="11457432" cy="502920"/>
+          </a:xfrm>
+          <a:prstGeom prst="rect">
+            <a:avLst/>
+          </a:prstGeom>
+          <a:noFill/>
+        </p:spPr>
+        <p:txBody>
+          <a:bodyPr wrap="square">
+            <a:spAutoFit/>
+          </a:bodyPr>
+          <a:lstStyle/>
+          <a:p>
+            <a:pPr algn="l"/>
+            <a:r>
+              <a:rPr sz="2200" b="1" i="0">
+                <a:solidFill>
+                  <a:srgbClr val="FFFFFF"/>
+                </a:solidFill>
+              </a:rPr>
+              <a:t>Summary</a:t>
+            </a:r>
+          </a:p>
+        </p:txBody>
+      </p:sp>
+      <p:sp>
+        <p:nvSpPr>
+          <p:cNvPr id="5" name="Rectangle 4"/>
+          <p:cNvSpPr/>
+          <p:nvPr/>
+        </p:nvSpPr>
+        <p:spPr>
+          <a:xfrm>
+            <a:off x="0" y="6510528"/>
+            <a:ext cx="12188952" cy="347472"/>
+          </a:xfrm>
+          <a:prstGeom prst="rect">
+            <a:avLst/>
+          </a:prstGeom>
+          <a:solidFill>
+            <a:srgbClr val="0F1E42"/>
+          </a:solidFill>
+          <a:ln>
+            <a:noFill/>
+          </a:ln>
+        </p:spPr>
+        <p:style>
+          <a:lnRef idx="1">
+            <a:schemeClr val="accent1"/>
+          </a:lnRef>
+          <a:fillRef idx="3">
+            <a:schemeClr val="accent1"/>
+          </a:fillRef>
+          <a:effectRef idx="2">
+            <a:schemeClr val="accent1"/>
+          </a:effectRef>
+          <a:fontRef idx="minor">
+            <a:schemeClr val="lt1"/>
+          </a:fontRef>
+        </p:style>
+        <p:txBody>
+          <a:bodyPr rtlCol="0" anchor="ctr"/>
+          <a:lstStyle/>
+          <a:p>
+            <a:pPr algn="ctr"/>
+          </a:p>
+        </p:txBody>
+      </p:sp>
+      <p:sp>
+        <p:nvSpPr>
+          <p:cNvPr id="6" name="TextBox 5"/>
+          <p:cNvSpPr txBox="1"/>
+          <p:nvPr/>
+        </p:nvSpPr>
+        <p:spPr>
+          <a:xfrm>
+            <a:off x="182880" y="6528816"/>
+            <a:ext cx="11823192" cy="310896"/>
+          </a:xfrm>
+          <a:prstGeom prst="rect">
+            <a:avLst/>
+          </a:prstGeom>
+          <a:noFill/>
+        </p:spPr>
+        <p:txBody>
+          <a:bodyPr wrap="square">
+            <a:spAutoFit/>
+          </a:bodyPr>
+          <a:lstStyle/>
+          <a:p>
+            <a:pPr algn="l"/>
+            <a:r>
+              <a:rPr sz="900" b="0" i="0">
+                <a:solidFill>
+                  <a:srgbClr val="CCCCCC"/>
+                </a:solidFill>
+              </a:rPr>
+              <a:t>OCM Dataset Integration   |   Slide 13 / 13</a:t>
             </a:r>
           </a:p>
         </p:txBody>
@@ -7020,7 +7845,7 @@
         <p:spPr>
           <a:xfrm>
             <a:off x="0" y="0"/>
-            <a:ext cx="12188952" cy="868680"/>
+            <a:ext cx="12188952" cy="1097280"/>
           </a:xfrm>
           <a:prstGeom prst="rect">
             <a:avLst/>
@@ -7090,7 +7915,41 @@
       </p:sp>
       <p:sp>
         <p:nvSpPr>
-          <p:cNvPr id="5" name="Rectangle 4"/>
+          <p:cNvPr id="5" name="TextBox 4"/>
+          <p:cNvSpPr txBox="1"/>
+          <p:nvPr/>
+        </p:nvSpPr>
+        <p:spPr>
+          <a:xfrm>
+            <a:off x="365760" y="658368"/>
+            <a:ext cx="11457432" cy="365760"/>
+          </a:xfrm>
+          <a:prstGeom prst="rect">
+            <a:avLst/>
+          </a:prstGeom>
+          <a:noFill/>
+        </p:spPr>
+        <p:txBody>
+          <a:bodyPr wrap="square">
+            <a:spAutoFit/>
+          </a:bodyPr>
+          <a:lstStyle/>
+          <a:p>
+            <a:pPr algn="l"/>
+            <a:r>
+              <a:rPr sz="1100" b="0" i="1">
+                <a:solidFill>
+                  <a:srgbClr val="BBCCEE"/>
+                </a:solidFill>
+              </a:rPr>
+              <a:t>Chapter 1</a:t>
+            </a:r>
+          </a:p>
+        </p:txBody>
+      </p:sp>
+      <p:sp>
+        <p:nvSpPr>
+          <p:cNvPr id="6" name="Rectangle 5"/>
           <p:cNvSpPr/>
           <p:nvPr/>
         </p:nvSpPr>
@@ -7133,7 +7992,7 @@
       </p:sp>
       <p:sp>
         <p:nvSpPr>
-          <p:cNvPr id="6" name="TextBox 5"/>
+          <p:cNvPr id="7" name="TextBox 6"/>
           <p:cNvSpPr txBox="1"/>
           <p:nvPr/>
         </p:nvSpPr>
@@ -7160,14 +8019,14 @@
                   <a:srgbClr val="CCCCCC"/>
                 </a:solidFill>
               </a:rPr>
-              <a:t>OCM Dataset Integration   |   Slide 2 / 12</a:t>
-            </a:r>
-          </a:p>
-        </p:txBody>
-      </p:sp>
-      <p:sp>
-        <p:nvSpPr>
-          <p:cNvPr id="7" name="Rectangle 6"/>
+              <a:t>OCM Dataset Integration   |   Slide 2 / 13</a:t>
+            </a:r>
+          </a:p>
+        </p:txBody>
+      </p:sp>
+      <p:sp>
+        <p:nvSpPr>
+          <p:cNvPr id="8" name="Rectangle 7"/>
           <p:cNvSpPr/>
           <p:nvPr/>
         </p:nvSpPr>
@@ -7212,7 +8071,7 @@
       </p:sp>
       <p:sp>
         <p:nvSpPr>
-          <p:cNvPr id="8" name="Rectangle 7"/>
+          <p:cNvPr id="9" name="Rectangle 8"/>
           <p:cNvSpPr/>
           <p:nvPr/>
         </p:nvSpPr>
@@ -7255,7 +8114,7 @@
       </p:sp>
       <p:sp>
         <p:nvSpPr>
-          <p:cNvPr id="9" name="TextBox 8"/>
+          <p:cNvPr id="10" name="TextBox 9"/>
           <p:cNvSpPr txBox="1"/>
           <p:nvPr/>
         </p:nvSpPr>
@@ -7289,7 +8148,7 @@
       </p:sp>
       <p:sp>
         <p:nvSpPr>
-          <p:cNvPr id="10" name="TextBox 9"/>
+          <p:cNvPr id="11" name="TextBox 10"/>
           <p:cNvSpPr txBox="1"/>
           <p:nvPr/>
         </p:nvSpPr>
@@ -7323,7 +8182,7 @@
       </p:sp>
       <p:sp>
         <p:nvSpPr>
-          <p:cNvPr id="11" name="TextBox 10"/>
+          <p:cNvPr id="12" name="TextBox 11"/>
           <p:cNvSpPr txBox="1"/>
           <p:nvPr/>
         </p:nvSpPr>
@@ -7357,7 +8216,7 @@
       </p:sp>
       <p:sp>
         <p:nvSpPr>
-          <p:cNvPr id="12" name="TextBox 11"/>
+          <p:cNvPr id="13" name="TextBox 12"/>
           <p:cNvSpPr txBox="1"/>
           <p:nvPr/>
         </p:nvSpPr>
@@ -7391,7 +8250,7 @@
       </p:sp>
       <p:sp>
         <p:nvSpPr>
-          <p:cNvPr id="13" name="TextBox 12"/>
+          <p:cNvPr id="14" name="TextBox 13"/>
           <p:cNvSpPr txBox="1"/>
           <p:nvPr/>
         </p:nvSpPr>
@@ -7425,7 +8284,7 @@
       </p:sp>
       <p:sp>
         <p:nvSpPr>
-          <p:cNvPr id="14" name="TextBox 13"/>
+          <p:cNvPr id="15" name="TextBox 14"/>
           <p:cNvSpPr txBox="1"/>
           <p:nvPr/>
         </p:nvSpPr>
@@ -7459,7 +8318,7 @@
       </p:sp>
       <p:sp>
         <p:nvSpPr>
-          <p:cNvPr id="15" name="TextBox 14"/>
+          <p:cNvPr id="16" name="TextBox 15"/>
           <p:cNvSpPr txBox="1"/>
           <p:nvPr/>
         </p:nvSpPr>
@@ -7493,7 +8352,7 @@
       </p:sp>
       <p:sp>
         <p:nvSpPr>
-          <p:cNvPr id="16" name="TextBox 15"/>
+          <p:cNvPr id="17" name="TextBox 16"/>
           <p:cNvSpPr txBox="1"/>
           <p:nvPr/>
         </p:nvSpPr>
@@ -7527,7 +8386,7 @@
       </p:sp>
       <p:sp>
         <p:nvSpPr>
-          <p:cNvPr id="17" name="TextBox 16"/>
+          <p:cNvPr id="18" name="TextBox 17"/>
           <p:cNvSpPr txBox="1"/>
           <p:nvPr/>
         </p:nvSpPr>
@@ -7561,7 +8420,7 @@
       </p:sp>
       <p:sp>
         <p:nvSpPr>
-          <p:cNvPr id="18" name="TextBox 17"/>
+          <p:cNvPr id="19" name="TextBox 18"/>
           <p:cNvSpPr txBox="1"/>
           <p:nvPr/>
         </p:nvSpPr>
@@ -7595,7 +8454,7 @@
       </p:sp>
       <p:sp>
         <p:nvSpPr>
-          <p:cNvPr id="19" name="TextBox 18"/>
+          <p:cNvPr id="20" name="TextBox 19"/>
           <p:cNvSpPr txBox="1"/>
           <p:nvPr/>
         </p:nvSpPr>
@@ -7629,7 +8488,7 @@
       </p:sp>
       <p:sp>
         <p:nvSpPr>
-          <p:cNvPr id="20" name="Rectangle 19"/>
+          <p:cNvPr id="21" name="Rectangle 20"/>
           <p:cNvSpPr/>
           <p:nvPr/>
         </p:nvSpPr>
@@ -7674,7 +8533,7 @@
       </p:sp>
       <p:sp>
         <p:nvSpPr>
-          <p:cNvPr id="21" name="Rectangle 20"/>
+          <p:cNvPr id="22" name="Rectangle 21"/>
           <p:cNvSpPr/>
           <p:nvPr/>
         </p:nvSpPr>
@@ -7717,7 +8576,7 @@
       </p:sp>
       <p:sp>
         <p:nvSpPr>
-          <p:cNvPr id="22" name="TextBox 21"/>
+          <p:cNvPr id="23" name="TextBox 22"/>
           <p:cNvSpPr txBox="1"/>
           <p:nvPr/>
         </p:nvSpPr>
@@ -7751,7 +8610,7 @@
       </p:sp>
       <p:sp>
         <p:nvSpPr>
-          <p:cNvPr id="23" name="TextBox 22"/>
+          <p:cNvPr id="24" name="TextBox 23"/>
           <p:cNvSpPr txBox="1"/>
           <p:nvPr/>
         </p:nvSpPr>
@@ -7785,7 +8644,7 @@
       </p:sp>
       <p:sp>
         <p:nvSpPr>
-          <p:cNvPr id="24" name="TextBox 23"/>
+          <p:cNvPr id="25" name="TextBox 24"/>
           <p:cNvSpPr txBox="1"/>
           <p:nvPr/>
         </p:nvSpPr>
@@ -7819,7 +8678,7 @@
       </p:sp>
       <p:sp>
         <p:nvSpPr>
-          <p:cNvPr id="25" name="TextBox 24"/>
+          <p:cNvPr id="26" name="TextBox 25"/>
           <p:cNvSpPr txBox="1"/>
           <p:nvPr/>
         </p:nvSpPr>
@@ -7853,7 +8712,7 @@
       </p:sp>
       <p:sp>
         <p:nvSpPr>
-          <p:cNvPr id="26" name="TextBox 25"/>
+          <p:cNvPr id="27" name="TextBox 26"/>
           <p:cNvSpPr txBox="1"/>
           <p:nvPr/>
         </p:nvSpPr>
@@ -7887,7 +8746,7 @@
       </p:sp>
       <p:sp>
         <p:nvSpPr>
-          <p:cNvPr id="27" name="TextBox 26"/>
+          <p:cNvPr id="28" name="TextBox 27"/>
           <p:cNvSpPr txBox="1"/>
           <p:nvPr/>
         </p:nvSpPr>
@@ -7921,7 +8780,7 @@
       </p:sp>
       <p:sp>
         <p:nvSpPr>
-          <p:cNvPr id="28" name="TextBox 27"/>
+          <p:cNvPr id="29" name="TextBox 28"/>
           <p:cNvSpPr txBox="1"/>
           <p:nvPr/>
         </p:nvSpPr>
@@ -7955,7 +8814,7 @@
       </p:sp>
       <p:sp>
         <p:nvSpPr>
-          <p:cNvPr id="29" name="TextBox 28"/>
+          <p:cNvPr id="30" name="TextBox 29"/>
           <p:cNvSpPr txBox="1"/>
           <p:nvPr/>
         </p:nvSpPr>
@@ -7989,7 +8848,7 @@
       </p:sp>
       <p:sp>
         <p:nvSpPr>
-          <p:cNvPr id="30" name="TextBox 29"/>
+          <p:cNvPr id="31" name="TextBox 30"/>
           <p:cNvSpPr txBox="1"/>
           <p:nvPr/>
         </p:nvSpPr>
@@ -8023,7 +8882,7 @@
       </p:sp>
       <p:sp>
         <p:nvSpPr>
-          <p:cNvPr id="31" name="TextBox 30"/>
+          <p:cNvPr id="32" name="TextBox 31"/>
           <p:cNvSpPr txBox="1"/>
           <p:nvPr/>
         </p:nvSpPr>
@@ -8057,7 +8916,7 @@
       </p:sp>
       <p:sp>
         <p:nvSpPr>
-          <p:cNvPr id="32" name="TextBox 31"/>
+          <p:cNvPr id="33" name="TextBox 32"/>
           <p:cNvSpPr txBox="1"/>
           <p:nvPr/>
         </p:nvSpPr>
@@ -8091,7 +8950,7 @@
       </p:sp>
       <p:sp>
         <p:nvSpPr>
-          <p:cNvPr id="33" name="TextBox 32"/>
+          <p:cNvPr id="34" name="TextBox 33"/>
           <p:cNvSpPr txBox="1"/>
           <p:nvPr/>
         </p:nvSpPr>
@@ -8125,7 +8984,7 @@
       </p:sp>
       <p:sp>
         <p:nvSpPr>
-          <p:cNvPr id="34" name="Rectangle 33"/>
+          <p:cNvPr id="35" name="Rectangle 34"/>
           <p:cNvSpPr/>
           <p:nvPr/>
         </p:nvSpPr>
@@ -8168,7 +9027,7 @@
       </p:sp>
       <p:sp>
         <p:nvSpPr>
-          <p:cNvPr id="35" name="TextBox 34"/>
+          <p:cNvPr id="36" name="TextBox 35"/>
           <p:cNvSpPr txBox="1"/>
           <p:nvPr/>
         </p:nvSpPr>
@@ -8202,7 +9061,7 @@
       </p:sp>
       <p:sp>
         <p:nvSpPr>
-          <p:cNvPr id="36" name="TextBox 35"/>
+          <p:cNvPr id="37" name="TextBox 36"/>
           <p:cNvSpPr txBox="1"/>
           <p:nvPr/>
         </p:nvSpPr>
@@ -8236,7 +9095,7 @@
       </p:sp>
       <p:sp>
         <p:nvSpPr>
-          <p:cNvPr id="37" name="Rectangle 36"/>
+          <p:cNvPr id="38" name="Rectangle 37"/>
           <p:cNvSpPr/>
           <p:nvPr/>
         </p:nvSpPr>
@@ -8279,7 +9138,7 @@
       </p:sp>
       <p:sp>
         <p:nvSpPr>
-          <p:cNvPr id="38" name="TextBox 37"/>
+          <p:cNvPr id="39" name="TextBox 38"/>
           <p:cNvSpPr txBox="1"/>
           <p:nvPr/>
         </p:nvSpPr>
@@ -8313,7 +9172,7 @@
       </p:sp>
       <p:sp>
         <p:nvSpPr>
-          <p:cNvPr id="39" name="TextBox 38"/>
+          <p:cNvPr id="40" name="TextBox 39"/>
           <p:cNvSpPr txBox="1"/>
           <p:nvPr/>
         </p:nvSpPr>
@@ -8347,7 +9206,7 @@
       </p:sp>
       <p:sp>
         <p:nvSpPr>
-          <p:cNvPr id="40" name="Rectangle 39"/>
+          <p:cNvPr id="41" name="Rectangle 40"/>
           <p:cNvSpPr/>
           <p:nvPr/>
         </p:nvSpPr>
@@ -8390,7 +9249,7 @@
       </p:sp>
       <p:sp>
         <p:nvSpPr>
-          <p:cNvPr id="41" name="TextBox 40"/>
+          <p:cNvPr id="42" name="TextBox 41"/>
           <p:cNvSpPr txBox="1"/>
           <p:nvPr/>
         </p:nvSpPr>
@@ -8424,7 +9283,7 @@
       </p:sp>
       <p:sp>
         <p:nvSpPr>
-          <p:cNvPr id="42" name="TextBox 41"/>
+          <p:cNvPr id="43" name="TextBox 42"/>
           <p:cNvSpPr txBox="1"/>
           <p:nvPr/>
         </p:nvSpPr>
@@ -8458,7 +9317,7 @@
       </p:sp>
       <p:sp>
         <p:nvSpPr>
-          <p:cNvPr id="43" name="Rectangle 42"/>
+          <p:cNvPr id="44" name="Rectangle 43"/>
           <p:cNvSpPr/>
           <p:nvPr/>
         </p:nvSpPr>
@@ -8503,7 +9362,7 @@
       </p:sp>
       <p:sp>
         <p:nvSpPr>
-          <p:cNvPr id="44" name="TextBox 43"/>
+          <p:cNvPr id="45" name="TextBox 44"/>
           <p:cNvSpPr txBox="1"/>
           <p:nvPr/>
         </p:nvSpPr>
@@ -8605,7 +9464,7 @@
         <p:spPr>
           <a:xfrm>
             <a:off x="0" y="0"/>
-            <a:ext cx="12188952" cy="868680"/>
+            <a:ext cx="12188952" cy="1097280"/>
           </a:xfrm>
           <a:prstGeom prst="rect">
             <a:avLst/>
@@ -8668,14 +9527,48 @@
                   <a:srgbClr val="FFFFFF"/>
                 </a:solidFill>
               </a:rPr>
-              <a:t>Visualising the Gap — Label Shift, Covariate Shift, Chemistry</a:t>
-            </a:r>
-          </a:p>
-        </p:txBody>
-      </p:sp>
-      <p:sp>
-        <p:nvSpPr>
-          <p:cNvPr id="5" name="Rectangle 4"/>
+              <a:t>Setup — Visualising the Two Shifts</a:t>
+            </a:r>
+          </a:p>
+        </p:txBody>
+      </p:sp>
+      <p:sp>
+        <p:nvSpPr>
+          <p:cNvPr id="5" name="TextBox 4"/>
+          <p:cNvSpPr txBox="1"/>
+          <p:nvPr/>
+        </p:nvSpPr>
+        <p:spPr>
+          <a:xfrm>
+            <a:off x="365760" y="658368"/>
+            <a:ext cx="11457432" cy="365760"/>
+          </a:xfrm>
+          <a:prstGeom prst="rect">
+            <a:avLst/>
+          </a:prstGeom>
+          <a:noFill/>
+        </p:spPr>
+        <p:txBody>
+          <a:bodyPr wrap="square">
+            <a:spAutoFit/>
+          </a:bodyPr>
+          <a:lstStyle/>
+          <a:p>
+            <a:pPr algn="l"/>
+            <a:r>
+              <a:rPr sz="1100" b="0" i="1">
+                <a:solidFill>
+                  <a:srgbClr val="BBCCEE"/>
+                </a:solidFill>
+              </a:rPr>
+              <a:t>Chapter 2</a:t>
+            </a:r>
+          </a:p>
+        </p:txBody>
+      </p:sp>
+      <p:sp>
+        <p:nvSpPr>
+          <p:cNvPr id="6" name="Rectangle 5"/>
           <p:cNvSpPr/>
           <p:nvPr/>
         </p:nvSpPr>
@@ -8718,7 +9611,7 @@
       </p:sp>
       <p:sp>
         <p:nvSpPr>
-          <p:cNvPr id="6" name="TextBox 5"/>
+          <p:cNvPr id="7" name="TextBox 6"/>
           <p:cNvSpPr txBox="1"/>
           <p:nvPr/>
         </p:nvSpPr>
@@ -8745,14 +9638,14 @@
                   <a:srgbClr val="CCCCCC"/>
                 </a:solidFill>
               </a:rPr>
-              <a:t>OCM Dataset Integration   |   Slide 3 / 12</a:t>
+              <a:t>OCM Dataset Integration   |   Slide 3 / 13</a:t>
             </a:r>
           </a:p>
         </p:txBody>
       </p:sp>
       <p:pic>
         <p:nvPicPr>
-          <p:cNvPr id="7" name="Picture 6" descr="fig_walkthrough_label_pca.png"/>
+          <p:cNvPr id="8" name="Picture 7" descr="fig_walkthrough_label_pca.png"/>
           <p:cNvPicPr>
             <a:picLocks noChangeAspect="1"/>
           </p:cNvPicPr>
@@ -8776,7 +9669,7 @@
       </p:pic>
       <p:pic>
         <p:nvPicPr>
-          <p:cNvPr id="8" name="Picture 7" descr="fig_element_usage.png"/>
+          <p:cNvPr id="9" name="Picture 8" descr="fig_element_usage.png"/>
           <p:cNvPicPr>
             <a:picLocks noChangeAspect="1"/>
           </p:cNvPicPr>
@@ -8800,7 +9693,7 @@
       </p:pic>
       <p:sp>
         <p:nvSpPr>
-          <p:cNvPr id="9" name="Rectangle 8"/>
+          <p:cNvPr id="10" name="Rectangle 9"/>
           <p:cNvSpPr/>
           <p:nvPr/>
         </p:nvSpPr>
@@ -8843,7 +9736,7 @@
       </p:sp>
       <p:sp>
         <p:nvSpPr>
-          <p:cNvPr id="10" name="TextBox 9"/>
+          <p:cNvPr id="11" name="TextBox 10"/>
           <p:cNvSpPr txBox="1"/>
           <p:nvPr/>
         </p:nvSpPr>
@@ -8877,7 +9770,7 @@
       </p:sp>
       <p:sp>
         <p:nvSpPr>
-          <p:cNvPr id="11" name="TextBox 10"/>
+          <p:cNvPr id="12" name="TextBox 11"/>
           <p:cNvSpPr txBox="1"/>
           <p:nvPr/>
         </p:nvSpPr>
@@ -8911,7 +9804,7 @@
       </p:sp>
       <p:sp>
         <p:nvSpPr>
-          <p:cNvPr id="12" name="TextBox 11"/>
+          <p:cNvPr id="13" name="TextBox 12"/>
           <p:cNvSpPr txBox="1"/>
           <p:nvPr/>
         </p:nvSpPr>
@@ -8945,7 +9838,7 @@
       </p:sp>
       <p:sp>
         <p:nvSpPr>
-          <p:cNvPr id="13" name="TextBox 12"/>
+          <p:cNvPr id="14" name="TextBox 13"/>
           <p:cNvSpPr txBox="1"/>
           <p:nvPr/>
         </p:nvSpPr>
@@ -8979,7 +9872,7 @@
       </p:sp>
       <p:sp>
         <p:nvSpPr>
-          <p:cNvPr id="14" name="Rectangle 13"/>
+          <p:cNvPr id="15" name="Rectangle 14"/>
           <p:cNvSpPr/>
           <p:nvPr/>
         </p:nvSpPr>
@@ -9022,7 +9915,7 @@
       </p:sp>
       <p:sp>
         <p:nvSpPr>
-          <p:cNvPr id="15" name="TextBox 14"/>
+          <p:cNvPr id="16" name="TextBox 15"/>
           <p:cNvSpPr txBox="1"/>
           <p:nvPr/>
         </p:nvSpPr>
@@ -9056,7 +9949,7 @@
       </p:sp>
       <p:sp>
         <p:nvSpPr>
-          <p:cNvPr id="16" name="TextBox 15"/>
+          <p:cNvPr id="17" name="TextBox 16"/>
           <p:cNvSpPr txBox="1"/>
           <p:nvPr/>
         </p:nvSpPr>
@@ -9090,7 +9983,7 @@
       </p:sp>
       <p:sp>
         <p:nvSpPr>
-          <p:cNvPr id="17" name="TextBox 16"/>
+          <p:cNvPr id="18" name="TextBox 17"/>
           <p:cNvSpPr txBox="1"/>
           <p:nvPr/>
         </p:nvSpPr>
@@ -9124,7 +10017,7 @@
       </p:sp>
       <p:sp>
         <p:nvSpPr>
-          <p:cNvPr id="18" name="TextBox 17"/>
+          <p:cNvPr id="19" name="TextBox 18"/>
           <p:cNvSpPr txBox="1"/>
           <p:nvPr/>
         </p:nvSpPr>
@@ -9158,7 +10051,7 @@
       </p:sp>
       <p:sp>
         <p:nvSpPr>
-          <p:cNvPr id="19" name="Rectangle 18"/>
+          <p:cNvPr id="20" name="Rectangle 19"/>
           <p:cNvSpPr/>
           <p:nvPr/>
         </p:nvSpPr>
@@ -9203,7 +10096,7 @@
       </p:sp>
       <p:sp>
         <p:nvSpPr>
-          <p:cNvPr id="20" name="TextBox 19"/>
+          <p:cNvPr id="21" name="TextBox 20"/>
           <p:cNvSpPr txBox="1"/>
           <p:nvPr/>
         </p:nvSpPr>
@@ -9305,7 +10198,7 @@
         <p:spPr>
           <a:xfrm>
             <a:off x="0" y="0"/>
-            <a:ext cx="12188952" cy="868680"/>
+            <a:ext cx="12188952" cy="1097280"/>
           </a:xfrm>
           <a:prstGeom prst="rect">
             <a:avLst/>
@@ -9375,7 +10268,41 @@
       </p:sp>
       <p:sp>
         <p:nvSpPr>
-          <p:cNvPr id="5" name="Rectangle 4"/>
+          <p:cNvPr id="5" name="TextBox 4"/>
+          <p:cNvSpPr txBox="1"/>
+          <p:nvPr/>
+        </p:nvSpPr>
+        <p:spPr>
+          <a:xfrm>
+            <a:off x="365760" y="658368"/>
+            <a:ext cx="11457432" cy="365760"/>
+          </a:xfrm>
+          <a:prstGeom prst="rect">
+            <a:avLst/>
+          </a:prstGeom>
+          <a:noFill/>
+        </p:spPr>
+        <p:txBody>
+          <a:bodyPr wrap="square">
+            <a:spAutoFit/>
+          </a:bodyPr>
+          <a:lstStyle/>
+          <a:p>
+            <a:pPr algn="l"/>
+            <a:r>
+              <a:rPr sz="1100" b="0" i="1">
+                <a:solidFill>
+                  <a:srgbClr val="BBCCEE"/>
+                </a:solidFill>
+              </a:rPr>
+              <a:t>Chapter 3</a:t>
+            </a:r>
+          </a:p>
+        </p:txBody>
+      </p:sp>
+      <p:sp>
+        <p:nvSpPr>
+          <p:cNvPr id="6" name="Rectangle 5"/>
           <p:cNvSpPr/>
           <p:nvPr/>
         </p:nvSpPr>
@@ -9418,7 +10345,7 @@
       </p:sp>
       <p:sp>
         <p:nvSpPr>
-          <p:cNvPr id="6" name="TextBox 5"/>
+          <p:cNvPr id="7" name="TextBox 6"/>
           <p:cNvSpPr txBox="1"/>
           <p:nvPr/>
         </p:nvSpPr>
@@ -9445,14 +10372,14 @@
                   <a:srgbClr val="CCCCCC"/>
                 </a:solidFill>
               </a:rPr>
-              <a:t>OCM Dataset Integration   |   Slide 4 / 12</a:t>
-            </a:r>
-          </a:p>
-        </p:txBody>
-      </p:sp>
-      <p:sp>
-        <p:nvSpPr>
-          <p:cNvPr id="7" name="Rectangle 6"/>
+              <a:t>OCM Dataset Integration   |   Slide 4 / 13</a:t>
+            </a:r>
+          </a:p>
+        </p:txBody>
+      </p:sp>
+      <p:sp>
+        <p:nvSpPr>
+          <p:cNvPr id="8" name="Rectangle 7"/>
           <p:cNvSpPr/>
           <p:nvPr/>
         </p:nvSpPr>
@@ -9495,7 +10422,7 @@
       </p:sp>
       <p:sp>
         <p:nvSpPr>
-          <p:cNvPr id="8" name="TextBox 7"/>
+          <p:cNvPr id="9" name="TextBox 8"/>
           <p:cNvSpPr txBox="1"/>
           <p:nvPr/>
         </p:nvSpPr>
@@ -9529,7 +10456,7 @@
       </p:sp>
       <p:sp>
         <p:nvSpPr>
-          <p:cNvPr id="9" name="TextBox 8"/>
+          <p:cNvPr id="10" name="TextBox 9"/>
           <p:cNvSpPr txBox="1"/>
           <p:nvPr/>
         </p:nvSpPr>
@@ -9563,7 +10490,7 @@
       </p:sp>
       <p:sp>
         <p:nvSpPr>
-          <p:cNvPr id="10" name="TextBox 9"/>
+          <p:cNvPr id="11" name="TextBox 10"/>
           <p:cNvSpPr txBox="1"/>
           <p:nvPr/>
         </p:nvSpPr>
@@ -9597,7 +10524,7 @@
       </p:sp>
       <p:sp>
         <p:nvSpPr>
-          <p:cNvPr id="11" name="TextBox 10"/>
+          <p:cNvPr id="12" name="TextBox 11"/>
           <p:cNvSpPr txBox="1"/>
           <p:nvPr/>
         </p:nvSpPr>
@@ -9631,7 +10558,7 @@
       </p:sp>
       <p:sp>
         <p:nvSpPr>
-          <p:cNvPr id="12" name="TextBox 11"/>
+          <p:cNvPr id="13" name="TextBox 12"/>
           <p:cNvSpPr txBox="1"/>
           <p:nvPr/>
         </p:nvSpPr>
@@ -9665,7 +10592,7 @@
       </p:sp>
       <p:sp>
         <p:nvSpPr>
-          <p:cNvPr id="13" name="Rectangle 12"/>
+          <p:cNvPr id="14" name="Rectangle 13"/>
           <p:cNvSpPr/>
           <p:nvPr/>
         </p:nvSpPr>
@@ -9708,7 +10635,7 @@
       </p:sp>
       <p:sp>
         <p:nvSpPr>
-          <p:cNvPr id="14" name="TextBox 13"/>
+          <p:cNvPr id="15" name="TextBox 14"/>
           <p:cNvSpPr txBox="1"/>
           <p:nvPr/>
         </p:nvSpPr>
@@ -9742,7 +10669,7 @@
       </p:sp>
       <p:sp>
         <p:nvSpPr>
-          <p:cNvPr id="15" name="TextBox 14"/>
+          <p:cNvPr id="16" name="TextBox 15"/>
           <p:cNvSpPr txBox="1"/>
           <p:nvPr/>
         </p:nvSpPr>
@@ -9776,7 +10703,7 @@
       </p:sp>
       <p:sp>
         <p:nvSpPr>
-          <p:cNvPr id="16" name="TextBox 15"/>
+          <p:cNvPr id="17" name="TextBox 16"/>
           <p:cNvSpPr txBox="1"/>
           <p:nvPr/>
         </p:nvSpPr>
@@ -9810,7 +10737,7 @@
       </p:sp>
       <p:sp>
         <p:nvSpPr>
-          <p:cNvPr id="17" name="TextBox 16"/>
+          <p:cNvPr id="18" name="TextBox 17"/>
           <p:cNvSpPr txBox="1"/>
           <p:nvPr/>
         </p:nvSpPr>
@@ -9844,7 +10771,7 @@
       </p:sp>
       <p:sp>
         <p:nvSpPr>
-          <p:cNvPr id="18" name="Rectangle 17"/>
+          <p:cNvPr id="19" name="Rectangle 18"/>
           <p:cNvSpPr/>
           <p:nvPr/>
         </p:nvSpPr>
@@ -9889,7 +10816,7 @@
       </p:sp>
       <p:sp>
         <p:nvSpPr>
-          <p:cNvPr id="19" name="TextBox 18"/>
+          <p:cNvPr id="20" name="TextBox 19"/>
           <p:cNvSpPr txBox="1"/>
           <p:nvPr/>
         </p:nvSpPr>
@@ -9923,7 +10850,7 @@
       </p:sp>
       <p:sp>
         <p:nvSpPr>
-          <p:cNvPr id="20" name="TextBox 19"/>
+          <p:cNvPr id="21" name="TextBox 20"/>
           <p:cNvSpPr txBox="1"/>
           <p:nvPr/>
         </p:nvSpPr>
@@ -9958,7 +10885,7 @@
       </p:sp>
       <p:sp>
         <p:nvSpPr>
-          <p:cNvPr id="21" name="TextBox 20"/>
+          <p:cNvPr id="22" name="TextBox 21"/>
           <p:cNvSpPr txBox="1"/>
           <p:nvPr/>
         </p:nvSpPr>
@@ -9992,7 +10919,7 @@
       </p:sp>
       <p:sp>
         <p:nvSpPr>
-          <p:cNvPr id="22" name="Rectangle 21"/>
+          <p:cNvPr id="23" name="Rectangle 22"/>
           <p:cNvSpPr/>
           <p:nvPr/>
         </p:nvSpPr>
@@ -10035,7 +10962,7 @@
       </p:sp>
       <p:sp>
         <p:nvSpPr>
-          <p:cNvPr id="23" name="TextBox 22"/>
+          <p:cNvPr id="24" name="TextBox 23"/>
           <p:cNvSpPr txBox="1"/>
           <p:nvPr/>
         </p:nvSpPr>
@@ -10070,7 +10997,7 @@
       </p:sp>
       <p:sp>
         <p:nvSpPr>
-          <p:cNvPr id="24" name="Rectangle 23"/>
+          <p:cNvPr id="25" name="Rectangle 24"/>
           <p:cNvSpPr/>
           <p:nvPr/>
         </p:nvSpPr>
@@ -10113,7 +11040,7 @@
       </p:sp>
       <p:sp>
         <p:nvSpPr>
-          <p:cNvPr id="25" name="TextBox 24"/>
+          <p:cNvPr id="26" name="TextBox 25"/>
           <p:cNvSpPr txBox="1"/>
           <p:nvPr/>
         </p:nvSpPr>
@@ -10148,7 +11075,7 @@
       </p:sp>
       <p:sp>
         <p:nvSpPr>
-          <p:cNvPr id="26" name="Rectangle 25"/>
+          <p:cNvPr id="27" name="Rectangle 26"/>
           <p:cNvSpPr/>
           <p:nvPr/>
         </p:nvSpPr>
@@ -10191,7 +11118,7 @@
       </p:sp>
       <p:sp>
         <p:nvSpPr>
-          <p:cNvPr id="27" name="TextBox 26"/>
+          <p:cNvPr id="28" name="TextBox 27"/>
           <p:cNvSpPr txBox="1"/>
           <p:nvPr/>
         </p:nvSpPr>
@@ -10226,7 +11153,7 @@
       </p:sp>
       <p:sp>
         <p:nvSpPr>
-          <p:cNvPr id="28" name="Rectangle 27"/>
+          <p:cNvPr id="29" name="Rectangle 28"/>
           <p:cNvSpPr/>
           <p:nvPr/>
         </p:nvSpPr>
@@ -10269,7 +11196,7 @@
       </p:sp>
       <p:sp>
         <p:nvSpPr>
-          <p:cNvPr id="29" name="TextBox 28"/>
+          <p:cNvPr id="30" name="TextBox 29"/>
           <p:cNvSpPr txBox="1"/>
           <p:nvPr/>
         </p:nvSpPr>
@@ -10304,7 +11231,7 @@
       </p:sp>
       <p:sp>
         <p:nvSpPr>
-          <p:cNvPr id="30" name="Rectangle 29"/>
+          <p:cNvPr id="31" name="Rectangle 30"/>
           <p:cNvSpPr/>
           <p:nvPr/>
         </p:nvSpPr>
@@ -10347,7 +11274,7 @@
       </p:sp>
       <p:sp>
         <p:nvSpPr>
-          <p:cNvPr id="31" name="TextBox 30"/>
+          <p:cNvPr id="32" name="TextBox 31"/>
           <p:cNvSpPr txBox="1"/>
           <p:nvPr/>
         </p:nvSpPr>
@@ -10382,7 +11309,7 @@
       </p:sp>
       <p:sp>
         <p:nvSpPr>
-          <p:cNvPr id="32" name="TextBox 31"/>
+          <p:cNvPr id="33" name="TextBox 32"/>
           <p:cNvSpPr txBox="1"/>
           <p:nvPr/>
         </p:nvSpPr>
@@ -10416,7 +11343,7 @@
       </p:sp>
       <p:sp>
         <p:nvSpPr>
-          <p:cNvPr id="33" name="Rectangle 32"/>
+          <p:cNvPr id="34" name="Rectangle 33"/>
           <p:cNvSpPr/>
           <p:nvPr/>
         </p:nvSpPr>
@@ -10461,7 +11388,7 @@
       </p:sp>
       <p:sp>
         <p:nvSpPr>
-          <p:cNvPr id="34" name="TextBox 33"/>
+          <p:cNvPr id="35" name="TextBox 34"/>
           <p:cNvSpPr txBox="1"/>
           <p:nvPr/>
         </p:nvSpPr>
@@ -10563,7 +11490,7 @@
         <p:spPr>
           <a:xfrm>
             <a:off x="0" y="0"/>
-            <a:ext cx="12188952" cy="868680"/>
+            <a:ext cx="12188952" cy="1097280"/>
           </a:xfrm>
           <a:prstGeom prst="rect">
             <a:avLst/>
@@ -10633,7 +11560,41 @@
       </p:sp>
       <p:sp>
         <p:nvSpPr>
-          <p:cNvPr id="5" name="Rectangle 4"/>
+          <p:cNvPr id="5" name="TextBox 4"/>
+          <p:cNvSpPr txBox="1"/>
+          <p:nvPr/>
+        </p:nvSpPr>
+        <p:spPr>
+          <a:xfrm>
+            <a:off x="365760" y="658368"/>
+            <a:ext cx="11457432" cy="365760"/>
+          </a:xfrm>
+          <a:prstGeom prst="rect">
+            <a:avLst/>
+          </a:prstGeom>
+          <a:noFill/>
+        </p:spPr>
+        <p:txBody>
+          <a:bodyPr wrap="square">
+            <a:spAutoFit/>
+          </a:bodyPr>
+          <a:lstStyle/>
+          <a:p>
+            <a:pPr algn="l"/>
+            <a:r>
+              <a:rPr sz="1100" b="0" i="1">
+                <a:solidFill>
+                  <a:srgbClr val="BBCCEE"/>
+                </a:solidFill>
+              </a:rPr>
+              <a:t>Chapter 4</a:t>
+            </a:r>
+          </a:p>
+        </p:txBody>
+      </p:sp>
+      <p:sp>
+        <p:nvSpPr>
+          <p:cNvPr id="6" name="Rectangle 5"/>
           <p:cNvSpPr/>
           <p:nvPr/>
         </p:nvSpPr>
@@ -10676,7 +11637,7 @@
       </p:sp>
       <p:sp>
         <p:nvSpPr>
-          <p:cNvPr id="6" name="TextBox 5"/>
+          <p:cNvPr id="7" name="TextBox 6"/>
           <p:cNvSpPr txBox="1"/>
           <p:nvPr/>
         </p:nvSpPr>
@@ -10703,14 +11664,14 @@
                   <a:srgbClr val="CCCCCC"/>
                 </a:solidFill>
               </a:rPr>
-              <a:t>OCM Dataset Integration   |   Slide 5 / 12</a:t>
-            </a:r>
-          </a:p>
-        </p:txBody>
-      </p:sp>
-      <p:sp>
-        <p:nvSpPr>
-          <p:cNvPr id="7" name="TextBox 6"/>
+              <a:t>OCM Dataset Integration   |   Slide 5 / 13</a:t>
+            </a:r>
+          </a:p>
+        </p:txBody>
+      </p:sp>
+      <p:sp>
+        <p:nvSpPr>
+          <p:cNvPr id="8" name="TextBox 7"/>
           <p:cNvSpPr txBox="1"/>
           <p:nvPr/>
         </p:nvSpPr>
@@ -10744,7 +11705,7 @@
       </p:sp>
       <p:sp>
         <p:nvSpPr>
-          <p:cNvPr id="8" name="Rectangle 7"/>
+          <p:cNvPr id="9" name="Rectangle 8"/>
           <p:cNvSpPr/>
           <p:nvPr/>
         </p:nvSpPr>
@@ -10787,7 +11748,7 @@
       </p:sp>
       <p:sp>
         <p:nvSpPr>
-          <p:cNvPr id="9" name="TextBox 8"/>
+          <p:cNvPr id="10" name="TextBox 9"/>
           <p:cNvSpPr txBox="1"/>
           <p:nvPr/>
         </p:nvSpPr>
@@ -10821,7 +11782,7 @@
       </p:sp>
       <p:sp>
         <p:nvSpPr>
-          <p:cNvPr id="10" name="TextBox 9"/>
+          <p:cNvPr id="11" name="TextBox 10"/>
           <p:cNvSpPr txBox="1"/>
           <p:nvPr/>
         </p:nvSpPr>
@@ -10855,7 +11816,7 @@
       </p:sp>
       <p:sp>
         <p:nvSpPr>
-          <p:cNvPr id="11" name="Rectangle 10"/>
+          <p:cNvPr id="12" name="Rectangle 11"/>
           <p:cNvSpPr/>
           <p:nvPr/>
         </p:nvSpPr>
@@ -10900,7 +11861,7 @@
       </p:sp>
       <p:sp>
         <p:nvSpPr>
-          <p:cNvPr id="12" name="TextBox 11"/>
+          <p:cNvPr id="13" name="TextBox 12"/>
           <p:cNvSpPr txBox="1"/>
           <p:nvPr/>
         </p:nvSpPr>
@@ -10934,7 +11895,7 @@
       </p:sp>
       <p:sp>
         <p:nvSpPr>
-          <p:cNvPr id="13" name="TextBox 12"/>
+          <p:cNvPr id="14" name="TextBox 13"/>
           <p:cNvSpPr txBox="1"/>
           <p:nvPr/>
         </p:nvSpPr>
@@ -10968,7 +11929,7 @@
       </p:sp>
       <p:sp>
         <p:nvSpPr>
-          <p:cNvPr id="14" name="TextBox 13"/>
+          <p:cNvPr id="15" name="TextBox 14"/>
           <p:cNvSpPr txBox="1"/>
           <p:nvPr/>
         </p:nvSpPr>
@@ -11002,7 +11963,7 @@
       </p:sp>
       <p:sp>
         <p:nvSpPr>
-          <p:cNvPr id="15" name="TextBox 14"/>
+          <p:cNvPr id="16" name="TextBox 15"/>
           <p:cNvSpPr txBox="1"/>
           <p:nvPr/>
         </p:nvSpPr>
@@ -11036,7 +11997,7 @@
       </p:sp>
       <p:sp>
         <p:nvSpPr>
-          <p:cNvPr id="16" name="Rectangle 15"/>
+          <p:cNvPr id="17" name="Rectangle 16"/>
           <p:cNvSpPr/>
           <p:nvPr/>
         </p:nvSpPr>
@@ -11079,7 +12040,7 @@
       </p:sp>
       <p:sp>
         <p:nvSpPr>
-          <p:cNvPr id="17" name="TextBox 16"/>
+          <p:cNvPr id="18" name="TextBox 17"/>
           <p:cNvSpPr txBox="1"/>
           <p:nvPr/>
         </p:nvSpPr>
@@ -11113,7 +12074,7 @@
       </p:sp>
       <p:sp>
         <p:nvSpPr>
-          <p:cNvPr id="18" name="TextBox 17"/>
+          <p:cNvPr id="19" name="TextBox 18"/>
           <p:cNvSpPr txBox="1"/>
           <p:nvPr/>
         </p:nvSpPr>
@@ -11147,7 +12108,7 @@
       </p:sp>
       <p:sp>
         <p:nvSpPr>
-          <p:cNvPr id="19" name="Rectangle 18"/>
+          <p:cNvPr id="20" name="Rectangle 19"/>
           <p:cNvSpPr/>
           <p:nvPr/>
         </p:nvSpPr>
@@ -11192,7 +12153,7 @@
       </p:sp>
       <p:sp>
         <p:nvSpPr>
-          <p:cNvPr id="20" name="TextBox 19"/>
+          <p:cNvPr id="21" name="TextBox 20"/>
           <p:cNvSpPr txBox="1"/>
           <p:nvPr/>
         </p:nvSpPr>
@@ -11226,7 +12187,7 @@
       </p:sp>
       <p:sp>
         <p:nvSpPr>
-          <p:cNvPr id="21" name="TextBox 20"/>
+          <p:cNvPr id="22" name="TextBox 21"/>
           <p:cNvSpPr txBox="1"/>
           <p:nvPr/>
         </p:nvSpPr>
@@ -11260,7 +12221,7 @@
       </p:sp>
       <p:sp>
         <p:nvSpPr>
-          <p:cNvPr id="22" name="Rectangle 21"/>
+          <p:cNvPr id="23" name="Rectangle 22"/>
           <p:cNvSpPr/>
           <p:nvPr/>
         </p:nvSpPr>
@@ -11305,7 +12266,7 @@
       </p:sp>
       <p:sp>
         <p:nvSpPr>
-          <p:cNvPr id="23" name="TextBox 22"/>
+          <p:cNvPr id="24" name="TextBox 23"/>
           <p:cNvSpPr txBox="1"/>
           <p:nvPr/>
         </p:nvSpPr>
@@ -11339,7 +12300,7 @@
       </p:sp>
       <p:sp>
         <p:nvSpPr>
-          <p:cNvPr id="24" name="TextBox 23"/>
+          <p:cNvPr id="25" name="TextBox 24"/>
           <p:cNvSpPr txBox="1"/>
           <p:nvPr/>
         </p:nvSpPr>
@@ -11373,7 +12334,7 @@
       </p:sp>
       <p:sp>
         <p:nvSpPr>
-          <p:cNvPr id="25" name="TextBox 24"/>
+          <p:cNvPr id="26" name="TextBox 25"/>
           <p:cNvSpPr txBox="1"/>
           <p:nvPr/>
         </p:nvSpPr>
@@ -11407,7 +12368,7 @@
       </p:sp>
       <p:sp>
         <p:nvSpPr>
-          <p:cNvPr id="26" name="Rectangle 25"/>
+          <p:cNvPr id="27" name="Rectangle 26"/>
           <p:cNvSpPr/>
           <p:nvPr/>
         </p:nvSpPr>
@@ -11450,7 +12411,7 @@
       </p:sp>
       <p:sp>
         <p:nvSpPr>
-          <p:cNvPr id="27" name="TextBox 26"/>
+          <p:cNvPr id="28" name="TextBox 27"/>
           <p:cNvSpPr txBox="1"/>
           <p:nvPr/>
         </p:nvSpPr>
@@ -11484,7 +12445,7 @@
       </p:sp>
       <p:sp>
         <p:nvSpPr>
-          <p:cNvPr id="28" name="Rectangle 27"/>
+          <p:cNvPr id="29" name="Rectangle 28"/>
           <p:cNvSpPr/>
           <p:nvPr/>
         </p:nvSpPr>
@@ -11529,7 +12490,7 @@
       </p:sp>
       <p:sp>
         <p:nvSpPr>
-          <p:cNvPr id="29" name="TextBox 28"/>
+          <p:cNvPr id="30" name="TextBox 29"/>
           <p:cNvSpPr txBox="1"/>
           <p:nvPr/>
         </p:nvSpPr>
@@ -11563,7 +12524,7 @@
       </p:sp>
       <p:sp>
         <p:nvSpPr>
-          <p:cNvPr id="30" name="TextBox 29"/>
+          <p:cNvPr id="31" name="TextBox 30"/>
           <p:cNvSpPr txBox="1"/>
           <p:nvPr/>
         </p:nvSpPr>
@@ -11597,7 +12558,7 @@
       </p:sp>
       <p:sp>
         <p:nvSpPr>
-          <p:cNvPr id="31" name="TextBox 30"/>
+          <p:cNvPr id="32" name="TextBox 31"/>
           <p:cNvSpPr txBox="1"/>
           <p:nvPr/>
         </p:nvSpPr>
@@ -11631,7 +12592,7 @@
       </p:sp>
       <p:sp>
         <p:nvSpPr>
-          <p:cNvPr id="32" name="TextBox 31"/>
+          <p:cNvPr id="33" name="TextBox 32"/>
           <p:cNvSpPr txBox="1"/>
           <p:nvPr/>
         </p:nvSpPr>
@@ -11665,7 +12626,7 @@
       </p:sp>
       <p:sp>
         <p:nvSpPr>
-          <p:cNvPr id="33" name="Rectangle 32"/>
+          <p:cNvPr id="34" name="Rectangle 33"/>
           <p:cNvSpPr/>
           <p:nvPr/>
         </p:nvSpPr>
@@ -11710,7 +12671,7 @@
       </p:sp>
       <p:sp>
         <p:nvSpPr>
-          <p:cNvPr id="34" name="TextBox 33"/>
+          <p:cNvPr id="35" name="TextBox 34"/>
           <p:cNvSpPr txBox="1"/>
           <p:nvPr/>
         </p:nvSpPr>
@@ -11813,7 +12774,7 @@
         <p:spPr>
           <a:xfrm>
             <a:off x="0" y="0"/>
-            <a:ext cx="12188952" cy="868680"/>
+            <a:ext cx="12188952" cy="1097280"/>
           </a:xfrm>
           <a:prstGeom prst="rect">
             <a:avLst/>
@@ -11883,7 +12844,41 @@
       </p:sp>
       <p:sp>
         <p:nvSpPr>
-          <p:cNvPr id="5" name="Rectangle 4"/>
+          <p:cNvPr id="5" name="TextBox 4"/>
+          <p:cNvSpPr txBox="1"/>
+          <p:nvPr/>
+        </p:nvSpPr>
+        <p:spPr>
+          <a:xfrm>
+            <a:off x="365760" y="658368"/>
+            <a:ext cx="11457432" cy="365760"/>
+          </a:xfrm>
+          <a:prstGeom prst="rect">
+            <a:avLst/>
+          </a:prstGeom>
+          <a:noFill/>
+        </p:spPr>
+        <p:txBody>
+          <a:bodyPr wrap="square">
+            <a:spAutoFit/>
+          </a:bodyPr>
+          <a:lstStyle/>
+          <a:p>
+            <a:pPr algn="l"/>
+            <a:r>
+              <a:rPr sz="1100" b="0" i="1">
+                <a:solidFill>
+                  <a:srgbClr val="BBCCEE"/>
+                </a:solidFill>
+              </a:rPr>
+              <a:t>Chapter 5</a:t>
+            </a:r>
+          </a:p>
+        </p:txBody>
+      </p:sp>
+      <p:sp>
+        <p:nvSpPr>
+          <p:cNvPr id="6" name="Rectangle 5"/>
           <p:cNvSpPr/>
           <p:nvPr/>
         </p:nvSpPr>
@@ -11926,7 +12921,7 @@
       </p:sp>
       <p:sp>
         <p:nvSpPr>
-          <p:cNvPr id="6" name="TextBox 5"/>
+          <p:cNvPr id="7" name="TextBox 6"/>
           <p:cNvSpPr txBox="1"/>
           <p:nvPr/>
         </p:nvSpPr>
@@ -11953,14 +12948,14 @@
                   <a:srgbClr val="CCCCCC"/>
                 </a:solidFill>
               </a:rPr>
-              <a:t>OCM Dataset Integration   |   Slide 6 / 12</a:t>
+              <a:t>OCM Dataset Integration   |   Slide 6 / 13</a:t>
             </a:r>
           </a:p>
         </p:txBody>
       </p:sp>
       <p:pic>
         <p:nvPicPr>
-          <p:cNvPr id="7" name="Picture 6" descr="fig_drst_scores.png"/>
+          <p:cNvPr id="8" name="Picture 7" descr="fig_drst_scores.png"/>
           <p:cNvPicPr>
             <a:picLocks noChangeAspect="1"/>
           </p:cNvPicPr>
@@ -11984,7 +12979,7 @@
       </p:pic>
       <p:sp>
         <p:nvSpPr>
-          <p:cNvPr id="8" name="TextBox 7"/>
+          <p:cNvPr id="9" name="TextBox 8"/>
           <p:cNvSpPr txBox="1"/>
           <p:nvPr/>
         </p:nvSpPr>
@@ -12018,7 +13013,7 @@
       </p:sp>
       <p:sp>
         <p:nvSpPr>
-          <p:cNvPr id="9" name="Rectangle 8"/>
+          <p:cNvPr id="10" name="Rectangle 9"/>
           <p:cNvSpPr/>
           <p:nvPr/>
         </p:nvSpPr>
@@ -12061,7 +13056,7 @@
       </p:sp>
       <p:sp>
         <p:nvSpPr>
-          <p:cNvPr id="10" name="TextBox 9"/>
+          <p:cNvPr id="11" name="TextBox 10"/>
           <p:cNvSpPr txBox="1"/>
           <p:nvPr/>
         </p:nvSpPr>
@@ -12095,7 +13090,7 @@
       </p:sp>
       <p:sp>
         <p:nvSpPr>
-          <p:cNvPr id="11" name="TextBox 10"/>
+          <p:cNvPr id="12" name="TextBox 11"/>
           <p:cNvSpPr txBox="1"/>
           <p:nvPr/>
         </p:nvSpPr>
@@ -12129,7 +13124,7 @@
       </p:sp>
       <p:sp>
         <p:nvSpPr>
-          <p:cNvPr id="12" name="TextBox 11"/>
+          <p:cNvPr id="13" name="TextBox 12"/>
           <p:cNvSpPr txBox="1"/>
           <p:nvPr/>
         </p:nvSpPr>
@@ -12163,7 +13158,7 @@
       </p:sp>
       <p:sp>
         <p:nvSpPr>
-          <p:cNvPr id="13" name="TextBox 12"/>
+          <p:cNvPr id="14" name="TextBox 13"/>
           <p:cNvSpPr txBox="1"/>
           <p:nvPr/>
         </p:nvSpPr>
@@ -12197,7 +13192,7 @@
       </p:sp>
       <p:sp>
         <p:nvSpPr>
-          <p:cNvPr id="14" name="Rectangle 13"/>
+          <p:cNvPr id="15" name="Rectangle 14"/>
           <p:cNvSpPr/>
           <p:nvPr/>
         </p:nvSpPr>
@@ -12242,7 +13237,7 @@
       </p:sp>
       <p:sp>
         <p:nvSpPr>
-          <p:cNvPr id="15" name="TextBox 14"/>
+          <p:cNvPr id="16" name="TextBox 15"/>
           <p:cNvSpPr txBox="1"/>
           <p:nvPr/>
         </p:nvSpPr>
@@ -12276,7 +13271,7 @@
       </p:sp>
       <p:sp>
         <p:nvSpPr>
-          <p:cNvPr id="16" name="TextBox 15"/>
+          <p:cNvPr id="17" name="TextBox 16"/>
           <p:cNvSpPr txBox="1"/>
           <p:nvPr/>
         </p:nvSpPr>
@@ -12310,7 +13305,7 @@
       </p:sp>
       <p:sp>
         <p:nvSpPr>
-          <p:cNvPr id="17" name="Rectangle 16"/>
+          <p:cNvPr id="18" name="Rectangle 17"/>
           <p:cNvSpPr/>
           <p:nvPr/>
         </p:nvSpPr>
@@ -12353,7 +13348,7 @@
       </p:sp>
       <p:sp>
         <p:nvSpPr>
-          <p:cNvPr id="18" name="TextBox 17"/>
+          <p:cNvPr id="19" name="TextBox 18"/>
           <p:cNvSpPr txBox="1"/>
           <p:nvPr/>
         </p:nvSpPr>
@@ -12387,7 +13382,7 @@
       </p:sp>
       <p:sp>
         <p:nvSpPr>
-          <p:cNvPr id="19" name="TextBox 18"/>
+          <p:cNvPr id="20" name="TextBox 19"/>
           <p:cNvSpPr txBox="1"/>
           <p:nvPr/>
         </p:nvSpPr>
@@ -12421,7 +13416,7 @@
       </p:sp>
       <p:sp>
         <p:nvSpPr>
-          <p:cNvPr id="20" name="TextBox 19"/>
+          <p:cNvPr id="21" name="TextBox 20"/>
           <p:cNvSpPr txBox="1"/>
           <p:nvPr/>
         </p:nvSpPr>
@@ -12455,7 +13450,7 @@
       </p:sp>
       <p:sp>
         <p:nvSpPr>
-          <p:cNvPr id="21" name="Rectangle 20"/>
+          <p:cNvPr id="22" name="Rectangle 21"/>
           <p:cNvSpPr/>
           <p:nvPr/>
         </p:nvSpPr>
@@ -12500,7 +13495,7 @@
       </p:sp>
       <p:sp>
         <p:nvSpPr>
-          <p:cNvPr id="22" name="TextBox 21"/>
+          <p:cNvPr id="23" name="TextBox 22"/>
           <p:cNvSpPr txBox="1"/>
           <p:nvPr/>
         </p:nvSpPr>
@@ -12534,7 +13529,7 @@
       </p:sp>
       <p:sp>
         <p:nvSpPr>
-          <p:cNvPr id="23" name="TextBox 22"/>
+          <p:cNvPr id="24" name="TextBox 23"/>
           <p:cNvSpPr txBox="1"/>
           <p:nvPr/>
         </p:nvSpPr>
@@ -12568,7 +13563,7 @@
       </p:sp>
       <p:sp>
         <p:nvSpPr>
-          <p:cNvPr id="24" name="TextBox 23"/>
+          <p:cNvPr id="25" name="TextBox 24"/>
           <p:cNvSpPr txBox="1"/>
           <p:nvPr/>
         </p:nvSpPr>
@@ -12602,7 +13597,7 @@
       </p:sp>
       <p:sp>
         <p:nvSpPr>
-          <p:cNvPr id="25" name="Rectangle 24"/>
+          <p:cNvPr id="26" name="Rectangle 25"/>
           <p:cNvSpPr/>
           <p:nvPr/>
         </p:nvSpPr>
@@ -12647,7 +13642,7 @@
       </p:sp>
       <p:sp>
         <p:nvSpPr>
-          <p:cNvPr id="26" name="TextBox 25"/>
+          <p:cNvPr id="27" name="TextBox 26"/>
           <p:cNvSpPr txBox="1"/>
           <p:nvPr/>
         </p:nvSpPr>
@@ -12681,7 +13676,7 @@
       </p:sp>
       <p:sp>
         <p:nvSpPr>
-          <p:cNvPr id="27" name="TextBox 26"/>
+          <p:cNvPr id="28" name="TextBox 27"/>
           <p:cNvSpPr txBox="1"/>
           <p:nvPr/>
         </p:nvSpPr>
@@ -12715,7 +13710,7 @@
       </p:sp>
       <p:sp>
         <p:nvSpPr>
-          <p:cNvPr id="28" name="TextBox 27"/>
+          <p:cNvPr id="29" name="TextBox 28"/>
           <p:cNvSpPr txBox="1"/>
           <p:nvPr/>
         </p:nvSpPr>
@@ -12749,7 +13744,7 @@
       </p:sp>
       <p:sp>
         <p:nvSpPr>
-          <p:cNvPr id="29" name="Rectangle 28"/>
+          <p:cNvPr id="30" name="Rectangle 29"/>
           <p:cNvSpPr/>
           <p:nvPr/>
         </p:nvSpPr>
@@ -12794,7 +13789,7 @@
       </p:sp>
       <p:sp>
         <p:nvSpPr>
-          <p:cNvPr id="30" name="TextBox 29"/>
+          <p:cNvPr id="31" name="TextBox 30"/>
           <p:cNvSpPr txBox="1"/>
           <p:nvPr/>
         </p:nvSpPr>
@@ -12828,7 +13823,7 @@
       </p:sp>
       <p:sp>
         <p:nvSpPr>
-          <p:cNvPr id="31" name="TextBox 30"/>
+          <p:cNvPr id="32" name="TextBox 31"/>
           <p:cNvSpPr txBox="1"/>
           <p:nvPr/>
         </p:nvSpPr>
@@ -12862,7 +13857,7 @@
       </p:sp>
       <p:sp>
         <p:nvSpPr>
-          <p:cNvPr id="32" name="TextBox 31"/>
+          <p:cNvPr id="33" name="TextBox 32"/>
           <p:cNvSpPr txBox="1"/>
           <p:nvPr/>
         </p:nvSpPr>
@@ -12896,7 +13891,7 @@
       </p:sp>
       <p:sp>
         <p:nvSpPr>
-          <p:cNvPr id="33" name="Rectangle 32"/>
+          <p:cNvPr id="34" name="Rectangle 33"/>
           <p:cNvSpPr/>
           <p:nvPr/>
         </p:nvSpPr>
@@ -12941,7 +13936,7 @@
       </p:sp>
       <p:sp>
         <p:nvSpPr>
-          <p:cNvPr id="34" name="TextBox 33"/>
+          <p:cNvPr id="35" name="TextBox 34"/>
           <p:cNvSpPr txBox="1"/>
           <p:nvPr/>
         </p:nvSpPr>
@@ -12975,7 +13970,7 @@
       </p:sp>
       <p:sp>
         <p:nvSpPr>
-          <p:cNvPr id="35" name="TextBox 34"/>
+          <p:cNvPr id="36" name="TextBox 35"/>
           <p:cNvSpPr txBox="1"/>
           <p:nvPr/>
         </p:nvSpPr>
@@ -13009,7 +14004,7 @@
       </p:sp>
       <p:sp>
         <p:nvSpPr>
-          <p:cNvPr id="36" name="TextBox 35"/>
+          <p:cNvPr id="37" name="TextBox 36"/>
           <p:cNvSpPr txBox="1"/>
           <p:nvPr/>
         </p:nvSpPr>
@@ -13043,7 +14038,7 @@
       </p:sp>
       <p:sp>
         <p:nvSpPr>
-          <p:cNvPr id="37" name="Rectangle 36"/>
+          <p:cNvPr id="38" name="Rectangle 37"/>
           <p:cNvSpPr/>
           <p:nvPr/>
         </p:nvSpPr>
@@ -13088,7 +14083,7 @@
       </p:sp>
       <p:sp>
         <p:nvSpPr>
-          <p:cNvPr id="38" name="TextBox 37"/>
+          <p:cNvPr id="39" name="TextBox 38"/>
           <p:cNvSpPr txBox="1"/>
           <p:nvPr/>
         </p:nvSpPr>
@@ -13190,7 +14185,7 @@
         <p:spPr>
           <a:xfrm>
             <a:off x="0" y="0"/>
-            <a:ext cx="12188952" cy="868680"/>
+            <a:ext cx="12188952" cy="1097280"/>
           </a:xfrm>
           <a:prstGeom prst="rect">
             <a:avLst/>
@@ -13260,7 +14255,41 @@
       </p:sp>
       <p:sp>
         <p:nvSpPr>
-          <p:cNvPr id="5" name="Rectangle 4"/>
+          <p:cNvPr id="5" name="TextBox 4"/>
+          <p:cNvSpPr txBox="1"/>
+          <p:nvPr/>
+        </p:nvSpPr>
+        <p:spPr>
+          <a:xfrm>
+            <a:off x="365760" y="658368"/>
+            <a:ext cx="11457432" cy="365760"/>
+          </a:xfrm>
+          <a:prstGeom prst="rect">
+            <a:avLst/>
+          </a:prstGeom>
+          <a:noFill/>
+        </p:spPr>
+        <p:txBody>
+          <a:bodyPr wrap="square">
+            <a:spAutoFit/>
+          </a:bodyPr>
+          <a:lstStyle/>
+          <a:p>
+            <a:pPr algn="l"/>
+            <a:r>
+              <a:rPr sz="1100" b="0" i="1">
+                <a:solidFill>
+                  <a:srgbClr val="BBCCEE"/>
+                </a:solidFill>
+              </a:rPr>
+              <a:t>Chapter 6</a:t>
+            </a:r>
+          </a:p>
+        </p:txBody>
+      </p:sp>
+      <p:sp>
+        <p:nvSpPr>
+          <p:cNvPr id="6" name="Rectangle 5"/>
           <p:cNvSpPr/>
           <p:nvPr/>
         </p:nvSpPr>
@@ -13303,7 +14332,7 @@
       </p:sp>
       <p:sp>
         <p:nvSpPr>
-          <p:cNvPr id="6" name="TextBox 5"/>
+          <p:cNvPr id="7" name="TextBox 6"/>
           <p:cNvSpPr txBox="1"/>
           <p:nvPr/>
         </p:nvSpPr>
@@ -13330,14 +14359,14 @@
                   <a:srgbClr val="CCCCCC"/>
                 </a:solidFill>
               </a:rPr>
-              <a:t>OCM Dataset Integration   |   Slide 7 / 12</a:t>
+              <a:t>OCM Dataset Integration   |   Slide 7 / 13</a:t>
             </a:r>
           </a:p>
         </p:txBody>
       </p:sp>
       <p:pic>
         <p:nvPicPr>
-          <p:cNvPr id="7" name="Picture 6" descr="fig_kmm_weights.png"/>
+          <p:cNvPr id="8" name="Picture 7" descr="fig_kmm_weights.png"/>
           <p:cNvPicPr>
             <a:picLocks noChangeAspect="1"/>
           </p:cNvPicPr>
@@ -13361,7 +14390,7 @@
       </p:pic>
       <p:sp>
         <p:nvSpPr>
-          <p:cNvPr id="8" name="Rectangle 7"/>
+          <p:cNvPr id="9" name="Rectangle 8"/>
           <p:cNvSpPr/>
           <p:nvPr/>
         </p:nvSpPr>
@@ -13404,7 +14433,7 @@
       </p:sp>
       <p:sp>
         <p:nvSpPr>
-          <p:cNvPr id="9" name="TextBox 8"/>
+          <p:cNvPr id="10" name="TextBox 9"/>
           <p:cNvSpPr txBox="1"/>
           <p:nvPr/>
         </p:nvSpPr>
@@ -13438,7 +14467,7 @@
       </p:sp>
       <p:sp>
         <p:nvSpPr>
-          <p:cNvPr id="10" name="TextBox 9"/>
+          <p:cNvPr id="11" name="TextBox 10"/>
           <p:cNvSpPr txBox="1"/>
           <p:nvPr/>
         </p:nvSpPr>
@@ -13472,7 +14501,7 @@
       </p:sp>
       <p:sp>
         <p:nvSpPr>
-          <p:cNvPr id="11" name="TextBox 10"/>
+          <p:cNvPr id="12" name="TextBox 11"/>
           <p:cNvSpPr txBox="1"/>
           <p:nvPr/>
         </p:nvSpPr>
@@ -13506,7 +14535,7 @@
       </p:sp>
       <p:sp>
         <p:nvSpPr>
-          <p:cNvPr id="12" name="TextBox 11"/>
+          <p:cNvPr id="13" name="TextBox 12"/>
           <p:cNvSpPr txBox="1"/>
           <p:nvPr/>
         </p:nvSpPr>
@@ -13540,7 +14569,7 @@
       </p:sp>
       <p:sp>
         <p:nvSpPr>
-          <p:cNvPr id="13" name="TextBox 12"/>
+          <p:cNvPr id="14" name="TextBox 13"/>
           <p:cNvSpPr txBox="1"/>
           <p:nvPr/>
         </p:nvSpPr>
@@ -13574,7 +14603,7 @@
       </p:sp>
       <p:sp>
         <p:nvSpPr>
-          <p:cNvPr id="14" name="Rectangle 13"/>
+          <p:cNvPr id="15" name="Rectangle 14"/>
           <p:cNvSpPr/>
           <p:nvPr/>
         </p:nvSpPr>
@@ -13619,7 +14648,7 @@
       </p:sp>
       <p:sp>
         <p:nvSpPr>
-          <p:cNvPr id="15" name="TextBox 14"/>
+          <p:cNvPr id="16" name="TextBox 15"/>
           <p:cNvSpPr txBox="1"/>
           <p:nvPr/>
         </p:nvSpPr>
@@ -13653,7 +14682,7 @@
       </p:sp>
       <p:sp>
         <p:nvSpPr>
-          <p:cNvPr id="16" name="TextBox 15"/>
+          <p:cNvPr id="17" name="TextBox 16"/>
           <p:cNvSpPr txBox="1"/>
           <p:nvPr/>
         </p:nvSpPr>
@@ -13687,7 +14716,7 @@
       </p:sp>
       <p:sp>
         <p:nvSpPr>
-          <p:cNvPr id="17" name="Rectangle 16"/>
+          <p:cNvPr id="18" name="Rectangle 17"/>
           <p:cNvSpPr/>
           <p:nvPr/>
         </p:nvSpPr>
@@ -13732,7 +14761,7 @@
       </p:sp>
       <p:sp>
         <p:nvSpPr>
-          <p:cNvPr id="18" name="TextBox 17"/>
+          <p:cNvPr id="19" name="TextBox 18"/>
           <p:cNvSpPr txBox="1"/>
           <p:nvPr/>
         </p:nvSpPr>
@@ -13766,7 +14795,7 @@
       </p:sp>
       <p:sp>
         <p:nvSpPr>
-          <p:cNvPr id="19" name="TextBox 18"/>
+          <p:cNvPr id="20" name="TextBox 19"/>
           <p:cNvSpPr txBox="1"/>
           <p:nvPr/>
         </p:nvSpPr>
@@ -13800,7 +14829,7 @@
       </p:sp>
       <p:sp>
         <p:nvSpPr>
-          <p:cNvPr id="20" name="Rectangle 19"/>
+          <p:cNvPr id="21" name="Rectangle 20"/>
           <p:cNvSpPr/>
           <p:nvPr/>
         </p:nvSpPr>
@@ -13845,7 +14874,7 @@
       </p:sp>
       <p:sp>
         <p:nvSpPr>
-          <p:cNvPr id="21" name="TextBox 20"/>
+          <p:cNvPr id="22" name="TextBox 21"/>
           <p:cNvSpPr txBox="1"/>
           <p:nvPr/>
         </p:nvSpPr>
@@ -13879,7 +14908,7 @@
       </p:sp>
       <p:sp>
         <p:nvSpPr>
-          <p:cNvPr id="22" name="TextBox 21"/>
+          <p:cNvPr id="23" name="TextBox 22"/>
           <p:cNvSpPr txBox="1"/>
           <p:nvPr/>
         </p:nvSpPr>
@@ -13913,7 +14942,7 @@
       </p:sp>
       <p:sp>
         <p:nvSpPr>
-          <p:cNvPr id="23" name="Rectangle 22"/>
+          <p:cNvPr id="24" name="Rectangle 23"/>
           <p:cNvSpPr/>
           <p:nvPr/>
         </p:nvSpPr>
@@ -13958,7 +14987,7 @@
       </p:sp>
       <p:sp>
         <p:nvSpPr>
-          <p:cNvPr id="24" name="TextBox 23"/>
+          <p:cNvPr id="25" name="TextBox 24"/>
           <p:cNvSpPr txBox="1"/>
           <p:nvPr/>
         </p:nvSpPr>
@@ -13992,7 +15021,7 @@
       </p:sp>
       <p:sp>
         <p:nvSpPr>
-          <p:cNvPr id="25" name="TextBox 24"/>
+          <p:cNvPr id="26" name="TextBox 25"/>
           <p:cNvSpPr txBox="1"/>
           <p:nvPr/>
         </p:nvSpPr>
@@ -14026,7 +15055,7 @@
       </p:sp>
       <p:sp>
         <p:nvSpPr>
-          <p:cNvPr id="26" name="Rectangle 25"/>
+          <p:cNvPr id="27" name="Rectangle 26"/>
           <p:cNvSpPr/>
           <p:nvPr/>
         </p:nvSpPr>
@@ -14071,7 +15100,7 @@
       </p:sp>
       <p:sp>
         <p:nvSpPr>
-          <p:cNvPr id="27" name="TextBox 26"/>
+          <p:cNvPr id="28" name="TextBox 27"/>
           <p:cNvSpPr txBox="1"/>
           <p:nvPr/>
         </p:nvSpPr>
@@ -14105,7 +15134,7 @@
       </p:sp>
       <p:sp>
         <p:nvSpPr>
-          <p:cNvPr id="28" name="TextBox 27"/>
+          <p:cNvPr id="29" name="TextBox 28"/>
           <p:cNvSpPr txBox="1"/>
           <p:nvPr/>
         </p:nvSpPr>
@@ -14139,7 +15168,7 @@
       </p:sp>
       <p:sp>
         <p:nvSpPr>
-          <p:cNvPr id="29" name="Rectangle 28"/>
+          <p:cNvPr id="30" name="Rectangle 29"/>
           <p:cNvSpPr/>
           <p:nvPr/>
         </p:nvSpPr>
@@ -14184,7 +15213,7 @@
       </p:sp>
       <p:sp>
         <p:nvSpPr>
-          <p:cNvPr id="30" name="TextBox 29"/>
+          <p:cNvPr id="31" name="TextBox 30"/>
           <p:cNvSpPr txBox="1"/>
           <p:nvPr/>
         </p:nvSpPr>
@@ -14287,7 +15316,7 @@
         <p:spPr>
           <a:xfrm>
             <a:off x="0" y="0"/>
-            <a:ext cx="12188952" cy="868680"/>
+            <a:ext cx="12188952" cy="1097280"/>
           </a:xfrm>
           <a:prstGeom prst="rect">
             <a:avLst/>
@@ -14357,7 +15386,41 @@
       </p:sp>
       <p:sp>
         <p:nvSpPr>
-          <p:cNvPr id="5" name="Rectangle 4"/>
+          <p:cNvPr id="5" name="TextBox 4"/>
+          <p:cNvSpPr txBox="1"/>
+          <p:nvPr/>
+        </p:nvSpPr>
+        <p:spPr>
+          <a:xfrm>
+            <a:off x="365760" y="658368"/>
+            <a:ext cx="11457432" cy="365760"/>
+          </a:xfrm>
+          <a:prstGeom prst="rect">
+            <a:avLst/>
+          </a:prstGeom>
+          <a:noFill/>
+        </p:spPr>
+        <p:txBody>
+          <a:bodyPr wrap="square">
+            <a:spAutoFit/>
+          </a:bodyPr>
+          <a:lstStyle/>
+          <a:p>
+            <a:pPr algn="l"/>
+            <a:r>
+              <a:rPr sz="1100" b="0" i="1">
+                <a:solidFill>
+                  <a:srgbClr val="BBCCEE"/>
+                </a:solidFill>
+              </a:rPr>
+              <a:t>Chapter 7</a:t>
+            </a:r>
+          </a:p>
+        </p:txBody>
+      </p:sp>
+      <p:sp>
+        <p:nvSpPr>
+          <p:cNvPr id="6" name="Rectangle 5"/>
           <p:cNvSpPr/>
           <p:nvPr/>
         </p:nvSpPr>
@@ -14400,7 +15463,7 @@
       </p:sp>
       <p:sp>
         <p:nvSpPr>
-          <p:cNvPr id="6" name="TextBox 5"/>
+          <p:cNvPr id="7" name="TextBox 6"/>
           <p:cNvSpPr txBox="1"/>
           <p:nvPr/>
         </p:nvSpPr>
@@ -14427,14 +15490,14 @@
                   <a:srgbClr val="CCCCCC"/>
                 </a:solidFill>
               </a:rPr>
-              <a:t>OCM Dataset Integration   |   Slide 8 / 12</a:t>
-            </a:r>
-          </a:p>
-        </p:txBody>
-      </p:sp>
-      <p:sp>
-        <p:nvSpPr>
-          <p:cNvPr id="7" name="TextBox 6"/>
+              <a:t>OCM Dataset Integration   |   Slide 8 / 13</a:t>
+            </a:r>
+          </a:p>
+        </p:txBody>
+      </p:sp>
+      <p:sp>
+        <p:nvSpPr>
+          <p:cNvPr id="8" name="TextBox 7"/>
           <p:cNvSpPr txBox="1"/>
           <p:nvPr/>
         </p:nvSpPr>
@@ -14468,7 +15531,7 @@
       </p:sp>
       <p:sp>
         <p:nvSpPr>
-          <p:cNvPr id="8" name="TextBox 7"/>
+          <p:cNvPr id="9" name="TextBox 8"/>
           <p:cNvSpPr txBox="1"/>
           <p:nvPr/>
         </p:nvSpPr>
@@ -14502,7 +15565,7 @@
       </p:sp>
       <p:sp>
         <p:nvSpPr>
-          <p:cNvPr id="9" name="Rectangle 8"/>
+          <p:cNvPr id="10" name="Rectangle 9"/>
           <p:cNvSpPr/>
           <p:nvPr/>
         </p:nvSpPr>
@@ -14547,7 +15610,7 @@
       </p:sp>
       <p:sp>
         <p:nvSpPr>
-          <p:cNvPr id="10" name="TextBox 9"/>
+          <p:cNvPr id="11" name="TextBox 10"/>
           <p:cNvSpPr txBox="1"/>
           <p:nvPr/>
         </p:nvSpPr>
@@ -14581,7 +15644,7 @@
       </p:sp>
       <p:sp>
         <p:nvSpPr>
-          <p:cNvPr id="11" name="TextBox 10"/>
+          <p:cNvPr id="12" name="TextBox 11"/>
           <p:cNvSpPr txBox="1"/>
           <p:nvPr/>
         </p:nvSpPr>
@@ -14616,7 +15679,7 @@
       </p:sp>
       <p:cxnSp>
         <p:nvCxnSpPr>
-          <p:cNvPr id="12" name="Connector 11"/>
+          <p:cNvPr id="13" name="Connector 12"/>
           <p:cNvCxnSpPr/>
           <p:nvPr/>
         </p:nvCxnSpPr>
@@ -14651,7 +15714,7 @@
       </p:cxnSp>
       <p:sp>
         <p:nvSpPr>
-          <p:cNvPr id="13" name="Rectangle 12"/>
+          <p:cNvPr id="14" name="Rectangle 13"/>
           <p:cNvSpPr/>
           <p:nvPr/>
         </p:nvSpPr>
@@ -14696,7 +15759,7 @@
       </p:sp>
       <p:sp>
         <p:nvSpPr>
-          <p:cNvPr id="14" name="TextBox 13"/>
+          <p:cNvPr id="15" name="TextBox 14"/>
           <p:cNvSpPr txBox="1"/>
           <p:nvPr/>
         </p:nvSpPr>
@@ -14730,7 +15793,7 @@
       </p:sp>
       <p:sp>
         <p:nvSpPr>
-          <p:cNvPr id="15" name="TextBox 14"/>
+          <p:cNvPr id="16" name="TextBox 15"/>
           <p:cNvSpPr txBox="1"/>
           <p:nvPr/>
         </p:nvSpPr>
@@ -14765,7 +15828,7 @@
       </p:sp>
       <p:cxnSp>
         <p:nvCxnSpPr>
-          <p:cNvPr id="16" name="Connector 15"/>
+          <p:cNvPr id="17" name="Connector 16"/>
           <p:cNvCxnSpPr/>
           <p:nvPr/>
         </p:nvCxnSpPr>
@@ -14800,7 +15863,7 @@
       </p:cxnSp>
       <p:sp>
         <p:nvSpPr>
-          <p:cNvPr id="17" name="Rectangle 16"/>
+          <p:cNvPr id="18" name="Rectangle 17"/>
           <p:cNvSpPr/>
           <p:nvPr/>
         </p:nvSpPr>
@@ -14845,7 +15908,7 @@
       </p:sp>
       <p:sp>
         <p:nvSpPr>
-          <p:cNvPr id="18" name="TextBox 17"/>
+          <p:cNvPr id="19" name="TextBox 18"/>
           <p:cNvSpPr txBox="1"/>
           <p:nvPr/>
         </p:nvSpPr>
@@ -14879,7 +15942,7 @@
       </p:sp>
       <p:sp>
         <p:nvSpPr>
-          <p:cNvPr id="19" name="TextBox 18"/>
+          <p:cNvPr id="20" name="TextBox 19"/>
           <p:cNvSpPr txBox="1"/>
           <p:nvPr/>
         </p:nvSpPr>
@@ -14914,7 +15977,7 @@
       </p:sp>
       <p:sp>
         <p:nvSpPr>
-          <p:cNvPr id="20" name="Rectangle 19"/>
+          <p:cNvPr id="21" name="Rectangle 20"/>
           <p:cNvSpPr/>
           <p:nvPr/>
         </p:nvSpPr>
@@ -14959,7 +16022,7 @@
       </p:sp>
       <p:sp>
         <p:nvSpPr>
-          <p:cNvPr id="21" name="TextBox 20"/>
+          <p:cNvPr id="22" name="TextBox 21"/>
           <p:cNvSpPr txBox="1"/>
           <p:nvPr/>
         </p:nvSpPr>
@@ -14993,7 +16056,7 @@
       </p:sp>
       <p:sp>
         <p:nvSpPr>
-          <p:cNvPr id="22" name="TextBox 21"/>
+          <p:cNvPr id="23" name="TextBox 22"/>
           <p:cNvSpPr txBox="1"/>
           <p:nvPr/>
         </p:nvSpPr>
@@ -15027,7 +16090,7 @@
       </p:sp>
       <p:cxnSp>
         <p:nvCxnSpPr>
-          <p:cNvPr id="23" name="Connector 22"/>
+          <p:cNvPr id="24" name="Connector 23"/>
           <p:cNvCxnSpPr/>
           <p:nvPr/>
         </p:nvCxnSpPr>
@@ -15062,7 +16125,7 @@
       </p:cxnSp>
       <p:sp>
         <p:nvSpPr>
-          <p:cNvPr id="24" name="Rectangle 23"/>
+          <p:cNvPr id="25" name="Rectangle 24"/>
           <p:cNvSpPr/>
           <p:nvPr/>
         </p:nvSpPr>
@@ -15107,7 +16170,7 @@
       </p:sp>
       <p:sp>
         <p:nvSpPr>
-          <p:cNvPr id="25" name="TextBox 24"/>
+          <p:cNvPr id="26" name="TextBox 25"/>
           <p:cNvSpPr txBox="1"/>
           <p:nvPr/>
         </p:nvSpPr>
@@ -15141,7 +16204,7 @@
       </p:sp>
       <p:sp>
         <p:nvSpPr>
-          <p:cNvPr id="26" name="TextBox 25"/>
+          <p:cNvPr id="27" name="TextBox 26"/>
           <p:cNvSpPr txBox="1"/>
           <p:nvPr/>
         </p:nvSpPr>
@@ -15175,7 +16238,7 @@
       </p:sp>
       <p:cxnSp>
         <p:nvCxnSpPr>
-          <p:cNvPr id="27" name="Connector 26"/>
+          <p:cNvPr id="28" name="Connector 27"/>
           <p:cNvCxnSpPr/>
           <p:nvPr/>
         </p:nvCxnSpPr>
@@ -15210,7 +16273,7 @@
       </p:cxnSp>
       <p:sp>
         <p:nvSpPr>
-          <p:cNvPr id="28" name="Rectangle 27"/>
+          <p:cNvPr id="29" name="Rectangle 28"/>
           <p:cNvSpPr/>
           <p:nvPr/>
         </p:nvSpPr>
@@ -15255,7 +16318,7 @@
       </p:sp>
       <p:sp>
         <p:nvSpPr>
-          <p:cNvPr id="29" name="TextBox 28"/>
+          <p:cNvPr id="30" name="TextBox 29"/>
           <p:cNvSpPr txBox="1"/>
           <p:nvPr/>
         </p:nvSpPr>
@@ -15289,7 +16352,7 @@
       </p:sp>
       <p:sp>
         <p:nvSpPr>
-          <p:cNvPr id="30" name="TextBox 29"/>
+          <p:cNvPr id="31" name="TextBox 30"/>
           <p:cNvSpPr txBox="1"/>
           <p:nvPr/>
         </p:nvSpPr>
@@ -15324,7 +16387,7 @@
       </p:sp>
       <p:cxnSp>
         <p:nvCxnSpPr>
-          <p:cNvPr id="31" name="Connector 30"/>
+          <p:cNvPr id="32" name="Connector 31"/>
           <p:cNvCxnSpPr/>
           <p:nvPr/>
         </p:nvCxnSpPr>
@@ -15359,7 +16422,7 @@
       </p:cxnSp>
       <p:sp>
         <p:nvSpPr>
-          <p:cNvPr id="32" name="Rectangle 31"/>
+          <p:cNvPr id="33" name="Rectangle 32"/>
           <p:cNvSpPr/>
           <p:nvPr/>
         </p:nvSpPr>
@@ -15404,7 +16467,7 @@
       </p:sp>
       <p:sp>
         <p:nvSpPr>
-          <p:cNvPr id="33" name="TextBox 32"/>
+          <p:cNvPr id="34" name="TextBox 33"/>
           <p:cNvSpPr txBox="1"/>
           <p:nvPr/>
         </p:nvSpPr>
@@ -15438,7 +16501,7 @@
       </p:sp>
       <p:sp>
         <p:nvSpPr>
-          <p:cNvPr id="34" name="TextBox 33"/>
+          <p:cNvPr id="35" name="TextBox 34"/>
           <p:cNvSpPr txBox="1"/>
           <p:nvPr/>
         </p:nvSpPr>
@@ -15472,7 +16535,7 @@
       </p:sp>
       <p:cxnSp>
         <p:nvCxnSpPr>
-          <p:cNvPr id="35" name="Connector 34"/>
+          <p:cNvPr id="36" name="Connector 35"/>
           <p:cNvCxnSpPr/>
           <p:nvPr/>
         </p:nvCxnSpPr>
@@ -15507,7 +16570,7 @@
       </p:cxnSp>
       <p:sp>
         <p:nvSpPr>
-          <p:cNvPr id="36" name="Rectangle 35"/>
+          <p:cNvPr id="37" name="Rectangle 36"/>
           <p:cNvSpPr/>
           <p:nvPr/>
         </p:nvSpPr>
@@ -15552,7 +16615,7 @@
       </p:sp>
       <p:sp>
         <p:nvSpPr>
-          <p:cNvPr id="37" name="TextBox 36"/>
+          <p:cNvPr id="38" name="TextBox 37"/>
           <p:cNvSpPr txBox="1"/>
           <p:nvPr/>
         </p:nvSpPr>
@@ -15586,7 +16649,7 @@
       </p:sp>
       <p:sp>
         <p:nvSpPr>
-          <p:cNvPr id="38" name="TextBox 37"/>
+          <p:cNvPr id="39" name="TextBox 38"/>
           <p:cNvSpPr txBox="1"/>
           <p:nvPr/>
         </p:nvSpPr>
@@ -15688,7 +16751,7 @@
         <p:spPr>
           <a:xfrm>
             <a:off x="0" y="0"/>
-            <a:ext cx="12188952" cy="868680"/>
+            <a:ext cx="12188952" cy="1097280"/>
           </a:xfrm>
           <a:prstGeom prst="rect">
             <a:avLst/>
@@ -15758,7 +16821,41 @@
       </p:sp>
       <p:sp>
         <p:nvSpPr>
-          <p:cNvPr id="5" name="Rectangle 4"/>
+          <p:cNvPr id="5" name="TextBox 4"/>
+          <p:cNvSpPr txBox="1"/>
+          <p:nvPr/>
+        </p:nvSpPr>
+        <p:spPr>
+          <a:xfrm>
+            <a:off x="365760" y="658368"/>
+            <a:ext cx="11457432" cy="365760"/>
+          </a:xfrm>
+          <a:prstGeom prst="rect">
+            <a:avLst/>
+          </a:prstGeom>
+          <a:noFill/>
+        </p:spPr>
+        <p:txBody>
+          <a:bodyPr wrap="square">
+            <a:spAutoFit/>
+          </a:bodyPr>
+          <a:lstStyle/>
+          <a:p>
+            <a:pPr algn="l"/>
+            <a:r>
+              <a:rPr sz="1100" b="0" i="1">
+                <a:solidFill>
+                  <a:srgbClr val="BBCCEE"/>
+                </a:solidFill>
+              </a:rPr>
+              <a:t>Chapter 8</a:t>
+            </a:r>
+          </a:p>
+        </p:txBody>
+      </p:sp>
+      <p:sp>
+        <p:nvSpPr>
+          <p:cNvPr id="6" name="Rectangle 5"/>
           <p:cNvSpPr/>
           <p:nvPr/>
         </p:nvSpPr>
@@ -15801,7 +16898,7 @@
       </p:sp>
       <p:sp>
         <p:nvSpPr>
-          <p:cNvPr id="6" name="TextBox 5"/>
+          <p:cNvPr id="7" name="TextBox 6"/>
           <p:cNvSpPr txBox="1"/>
           <p:nvPr/>
         </p:nvSpPr>
@@ -15828,14 +16925,14 @@
                   <a:srgbClr val="CCCCCC"/>
                 </a:solidFill>
               </a:rPr>
-              <a:t>OCM Dataset Integration   |   Slide 9 / 12</a:t>
+              <a:t>OCM Dataset Integration   |   Slide 9 / 13</a:t>
             </a:r>
           </a:p>
         </p:txBody>
       </p:sp>
       <p:pic>
         <p:nvPicPr>
-          <p:cNvPr id="7" name="Picture 6" descr="fig_walkthrough_results.png"/>
+          <p:cNvPr id="8" name="Picture 7" descr="fig_walkthrough_results.png"/>
           <p:cNvPicPr>
             <a:picLocks noChangeAspect="1"/>
           </p:cNvPicPr>
@@ -15859,7 +16956,7 @@
       </p:pic>
       <p:sp>
         <p:nvSpPr>
-          <p:cNvPr id="8" name="TextBox 7"/>
+          <p:cNvPr id="9" name="TextBox 8"/>
           <p:cNvSpPr txBox="1"/>
           <p:nvPr/>
         </p:nvSpPr>
@@ -15893,7 +16990,7 @@
       </p:sp>
       <p:sp>
         <p:nvSpPr>
-          <p:cNvPr id="9" name="Rectangle 8"/>
+          <p:cNvPr id="10" name="Rectangle 9"/>
           <p:cNvSpPr/>
           <p:nvPr/>
         </p:nvSpPr>
@@ -15936,7 +17033,7 @@
       </p:sp>
       <p:sp>
         <p:nvSpPr>
-          <p:cNvPr id="10" name="TextBox 9"/>
+          <p:cNvPr id="11" name="TextBox 10"/>
           <p:cNvSpPr txBox="1"/>
           <p:nvPr/>
         </p:nvSpPr>
@@ -15970,7 +17067,7 @@
       </p:sp>
       <p:sp>
         <p:nvSpPr>
-          <p:cNvPr id="11" name="TextBox 10"/>
+          <p:cNvPr id="12" name="TextBox 11"/>
           <p:cNvSpPr txBox="1"/>
           <p:nvPr/>
         </p:nvSpPr>
@@ -16004,7 +17101,7 @@
       </p:sp>
       <p:sp>
         <p:nvSpPr>
-          <p:cNvPr id="12" name="TextBox 11"/>
+          <p:cNvPr id="13" name="TextBox 12"/>
           <p:cNvSpPr txBox="1"/>
           <p:nvPr/>
         </p:nvSpPr>
@@ -16038,7 +17135,7 @@
       </p:sp>
       <p:sp>
         <p:nvSpPr>
-          <p:cNvPr id="13" name="Rectangle 12"/>
+          <p:cNvPr id="14" name="Rectangle 13"/>
           <p:cNvSpPr/>
           <p:nvPr/>
         </p:nvSpPr>
@@ -16083,7 +17180,7 @@
       </p:sp>
       <p:sp>
         <p:nvSpPr>
-          <p:cNvPr id="14" name="TextBox 13"/>
+          <p:cNvPr id="15" name="TextBox 14"/>
           <p:cNvSpPr txBox="1"/>
           <p:nvPr/>
         </p:nvSpPr>
@@ -16117,7 +17214,7 @@
       </p:sp>
       <p:sp>
         <p:nvSpPr>
-          <p:cNvPr id="15" name="TextBox 14"/>
+          <p:cNvPr id="16" name="TextBox 15"/>
           <p:cNvSpPr txBox="1"/>
           <p:nvPr/>
         </p:nvSpPr>
@@ -16151,7 +17248,7 @@
       </p:sp>
       <p:sp>
         <p:nvSpPr>
-          <p:cNvPr id="16" name="TextBox 15"/>
+          <p:cNvPr id="17" name="TextBox 16"/>
           <p:cNvSpPr txBox="1"/>
           <p:nvPr/>
         </p:nvSpPr>
@@ -16185,7 +17282,7 @@
       </p:sp>
       <p:sp>
         <p:nvSpPr>
-          <p:cNvPr id="17" name="Rectangle 16"/>
+          <p:cNvPr id="18" name="Rectangle 17"/>
           <p:cNvSpPr/>
           <p:nvPr/>
         </p:nvSpPr>
@@ -16230,7 +17327,7 @@
       </p:sp>
       <p:sp>
         <p:nvSpPr>
-          <p:cNvPr id="18" name="TextBox 17"/>
+          <p:cNvPr id="19" name="TextBox 18"/>
           <p:cNvSpPr txBox="1"/>
           <p:nvPr/>
         </p:nvSpPr>
@@ -16264,7 +17361,7 @@
       </p:sp>
       <p:sp>
         <p:nvSpPr>
-          <p:cNvPr id="19" name="TextBox 18"/>
+          <p:cNvPr id="20" name="TextBox 19"/>
           <p:cNvSpPr txBox="1"/>
           <p:nvPr/>
         </p:nvSpPr>
@@ -16298,7 +17395,7 @@
       </p:sp>
       <p:sp>
         <p:nvSpPr>
-          <p:cNvPr id="20" name="TextBox 19"/>
+          <p:cNvPr id="21" name="TextBox 20"/>
           <p:cNvSpPr txBox="1"/>
           <p:nvPr/>
         </p:nvSpPr>
@@ -16332,7 +17429,7 @@
       </p:sp>
       <p:sp>
         <p:nvSpPr>
-          <p:cNvPr id="21" name="Rectangle 20"/>
+          <p:cNvPr id="22" name="Rectangle 21"/>
           <p:cNvSpPr/>
           <p:nvPr/>
         </p:nvSpPr>
@@ -16377,7 +17474,7 @@
       </p:sp>
       <p:sp>
         <p:nvSpPr>
-          <p:cNvPr id="22" name="TextBox 21"/>
+          <p:cNvPr id="23" name="TextBox 22"/>
           <p:cNvSpPr txBox="1"/>
           <p:nvPr/>
         </p:nvSpPr>
@@ -16411,7 +17508,7 @@
       </p:sp>
       <p:sp>
         <p:nvSpPr>
-          <p:cNvPr id="23" name="TextBox 22"/>
+          <p:cNvPr id="24" name="TextBox 23"/>
           <p:cNvSpPr txBox="1"/>
           <p:nvPr/>
         </p:nvSpPr>
@@ -16445,7 +17542,7 @@
       </p:sp>
       <p:sp>
         <p:nvSpPr>
-          <p:cNvPr id="24" name="TextBox 23"/>
+          <p:cNvPr id="25" name="TextBox 24"/>
           <p:cNvSpPr txBox="1"/>
           <p:nvPr/>
         </p:nvSpPr>
@@ -16479,7 +17576,7 @@
       </p:sp>
       <p:sp>
         <p:nvSpPr>
-          <p:cNvPr id="25" name="Rectangle 24"/>
+          <p:cNvPr id="26" name="Rectangle 25"/>
           <p:cNvSpPr/>
           <p:nvPr/>
         </p:nvSpPr>
@@ -16524,7 +17621,7 @@
       </p:sp>
       <p:sp>
         <p:nvSpPr>
-          <p:cNvPr id="26" name="TextBox 25"/>
+          <p:cNvPr id="27" name="TextBox 26"/>
           <p:cNvSpPr txBox="1"/>
           <p:nvPr/>
         </p:nvSpPr>
@@ -16558,7 +17655,7 @@
       </p:sp>
       <p:sp>
         <p:nvSpPr>
-          <p:cNvPr id="27" name="TextBox 26"/>
+          <p:cNvPr id="28" name="TextBox 27"/>
           <p:cNvSpPr txBox="1"/>
           <p:nvPr/>
         </p:nvSpPr>
@@ -16592,7 +17689,7 @@
       </p:sp>
       <p:sp>
         <p:nvSpPr>
-          <p:cNvPr id="28" name="TextBox 27"/>
+          <p:cNvPr id="29" name="TextBox 28"/>
           <p:cNvSpPr txBox="1"/>
           <p:nvPr/>
         </p:nvSpPr>
@@ -16626,7 +17723,7 @@
       </p:sp>
       <p:sp>
         <p:nvSpPr>
-          <p:cNvPr id="29" name="Rectangle 28"/>
+          <p:cNvPr id="30" name="Rectangle 29"/>
           <p:cNvSpPr/>
           <p:nvPr/>
         </p:nvSpPr>
@@ -16671,7 +17768,7 @@
       </p:sp>
       <p:sp>
         <p:nvSpPr>
-          <p:cNvPr id="30" name="TextBox 29"/>
+          <p:cNvPr id="31" name="TextBox 30"/>
           <p:cNvSpPr txBox="1"/>
           <p:nvPr/>
         </p:nvSpPr>
@@ -16705,7 +17802,7 @@
       </p:sp>
       <p:sp>
         <p:nvSpPr>
-          <p:cNvPr id="31" name="TextBox 30"/>
+          <p:cNvPr id="32" name="TextBox 31"/>
           <p:cNvSpPr txBox="1"/>
           <p:nvPr/>
         </p:nvSpPr>
@@ -16739,7 +17836,7 @@
       </p:sp>
       <p:sp>
         <p:nvSpPr>
-          <p:cNvPr id="32" name="TextBox 31"/>
+          <p:cNvPr id="33" name="TextBox 32"/>
           <p:cNvSpPr txBox="1"/>
           <p:nvPr/>
         </p:nvSpPr>
@@ -16773,7 +17870,7 @@
       </p:sp>
       <p:sp>
         <p:nvSpPr>
-          <p:cNvPr id="33" name="TextBox 32"/>
+          <p:cNvPr id="34" name="TextBox 33"/>
           <p:cNvSpPr txBox="1"/>
           <p:nvPr/>
         </p:nvSpPr>
@@ -16807,7 +17904,7 @@
       </p:sp>
       <p:sp>
         <p:nvSpPr>
-          <p:cNvPr id="34" name="Rectangle 33"/>
+          <p:cNvPr id="35" name="Rectangle 34"/>
           <p:cNvSpPr/>
           <p:nvPr/>
         </p:nvSpPr>
@@ -16850,7 +17947,7 @@
       </p:sp>
       <p:sp>
         <p:nvSpPr>
-          <p:cNvPr id="35" name="TextBox 34"/>
+          <p:cNvPr id="36" name="TextBox 35"/>
           <p:cNvSpPr txBox="1"/>
           <p:nvPr/>
         </p:nvSpPr>
@@ -16884,7 +17981,7 @@
       </p:sp>
       <p:sp>
         <p:nvSpPr>
-          <p:cNvPr id="36" name="TextBox 35"/>
+          <p:cNvPr id="37" name="TextBox 36"/>
           <p:cNvSpPr txBox="1"/>
           <p:nvPr/>
         </p:nvSpPr>
@@ -16918,7 +18015,7 @@
       </p:sp>
       <p:sp>
         <p:nvSpPr>
-          <p:cNvPr id="37" name="Rectangle 36"/>
+          <p:cNvPr id="38" name="Rectangle 37"/>
           <p:cNvSpPr/>
           <p:nvPr/>
         </p:nvSpPr>
@@ -16963,7 +18060,7 @@
       </p:sp>
       <p:sp>
         <p:nvSpPr>
-          <p:cNvPr id="38" name="TextBox 37"/>
+          <p:cNvPr id="39" name="TextBox 38"/>
           <p:cNvSpPr txBox="1"/>
           <p:nvPr/>
         </p:nvSpPr>
@@ -16997,7 +18094,7 @@
       </p:sp>
       <p:sp>
         <p:nvSpPr>
-          <p:cNvPr id="39" name="TextBox 38"/>
+          <p:cNvPr id="40" name="TextBox 39"/>
           <p:cNvSpPr txBox="1"/>
           <p:nvPr/>
         </p:nvSpPr>
@@ -17031,7 +18128,7 @@
       </p:sp>
       <p:sp>
         <p:nvSpPr>
-          <p:cNvPr id="40" name="Rectangle 39"/>
+          <p:cNvPr id="41" name="Rectangle 40"/>
           <p:cNvSpPr/>
           <p:nvPr/>
         </p:nvSpPr>
@@ -17076,7 +18173,7 @@
       </p:sp>
       <p:sp>
         <p:nvSpPr>
-          <p:cNvPr id="41" name="TextBox 40"/>
+          <p:cNvPr id="42" name="TextBox 41"/>
           <p:cNvSpPr txBox="1"/>
           <p:nvPr/>
         </p:nvSpPr>
@@ -17110,7 +18207,7 @@
       </p:sp>
       <p:sp>
         <p:nvSpPr>
-          <p:cNvPr id="42" name="TextBox 41"/>
+          <p:cNvPr id="43" name="TextBox 42"/>
           <p:cNvSpPr txBox="1"/>
           <p:nvPr/>
         </p:nvSpPr>
@@ -17144,7 +18241,7 @@
       </p:sp>
       <p:sp>
         <p:nvSpPr>
-          <p:cNvPr id="43" name="TextBox 42"/>
+          <p:cNvPr id="44" name="TextBox 43"/>
           <p:cNvSpPr txBox="1"/>
           <p:nvPr/>
         </p:nvSpPr>

--- a/ocm_presentation.pptx
+++ b/ocm_presentation.pptx
@@ -20,6 +20,7 @@
     <p:sldId id="268" r:id="rId19"/>
     <p:sldId id="269" r:id="rId20"/>
     <p:sldId id="270" r:id="rId21"/>
+    <p:sldId id="271" r:id="rId22"/>
   </p:sldIdLst>
   <p:sldSz cx="12188952" cy="6858000" type="screen4x3"/>
   <p:notesSz cx="6858000" cy="9144000"/>
@@ -3474,7 +3475,7 @@
                   <a:srgbClr val="CCCCCC"/>
                 </a:solidFill>
               </a:rPr>
-              <a:t>OCM Dataset Integration   |   Slide 1 / 15</a:t>
+              <a:t>OCM Dataset Integration   |   Slide 1 / 16</a:t>
             </a:r>
           </a:p>
         </p:txBody>
@@ -3723,7 +3724,7 @@
                   <a:srgbClr val="CCCCCC"/>
                 </a:solidFill>
               </a:rPr>
-              <a:t>OCM Dataset Integration   |   Slide 10 / 15</a:t>
+              <a:t>OCM Dataset Integration   |   Slide 10 / 16</a:t>
             </a:r>
           </a:p>
         </p:txBody>
@@ -4695,7 +4696,7 @@
                   <a:srgbClr val="0F1E42"/>
                 </a:solidFill>
               </a:rPr>
-              <a:t>OOD robustness (unseen lit)</a:t>
+              <a:t>OOD — leak-free (unseen lit)</a:t>
             </a:r>
           </a:p>
         </p:txBody>
@@ -4939,11 +4940,11 @@
             <a:avLst/>
           </a:prstGeom>
           <a:solidFill>
-            <a:srgbClr val="E8F5E9"/>
+            <a:srgbClr val="F5F6F8"/>
           </a:solidFill>
           <a:ln w="9525">
             <a:solidFill>
-              <a:srgbClr val="10B981"/>
+              <a:srgbClr val="D0D5DF"/>
             </a:solidFill>
           </a:ln>
         </p:spPr>
@@ -4993,12 +4994,12 @@
           <a:p>
             <a:pPr algn="l"/>
             <a:r>
-              <a:rPr sz="1100" b="1" i="0">
-                <a:solidFill>
-                  <a:srgbClr val="1B5E20"/>
-                </a:solidFill>
-              </a:rPr>
-              <a:t>Prior FT  ★</a:t>
+              <a:rPr sz="1100" b="0" i="0">
+                <a:solidFill>
+                  <a:srgbClr val="1A1A2E"/>
+                </a:solidFill>
+              </a:rPr>
+              <a:t>Prior FT</a:t>
             </a:r>
           </a:p>
         </p:txBody>
@@ -5027,12 +5028,12 @@
           <a:p>
             <a:pPr algn="ctr"/>
             <a:r>
-              <a:rPr sz="1100" b="1" i="0">
-                <a:solidFill>
-                  <a:srgbClr val="1B5E20"/>
-                </a:solidFill>
-              </a:rPr>
-              <a:t>3.60  (−45%)</a:t>
+              <a:rPr sz="1100" b="0" i="0">
+                <a:solidFill>
+                  <a:srgbClr val="1A1A2E"/>
+                </a:solidFill>
+              </a:rPr>
+              <a:t>6.77</a:t>
             </a:r>
           </a:p>
         </p:txBody>
@@ -5045,28 +5046,28 @@
         </p:nvSpPr>
         <p:spPr>
           <a:xfrm>
-            <a:off x="8046720" y="5760720"/>
-            <a:ext cx="3840480" cy="365760"/>
-          </a:xfrm>
-          <a:prstGeom prst="rect">
-            <a:avLst/>
-          </a:prstGeom>
-          <a:noFill/>
-        </p:spPr>
-        <p:txBody>
-          <a:bodyPr wrap="square">
-            <a:spAutoFit/>
-          </a:bodyPr>
-          <a:lstStyle/>
-          <a:p>
-            <a:pPr algn="l"/>
-            <a:r>
-              <a:rPr sz="1000" b="0" i="1">
+            <a:off x="8046720" y="5715000"/>
+            <a:ext cx="3840480" cy="685800"/>
+          </a:xfrm>
+          <a:prstGeom prst="rect">
+            <a:avLst/>
+          </a:prstGeom>
+          <a:noFill/>
+        </p:spPr>
+        <p:txBody>
+          <a:bodyPr wrap="square">
+            <a:spAutoFit/>
+          </a:bodyPr>
+          <a:lstStyle/>
+          <a:p>
+            <a:pPr algn="l"/>
+            <a:r>
+              <a:rPr sz="900" b="0" i="1">
                 <a:solidFill>
                   <a:srgbClr val="50596E"/>
                 </a:solidFill>
               </a:rPr>
-              <a:t>OOD: 2,139 non-Impregnation lit samples, unseen.</a:t>
+              <a:t>OOD gain is modest &amp; honest.  Earlier “3.60 (−45%)” was leakage (prior saw test rows).  QN trades OOD for in-dist accuracy — see Rigour slide.</a:t>
             </a:r>
           </a:p>
         </p:txBody>
@@ -5315,7 +5316,7 @@
                   <a:srgbClr val="CCCCCC"/>
                 </a:solidFill>
               </a:rPr>
-              <a:t>OCM Dataset Integration   |   Slide 11 / 15</a:t>
+              <a:t>OCM Dataset Integration   |   Slide 11 / 16</a:t>
             </a:r>
           </a:p>
         </p:txBody>
@@ -5948,7 +5949,7 @@
                   <a:srgbClr val="CCCCCC"/>
                 </a:solidFill>
               </a:rPr>
-              <a:t>OCM Dataset Integration   |   Slide 12 / 15</a:t>
+              <a:t>OCM Dataset Integration   |   Slide 12 / 16</a:t>
             </a:r>
           </a:p>
         </p:txBody>
@@ -7090,7 +7091,7 @@
                   <a:srgbClr val="FFFFFF"/>
                 </a:solidFill>
               </a:rPr>
-              <a:t>Critical Analysis — Per-Method Review</a:t>
+              <a:t>Statistical Rigour &amp; Honesty</a:t>
             </a:r>
           </a:p>
         </p:txBody>
@@ -7124,7 +7125,7 @@
                   <a:srgbClr val="BBCCEE"/>
                 </a:solidFill>
               </a:rPr>
-              <a:t>Chapter 9</a:t>
+              <a:t>Chapter 8</a:t>
             </a:r>
           </a:p>
         </p:txBody>
@@ -7201,7 +7202,7 @@
                   <a:srgbClr val="CCCCCC"/>
                 </a:solidFill>
               </a:rPr>
-              <a:t>OCM Dataset Integration   |   Slide 13 / 15</a:t>
+              <a:t>OCM Dataset Integration   |   Slide 13 / 16</a:t>
             </a:r>
           </a:p>
         </p:txBody>
@@ -7214,51 +7215,237 @@
         </p:nvSpPr>
         <p:spPr>
           <a:xfrm>
-            <a:off x="365760" y="1234440"/>
-            <a:ext cx="6400800" cy="365760"/>
-          </a:xfrm>
-          <a:prstGeom prst="rect">
-            <a:avLst/>
-          </a:prstGeom>
-          <a:noFill/>
-        </p:spPr>
-        <p:txBody>
-          <a:bodyPr wrap="square">
-            <a:spAutoFit/>
-          </a:bodyPr>
-          <a:lstStyle/>
-          <a:p>
-            <a:pPr algn="l"/>
-            <a:r>
-              <a:rPr sz="1400" b="1" i="0">
+            <a:off x="274320" y="1097280"/>
+            <a:ext cx="5852160" cy="365760"/>
+          </a:xfrm>
+          <a:prstGeom prst="rect">
+            <a:avLst/>
+          </a:prstGeom>
+          <a:noFill/>
+        </p:spPr>
+        <p:txBody>
+          <a:bodyPr wrap="square">
+            <a:spAutoFit/>
+          </a:bodyPr>
+          <a:lstStyle/>
+          <a:p>
+            <a:pPr algn="l"/>
+            <a:r>
+              <a:rPr sz="1300" b="1" i="0">
                 <a:solidFill>
                   <a:srgbClr val="0F1E42"/>
                 </a:solidFill>
               </a:rPr>
-              <a:t>Honest critique of each method</a:t>
-            </a:r>
-          </a:p>
-        </p:txBody>
-      </p:sp>
-      <p:sp>
-        <p:nvSpPr>
-          <p:cNvPr id="9" name="Rectangle 8"/>
+              <a:t>Repeatable across 10 random seeds</a:t>
+            </a:r>
+          </a:p>
+        </p:txBody>
+      </p:sp>
+      <p:pic>
+        <p:nvPicPr>
+          <p:cNvPr id="9" name="Picture 8" descr="fig_repeated_runs.png"/>
+          <p:cNvPicPr>
+            <a:picLocks noChangeAspect="1"/>
+          </p:cNvPicPr>
+          <p:nvPr/>
+        </p:nvPicPr>
+        <p:blipFill>
+          <a:blip r:embed="rId2"/>
+          <a:stretch>
+            <a:fillRect/>
+          </a:stretch>
+        </p:blipFill>
+        <p:spPr>
+          <a:xfrm>
+            <a:off x="274320" y="1508760"/>
+            <a:ext cx="5852160" cy="2243328"/>
+          </a:xfrm>
+          <a:prstGeom prst="rect">
+            <a:avLst/>
+          </a:prstGeom>
+        </p:spPr>
+      </p:pic>
+      <p:sp>
+        <p:nvSpPr>
+          <p:cNvPr id="10" name="TextBox 9"/>
+          <p:cNvSpPr txBox="1"/>
+          <p:nvPr/>
+        </p:nvSpPr>
+        <p:spPr>
+          <a:xfrm>
+            <a:off x="274320" y="4160520"/>
+            <a:ext cx="5852160" cy="429768"/>
+          </a:xfrm>
+          <a:prstGeom prst="rect">
+            <a:avLst/>
+          </a:prstGeom>
+          <a:noFill/>
+        </p:spPr>
+        <p:txBody>
+          <a:bodyPr wrap="square">
+            <a:spAutoFit/>
+          </a:bodyPr>
+          <a:lstStyle/>
+          <a:p>
+            <a:pPr algn="l"/>
+            <a:r>
+              <a:rPr sz="1100" b="0" i="0">
+                <a:solidFill>
+                  <a:srgbClr val="1A1A2E"/>
+                </a:solidFill>
+              </a:rPr>
+              <a:t>•  Baseline 2.121 ± 0.006  vs  PFT 1.909 ± 0.002</a:t>
+            </a:r>
+          </a:p>
+        </p:txBody>
+      </p:sp>
+      <p:sp>
+        <p:nvSpPr>
+          <p:cNvPr id="11" name="TextBox 10"/>
+          <p:cNvSpPr txBox="1"/>
+          <p:nvPr/>
+        </p:nvSpPr>
+        <p:spPr>
+          <a:xfrm>
+            <a:off x="274320" y="4544568"/>
+            <a:ext cx="5852160" cy="429768"/>
+          </a:xfrm>
+          <a:prstGeom prst="rect">
+            <a:avLst/>
+          </a:prstGeom>
+          <a:noFill/>
+        </p:spPr>
+        <p:txBody>
+          <a:bodyPr wrap="square">
+            <a:spAutoFit/>
+          </a:bodyPr>
+          <a:lstStyle/>
+          <a:p>
+            <a:pPr algn="l"/>
+            <a:r>
+              <a:rPr sz="1100" b="0" i="0">
+                <a:solidFill>
+                  <a:srgbClr val="1A1A2E"/>
+                </a:solidFill>
+              </a:rPr>
+              <a:t>•  PFT wins 10 / 10 runs — curves never cross</a:t>
+            </a:r>
+          </a:p>
+        </p:txBody>
+      </p:sp>
+      <p:sp>
+        <p:nvSpPr>
+          <p:cNvPr id="12" name="TextBox 11"/>
+          <p:cNvSpPr txBox="1"/>
+          <p:nvPr/>
+        </p:nvSpPr>
+        <p:spPr>
+          <a:xfrm>
+            <a:off x="274320" y="4928616"/>
+            <a:ext cx="5852160" cy="429768"/>
+          </a:xfrm>
+          <a:prstGeom prst="rect">
+            <a:avLst/>
+          </a:prstGeom>
+          <a:noFill/>
+        </p:spPr>
+        <p:txBody>
+          <a:bodyPr wrap="square">
+            <a:spAutoFit/>
+          </a:bodyPr>
+          <a:lstStyle/>
+          <a:p>
+            <a:pPr algn="l"/>
+            <a:r>
+              <a:rPr sz="1100" b="0" i="0">
+                <a:solidFill>
+                  <a:srgbClr val="1A1A2E"/>
+                </a:solidFill>
+              </a:rPr>
+              <a:t>•  Paired t  p = 3.9×10⁻¹⁵;  held-out 20%: 2.097 → 1.892</a:t>
+            </a:r>
+          </a:p>
+        </p:txBody>
+      </p:sp>
+      <p:sp>
+        <p:nvSpPr>
+          <p:cNvPr id="13" name="TextBox 12"/>
+          <p:cNvSpPr txBox="1"/>
+          <p:nvPr/>
+        </p:nvSpPr>
+        <p:spPr>
+          <a:xfrm>
+            <a:off x="6309360" y="1097280"/>
+            <a:ext cx="5577840" cy="365760"/>
+          </a:xfrm>
+          <a:prstGeom prst="rect">
+            <a:avLst/>
+          </a:prstGeom>
+          <a:noFill/>
+        </p:spPr>
+        <p:txBody>
+          <a:bodyPr wrap="square">
+            <a:spAutoFit/>
+          </a:bodyPr>
+          <a:lstStyle/>
+          <a:p>
+            <a:pPr algn="l"/>
+            <a:r>
+              <a:rPr sz="1300" b="1" i="0">
+                <a:solidFill>
+                  <a:srgbClr val="0F1E42"/>
+                </a:solidFill>
+              </a:rPr>
+              <a:t>Quantile normalisation is a trade-off</a:t>
+            </a:r>
+          </a:p>
+        </p:txBody>
+      </p:sp>
+      <p:pic>
+        <p:nvPicPr>
+          <p:cNvPr id="14" name="Picture 13" descr="fig_qn_tradeoff.png"/>
+          <p:cNvPicPr>
+            <a:picLocks noChangeAspect="1"/>
+          </p:cNvPicPr>
+          <p:nvPr/>
+        </p:nvPicPr>
+        <p:blipFill>
+          <a:blip r:embed="rId3"/>
+          <a:stretch>
+            <a:fillRect/>
+          </a:stretch>
+        </p:blipFill>
+        <p:spPr>
+          <a:xfrm>
+            <a:off x="6309360" y="1508760"/>
+            <a:ext cx="5577840" cy="2231136"/>
+          </a:xfrm>
+          <a:prstGeom prst="rect">
+            <a:avLst/>
+          </a:prstGeom>
+        </p:spPr>
+      </p:pic>
+      <p:sp>
+        <p:nvSpPr>
+          <p:cNvPr id="15" name="Rectangle 14"/>
           <p:cNvSpPr/>
           <p:nvPr/>
         </p:nvSpPr>
         <p:spPr>
           <a:xfrm>
-            <a:off x="365760" y="1664208"/>
-            <a:ext cx="6400800" cy="365760"/>
+            <a:off x="6309360" y="3977639"/>
+            <a:ext cx="5577840" cy="1280160"/>
           </a:xfrm>
           <a:prstGeom prst="rect">
             <a:avLst/>
           </a:prstGeom>
           <a:solidFill>
-            <a:srgbClr val="0F1E42"/>
+            <a:srgbClr val="FFF4E5"/>
           </a:solidFill>
-          <a:ln>
-            <a:noFill/>
+          <a:ln w="9525">
+            <a:solidFill>
+              <a:srgbClr val="E67E22"/>
+            </a:solidFill>
           </a:ln>
         </p:spPr>
         <p:style>
@@ -7285,778 +7472,34 @@
       </p:sp>
       <p:sp>
         <p:nvSpPr>
-          <p:cNvPr id="10" name="TextBox 9"/>
-          <p:cNvSpPr txBox="1"/>
-          <p:nvPr/>
-        </p:nvSpPr>
-        <p:spPr>
-          <a:xfrm>
-            <a:off x="457200" y="1691640"/>
-            <a:ext cx="1645920" cy="310896"/>
-          </a:xfrm>
-          <a:prstGeom prst="rect">
-            <a:avLst/>
-          </a:prstGeom>
-          <a:noFill/>
-        </p:spPr>
-        <p:txBody>
-          <a:bodyPr wrap="square">
-            <a:spAutoFit/>
-          </a:bodyPr>
-          <a:lstStyle/>
-          <a:p>
-            <a:pPr algn="l"/>
-            <a:r>
-              <a:rPr sz="1100" b="1" i="0">
-                <a:solidFill>
-                  <a:srgbClr val="FFFFFF"/>
-                </a:solidFill>
-              </a:rPr>
-              <a:t>Method</a:t>
-            </a:r>
-          </a:p>
-        </p:txBody>
-      </p:sp>
-      <p:sp>
-        <p:nvSpPr>
-          <p:cNvPr id="11" name="TextBox 10"/>
-          <p:cNvSpPr txBox="1"/>
-          <p:nvPr/>
-        </p:nvSpPr>
-        <p:spPr>
-          <a:xfrm>
-            <a:off x="2148840" y="1691640"/>
-            <a:ext cx="4480560" cy="310896"/>
-          </a:xfrm>
-          <a:prstGeom prst="rect">
-            <a:avLst/>
-          </a:prstGeom>
-          <a:noFill/>
-        </p:spPr>
-        <p:txBody>
-          <a:bodyPr wrap="square">
-            <a:spAutoFit/>
-          </a:bodyPr>
-          <a:lstStyle/>
-          <a:p>
-            <a:pPr algn="l"/>
-            <a:r>
-              <a:rPr sz="1100" b="1" i="0">
-                <a:solidFill>
-                  <a:srgbClr val="FFFFFF"/>
-                </a:solidFill>
-              </a:rPr>
-              <a:t>Main limitation</a:t>
-            </a:r>
-          </a:p>
-        </p:txBody>
-      </p:sp>
-      <p:sp>
-        <p:nvSpPr>
-          <p:cNvPr id="12" name="Rectangle 11"/>
-          <p:cNvSpPr/>
-          <p:nvPr/>
-        </p:nvSpPr>
-        <p:spPr>
-          <a:xfrm>
-            <a:off x="365760" y="2029968"/>
-            <a:ext cx="6400800" cy="530352"/>
-          </a:xfrm>
-          <a:prstGeom prst="rect">
-            <a:avLst/>
-          </a:prstGeom>
-          <a:solidFill>
-            <a:srgbClr val="F5F6F8"/>
-          </a:solidFill>
-          <a:ln w="9525">
-            <a:solidFill>
-              <a:srgbClr val="D0D5DF"/>
-            </a:solidFill>
-          </a:ln>
-        </p:spPr>
-        <p:style>
-          <a:lnRef idx="1">
-            <a:schemeClr val="accent1"/>
-          </a:lnRef>
-          <a:fillRef idx="3">
-            <a:schemeClr val="accent1"/>
-          </a:fillRef>
-          <a:effectRef idx="2">
-            <a:schemeClr val="accent1"/>
-          </a:effectRef>
-          <a:fontRef idx="minor">
-            <a:schemeClr val="lt1"/>
-          </a:fontRef>
-        </p:style>
-        <p:txBody>
-          <a:bodyPr rtlCol="0" anchor="ctr"/>
-          <a:lstStyle/>
-          <a:p>
-            <a:pPr algn="ctr"/>
-          </a:p>
-        </p:txBody>
-      </p:sp>
-      <p:sp>
-        <p:nvSpPr>
-          <p:cNvPr id="13" name="TextBox 12"/>
-          <p:cNvSpPr txBox="1"/>
-          <p:nvPr/>
-        </p:nvSpPr>
-        <p:spPr>
-          <a:xfrm>
-            <a:off x="457200" y="2075688"/>
-            <a:ext cx="1645920" cy="457199"/>
-          </a:xfrm>
-          <a:prstGeom prst="rect">
-            <a:avLst/>
-          </a:prstGeom>
-          <a:noFill/>
-        </p:spPr>
-        <p:txBody>
-          <a:bodyPr wrap="square">
-            <a:spAutoFit/>
-          </a:bodyPr>
-          <a:lstStyle/>
-          <a:p>
-            <a:pPr algn="l"/>
-            <a:r>
-              <a:rPr sz="1000" b="1" i="0">
-                <a:solidFill>
-                  <a:srgbClr val="1A1A2E"/>
-                </a:solidFill>
-              </a:rPr>
-              <a:t>Naive merge</a:t>
-            </a:r>
-          </a:p>
-        </p:txBody>
-      </p:sp>
-      <p:sp>
-        <p:nvSpPr>
-          <p:cNvPr id="14" name="TextBox 13"/>
-          <p:cNvSpPr txBox="1"/>
-          <p:nvPr/>
-        </p:nvSpPr>
-        <p:spPr>
-          <a:xfrm>
-            <a:off x="2148840" y="2075688"/>
-            <a:ext cx="4480560" cy="457199"/>
-          </a:xfrm>
-          <a:prstGeom prst="rect">
-            <a:avLst/>
-          </a:prstGeom>
-          <a:noFill/>
-        </p:spPr>
-        <p:txBody>
-          <a:bodyPr wrap="square">
-            <a:spAutoFit/>
-          </a:bodyPr>
-          <a:lstStyle/>
-          <a:p>
-            <a:pPr algn="l"/>
-            <a:r>
-              <a:rPr sz="1000" b="0" i="0">
+          <p:cNvPr id="16" name="TextBox 15"/>
+          <p:cNvSpPr txBox="1"/>
+          <p:nvPr/>
+        </p:nvSpPr>
+        <p:spPr>
+          <a:xfrm>
+            <a:off x="6419088" y="4050791"/>
+            <a:ext cx="5358384" cy="1133856"/>
+          </a:xfrm>
+          <a:prstGeom prst="rect">
+            <a:avLst/>
+          </a:prstGeom>
+          <a:noFill/>
+        </p:spPr>
+        <p:txBody>
+          <a:bodyPr wrap="square">
+            <a:spAutoFit/>
+          </a:bodyPr>
+          <a:lstStyle/>
+          <a:p>
+            <a:pPr algn="l"/>
+            <a:r>
+              <a:rPr sz="1000" b="0" i="1">
                 <a:solidFill>
                   <a:srgbClr val="50596E"/>
                 </a:solidFill>
               </a:rPr>
-              <a:t>Negative control — makes the model worse</a:t>
-            </a:r>
-          </a:p>
-        </p:txBody>
-      </p:sp>
-      <p:sp>
-        <p:nvSpPr>
-          <p:cNvPr id="15" name="Rectangle 14"/>
-          <p:cNvSpPr/>
-          <p:nvPr/>
-        </p:nvSpPr>
-        <p:spPr>
-          <a:xfrm>
-            <a:off x="365760" y="2596896"/>
-            <a:ext cx="6400800" cy="530352"/>
-          </a:xfrm>
-          <a:prstGeom prst="rect">
-            <a:avLst/>
-          </a:prstGeom>
-          <a:solidFill>
-            <a:srgbClr val="F5F6F8"/>
-          </a:solidFill>
-          <a:ln w="9525">
-            <a:solidFill>
-              <a:srgbClr val="D0D5DF"/>
-            </a:solidFill>
-          </a:ln>
-        </p:spPr>
-        <p:style>
-          <a:lnRef idx="1">
-            <a:schemeClr val="accent1"/>
-          </a:lnRef>
-          <a:fillRef idx="3">
-            <a:schemeClr val="accent1"/>
-          </a:fillRef>
-          <a:effectRef idx="2">
-            <a:schemeClr val="accent1"/>
-          </a:effectRef>
-          <a:fontRef idx="minor">
-            <a:schemeClr val="lt1"/>
-          </a:fontRef>
-        </p:style>
-        <p:txBody>
-          <a:bodyPr rtlCol="0" anchor="ctr"/>
-          <a:lstStyle/>
-          <a:p>
-            <a:pPr algn="ctr"/>
-          </a:p>
-        </p:txBody>
-      </p:sp>
-      <p:sp>
-        <p:nvSpPr>
-          <p:cNvPr id="16" name="TextBox 15"/>
-          <p:cNvSpPr txBox="1"/>
-          <p:nvPr/>
-        </p:nvSpPr>
-        <p:spPr>
-          <a:xfrm>
-            <a:off x="457200" y="2642616"/>
-            <a:ext cx="1645920" cy="457199"/>
-          </a:xfrm>
-          <a:prstGeom prst="rect">
-            <a:avLst/>
-          </a:prstGeom>
-          <a:noFill/>
-        </p:spPr>
-        <p:txBody>
-          <a:bodyPr wrap="square">
-            <a:spAutoFit/>
-          </a:bodyPr>
-          <a:lstStyle/>
-          <a:p>
-            <a:pPr algn="l"/>
-            <a:r>
-              <a:rPr sz="1000" b="1" i="0">
-                <a:solidFill>
-                  <a:srgbClr val="1A1A2E"/>
-                </a:solidFill>
-              </a:rPr>
-              <a:t>DRST</a:t>
-            </a:r>
-          </a:p>
-        </p:txBody>
-      </p:sp>
-      <p:sp>
-        <p:nvSpPr>
-          <p:cNvPr id="17" name="TextBox 16"/>
-          <p:cNvSpPr txBox="1"/>
-          <p:nvPr/>
-        </p:nvSpPr>
-        <p:spPr>
-          <a:xfrm>
-            <a:off x="2148840" y="2642616"/>
-            <a:ext cx="4480560" cy="457199"/>
-          </a:xfrm>
-          <a:prstGeom prst="rect">
-            <a:avLst/>
-          </a:prstGeom>
-          <a:noFill/>
-        </p:spPr>
-        <p:txBody>
-          <a:bodyPr wrap="square">
-            <a:spAutoFit/>
-          </a:bodyPr>
-          <a:lstStyle/>
-          <a:p>
-            <a:pPr algn="l"/>
-            <a:r>
-              <a:rPr sz="1000" b="0" i="0">
-                <a:solidFill>
-                  <a:srgbClr val="50596E"/>
-                </a:solidFill>
-              </a:rPr>
-              <a:t>Hard cliff; discards ~80%; τ tuned on the reported CV</a:t>
-            </a:r>
-          </a:p>
-        </p:txBody>
-      </p:sp>
-      <p:sp>
-        <p:nvSpPr>
-          <p:cNvPr id="18" name="Rectangle 17"/>
-          <p:cNvSpPr/>
-          <p:nvPr/>
-        </p:nvSpPr>
-        <p:spPr>
-          <a:xfrm>
-            <a:off x="365760" y="3163824"/>
-            <a:ext cx="6400800" cy="530352"/>
-          </a:xfrm>
-          <a:prstGeom prst="rect">
-            <a:avLst/>
-          </a:prstGeom>
-          <a:solidFill>
-            <a:srgbClr val="F5F6F8"/>
-          </a:solidFill>
-          <a:ln w="9525">
-            <a:solidFill>
-              <a:srgbClr val="D0D5DF"/>
-            </a:solidFill>
-          </a:ln>
-        </p:spPr>
-        <p:style>
-          <a:lnRef idx="1">
-            <a:schemeClr val="accent1"/>
-          </a:lnRef>
-          <a:fillRef idx="3">
-            <a:schemeClr val="accent1"/>
-          </a:fillRef>
-          <a:effectRef idx="2">
-            <a:schemeClr val="accent1"/>
-          </a:effectRef>
-          <a:fontRef idx="minor">
-            <a:schemeClr val="lt1"/>
-          </a:fontRef>
-        </p:style>
-        <p:txBody>
-          <a:bodyPr rtlCol="0" anchor="ctr"/>
-          <a:lstStyle/>
-          <a:p>
-            <a:pPr algn="ctr"/>
-          </a:p>
-        </p:txBody>
-      </p:sp>
-      <p:sp>
-        <p:nvSpPr>
-          <p:cNvPr id="19" name="TextBox 18"/>
-          <p:cNvSpPr txBox="1"/>
-          <p:nvPr/>
-        </p:nvSpPr>
-        <p:spPr>
-          <a:xfrm>
-            <a:off x="457200" y="3209544"/>
-            <a:ext cx="1645920" cy="457199"/>
-          </a:xfrm>
-          <a:prstGeom prst="rect">
-            <a:avLst/>
-          </a:prstGeom>
-          <a:noFill/>
-        </p:spPr>
-        <p:txBody>
-          <a:bodyPr wrap="square">
-            <a:spAutoFit/>
-          </a:bodyPr>
-          <a:lstStyle/>
-          <a:p>
-            <a:pPr algn="l"/>
-            <a:r>
-              <a:rPr sz="1000" b="1" i="0">
-                <a:solidFill>
-                  <a:srgbClr val="1A1A2E"/>
-                </a:solidFill>
-              </a:rPr>
-              <a:t>KMM</a:t>
-            </a:r>
-          </a:p>
-        </p:txBody>
-      </p:sp>
-      <p:sp>
-        <p:nvSpPr>
-          <p:cNvPr id="20" name="TextBox 19"/>
-          <p:cNvSpPr txBox="1"/>
-          <p:nvPr/>
-        </p:nvSpPr>
-        <p:spPr>
-          <a:xfrm>
-            <a:off x="2148840" y="3209544"/>
-            <a:ext cx="4480560" cy="457199"/>
-          </a:xfrm>
-          <a:prstGeom prst="rect">
-            <a:avLst/>
-          </a:prstGeom>
-          <a:noFill/>
-        </p:spPr>
-        <p:txBody>
-          <a:bodyPr wrap="square">
-            <a:spAutoFit/>
-          </a:bodyPr>
-          <a:lstStyle/>
-          <a:p>
-            <a:pPr algn="l"/>
-            <a:r>
-              <a:rPr sz="1000" b="0" i="0">
-                <a:solidFill>
-                  <a:srgbClr val="50596E"/>
-                </a:solidFill>
-              </a:rPr>
-              <a:t>O(n²) kernel; σ-sensitive; labels still in loss; ties DRST</a:t>
-            </a:r>
-          </a:p>
-        </p:txBody>
-      </p:sp>
-      <p:sp>
-        <p:nvSpPr>
-          <p:cNvPr id="21" name="Rectangle 20"/>
-          <p:cNvSpPr/>
-          <p:nvPr/>
-        </p:nvSpPr>
-        <p:spPr>
-          <a:xfrm>
-            <a:off x="365760" y="3730752"/>
-            <a:ext cx="6400800" cy="530352"/>
-          </a:xfrm>
-          <a:prstGeom prst="rect">
-            <a:avLst/>
-          </a:prstGeom>
-          <a:solidFill>
-            <a:srgbClr val="E8F5E9"/>
-          </a:solidFill>
-          <a:ln w="9525">
-            <a:solidFill>
-              <a:srgbClr val="D0D5DF"/>
-            </a:solidFill>
-          </a:ln>
-        </p:spPr>
-        <p:style>
-          <a:lnRef idx="1">
-            <a:schemeClr val="accent1"/>
-          </a:lnRef>
-          <a:fillRef idx="3">
-            <a:schemeClr val="accent1"/>
-          </a:fillRef>
-          <a:effectRef idx="2">
-            <a:schemeClr val="accent1"/>
-          </a:effectRef>
-          <a:fontRef idx="minor">
-            <a:schemeClr val="lt1"/>
-          </a:fontRef>
-        </p:style>
-        <p:txBody>
-          <a:bodyPr rtlCol="0" anchor="ctr"/>
-          <a:lstStyle/>
-          <a:p>
-            <a:pPr algn="ctr"/>
-          </a:p>
-        </p:txBody>
-      </p:sp>
-      <p:sp>
-        <p:nvSpPr>
-          <p:cNvPr id="22" name="TextBox 21"/>
-          <p:cNvSpPr txBox="1"/>
-          <p:nvPr/>
-        </p:nvSpPr>
-        <p:spPr>
-          <a:xfrm>
-            <a:off x="457200" y="3776472"/>
-            <a:ext cx="1645920" cy="457199"/>
-          </a:xfrm>
-          <a:prstGeom prst="rect">
-            <a:avLst/>
-          </a:prstGeom>
-          <a:noFill/>
-        </p:spPr>
-        <p:txBody>
-          <a:bodyPr wrap="square">
-            <a:spAutoFit/>
-          </a:bodyPr>
-          <a:lstStyle/>
-          <a:p>
-            <a:pPr algn="l"/>
-            <a:r>
-              <a:rPr sz="1000" b="1" i="0">
-                <a:solidFill>
-                  <a:srgbClr val="1B5E20"/>
-                </a:solidFill>
-              </a:rPr>
-              <a:t>Prior FT</a:t>
-            </a:r>
-          </a:p>
-        </p:txBody>
-      </p:sp>
-      <p:sp>
-        <p:nvSpPr>
-          <p:cNvPr id="23" name="TextBox 22"/>
-          <p:cNvSpPr txBox="1"/>
-          <p:nvPr/>
-        </p:nvSpPr>
-        <p:spPr>
-          <a:xfrm>
-            <a:off x="2148840" y="3776472"/>
-            <a:ext cx="4480560" cy="457199"/>
-          </a:xfrm>
-          <a:prstGeom prst="rect">
-            <a:avLst/>
-          </a:prstGeom>
-          <a:noFill/>
-        </p:spPr>
-        <p:txBody>
-          <a:bodyPr wrap="square">
-            <a:spAutoFit/>
-          </a:bodyPr>
-          <a:lstStyle/>
-          <a:p>
-            <a:pPr algn="l"/>
-            <a:r>
-              <a:rPr sz="1000" b="0" i="0">
-                <a:solidFill>
-                  <a:srgbClr val="1B5E20"/>
-                </a:solidFill>
-              </a:rPr>
-              <a:t>Best — Stage-1 on 782 rows → high variance; two models</a:t>
-            </a:r>
-          </a:p>
-        </p:txBody>
-      </p:sp>
-      <p:sp>
-        <p:nvSpPr>
-          <p:cNvPr id="24" name="Rectangle 23"/>
-          <p:cNvSpPr/>
-          <p:nvPr/>
-        </p:nvSpPr>
-        <p:spPr>
-          <a:xfrm>
-            <a:off x="7040880" y="1234440"/>
-            <a:ext cx="4846320" cy="384048"/>
-          </a:xfrm>
-          <a:prstGeom prst="rect">
-            <a:avLst/>
-          </a:prstGeom>
-          <a:solidFill>
-            <a:srgbClr val="0078C8"/>
-          </a:solidFill>
-          <a:ln>
-            <a:noFill/>
-          </a:ln>
-        </p:spPr>
-        <p:style>
-          <a:lnRef idx="1">
-            <a:schemeClr val="accent1"/>
-          </a:lnRef>
-          <a:fillRef idx="3">
-            <a:schemeClr val="accent1"/>
-          </a:fillRef>
-          <a:effectRef idx="2">
-            <a:schemeClr val="accent1"/>
-          </a:effectRef>
-          <a:fontRef idx="minor">
-            <a:schemeClr val="lt1"/>
-          </a:fontRef>
-        </p:style>
-        <p:txBody>
-          <a:bodyPr rtlCol="0" anchor="ctr"/>
-          <a:lstStyle/>
-          <a:p>
-            <a:pPr algn="ctr"/>
-          </a:p>
-        </p:txBody>
-      </p:sp>
-      <p:sp>
-        <p:nvSpPr>
-          <p:cNvPr id="25" name="TextBox 24"/>
-          <p:cNvSpPr txBox="1"/>
-          <p:nvPr/>
-        </p:nvSpPr>
-        <p:spPr>
-          <a:xfrm>
-            <a:off x="7178040" y="1261872"/>
-            <a:ext cx="4572000" cy="329184"/>
-          </a:xfrm>
-          <a:prstGeom prst="rect">
-            <a:avLst/>
-          </a:prstGeom>
-          <a:noFill/>
-        </p:spPr>
-        <p:txBody>
-          <a:bodyPr wrap="square">
-            <a:spAutoFit/>
-          </a:bodyPr>
-          <a:lstStyle/>
-          <a:p>
-            <a:pPr algn="l"/>
-            <a:r>
-              <a:rPr sz="1300" b="1" i="0">
-                <a:solidFill>
-                  <a:srgbClr val="FFFFFF"/>
-                </a:solidFill>
-              </a:rPr>
-              <a:t>Cross-cutting limits</a:t>
-            </a:r>
-          </a:p>
-        </p:txBody>
-      </p:sp>
-      <p:sp>
-        <p:nvSpPr>
-          <p:cNvPr id="26" name="TextBox 25"/>
-          <p:cNvSpPr txBox="1"/>
-          <p:nvPr/>
-        </p:nvSpPr>
-        <p:spPr>
-          <a:xfrm>
-            <a:off x="7086600" y="1719072"/>
-            <a:ext cx="4754880" cy="429768"/>
-          </a:xfrm>
-          <a:prstGeom prst="rect">
-            <a:avLst/>
-          </a:prstGeom>
-          <a:noFill/>
-        </p:spPr>
-        <p:txBody>
-          <a:bodyPr wrap="square">
-            <a:spAutoFit/>
-          </a:bodyPr>
-          <a:lstStyle/>
-          <a:p>
-            <a:pPr algn="l"/>
-            <a:r>
-              <a:rPr sz="1000" b="0" i="0">
-                <a:solidFill>
-                  <a:srgbClr val="1A1A2E"/>
-                </a:solidFill>
-              </a:rPr>
-              <a:t>•  All methods evaluated on our-data CV only; OOD tested for Prior FT alone</a:t>
-            </a:r>
-          </a:p>
-        </p:txBody>
-      </p:sp>
-      <p:sp>
-        <p:nvSpPr>
-          <p:cNvPr id="27" name="TextBox 26"/>
-          <p:cNvSpPr txBox="1"/>
-          <p:nvPr/>
-        </p:nvSpPr>
-        <p:spPr>
-          <a:xfrm>
-            <a:off x="7086600" y="2103120"/>
-            <a:ext cx="4754880" cy="429768"/>
-          </a:xfrm>
-          <a:prstGeom prst="rect">
-            <a:avLst/>
-          </a:prstGeom>
-          <a:noFill/>
-        </p:spPr>
-        <p:txBody>
-          <a:bodyPr wrap="square">
-            <a:spAutoFit/>
-          </a:bodyPr>
-          <a:lstStyle/>
-          <a:p>
-            <a:pPr algn="l"/>
-            <a:r>
-              <a:rPr sz="1000" b="0" i="0">
-                <a:solidFill>
-                  <a:srgbClr val="1A1A2E"/>
-                </a:solidFill>
-              </a:rPr>
-              <a:t>•  Point predictions — no uncertainty estimates to guide experiment selection</a:t>
-            </a:r>
-          </a:p>
-        </p:txBody>
-      </p:sp>
-      <p:sp>
-        <p:nvSpPr>
-          <p:cNvPr id="28" name="TextBox 27"/>
-          <p:cNvSpPr txBox="1"/>
-          <p:nvPr/>
-        </p:nvSpPr>
-        <p:spPr>
-          <a:xfrm>
-            <a:off x="7086600" y="2487168"/>
-            <a:ext cx="4754880" cy="429768"/>
-          </a:xfrm>
-          <a:prstGeom prst="rect">
-            <a:avLst/>
-          </a:prstGeom>
-          <a:noFill/>
-        </p:spPr>
-        <p:txBody>
-          <a:bodyPr wrap="square">
-            <a:spAutoFit/>
-          </a:bodyPr>
-          <a:lstStyle/>
-          <a:p>
-            <a:pPr algn="l"/>
-            <a:r>
-              <a:rPr sz="1000" b="0" i="0">
-                <a:solidFill>
-                  <a:srgbClr val="1A1A2E"/>
-                </a:solidFill>
-              </a:rPr>
-              <a:t>•  Y&gt;15% ceiling is DATA-bound (missing GHSV, CH₄:O₂, pressure), not model-bound</a:t>
-            </a:r>
-          </a:p>
-        </p:txBody>
-      </p:sp>
-      <p:sp>
-        <p:nvSpPr>
-          <p:cNvPr id="29" name="Rectangle 28"/>
-          <p:cNvSpPr/>
-          <p:nvPr/>
-        </p:nvSpPr>
-        <p:spPr>
-          <a:xfrm>
-            <a:off x="7040880" y="3063240"/>
-            <a:ext cx="4846320" cy="868680"/>
-          </a:xfrm>
-          <a:prstGeom prst="rect">
-            <a:avLst/>
-          </a:prstGeom>
-          <a:solidFill>
-            <a:srgbClr val="E8F5FF"/>
-          </a:solidFill>
-          <a:ln w="9525">
-            <a:solidFill>
-              <a:srgbClr val="0078C8"/>
-            </a:solidFill>
-          </a:ln>
-        </p:spPr>
-        <p:style>
-          <a:lnRef idx="1">
-            <a:schemeClr val="accent1"/>
-          </a:lnRef>
-          <a:fillRef idx="3">
-            <a:schemeClr val="accent1"/>
-          </a:fillRef>
-          <a:effectRef idx="2">
-            <a:schemeClr val="accent1"/>
-          </a:effectRef>
-          <a:fontRef idx="minor">
-            <a:schemeClr val="lt1"/>
-          </a:fontRef>
-        </p:style>
-        <p:txBody>
-          <a:bodyPr rtlCol="0" anchor="ctr"/>
-          <a:lstStyle/>
-          <a:p>
-            <a:pPr algn="ctr"/>
-          </a:p>
-        </p:txBody>
-      </p:sp>
-      <p:sp>
-        <p:nvSpPr>
-          <p:cNvPr id="30" name="TextBox 29"/>
-          <p:cNvSpPr txBox="1"/>
-          <p:nvPr/>
-        </p:nvSpPr>
-        <p:spPr>
-          <a:xfrm>
-            <a:off x="7150608" y="3136392"/>
-            <a:ext cx="4626864" cy="722376"/>
-          </a:xfrm>
-          <a:prstGeom prst="rect">
-            <a:avLst/>
-          </a:prstGeom>
-          <a:noFill/>
-        </p:spPr>
-        <p:txBody>
-          <a:bodyPr wrap="square">
-            <a:spAutoFit/>
-          </a:bodyPr>
-          <a:lstStyle/>
-          <a:p>
-            <a:pPr algn="l"/>
-            <a:r>
-              <a:rPr sz="1000" b="0" i="0">
-                <a:solidFill>
-                  <a:srgbClr val="50596E"/>
-                </a:solidFill>
-              </a:rPr>
-              <a:t>Key insight: the ceiling effect and much of the label shift share the same root cause — missing operating-condition features. Fix the data; the models follow.</a:t>
+              <a:t>Honest correction: the earlier “OOD 6.53→3.60 (−45%)” was data leakage — the prior was trained on the OOD test rows. Leak-free OOD is ≈6.0–6.8 (near baseline). QN improves in-distribution accuracy but slightly worsens OOD.</a:t>
             </a:r>
           </a:p>
         </p:txBody>
@@ -8194,7 +7637,7 @@
                   <a:srgbClr val="FFFFFF"/>
                 </a:solidFill>
               </a:rPr>
-              <a:t>What's Next — Priority-Ordered</a:t>
+              <a:t>Critical Analysis — Per-Method Review</a:t>
             </a:r>
           </a:p>
         </p:txBody>
@@ -8305,32 +7748,64 @@
                   <a:srgbClr val="CCCCCC"/>
                 </a:solidFill>
               </a:rPr>
-              <a:t>OCM Dataset Integration   |   Slide 14 / 15</a:t>
-            </a:r>
-          </a:p>
-        </p:txBody>
-      </p:sp>
-      <p:sp>
-        <p:nvSpPr>
-          <p:cNvPr id="8" name="Rectangle 7"/>
+              <a:t>OCM Dataset Integration   |   Slide 14 / 16</a:t>
+            </a:r>
+          </a:p>
+        </p:txBody>
+      </p:sp>
+      <p:sp>
+        <p:nvSpPr>
+          <p:cNvPr id="8" name="TextBox 7"/>
+          <p:cNvSpPr txBox="1"/>
+          <p:nvPr/>
+        </p:nvSpPr>
+        <p:spPr>
+          <a:xfrm>
+            <a:off x="365760" y="1234440"/>
+            <a:ext cx="6400800" cy="365760"/>
+          </a:xfrm>
+          <a:prstGeom prst="rect">
+            <a:avLst/>
+          </a:prstGeom>
+          <a:noFill/>
+        </p:spPr>
+        <p:txBody>
+          <a:bodyPr wrap="square">
+            <a:spAutoFit/>
+          </a:bodyPr>
+          <a:lstStyle/>
+          <a:p>
+            <a:pPr algn="l"/>
+            <a:r>
+              <a:rPr sz="1400" b="1" i="0">
+                <a:solidFill>
+                  <a:srgbClr val="0F1E42"/>
+                </a:solidFill>
+              </a:rPr>
+              <a:t>Honest critique of each method</a:t>
+            </a:r>
+          </a:p>
+        </p:txBody>
+      </p:sp>
+      <p:sp>
+        <p:nvSpPr>
+          <p:cNvPr id="9" name="Rectangle 8"/>
           <p:cNvSpPr/>
           <p:nvPr/>
         </p:nvSpPr>
         <p:spPr>
           <a:xfrm>
-            <a:off x="365760" y="1325880"/>
-            <a:ext cx="5669280" cy="1417320"/>
+            <a:off x="365760" y="1664208"/>
+            <a:ext cx="6400800" cy="365760"/>
           </a:xfrm>
           <a:prstGeom prst="rect">
             <a:avLst/>
           </a:prstGeom>
           <a:solidFill>
-            <a:srgbClr val="E8F5E9"/>
+            <a:srgbClr val="0F1E42"/>
           </a:solidFill>
-          <a:ln w="9525">
-            <a:solidFill>
-              <a:srgbClr val="10B981"/>
-            </a:solidFill>
+          <a:ln>
+            <a:noFill/>
           </a:ln>
         </p:spPr>
         <p:style>
@@ -8357,236 +7832,82 @@
       </p:sp>
       <p:sp>
         <p:nvSpPr>
-          <p:cNvPr id="9" name="Rectangle 8"/>
+          <p:cNvPr id="10" name="TextBox 9"/>
+          <p:cNvSpPr txBox="1"/>
+          <p:nvPr/>
+        </p:nvSpPr>
+        <p:spPr>
+          <a:xfrm>
+            <a:off x="457200" y="1691640"/>
+            <a:ext cx="1645920" cy="310896"/>
+          </a:xfrm>
+          <a:prstGeom prst="rect">
+            <a:avLst/>
+          </a:prstGeom>
+          <a:noFill/>
+        </p:spPr>
+        <p:txBody>
+          <a:bodyPr wrap="square">
+            <a:spAutoFit/>
+          </a:bodyPr>
+          <a:lstStyle/>
+          <a:p>
+            <a:pPr algn="l"/>
+            <a:r>
+              <a:rPr sz="1100" b="1" i="0">
+                <a:solidFill>
+                  <a:srgbClr val="FFFFFF"/>
+                </a:solidFill>
+              </a:rPr>
+              <a:t>Method</a:t>
+            </a:r>
+          </a:p>
+        </p:txBody>
+      </p:sp>
+      <p:sp>
+        <p:nvSpPr>
+          <p:cNvPr id="11" name="TextBox 10"/>
+          <p:cNvSpPr txBox="1"/>
+          <p:nvPr/>
+        </p:nvSpPr>
+        <p:spPr>
+          <a:xfrm>
+            <a:off x="2148840" y="1691640"/>
+            <a:ext cx="4480560" cy="310896"/>
+          </a:xfrm>
+          <a:prstGeom prst="rect">
+            <a:avLst/>
+          </a:prstGeom>
+          <a:noFill/>
+        </p:spPr>
+        <p:txBody>
+          <a:bodyPr wrap="square">
+            <a:spAutoFit/>
+          </a:bodyPr>
+          <a:lstStyle/>
+          <a:p>
+            <a:pPr algn="l"/>
+            <a:r>
+              <a:rPr sz="1100" b="1" i="0">
+                <a:solidFill>
+                  <a:srgbClr val="FFFFFF"/>
+                </a:solidFill>
+              </a:rPr>
+              <a:t>Main limitation</a:t>
+            </a:r>
+          </a:p>
+        </p:txBody>
+      </p:sp>
+      <p:sp>
+        <p:nvSpPr>
+          <p:cNvPr id="12" name="Rectangle 11"/>
           <p:cNvSpPr/>
           <p:nvPr/>
         </p:nvSpPr>
         <p:spPr>
           <a:xfrm>
-            <a:off x="457200" y="1417320"/>
-            <a:ext cx="329184" cy="329184"/>
-          </a:xfrm>
-          <a:prstGeom prst="rect">
-            <a:avLst/>
-          </a:prstGeom>
-          <a:solidFill>
-            <a:srgbClr val="10B981"/>
-          </a:solidFill>
-          <a:ln>
-            <a:noFill/>
-          </a:ln>
-        </p:spPr>
-        <p:style>
-          <a:lnRef idx="1">
-            <a:schemeClr val="accent1"/>
-          </a:lnRef>
-          <a:fillRef idx="3">
-            <a:schemeClr val="accent1"/>
-          </a:fillRef>
-          <a:effectRef idx="2">
-            <a:schemeClr val="accent1"/>
-          </a:effectRef>
-          <a:fontRef idx="minor">
-            <a:schemeClr val="lt1"/>
-          </a:fontRef>
-        </p:style>
-        <p:txBody>
-          <a:bodyPr rtlCol="0" anchor="ctr"/>
-          <a:lstStyle/>
-          <a:p>
-            <a:pPr algn="ctr"/>
-          </a:p>
-        </p:txBody>
-      </p:sp>
-      <p:sp>
-        <p:nvSpPr>
-          <p:cNvPr id="10" name="TextBox 9"/>
-          <p:cNvSpPr txBox="1"/>
-          <p:nvPr/>
-        </p:nvSpPr>
-        <p:spPr>
-          <a:xfrm>
-            <a:off x="502920" y="1435608"/>
-            <a:ext cx="237744" cy="292608"/>
-          </a:xfrm>
-          <a:prstGeom prst="rect">
-            <a:avLst/>
-          </a:prstGeom>
-          <a:noFill/>
-        </p:spPr>
-        <p:txBody>
-          <a:bodyPr wrap="square">
-            <a:spAutoFit/>
-          </a:bodyPr>
-          <a:lstStyle/>
-          <a:p>
-            <a:pPr algn="ctr"/>
-            <a:r>
-              <a:rPr sz="1400" b="1" i="0">
-                <a:solidFill>
-                  <a:srgbClr val="FFFFFF"/>
-                </a:solidFill>
-              </a:rPr>
-              <a:t>1</a:t>
-            </a:r>
-          </a:p>
-        </p:txBody>
-      </p:sp>
-      <p:sp>
-        <p:nvSpPr>
-          <p:cNvPr id="11" name="TextBox 10"/>
-          <p:cNvSpPr txBox="1"/>
-          <p:nvPr/>
-        </p:nvSpPr>
-        <p:spPr>
-          <a:xfrm>
-            <a:off x="868680" y="1417320"/>
-            <a:ext cx="5074920" cy="384048"/>
-          </a:xfrm>
-          <a:prstGeom prst="rect">
-            <a:avLst/>
-          </a:prstGeom>
-          <a:noFill/>
-        </p:spPr>
-        <p:txBody>
-          <a:bodyPr wrap="square">
-            <a:spAutoFit/>
-          </a:bodyPr>
-          <a:lstStyle/>
-          <a:p>
-            <a:pPr algn="l"/>
-            <a:r>
-              <a:rPr sz="1200" b="1" i="0">
-                <a:solidFill>
-                  <a:srgbClr val="1B5E20"/>
-                </a:solidFill>
-              </a:rPr>
-              <a:t>Add GHSV, CH₄:O₂, pressure to the feature set</a:t>
-            </a:r>
-          </a:p>
-        </p:txBody>
-      </p:sp>
-      <p:sp>
-        <p:nvSpPr>
-          <p:cNvPr id="12" name="TextBox 11"/>
-          <p:cNvSpPr txBox="1"/>
-          <p:nvPr/>
-        </p:nvSpPr>
-        <p:spPr>
-          <a:xfrm>
-            <a:off x="868680" y="1828800"/>
-            <a:ext cx="5074920" cy="777240"/>
-          </a:xfrm>
-          <a:prstGeom prst="rect">
-            <a:avLst/>
-          </a:prstGeom>
-          <a:noFill/>
-        </p:spPr>
-        <p:txBody>
-          <a:bodyPr wrap="square">
-            <a:spAutoFit/>
-          </a:bodyPr>
-          <a:lstStyle/>
-          <a:p>
-            <a:pPr algn="l"/>
-            <a:r>
-              <a:rPr sz="1000" b="0" i="0">
-                <a:solidFill>
-                  <a:srgbClr val="50596E"/>
-                </a:solidFill>
-              </a:rPr>
-              <a:t>Fixes the Y&gt;15% ceiling and likely resolves much of the label shift too.</a:t>
-            </a:r>
-          </a:p>
-        </p:txBody>
-      </p:sp>
-      <p:sp>
-        <p:nvSpPr>
-          <p:cNvPr id="13" name="Rectangle 12"/>
-          <p:cNvSpPr/>
-          <p:nvPr/>
-        </p:nvSpPr>
-        <p:spPr>
-          <a:xfrm>
-            <a:off x="4343400" y="1417320"/>
-            <a:ext cx="1554480" cy="274320"/>
-          </a:xfrm>
-          <a:prstGeom prst="rect">
-            <a:avLst/>
-          </a:prstGeom>
-          <a:solidFill>
-            <a:srgbClr val="10B981"/>
-          </a:solidFill>
-          <a:ln>
-            <a:noFill/>
-          </a:ln>
-        </p:spPr>
-        <p:style>
-          <a:lnRef idx="1">
-            <a:schemeClr val="accent1"/>
-          </a:lnRef>
-          <a:fillRef idx="3">
-            <a:schemeClr val="accent1"/>
-          </a:fillRef>
-          <a:effectRef idx="2">
-            <a:schemeClr val="accent1"/>
-          </a:effectRef>
-          <a:fontRef idx="minor">
-            <a:schemeClr val="lt1"/>
-          </a:fontRef>
-        </p:style>
-        <p:txBody>
-          <a:bodyPr rtlCol="0" anchor="ctr"/>
-          <a:lstStyle/>
-          <a:p>
-            <a:pPr algn="ctr"/>
-          </a:p>
-        </p:txBody>
-      </p:sp>
-      <p:sp>
-        <p:nvSpPr>
-          <p:cNvPr id="14" name="TextBox 13"/>
-          <p:cNvSpPr txBox="1"/>
-          <p:nvPr/>
-        </p:nvSpPr>
-        <p:spPr>
-          <a:xfrm>
-            <a:off x="4389120" y="1435608"/>
-            <a:ext cx="1463040" cy="237744"/>
-          </a:xfrm>
-          <a:prstGeom prst="rect">
-            <a:avLst/>
-          </a:prstGeom>
-          <a:noFill/>
-        </p:spPr>
-        <p:txBody>
-          <a:bodyPr wrap="square">
-            <a:spAutoFit/>
-          </a:bodyPr>
-          <a:lstStyle/>
-          <a:p>
-            <a:pPr algn="ctr"/>
-            <a:r>
-              <a:rPr sz="900" b="1" i="0">
-                <a:solidFill>
-                  <a:srgbClr val="FFFFFF"/>
-                </a:solidFill>
-              </a:rPr>
-              <a:t>Highest impact</a:t>
-            </a:r>
-          </a:p>
-        </p:txBody>
-      </p:sp>
-      <p:sp>
-        <p:nvSpPr>
-          <p:cNvPr id="15" name="Rectangle 14"/>
-          <p:cNvSpPr/>
-          <p:nvPr/>
-        </p:nvSpPr>
-        <p:spPr>
-          <a:xfrm>
-            <a:off x="365760" y="2834639"/>
-            <a:ext cx="5669280" cy="1417320"/>
+            <a:off x="365760" y="2029968"/>
+            <a:ext cx="6400800" cy="530352"/>
           </a:xfrm>
           <a:prstGeom prst="rect">
             <a:avLst/>
@@ -8624,159 +7945,82 @@
       </p:sp>
       <p:sp>
         <p:nvSpPr>
-          <p:cNvPr id="16" name="Rectangle 15"/>
+          <p:cNvPr id="13" name="TextBox 12"/>
+          <p:cNvSpPr txBox="1"/>
+          <p:nvPr/>
+        </p:nvSpPr>
+        <p:spPr>
+          <a:xfrm>
+            <a:off x="457200" y="2075688"/>
+            <a:ext cx="1645920" cy="457199"/>
+          </a:xfrm>
+          <a:prstGeom prst="rect">
+            <a:avLst/>
+          </a:prstGeom>
+          <a:noFill/>
+        </p:spPr>
+        <p:txBody>
+          <a:bodyPr wrap="square">
+            <a:spAutoFit/>
+          </a:bodyPr>
+          <a:lstStyle/>
+          <a:p>
+            <a:pPr algn="l"/>
+            <a:r>
+              <a:rPr sz="1000" b="1" i="0">
+                <a:solidFill>
+                  <a:srgbClr val="1A1A2E"/>
+                </a:solidFill>
+              </a:rPr>
+              <a:t>Naive merge</a:t>
+            </a:r>
+          </a:p>
+        </p:txBody>
+      </p:sp>
+      <p:sp>
+        <p:nvSpPr>
+          <p:cNvPr id="14" name="TextBox 13"/>
+          <p:cNvSpPr txBox="1"/>
+          <p:nvPr/>
+        </p:nvSpPr>
+        <p:spPr>
+          <a:xfrm>
+            <a:off x="2148840" y="2075688"/>
+            <a:ext cx="4480560" cy="457199"/>
+          </a:xfrm>
+          <a:prstGeom prst="rect">
+            <a:avLst/>
+          </a:prstGeom>
+          <a:noFill/>
+        </p:spPr>
+        <p:txBody>
+          <a:bodyPr wrap="square">
+            <a:spAutoFit/>
+          </a:bodyPr>
+          <a:lstStyle/>
+          <a:p>
+            <a:pPr algn="l"/>
+            <a:r>
+              <a:rPr sz="1000" b="0" i="0">
+                <a:solidFill>
+                  <a:srgbClr val="50596E"/>
+                </a:solidFill>
+              </a:rPr>
+              <a:t>Negative control — makes the model worse</a:t>
+            </a:r>
+          </a:p>
+        </p:txBody>
+      </p:sp>
+      <p:sp>
+        <p:nvSpPr>
+          <p:cNvPr id="15" name="Rectangle 14"/>
           <p:cNvSpPr/>
           <p:nvPr/>
         </p:nvSpPr>
         <p:spPr>
           <a:xfrm>
-            <a:off x="457200" y="2926079"/>
-            <a:ext cx="329184" cy="329184"/>
-          </a:xfrm>
-          <a:prstGeom prst="rect">
-            <a:avLst/>
-          </a:prstGeom>
-          <a:solidFill>
-            <a:srgbClr val="0078C8"/>
-          </a:solidFill>
-          <a:ln>
-            <a:noFill/>
-          </a:ln>
-        </p:spPr>
-        <p:style>
-          <a:lnRef idx="1">
-            <a:schemeClr val="accent1"/>
-          </a:lnRef>
-          <a:fillRef idx="3">
-            <a:schemeClr val="accent1"/>
-          </a:fillRef>
-          <a:effectRef idx="2">
-            <a:schemeClr val="accent1"/>
-          </a:effectRef>
-          <a:fontRef idx="minor">
-            <a:schemeClr val="lt1"/>
-          </a:fontRef>
-        </p:style>
-        <p:txBody>
-          <a:bodyPr rtlCol="0" anchor="ctr"/>
-          <a:lstStyle/>
-          <a:p>
-            <a:pPr algn="ctr"/>
-          </a:p>
-        </p:txBody>
-      </p:sp>
-      <p:sp>
-        <p:nvSpPr>
-          <p:cNvPr id="17" name="TextBox 16"/>
-          <p:cNvSpPr txBox="1"/>
-          <p:nvPr/>
-        </p:nvSpPr>
-        <p:spPr>
-          <a:xfrm>
-            <a:off x="502920" y="2944367"/>
-            <a:ext cx="237744" cy="292608"/>
-          </a:xfrm>
-          <a:prstGeom prst="rect">
-            <a:avLst/>
-          </a:prstGeom>
-          <a:noFill/>
-        </p:spPr>
-        <p:txBody>
-          <a:bodyPr wrap="square">
-            <a:spAutoFit/>
-          </a:bodyPr>
-          <a:lstStyle/>
-          <a:p>
-            <a:pPr algn="ctr"/>
-            <a:r>
-              <a:rPr sz="1400" b="1" i="0">
-                <a:solidFill>
-                  <a:srgbClr val="FFFFFF"/>
-                </a:solidFill>
-              </a:rPr>
-              <a:t>2</a:t>
-            </a:r>
-          </a:p>
-        </p:txBody>
-      </p:sp>
-      <p:sp>
-        <p:nvSpPr>
-          <p:cNvPr id="18" name="TextBox 17"/>
-          <p:cNvSpPr txBox="1"/>
-          <p:nvPr/>
-        </p:nvSpPr>
-        <p:spPr>
-          <a:xfrm>
-            <a:off x="868680" y="2926079"/>
-            <a:ext cx="5074920" cy="384048"/>
-          </a:xfrm>
-          <a:prstGeom prst="rect">
-            <a:avLst/>
-          </a:prstGeom>
-          <a:noFill/>
-        </p:spPr>
-        <p:txBody>
-          <a:bodyPr wrap="square">
-            <a:spAutoFit/>
-          </a:bodyPr>
-          <a:lstStyle/>
-          <a:p>
-            <a:pPr algn="l"/>
-            <a:r>
-              <a:rPr sz="1200" b="1" i="0">
-                <a:solidFill>
-                  <a:srgbClr val="0F1E42"/>
-                </a:solidFill>
-              </a:rPr>
-              <a:t>Bag the Stage-1 expert</a:t>
-            </a:r>
-          </a:p>
-        </p:txBody>
-      </p:sp>
-      <p:sp>
-        <p:nvSpPr>
-          <p:cNvPr id="19" name="TextBox 18"/>
-          <p:cNvSpPr txBox="1"/>
-          <p:nvPr/>
-        </p:nvSpPr>
-        <p:spPr>
-          <a:xfrm>
-            <a:off x="868680" y="3337559"/>
-            <a:ext cx="5074920" cy="777240"/>
-          </a:xfrm>
-          <a:prstGeom prst="rect">
-            <a:avLst/>
-          </a:prstGeom>
-          <a:noFill/>
-        </p:spPr>
-        <p:txBody>
-          <a:bodyPr wrap="square">
-            <a:spAutoFit/>
-          </a:bodyPr>
-          <a:lstStyle/>
-          <a:p>
-            <a:pPr algn="l"/>
-            <a:r>
-              <a:rPr sz="1000" b="0" i="0">
-                <a:solidFill>
-                  <a:srgbClr val="50596E"/>
-                </a:solidFill>
-              </a:rPr>
-              <a:t>Ensemble of XGBoost models reduces high variance from only 782 training samples.</a:t>
-            </a:r>
-          </a:p>
-        </p:txBody>
-      </p:sp>
-      <p:sp>
-        <p:nvSpPr>
-          <p:cNvPr id="20" name="Rectangle 19"/>
-          <p:cNvSpPr/>
-          <p:nvPr/>
-        </p:nvSpPr>
-        <p:spPr>
-          <a:xfrm>
-            <a:off x="365760" y="4343400"/>
-            <a:ext cx="5669280" cy="1417320"/>
+            <a:off x="365760" y="2596896"/>
+            <a:ext cx="6400800" cy="530352"/>
           </a:xfrm>
           <a:prstGeom prst="rect">
             <a:avLst/>
@@ -8814,159 +8058,82 @@
       </p:sp>
       <p:sp>
         <p:nvSpPr>
-          <p:cNvPr id="21" name="Rectangle 20"/>
+          <p:cNvPr id="16" name="TextBox 15"/>
+          <p:cNvSpPr txBox="1"/>
+          <p:nvPr/>
+        </p:nvSpPr>
+        <p:spPr>
+          <a:xfrm>
+            <a:off x="457200" y="2642616"/>
+            <a:ext cx="1645920" cy="457199"/>
+          </a:xfrm>
+          <a:prstGeom prst="rect">
+            <a:avLst/>
+          </a:prstGeom>
+          <a:noFill/>
+        </p:spPr>
+        <p:txBody>
+          <a:bodyPr wrap="square">
+            <a:spAutoFit/>
+          </a:bodyPr>
+          <a:lstStyle/>
+          <a:p>
+            <a:pPr algn="l"/>
+            <a:r>
+              <a:rPr sz="1000" b="1" i="0">
+                <a:solidFill>
+                  <a:srgbClr val="1A1A2E"/>
+                </a:solidFill>
+              </a:rPr>
+              <a:t>DRST</a:t>
+            </a:r>
+          </a:p>
+        </p:txBody>
+      </p:sp>
+      <p:sp>
+        <p:nvSpPr>
+          <p:cNvPr id="17" name="TextBox 16"/>
+          <p:cNvSpPr txBox="1"/>
+          <p:nvPr/>
+        </p:nvSpPr>
+        <p:spPr>
+          <a:xfrm>
+            <a:off x="2148840" y="2642616"/>
+            <a:ext cx="4480560" cy="457199"/>
+          </a:xfrm>
+          <a:prstGeom prst="rect">
+            <a:avLst/>
+          </a:prstGeom>
+          <a:noFill/>
+        </p:spPr>
+        <p:txBody>
+          <a:bodyPr wrap="square">
+            <a:spAutoFit/>
+          </a:bodyPr>
+          <a:lstStyle/>
+          <a:p>
+            <a:pPr algn="l"/>
+            <a:r>
+              <a:rPr sz="1000" b="0" i="0">
+                <a:solidFill>
+                  <a:srgbClr val="50596E"/>
+                </a:solidFill>
+              </a:rPr>
+              <a:t>Hard cliff; discards ~80%; τ tuned on the reported CV</a:t>
+            </a:r>
+          </a:p>
+        </p:txBody>
+      </p:sp>
+      <p:sp>
+        <p:nvSpPr>
+          <p:cNvPr id="18" name="Rectangle 17"/>
           <p:cNvSpPr/>
           <p:nvPr/>
         </p:nvSpPr>
         <p:spPr>
           <a:xfrm>
-            <a:off x="457200" y="4434840"/>
-            <a:ext cx="329184" cy="329184"/>
-          </a:xfrm>
-          <a:prstGeom prst="rect">
-            <a:avLst/>
-          </a:prstGeom>
-          <a:solidFill>
-            <a:srgbClr val="0078C8"/>
-          </a:solidFill>
-          <a:ln>
-            <a:noFill/>
-          </a:ln>
-        </p:spPr>
-        <p:style>
-          <a:lnRef idx="1">
-            <a:schemeClr val="accent1"/>
-          </a:lnRef>
-          <a:fillRef idx="3">
-            <a:schemeClr val="accent1"/>
-          </a:fillRef>
-          <a:effectRef idx="2">
-            <a:schemeClr val="accent1"/>
-          </a:effectRef>
-          <a:fontRef idx="minor">
-            <a:schemeClr val="lt1"/>
-          </a:fontRef>
-        </p:style>
-        <p:txBody>
-          <a:bodyPr rtlCol="0" anchor="ctr"/>
-          <a:lstStyle/>
-          <a:p>
-            <a:pPr algn="ctr"/>
-          </a:p>
-        </p:txBody>
-      </p:sp>
-      <p:sp>
-        <p:nvSpPr>
-          <p:cNvPr id="22" name="TextBox 21"/>
-          <p:cNvSpPr txBox="1"/>
-          <p:nvPr/>
-        </p:nvSpPr>
-        <p:spPr>
-          <a:xfrm>
-            <a:off x="502920" y="4453128"/>
-            <a:ext cx="237744" cy="292608"/>
-          </a:xfrm>
-          <a:prstGeom prst="rect">
-            <a:avLst/>
-          </a:prstGeom>
-          <a:noFill/>
-        </p:spPr>
-        <p:txBody>
-          <a:bodyPr wrap="square">
-            <a:spAutoFit/>
-          </a:bodyPr>
-          <a:lstStyle/>
-          <a:p>
-            <a:pPr algn="ctr"/>
-            <a:r>
-              <a:rPr sz="1400" b="1" i="0">
-                <a:solidFill>
-                  <a:srgbClr val="FFFFFF"/>
-                </a:solidFill>
-              </a:rPr>
-              <a:t>3</a:t>
-            </a:r>
-          </a:p>
-        </p:txBody>
-      </p:sp>
-      <p:sp>
-        <p:nvSpPr>
-          <p:cNvPr id="23" name="TextBox 22"/>
-          <p:cNvSpPr txBox="1"/>
-          <p:nvPr/>
-        </p:nvSpPr>
-        <p:spPr>
-          <a:xfrm>
-            <a:off x="868680" y="4434840"/>
-            <a:ext cx="5074920" cy="384048"/>
-          </a:xfrm>
-          <a:prstGeom prst="rect">
-            <a:avLst/>
-          </a:prstGeom>
-          <a:noFill/>
-        </p:spPr>
-        <p:txBody>
-          <a:bodyPr wrap="square">
-            <a:spAutoFit/>
-          </a:bodyPr>
-          <a:lstStyle/>
-          <a:p>
-            <a:pPr algn="l"/>
-            <a:r>
-              <a:rPr sz="1200" b="1" i="0">
-                <a:solidFill>
-                  <a:srgbClr val="0F1E42"/>
-                </a:solidFill>
-              </a:rPr>
-              <a:t>Add uncertainty quantification</a:t>
-            </a:r>
-          </a:p>
-        </p:txBody>
-      </p:sp>
-      <p:sp>
-        <p:nvSpPr>
-          <p:cNvPr id="24" name="TextBox 23"/>
-          <p:cNvSpPr txBox="1"/>
-          <p:nvPr/>
-        </p:nvSpPr>
-        <p:spPr>
-          <a:xfrm>
-            <a:off x="868680" y="4846320"/>
-            <a:ext cx="5074920" cy="777240"/>
-          </a:xfrm>
-          <a:prstGeom prst="rect">
-            <a:avLst/>
-          </a:prstGeom>
-          <a:noFill/>
-        </p:spPr>
-        <p:txBody>
-          <a:bodyPr wrap="square">
-            <a:spAutoFit/>
-          </a:bodyPr>
-          <a:lstStyle/>
-          <a:p>
-            <a:pPr algn="l"/>
-            <a:r>
-              <a:rPr sz="1000" b="0" i="0">
-                <a:solidFill>
-                  <a:srgbClr val="50596E"/>
-                </a:solidFill>
-              </a:rPr>
-              <a:t>Conformal prediction or quantile regression — flag low-confidence picks for the experiment loop.</a:t>
-            </a:r>
-          </a:p>
-        </p:txBody>
-      </p:sp>
-      <p:sp>
-        <p:nvSpPr>
-          <p:cNvPr id="25" name="Rectangle 24"/>
-          <p:cNvSpPr/>
-          <p:nvPr/>
-        </p:nvSpPr>
-        <p:spPr>
-          <a:xfrm>
-            <a:off x="6263640" y="1325880"/>
-            <a:ext cx="5669280" cy="1417320"/>
+            <a:off x="365760" y="3163824"/>
+            <a:ext cx="6400800" cy="530352"/>
           </a:xfrm>
           <a:prstGeom prst="rect">
             <a:avLst/>
@@ -9004,14 +8171,195 @@
       </p:sp>
       <p:sp>
         <p:nvSpPr>
-          <p:cNvPr id="26" name="Rectangle 25"/>
+          <p:cNvPr id="19" name="TextBox 18"/>
+          <p:cNvSpPr txBox="1"/>
+          <p:nvPr/>
+        </p:nvSpPr>
+        <p:spPr>
+          <a:xfrm>
+            <a:off x="457200" y="3209544"/>
+            <a:ext cx="1645920" cy="457199"/>
+          </a:xfrm>
+          <a:prstGeom prst="rect">
+            <a:avLst/>
+          </a:prstGeom>
+          <a:noFill/>
+        </p:spPr>
+        <p:txBody>
+          <a:bodyPr wrap="square">
+            <a:spAutoFit/>
+          </a:bodyPr>
+          <a:lstStyle/>
+          <a:p>
+            <a:pPr algn="l"/>
+            <a:r>
+              <a:rPr sz="1000" b="1" i="0">
+                <a:solidFill>
+                  <a:srgbClr val="1A1A2E"/>
+                </a:solidFill>
+              </a:rPr>
+              <a:t>KMM</a:t>
+            </a:r>
+          </a:p>
+        </p:txBody>
+      </p:sp>
+      <p:sp>
+        <p:nvSpPr>
+          <p:cNvPr id="20" name="TextBox 19"/>
+          <p:cNvSpPr txBox="1"/>
+          <p:nvPr/>
+        </p:nvSpPr>
+        <p:spPr>
+          <a:xfrm>
+            <a:off x="2148840" y="3209544"/>
+            <a:ext cx="4480560" cy="457199"/>
+          </a:xfrm>
+          <a:prstGeom prst="rect">
+            <a:avLst/>
+          </a:prstGeom>
+          <a:noFill/>
+        </p:spPr>
+        <p:txBody>
+          <a:bodyPr wrap="square">
+            <a:spAutoFit/>
+          </a:bodyPr>
+          <a:lstStyle/>
+          <a:p>
+            <a:pPr algn="l"/>
+            <a:r>
+              <a:rPr sz="1000" b="0" i="0">
+                <a:solidFill>
+                  <a:srgbClr val="50596E"/>
+                </a:solidFill>
+              </a:rPr>
+              <a:t>O(n²) kernel; σ-sensitive; labels still in loss; ties DRST</a:t>
+            </a:r>
+          </a:p>
+        </p:txBody>
+      </p:sp>
+      <p:sp>
+        <p:nvSpPr>
+          <p:cNvPr id="21" name="Rectangle 20"/>
           <p:cNvSpPr/>
           <p:nvPr/>
         </p:nvSpPr>
         <p:spPr>
           <a:xfrm>
-            <a:off x="6355080" y="1417320"/>
-            <a:ext cx="329184" cy="329184"/>
+            <a:off x="365760" y="3730752"/>
+            <a:ext cx="6400800" cy="530352"/>
+          </a:xfrm>
+          <a:prstGeom prst="rect">
+            <a:avLst/>
+          </a:prstGeom>
+          <a:solidFill>
+            <a:srgbClr val="E8F5E9"/>
+          </a:solidFill>
+          <a:ln w="9525">
+            <a:solidFill>
+              <a:srgbClr val="D0D5DF"/>
+            </a:solidFill>
+          </a:ln>
+        </p:spPr>
+        <p:style>
+          <a:lnRef idx="1">
+            <a:schemeClr val="accent1"/>
+          </a:lnRef>
+          <a:fillRef idx="3">
+            <a:schemeClr val="accent1"/>
+          </a:fillRef>
+          <a:effectRef idx="2">
+            <a:schemeClr val="accent1"/>
+          </a:effectRef>
+          <a:fontRef idx="minor">
+            <a:schemeClr val="lt1"/>
+          </a:fontRef>
+        </p:style>
+        <p:txBody>
+          <a:bodyPr rtlCol="0" anchor="ctr"/>
+          <a:lstStyle/>
+          <a:p>
+            <a:pPr algn="ctr"/>
+          </a:p>
+        </p:txBody>
+      </p:sp>
+      <p:sp>
+        <p:nvSpPr>
+          <p:cNvPr id="22" name="TextBox 21"/>
+          <p:cNvSpPr txBox="1"/>
+          <p:nvPr/>
+        </p:nvSpPr>
+        <p:spPr>
+          <a:xfrm>
+            <a:off x="457200" y="3776472"/>
+            <a:ext cx="1645920" cy="457199"/>
+          </a:xfrm>
+          <a:prstGeom prst="rect">
+            <a:avLst/>
+          </a:prstGeom>
+          <a:noFill/>
+        </p:spPr>
+        <p:txBody>
+          <a:bodyPr wrap="square">
+            <a:spAutoFit/>
+          </a:bodyPr>
+          <a:lstStyle/>
+          <a:p>
+            <a:pPr algn="l"/>
+            <a:r>
+              <a:rPr sz="1000" b="1" i="0">
+                <a:solidFill>
+                  <a:srgbClr val="1B5E20"/>
+                </a:solidFill>
+              </a:rPr>
+              <a:t>Prior FT</a:t>
+            </a:r>
+          </a:p>
+        </p:txBody>
+      </p:sp>
+      <p:sp>
+        <p:nvSpPr>
+          <p:cNvPr id="23" name="TextBox 22"/>
+          <p:cNvSpPr txBox="1"/>
+          <p:nvPr/>
+        </p:nvSpPr>
+        <p:spPr>
+          <a:xfrm>
+            <a:off x="2148840" y="3776472"/>
+            <a:ext cx="4480560" cy="457199"/>
+          </a:xfrm>
+          <a:prstGeom prst="rect">
+            <a:avLst/>
+          </a:prstGeom>
+          <a:noFill/>
+        </p:spPr>
+        <p:txBody>
+          <a:bodyPr wrap="square">
+            <a:spAutoFit/>
+          </a:bodyPr>
+          <a:lstStyle/>
+          <a:p>
+            <a:pPr algn="l"/>
+            <a:r>
+              <a:rPr sz="1000" b="0" i="0">
+                <a:solidFill>
+                  <a:srgbClr val="1B5E20"/>
+                </a:solidFill>
+              </a:rPr>
+              <a:t>Best — Stage-1 on 782 rows → high variance; two models</a:t>
+            </a:r>
+          </a:p>
+        </p:txBody>
+      </p:sp>
+      <p:sp>
+        <p:nvSpPr>
+          <p:cNvPr id="24" name="Rectangle 23"/>
+          <p:cNvSpPr/>
+          <p:nvPr/>
+        </p:nvSpPr>
+        <p:spPr>
+          <a:xfrm>
+            <a:off x="7040880" y="1234440"/>
+            <a:ext cx="4846320" cy="384048"/>
           </a:xfrm>
           <a:prstGeom prst="rect">
             <a:avLst/>
@@ -9047,34 +8395,102 @@
       </p:sp>
       <p:sp>
         <p:nvSpPr>
+          <p:cNvPr id="25" name="TextBox 24"/>
+          <p:cNvSpPr txBox="1"/>
+          <p:nvPr/>
+        </p:nvSpPr>
+        <p:spPr>
+          <a:xfrm>
+            <a:off x="7178040" y="1261872"/>
+            <a:ext cx="4572000" cy="329184"/>
+          </a:xfrm>
+          <a:prstGeom prst="rect">
+            <a:avLst/>
+          </a:prstGeom>
+          <a:noFill/>
+        </p:spPr>
+        <p:txBody>
+          <a:bodyPr wrap="square">
+            <a:spAutoFit/>
+          </a:bodyPr>
+          <a:lstStyle/>
+          <a:p>
+            <a:pPr algn="l"/>
+            <a:r>
+              <a:rPr sz="1300" b="1" i="0">
+                <a:solidFill>
+                  <a:srgbClr val="FFFFFF"/>
+                </a:solidFill>
+              </a:rPr>
+              <a:t>Cross-cutting limits</a:t>
+            </a:r>
+          </a:p>
+        </p:txBody>
+      </p:sp>
+      <p:sp>
+        <p:nvSpPr>
+          <p:cNvPr id="26" name="TextBox 25"/>
+          <p:cNvSpPr txBox="1"/>
+          <p:nvPr/>
+        </p:nvSpPr>
+        <p:spPr>
+          <a:xfrm>
+            <a:off x="7086600" y="1719072"/>
+            <a:ext cx="4754880" cy="429768"/>
+          </a:xfrm>
+          <a:prstGeom prst="rect">
+            <a:avLst/>
+          </a:prstGeom>
+          <a:noFill/>
+        </p:spPr>
+        <p:txBody>
+          <a:bodyPr wrap="square">
+            <a:spAutoFit/>
+          </a:bodyPr>
+          <a:lstStyle/>
+          <a:p>
+            <a:pPr algn="l"/>
+            <a:r>
+              <a:rPr sz="1000" b="0" i="0">
+                <a:solidFill>
+                  <a:srgbClr val="1A1A2E"/>
+                </a:solidFill>
+              </a:rPr>
+              <a:t>•  All methods evaluated on our-data CV only; OOD tested for Prior FT alone</a:t>
+            </a:r>
+          </a:p>
+        </p:txBody>
+      </p:sp>
+      <p:sp>
+        <p:nvSpPr>
           <p:cNvPr id="27" name="TextBox 26"/>
           <p:cNvSpPr txBox="1"/>
           <p:nvPr/>
         </p:nvSpPr>
         <p:spPr>
           <a:xfrm>
-            <a:off x="6400800" y="1435608"/>
-            <a:ext cx="237744" cy="292608"/>
-          </a:xfrm>
-          <a:prstGeom prst="rect">
-            <a:avLst/>
-          </a:prstGeom>
-          <a:noFill/>
-        </p:spPr>
-        <p:txBody>
-          <a:bodyPr wrap="square">
-            <a:spAutoFit/>
-          </a:bodyPr>
-          <a:lstStyle/>
-          <a:p>
-            <a:pPr algn="ctr"/>
-            <a:r>
-              <a:rPr sz="1400" b="1" i="0">
-                <a:solidFill>
-                  <a:srgbClr val="FFFFFF"/>
-                </a:solidFill>
-              </a:rPr>
-              <a:t>4</a:t>
+            <a:off x="7086600" y="2103120"/>
+            <a:ext cx="4754880" cy="429768"/>
+          </a:xfrm>
+          <a:prstGeom prst="rect">
+            <a:avLst/>
+          </a:prstGeom>
+          <a:noFill/>
+        </p:spPr>
+        <p:txBody>
+          <a:bodyPr wrap="square">
+            <a:spAutoFit/>
+          </a:bodyPr>
+          <a:lstStyle/>
+          <a:p>
+            <a:pPr algn="l"/>
+            <a:r>
+              <a:rPr sz="1000" b="0" i="0">
+                <a:solidFill>
+                  <a:srgbClr val="1A1A2E"/>
+                </a:solidFill>
+              </a:rPr>
+              <a:t>•  Point predictions — no uncertainty estimates to guide experiment selection</a:t>
             </a:r>
           </a:p>
         </p:txBody>
@@ -9087,42 +8503,8 @@
         </p:nvSpPr>
         <p:spPr>
           <a:xfrm>
-            <a:off x="6766560" y="1417320"/>
-            <a:ext cx="5074920" cy="384048"/>
-          </a:xfrm>
-          <a:prstGeom prst="rect">
-            <a:avLst/>
-          </a:prstGeom>
-          <a:noFill/>
-        </p:spPr>
-        <p:txBody>
-          <a:bodyPr wrap="square">
-            <a:spAutoFit/>
-          </a:bodyPr>
-          <a:lstStyle/>
-          <a:p>
-            <a:pPr algn="l"/>
-            <a:r>
-              <a:rPr sz="1200" b="1" i="0">
-                <a:solidFill>
-                  <a:srgbClr val="0F1E42"/>
-                </a:solidFill>
-              </a:rPr>
-              <a:t>Stack DRST + KMM inside Prior FT</a:t>
-            </a:r>
-          </a:p>
-        </p:txBody>
-      </p:sp>
-      <p:sp>
-        <p:nvSpPr>
-          <p:cNvPr id="29" name="TextBox 28"/>
-          <p:cNvSpPr txBox="1"/>
-          <p:nvPr/>
-        </p:nvSpPr>
-        <p:spPr>
-          <a:xfrm>
-            <a:off x="6766560" y="1828800"/>
-            <a:ext cx="5074920" cy="777240"/>
+            <a:off x="7086600" y="2487168"/>
+            <a:ext cx="4754880" cy="429768"/>
           </a:xfrm>
           <a:prstGeom prst="rect">
             <a:avLst/>
@@ -9139,34 +8521,34 @@
             <a:r>
               <a:rPr sz="1000" b="0" i="0">
                 <a:solidFill>
-                  <a:srgbClr val="50596E"/>
-                </a:solidFill>
-              </a:rPr>
-              <a:t>Run them as one integrated pipeline rather than three separate methods.</a:t>
-            </a:r>
-          </a:p>
-        </p:txBody>
-      </p:sp>
-      <p:sp>
-        <p:nvSpPr>
-          <p:cNvPr id="30" name="Rectangle 29"/>
+                  <a:srgbClr val="1A1A2E"/>
+                </a:solidFill>
+              </a:rPr>
+              <a:t>•  Y&gt;15% ceiling is DATA-bound (missing GHSV, CH₄:O₂, pressure), not model-bound</a:t>
+            </a:r>
+          </a:p>
+        </p:txBody>
+      </p:sp>
+      <p:sp>
+        <p:nvSpPr>
+          <p:cNvPr id="29" name="Rectangle 28"/>
           <p:cNvSpPr/>
           <p:nvPr/>
         </p:nvSpPr>
         <p:spPr>
           <a:xfrm>
-            <a:off x="6263640" y="2834639"/>
-            <a:ext cx="5669280" cy="1417320"/>
+            <a:off x="7040880" y="3063240"/>
+            <a:ext cx="4846320" cy="868680"/>
           </a:xfrm>
           <a:prstGeom prst="rect">
             <a:avLst/>
           </a:prstGeom>
           <a:solidFill>
-            <a:srgbClr val="F5F6F8"/>
+            <a:srgbClr val="E8F5FF"/>
           </a:solidFill>
           <a:ln w="9525">
             <a:solidFill>
-              <a:srgbClr val="D0D5DF"/>
+              <a:srgbClr val="0078C8"/>
             </a:solidFill>
           </a:ln>
         </p:spPr>
@@ -9194,125 +8576,14 @@
       </p:sp>
       <p:sp>
         <p:nvSpPr>
-          <p:cNvPr id="31" name="Rectangle 30"/>
-          <p:cNvSpPr/>
-          <p:nvPr/>
-        </p:nvSpPr>
-        <p:spPr>
-          <a:xfrm>
-            <a:off x="6355080" y="2926079"/>
-            <a:ext cx="329184" cy="329184"/>
-          </a:xfrm>
-          <a:prstGeom prst="rect">
-            <a:avLst/>
-          </a:prstGeom>
-          <a:solidFill>
-            <a:srgbClr val="0078C8"/>
-          </a:solidFill>
-          <a:ln>
-            <a:noFill/>
-          </a:ln>
-        </p:spPr>
-        <p:style>
-          <a:lnRef idx="1">
-            <a:schemeClr val="accent1"/>
-          </a:lnRef>
-          <a:fillRef idx="3">
-            <a:schemeClr val="accent1"/>
-          </a:fillRef>
-          <a:effectRef idx="2">
-            <a:schemeClr val="accent1"/>
-          </a:effectRef>
-          <a:fontRef idx="minor">
-            <a:schemeClr val="lt1"/>
-          </a:fontRef>
-        </p:style>
-        <p:txBody>
-          <a:bodyPr rtlCol="0" anchor="ctr"/>
-          <a:lstStyle/>
-          <a:p>
-            <a:pPr algn="ctr"/>
-          </a:p>
-        </p:txBody>
-      </p:sp>
-      <p:sp>
-        <p:nvSpPr>
-          <p:cNvPr id="32" name="TextBox 31"/>
-          <p:cNvSpPr txBox="1"/>
-          <p:nvPr/>
-        </p:nvSpPr>
-        <p:spPr>
-          <a:xfrm>
-            <a:off x="6400800" y="2944367"/>
-            <a:ext cx="237744" cy="292608"/>
-          </a:xfrm>
-          <a:prstGeom prst="rect">
-            <a:avLst/>
-          </a:prstGeom>
-          <a:noFill/>
-        </p:spPr>
-        <p:txBody>
-          <a:bodyPr wrap="square">
-            <a:spAutoFit/>
-          </a:bodyPr>
-          <a:lstStyle/>
-          <a:p>
-            <a:pPr algn="ctr"/>
-            <a:r>
-              <a:rPr sz="1400" b="1" i="0">
-                <a:solidFill>
-                  <a:srgbClr val="FFFFFF"/>
-                </a:solidFill>
-              </a:rPr>
-              <a:t>5</a:t>
-            </a:r>
-          </a:p>
-        </p:txBody>
-      </p:sp>
-      <p:sp>
-        <p:nvSpPr>
-          <p:cNvPr id="33" name="TextBox 32"/>
-          <p:cNvSpPr txBox="1"/>
-          <p:nvPr/>
-        </p:nvSpPr>
-        <p:spPr>
-          <a:xfrm>
-            <a:off x="6766560" y="2926079"/>
-            <a:ext cx="5074920" cy="384048"/>
-          </a:xfrm>
-          <a:prstGeom prst="rect">
-            <a:avLst/>
-          </a:prstGeom>
-          <a:noFill/>
-        </p:spPr>
-        <p:txBody>
-          <a:bodyPr wrap="square">
-            <a:spAutoFit/>
-          </a:bodyPr>
-          <a:lstStyle/>
-          <a:p>
-            <a:pPr algn="l"/>
-            <a:r>
-              <a:rPr sz="1200" b="1" i="0">
-                <a:solidFill>
-                  <a:srgbClr val="0F1E42"/>
-                </a:solidFill>
-              </a:rPr>
-              <a:t>Neural domain adaptation (DANN, CORAL)</a:t>
-            </a:r>
-          </a:p>
-        </p:txBody>
-      </p:sp>
-      <p:sp>
-        <p:nvSpPr>
-          <p:cNvPr id="34" name="TextBox 33"/>
-          <p:cNvSpPr txBox="1"/>
-          <p:nvPr/>
-        </p:nvSpPr>
-        <p:spPr>
-          <a:xfrm>
-            <a:off x="6766560" y="3337559"/>
-            <a:ext cx="5074920" cy="777240"/>
+          <p:cNvPr id="30" name="TextBox 29"/>
+          <p:cNvSpPr txBox="1"/>
+          <p:nvPr/>
+        </p:nvSpPr>
+        <p:spPr>
+          <a:xfrm>
+            <a:off x="7150608" y="3136392"/>
+            <a:ext cx="4626864" cy="722376"/>
           </a:xfrm>
           <a:prstGeom prst="rect">
             <a:avLst/>
@@ -9332,197 +8603,7 @@
                   <a:srgbClr val="50596E"/>
                 </a:solidFill>
               </a:rPr>
-              <a:t>More powerful once the feature set is richer — currently under-powered.</a:t>
-            </a:r>
-          </a:p>
-        </p:txBody>
-      </p:sp>
-      <p:sp>
-        <p:nvSpPr>
-          <p:cNvPr id="35" name="Rectangle 34"/>
-          <p:cNvSpPr/>
-          <p:nvPr/>
-        </p:nvSpPr>
-        <p:spPr>
-          <a:xfrm>
-            <a:off x="6263640" y="4343400"/>
-            <a:ext cx="5669280" cy="1417320"/>
-          </a:xfrm>
-          <a:prstGeom prst="rect">
-            <a:avLst/>
-          </a:prstGeom>
-          <a:solidFill>
-            <a:srgbClr val="F5F6F8"/>
-          </a:solidFill>
-          <a:ln w="9525">
-            <a:solidFill>
-              <a:srgbClr val="D0D5DF"/>
-            </a:solidFill>
-          </a:ln>
-        </p:spPr>
-        <p:style>
-          <a:lnRef idx="1">
-            <a:schemeClr val="accent1"/>
-          </a:lnRef>
-          <a:fillRef idx="3">
-            <a:schemeClr val="accent1"/>
-          </a:fillRef>
-          <a:effectRef idx="2">
-            <a:schemeClr val="accent1"/>
-          </a:effectRef>
-          <a:fontRef idx="minor">
-            <a:schemeClr val="lt1"/>
-          </a:fontRef>
-        </p:style>
-        <p:txBody>
-          <a:bodyPr rtlCol="0" anchor="ctr"/>
-          <a:lstStyle/>
-          <a:p>
-            <a:pPr algn="ctr"/>
-          </a:p>
-        </p:txBody>
-      </p:sp>
-      <p:sp>
-        <p:nvSpPr>
-          <p:cNvPr id="36" name="Rectangle 35"/>
-          <p:cNvSpPr/>
-          <p:nvPr/>
-        </p:nvSpPr>
-        <p:spPr>
-          <a:xfrm>
-            <a:off x="6355080" y="4434840"/>
-            <a:ext cx="329184" cy="329184"/>
-          </a:xfrm>
-          <a:prstGeom prst="rect">
-            <a:avLst/>
-          </a:prstGeom>
-          <a:solidFill>
-            <a:srgbClr val="0078C8"/>
-          </a:solidFill>
-          <a:ln>
-            <a:noFill/>
-          </a:ln>
-        </p:spPr>
-        <p:style>
-          <a:lnRef idx="1">
-            <a:schemeClr val="accent1"/>
-          </a:lnRef>
-          <a:fillRef idx="3">
-            <a:schemeClr val="accent1"/>
-          </a:fillRef>
-          <a:effectRef idx="2">
-            <a:schemeClr val="accent1"/>
-          </a:effectRef>
-          <a:fontRef idx="minor">
-            <a:schemeClr val="lt1"/>
-          </a:fontRef>
-        </p:style>
-        <p:txBody>
-          <a:bodyPr rtlCol="0" anchor="ctr"/>
-          <a:lstStyle/>
-          <a:p>
-            <a:pPr algn="ctr"/>
-          </a:p>
-        </p:txBody>
-      </p:sp>
-      <p:sp>
-        <p:nvSpPr>
-          <p:cNvPr id="37" name="TextBox 36"/>
-          <p:cNvSpPr txBox="1"/>
-          <p:nvPr/>
-        </p:nvSpPr>
-        <p:spPr>
-          <a:xfrm>
-            <a:off x="6400800" y="4453128"/>
-            <a:ext cx="237744" cy="292608"/>
-          </a:xfrm>
-          <a:prstGeom prst="rect">
-            <a:avLst/>
-          </a:prstGeom>
-          <a:noFill/>
-        </p:spPr>
-        <p:txBody>
-          <a:bodyPr wrap="square">
-            <a:spAutoFit/>
-          </a:bodyPr>
-          <a:lstStyle/>
-          <a:p>
-            <a:pPr algn="ctr"/>
-            <a:r>
-              <a:rPr sz="1400" b="1" i="0">
-                <a:solidFill>
-                  <a:srgbClr val="FFFFFF"/>
-                </a:solidFill>
-              </a:rPr>
-              <a:t>6</a:t>
-            </a:r>
-          </a:p>
-        </p:txBody>
-      </p:sp>
-      <p:sp>
-        <p:nvSpPr>
-          <p:cNvPr id="38" name="TextBox 37"/>
-          <p:cNvSpPr txBox="1"/>
-          <p:nvPr/>
-        </p:nvSpPr>
-        <p:spPr>
-          <a:xfrm>
-            <a:off x="6766560" y="4434840"/>
-            <a:ext cx="5074920" cy="384048"/>
-          </a:xfrm>
-          <a:prstGeom prst="rect">
-            <a:avLst/>
-          </a:prstGeom>
-          <a:noFill/>
-        </p:spPr>
-        <p:txBody>
-          <a:bodyPr wrap="square">
-            <a:spAutoFit/>
-          </a:bodyPr>
-          <a:lstStyle/>
-          <a:p>
-            <a:pPr algn="l"/>
-            <a:r>
-              <a:rPr sz="1200" b="1" i="0">
-                <a:solidFill>
-                  <a:srgbClr val="0F1E42"/>
-                </a:solidFill>
-              </a:rPr>
-              <a:t>Close the active-learning loop</a:t>
-            </a:r>
-          </a:p>
-        </p:txBody>
-      </p:sp>
-      <p:sp>
-        <p:nvSpPr>
-          <p:cNvPr id="39" name="TextBox 38"/>
-          <p:cNvSpPr txBox="1"/>
-          <p:nvPr/>
-        </p:nvSpPr>
-        <p:spPr>
-          <a:xfrm>
-            <a:off x="6766560" y="4846320"/>
-            <a:ext cx="5074920" cy="777240"/>
-          </a:xfrm>
-          <a:prstGeom prst="rect">
-            <a:avLst/>
-          </a:prstGeom>
-          <a:noFill/>
-        </p:spPr>
-        <p:txBody>
-          <a:bodyPr wrap="square">
-            <a:spAutoFit/>
-          </a:bodyPr>
-          <a:lstStyle/>
-          <a:p>
-            <a:pPr algn="l"/>
-            <a:r>
-              <a:rPr sz="1000" b="0" i="0">
-                <a:solidFill>
-                  <a:srgbClr val="50596E"/>
-                </a:solidFill>
-              </a:rPr>
-              <a:t>Model proposes → lab measures → model retrains. Reduces label shift over time.</a:t>
+              <a:t>Key insight: the ceiling effect and much of the label shift share the same root cause — missing operating-condition features. Fix the data; the models follow.</a:t>
             </a:r>
           </a:p>
         </p:txBody>
@@ -9597,7 +8678,7 @@
         <p:spPr>
           <a:xfrm>
             <a:off x="0" y="0"/>
-            <a:ext cx="12188952" cy="868680"/>
+            <a:ext cx="12188952" cy="1097280"/>
           </a:xfrm>
           <a:prstGeom prst="rect">
             <a:avLst/>
@@ -9660,14 +8741,48 @@
                   <a:srgbClr val="FFFFFF"/>
                 </a:solidFill>
               </a:rPr>
-              <a:t>Summary</a:t>
-            </a:r>
-          </a:p>
-        </p:txBody>
-      </p:sp>
-      <p:sp>
-        <p:nvSpPr>
-          <p:cNvPr id="5" name="Rectangle 4"/>
+              <a:t>What's Next — Priority-Ordered</a:t>
+            </a:r>
+          </a:p>
+        </p:txBody>
+      </p:sp>
+      <p:sp>
+        <p:nvSpPr>
+          <p:cNvPr id="5" name="TextBox 4"/>
+          <p:cNvSpPr txBox="1"/>
+          <p:nvPr/>
+        </p:nvSpPr>
+        <p:spPr>
+          <a:xfrm>
+            <a:off x="365760" y="658368"/>
+            <a:ext cx="11457432" cy="365760"/>
+          </a:xfrm>
+          <a:prstGeom prst="rect">
+            <a:avLst/>
+          </a:prstGeom>
+          <a:noFill/>
+        </p:spPr>
+        <p:txBody>
+          <a:bodyPr wrap="square">
+            <a:spAutoFit/>
+          </a:bodyPr>
+          <a:lstStyle/>
+          <a:p>
+            <a:pPr algn="l"/>
+            <a:r>
+              <a:rPr sz="1100" b="0" i="1">
+                <a:solidFill>
+                  <a:srgbClr val="BBCCEE"/>
+                </a:solidFill>
+              </a:rPr>
+              <a:t>Chapter 9</a:t>
+            </a:r>
+          </a:p>
+        </p:txBody>
+      </p:sp>
+      <p:sp>
+        <p:nvSpPr>
+          <p:cNvPr id="6" name="Rectangle 5"/>
           <p:cNvSpPr/>
           <p:nvPr/>
         </p:nvSpPr>
@@ -9710,7 +8825,7 @@
       </p:sp>
       <p:sp>
         <p:nvSpPr>
-          <p:cNvPr id="6" name="TextBox 5"/>
+          <p:cNvPr id="7" name="TextBox 6"/>
           <p:cNvSpPr txBox="1"/>
           <p:nvPr/>
         </p:nvSpPr>
@@ -9737,7 +8852,1439 @@
                   <a:srgbClr val="CCCCCC"/>
                 </a:solidFill>
               </a:rPr>
-              <a:t>OCM Dataset Integration   |   Slide 15 / 15</a:t>
+              <a:t>OCM Dataset Integration   |   Slide 15 / 16</a:t>
+            </a:r>
+          </a:p>
+        </p:txBody>
+      </p:sp>
+      <p:sp>
+        <p:nvSpPr>
+          <p:cNvPr id="8" name="Rectangle 7"/>
+          <p:cNvSpPr/>
+          <p:nvPr/>
+        </p:nvSpPr>
+        <p:spPr>
+          <a:xfrm>
+            <a:off x="365760" y="1325880"/>
+            <a:ext cx="5669280" cy="1417320"/>
+          </a:xfrm>
+          <a:prstGeom prst="rect">
+            <a:avLst/>
+          </a:prstGeom>
+          <a:solidFill>
+            <a:srgbClr val="E8F5E9"/>
+          </a:solidFill>
+          <a:ln w="9525">
+            <a:solidFill>
+              <a:srgbClr val="10B981"/>
+            </a:solidFill>
+          </a:ln>
+        </p:spPr>
+        <p:style>
+          <a:lnRef idx="1">
+            <a:schemeClr val="accent1"/>
+          </a:lnRef>
+          <a:fillRef idx="3">
+            <a:schemeClr val="accent1"/>
+          </a:fillRef>
+          <a:effectRef idx="2">
+            <a:schemeClr val="accent1"/>
+          </a:effectRef>
+          <a:fontRef idx="minor">
+            <a:schemeClr val="lt1"/>
+          </a:fontRef>
+        </p:style>
+        <p:txBody>
+          <a:bodyPr rtlCol="0" anchor="ctr"/>
+          <a:lstStyle/>
+          <a:p>
+            <a:pPr algn="ctr"/>
+          </a:p>
+        </p:txBody>
+      </p:sp>
+      <p:sp>
+        <p:nvSpPr>
+          <p:cNvPr id="9" name="Rectangle 8"/>
+          <p:cNvSpPr/>
+          <p:nvPr/>
+        </p:nvSpPr>
+        <p:spPr>
+          <a:xfrm>
+            <a:off x="457200" y="1417320"/>
+            <a:ext cx="329184" cy="329184"/>
+          </a:xfrm>
+          <a:prstGeom prst="rect">
+            <a:avLst/>
+          </a:prstGeom>
+          <a:solidFill>
+            <a:srgbClr val="10B981"/>
+          </a:solidFill>
+          <a:ln>
+            <a:noFill/>
+          </a:ln>
+        </p:spPr>
+        <p:style>
+          <a:lnRef idx="1">
+            <a:schemeClr val="accent1"/>
+          </a:lnRef>
+          <a:fillRef idx="3">
+            <a:schemeClr val="accent1"/>
+          </a:fillRef>
+          <a:effectRef idx="2">
+            <a:schemeClr val="accent1"/>
+          </a:effectRef>
+          <a:fontRef idx="minor">
+            <a:schemeClr val="lt1"/>
+          </a:fontRef>
+        </p:style>
+        <p:txBody>
+          <a:bodyPr rtlCol="0" anchor="ctr"/>
+          <a:lstStyle/>
+          <a:p>
+            <a:pPr algn="ctr"/>
+          </a:p>
+        </p:txBody>
+      </p:sp>
+      <p:sp>
+        <p:nvSpPr>
+          <p:cNvPr id="10" name="TextBox 9"/>
+          <p:cNvSpPr txBox="1"/>
+          <p:nvPr/>
+        </p:nvSpPr>
+        <p:spPr>
+          <a:xfrm>
+            <a:off x="502920" y="1435608"/>
+            <a:ext cx="237744" cy="292608"/>
+          </a:xfrm>
+          <a:prstGeom prst="rect">
+            <a:avLst/>
+          </a:prstGeom>
+          <a:noFill/>
+        </p:spPr>
+        <p:txBody>
+          <a:bodyPr wrap="square">
+            <a:spAutoFit/>
+          </a:bodyPr>
+          <a:lstStyle/>
+          <a:p>
+            <a:pPr algn="ctr"/>
+            <a:r>
+              <a:rPr sz="1400" b="1" i="0">
+                <a:solidFill>
+                  <a:srgbClr val="FFFFFF"/>
+                </a:solidFill>
+              </a:rPr>
+              <a:t>1</a:t>
+            </a:r>
+          </a:p>
+        </p:txBody>
+      </p:sp>
+      <p:sp>
+        <p:nvSpPr>
+          <p:cNvPr id="11" name="TextBox 10"/>
+          <p:cNvSpPr txBox="1"/>
+          <p:nvPr/>
+        </p:nvSpPr>
+        <p:spPr>
+          <a:xfrm>
+            <a:off x="868680" y="1417320"/>
+            <a:ext cx="5074920" cy="384048"/>
+          </a:xfrm>
+          <a:prstGeom prst="rect">
+            <a:avLst/>
+          </a:prstGeom>
+          <a:noFill/>
+        </p:spPr>
+        <p:txBody>
+          <a:bodyPr wrap="square">
+            <a:spAutoFit/>
+          </a:bodyPr>
+          <a:lstStyle/>
+          <a:p>
+            <a:pPr algn="l"/>
+            <a:r>
+              <a:rPr sz="1200" b="1" i="0">
+                <a:solidFill>
+                  <a:srgbClr val="1B5E20"/>
+                </a:solidFill>
+              </a:rPr>
+              <a:t>Add GHSV, CH₄:O₂, pressure to the feature set</a:t>
+            </a:r>
+          </a:p>
+        </p:txBody>
+      </p:sp>
+      <p:sp>
+        <p:nvSpPr>
+          <p:cNvPr id="12" name="TextBox 11"/>
+          <p:cNvSpPr txBox="1"/>
+          <p:nvPr/>
+        </p:nvSpPr>
+        <p:spPr>
+          <a:xfrm>
+            <a:off x="868680" y="1828800"/>
+            <a:ext cx="5074920" cy="777240"/>
+          </a:xfrm>
+          <a:prstGeom prst="rect">
+            <a:avLst/>
+          </a:prstGeom>
+          <a:noFill/>
+        </p:spPr>
+        <p:txBody>
+          <a:bodyPr wrap="square">
+            <a:spAutoFit/>
+          </a:bodyPr>
+          <a:lstStyle/>
+          <a:p>
+            <a:pPr algn="l"/>
+            <a:r>
+              <a:rPr sz="1000" b="0" i="0">
+                <a:solidFill>
+                  <a:srgbClr val="50596E"/>
+                </a:solidFill>
+              </a:rPr>
+              <a:t>Fixes the Y&gt;15% ceiling and likely resolves much of the label shift too.</a:t>
+            </a:r>
+          </a:p>
+        </p:txBody>
+      </p:sp>
+      <p:sp>
+        <p:nvSpPr>
+          <p:cNvPr id="13" name="Rectangle 12"/>
+          <p:cNvSpPr/>
+          <p:nvPr/>
+        </p:nvSpPr>
+        <p:spPr>
+          <a:xfrm>
+            <a:off x="4343400" y="1417320"/>
+            <a:ext cx="1554480" cy="274320"/>
+          </a:xfrm>
+          <a:prstGeom prst="rect">
+            <a:avLst/>
+          </a:prstGeom>
+          <a:solidFill>
+            <a:srgbClr val="10B981"/>
+          </a:solidFill>
+          <a:ln>
+            <a:noFill/>
+          </a:ln>
+        </p:spPr>
+        <p:style>
+          <a:lnRef idx="1">
+            <a:schemeClr val="accent1"/>
+          </a:lnRef>
+          <a:fillRef idx="3">
+            <a:schemeClr val="accent1"/>
+          </a:fillRef>
+          <a:effectRef idx="2">
+            <a:schemeClr val="accent1"/>
+          </a:effectRef>
+          <a:fontRef idx="minor">
+            <a:schemeClr val="lt1"/>
+          </a:fontRef>
+        </p:style>
+        <p:txBody>
+          <a:bodyPr rtlCol="0" anchor="ctr"/>
+          <a:lstStyle/>
+          <a:p>
+            <a:pPr algn="ctr"/>
+          </a:p>
+        </p:txBody>
+      </p:sp>
+      <p:sp>
+        <p:nvSpPr>
+          <p:cNvPr id="14" name="TextBox 13"/>
+          <p:cNvSpPr txBox="1"/>
+          <p:nvPr/>
+        </p:nvSpPr>
+        <p:spPr>
+          <a:xfrm>
+            <a:off x="4389120" y="1435608"/>
+            <a:ext cx="1463040" cy="237744"/>
+          </a:xfrm>
+          <a:prstGeom prst="rect">
+            <a:avLst/>
+          </a:prstGeom>
+          <a:noFill/>
+        </p:spPr>
+        <p:txBody>
+          <a:bodyPr wrap="square">
+            <a:spAutoFit/>
+          </a:bodyPr>
+          <a:lstStyle/>
+          <a:p>
+            <a:pPr algn="ctr"/>
+            <a:r>
+              <a:rPr sz="900" b="1" i="0">
+                <a:solidFill>
+                  <a:srgbClr val="FFFFFF"/>
+                </a:solidFill>
+              </a:rPr>
+              <a:t>Highest impact</a:t>
+            </a:r>
+          </a:p>
+        </p:txBody>
+      </p:sp>
+      <p:sp>
+        <p:nvSpPr>
+          <p:cNvPr id="15" name="Rectangle 14"/>
+          <p:cNvSpPr/>
+          <p:nvPr/>
+        </p:nvSpPr>
+        <p:spPr>
+          <a:xfrm>
+            <a:off x="365760" y="2834639"/>
+            <a:ext cx="5669280" cy="1417320"/>
+          </a:xfrm>
+          <a:prstGeom prst="rect">
+            <a:avLst/>
+          </a:prstGeom>
+          <a:solidFill>
+            <a:srgbClr val="F5F6F8"/>
+          </a:solidFill>
+          <a:ln w="9525">
+            <a:solidFill>
+              <a:srgbClr val="D0D5DF"/>
+            </a:solidFill>
+          </a:ln>
+        </p:spPr>
+        <p:style>
+          <a:lnRef idx="1">
+            <a:schemeClr val="accent1"/>
+          </a:lnRef>
+          <a:fillRef idx="3">
+            <a:schemeClr val="accent1"/>
+          </a:fillRef>
+          <a:effectRef idx="2">
+            <a:schemeClr val="accent1"/>
+          </a:effectRef>
+          <a:fontRef idx="minor">
+            <a:schemeClr val="lt1"/>
+          </a:fontRef>
+        </p:style>
+        <p:txBody>
+          <a:bodyPr rtlCol="0" anchor="ctr"/>
+          <a:lstStyle/>
+          <a:p>
+            <a:pPr algn="ctr"/>
+          </a:p>
+        </p:txBody>
+      </p:sp>
+      <p:sp>
+        <p:nvSpPr>
+          <p:cNvPr id="16" name="Rectangle 15"/>
+          <p:cNvSpPr/>
+          <p:nvPr/>
+        </p:nvSpPr>
+        <p:spPr>
+          <a:xfrm>
+            <a:off x="457200" y="2926079"/>
+            <a:ext cx="329184" cy="329184"/>
+          </a:xfrm>
+          <a:prstGeom prst="rect">
+            <a:avLst/>
+          </a:prstGeom>
+          <a:solidFill>
+            <a:srgbClr val="0078C8"/>
+          </a:solidFill>
+          <a:ln>
+            <a:noFill/>
+          </a:ln>
+        </p:spPr>
+        <p:style>
+          <a:lnRef idx="1">
+            <a:schemeClr val="accent1"/>
+          </a:lnRef>
+          <a:fillRef idx="3">
+            <a:schemeClr val="accent1"/>
+          </a:fillRef>
+          <a:effectRef idx="2">
+            <a:schemeClr val="accent1"/>
+          </a:effectRef>
+          <a:fontRef idx="minor">
+            <a:schemeClr val="lt1"/>
+          </a:fontRef>
+        </p:style>
+        <p:txBody>
+          <a:bodyPr rtlCol="0" anchor="ctr"/>
+          <a:lstStyle/>
+          <a:p>
+            <a:pPr algn="ctr"/>
+          </a:p>
+        </p:txBody>
+      </p:sp>
+      <p:sp>
+        <p:nvSpPr>
+          <p:cNvPr id="17" name="TextBox 16"/>
+          <p:cNvSpPr txBox="1"/>
+          <p:nvPr/>
+        </p:nvSpPr>
+        <p:spPr>
+          <a:xfrm>
+            <a:off x="502920" y="2944367"/>
+            <a:ext cx="237744" cy="292608"/>
+          </a:xfrm>
+          <a:prstGeom prst="rect">
+            <a:avLst/>
+          </a:prstGeom>
+          <a:noFill/>
+        </p:spPr>
+        <p:txBody>
+          <a:bodyPr wrap="square">
+            <a:spAutoFit/>
+          </a:bodyPr>
+          <a:lstStyle/>
+          <a:p>
+            <a:pPr algn="ctr"/>
+            <a:r>
+              <a:rPr sz="1400" b="1" i="0">
+                <a:solidFill>
+                  <a:srgbClr val="FFFFFF"/>
+                </a:solidFill>
+              </a:rPr>
+              <a:t>2</a:t>
+            </a:r>
+          </a:p>
+        </p:txBody>
+      </p:sp>
+      <p:sp>
+        <p:nvSpPr>
+          <p:cNvPr id="18" name="TextBox 17"/>
+          <p:cNvSpPr txBox="1"/>
+          <p:nvPr/>
+        </p:nvSpPr>
+        <p:spPr>
+          <a:xfrm>
+            <a:off x="868680" y="2926079"/>
+            <a:ext cx="5074920" cy="384048"/>
+          </a:xfrm>
+          <a:prstGeom prst="rect">
+            <a:avLst/>
+          </a:prstGeom>
+          <a:noFill/>
+        </p:spPr>
+        <p:txBody>
+          <a:bodyPr wrap="square">
+            <a:spAutoFit/>
+          </a:bodyPr>
+          <a:lstStyle/>
+          <a:p>
+            <a:pPr algn="l"/>
+            <a:r>
+              <a:rPr sz="1200" b="1" i="0">
+                <a:solidFill>
+                  <a:srgbClr val="0F1E42"/>
+                </a:solidFill>
+              </a:rPr>
+              <a:t>Bag the Stage-1 expert</a:t>
+            </a:r>
+          </a:p>
+        </p:txBody>
+      </p:sp>
+      <p:sp>
+        <p:nvSpPr>
+          <p:cNvPr id="19" name="TextBox 18"/>
+          <p:cNvSpPr txBox="1"/>
+          <p:nvPr/>
+        </p:nvSpPr>
+        <p:spPr>
+          <a:xfrm>
+            <a:off x="868680" y="3337559"/>
+            <a:ext cx="5074920" cy="777240"/>
+          </a:xfrm>
+          <a:prstGeom prst="rect">
+            <a:avLst/>
+          </a:prstGeom>
+          <a:noFill/>
+        </p:spPr>
+        <p:txBody>
+          <a:bodyPr wrap="square">
+            <a:spAutoFit/>
+          </a:bodyPr>
+          <a:lstStyle/>
+          <a:p>
+            <a:pPr algn="l"/>
+            <a:r>
+              <a:rPr sz="1000" b="0" i="0">
+                <a:solidFill>
+                  <a:srgbClr val="50596E"/>
+                </a:solidFill>
+              </a:rPr>
+              <a:t>Ensemble of XGBoost models reduces high variance from only 782 training samples.</a:t>
+            </a:r>
+          </a:p>
+        </p:txBody>
+      </p:sp>
+      <p:sp>
+        <p:nvSpPr>
+          <p:cNvPr id="20" name="Rectangle 19"/>
+          <p:cNvSpPr/>
+          <p:nvPr/>
+        </p:nvSpPr>
+        <p:spPr>
+          <a:xfrm>
+            <a:off x="365760" y="4343400"/>
+            <a:ext cx="5669280" cy="1417320"/>
+          </a:xfrm>
+          <a:prstGeom prst="rect">
+            <a:avLst/>
+          </a:prstGeom>
+          <a:solidFill>
+            <a:srgbClr val="F5F6F8"/>
+          </a:solidFill>
+          <a:ln w="9525">
+            <a:solidFill>
+              <a:srgbClr val="D0D5DF"/>
+            </a:solidFill>
+          </a:ln>
+        </p:spPr>
+        <p:style>
+          <a:lnRef idx="1">
+            <a:schemeClr val="accent1"/>
+          </a:lnRef>
+          <a:fillRef idx="3">
+            <a:schemeClr val="accent1"/>
+          </a:fillRef>
+          <a:effectRef idx="2">
+            <a:schemeClr val="accent1"/>
+          </a:effectRef>
+          <a:fontRef idx="minor">
+            <a:schemeClr val="lt1"/>
+          </a:fontRef>
+        </p:style>
+        <p:txBody>
+          <a:bodyPr rtlCol="0" anchor="ctr"/>
+          <a:lstStyle/>
+          <a:p>
+            <a:pPr algn="ctr"/>
+          </a:p>
+        </p:txBody>
+      </p:sp>
+      <p:sp>
+        <p:nvSpPr>
+          <p:cNvPr id="21" name="Rectangle 20"/>
+          <p:cNvSpPr/>
+          <p:nvPr/>
+        </p:nvSpPr>
+        <p:spPr>
+          <a:xfrm>
+            <a:off x="457200" y="4434840"/>
+            <a:ext cx="329184" cy="329184"/>
+          </a:xfrm>
+          <a:prstGeom prst="rect">
+            <a:avLst/>
+          </a:prstGeom>
+          <a:solidFill>
+            <a:srgbClr val="0078C8"/>
+          </a:solidFill>
+          <a:ln>
+            <a:noFill/>
+          </a:ln>
+        </p:spPr>
+        <p:style>
+          <a:lnRef idx="1">
+            <a:schemeClr val="accent1"/>
+          </a:lnRef>
+          <a:fillRef idx="3">
+            <a:schemeClr val="accent1"/>
+          </a:fillRef>
+          <a:effectRef idx="2">
+            <a:schemeClr val="accent1"/>
+          </a:effectRef>
+          <a:fontRef idx="minor">
+            <a:schemeClr val="lt1"/>
+          </a:fontRef>
+        </p:style>
+        <p:txBody>
+          <a:bodyPr rtlCol="0" anchor="ctr"/>
+          <a:lstStyle/>
+          <a:p>
+            <a:pPr algn="ctr"/>
+          </a:p>
+        </p:txBody>
+      </p:sp>
+      <p:sp>
+        <p:nvSpPr>
+          <p:cNvPr id="22" name="TextBox 21"/>
+          <p:cNvSpPr txBox="1"/>
+          <p:nvPr/>
+        </p:nvSpPr>
+        <p:spPr>
+          <a:xfrm>
+            <a:off x="502920" y="4453128"/>
+            <a:ext cx="237744" cy="292608"/>
+          </a:xfrm>
+          <a:prstGeom prst="rect">
+            <a:avLst/>
+          </a:prstGeom>
+          <a:noFill/>
+        </p:spPr>
+        <p:txBody>
+          <a:bodyPr wrap="square">
+            <a:spAutoFit/>
+          </a:bodyPr>
+          <a:lstStyle/>
+          <a:p>
+            <a:pPr algn="ctr"/>
+            <a:r>
+              <a:rPr sz="1400" b="1" i="0">
+                <a:solidFill>
+                  <a:srgbClr val="FFFFFF"/>
+                </a:solidFill>
+              </a:rPr>
+              <a:t>3</a:t>
+            </a:r>
+          </a:p>
+        </p:txBody>
+      </p:sp>
+      <p:sp>
+        <p:nvSpPr>
+          <p:cNvPr id="23" name="TextBox 22"/>
+          <p:cNvSpPr txBox="1"/>
+          <p:nvPr/>
+        </p:nvSpPr>
+        <p:spPr>
+          <a:xfrm>
+            <a:off x="868680" y="4434840"/>
+            <a:ext cx="5074920" cy="384048"/>
+          </a:xfrm>
+          <a:prstGeom prst="rect">
+            <a:avLst/>
+          </a:prstGeom>
+          <a:noFill/>
+        </p:spPr>
+        <p:txBody>
+          <a:bodyPr wrap="square">
+            <a:spAutoFit/>
+          </a:bodyPr>
+          <a:lstStyle/>
+          <a:p>
+            <a:pPr algn="l"/>
+            <a:r>
+              <a:rPr sz="1200" b="1" i="0">
+                <a:solidFill>
+                  <a:srgbClr val="0F1E42"/>
+                </a:solidFill>
+              </a:rPr>
+              <a:t>Add uncertainty quantification</a:t>
+            </a:r>
+          </a:p>
+        </p:txBody>
+      </p:sp>
+      <p:sp>
+        <p:nvSpPr>
+          <p:cNvPr id="24" name="TextBox 23"/>
+          <p:cNvSpPr txBox="1"/>
+          <p:nvPr/>
+        </p:nvSpPr>
+        <p:spPr>
+          <a:xfrm>
+            <a:off x="868680" y="4846320"/>
+            <a:ext cx="5074920" cy="777240"/>
+          </a:xfrm>
+          <a:prstGeom prst="rect">
+            <a:avLst/>
+          </a:prstGeom>
+          <a:noFill/>
+        </p:spPr>
+        <p:txBody>
+          <a:bodyPr wrap="square">
+            <a:spAutoFit/>
+          </a:bodyPr>
+          <a:lstStyle/>
+          <a:p>
+            <a:pPr algn="l"/>
+            <a:r>
+              <a:rPr sz="1000" b="0" i="0">
+                <a:solidFill>
+                  <a:srgbClr val="50596E"/>
+                </a:solidFill>
+              </a:rPr>
+              <a:t>Conformal prediction or quantile regression — flag low-confidence picks for the experiment loop.</a:t>
+            </a:r>
+          </a:p>
+        </p:txBody>
+      </p:sp>
+      <p:sp>
+        <p:nvSpPr>
+          <p:cNvPr id="25" name="Rectangle 24"/>
+          <p:cNvSpPr/>
+          <p:nvPr/>
+        </p:nvSpPr>
+        <p:spPr>
+          <a:xfrm>
+            <a:off x="6263640" y="1325880"/>
+            <a:ext cx="5669280" cy="1417320"/>
+          </a:xfrm>
+          <a:prstGeom prst="rect">
+            <a:avLst/>
+          </a:prstGeom>
+          <a:solidFill>
+            <a:srgbClr val="F5F6F8"/>
+          </a:solidFill>
+          <a:ln w="9525">
+            <a:solidFill>
+              <a:srgbClr val="D0D5DF"/>
+            </a:solidFill>
+          </a:ln>
+        </p:spPr>
+        <p:style>
+          <a:lnRef idx="1">
+            <a:schemeClr val="accent1"/>
+          </a:lnRef>
+          <a:fillRef idx="3">
+            <a:schemeClr val="accent1"/>
+          </a:fillRef>
+          <a:effectRef idx="2">
+            <a:schemeClr val="accent1"/>
+          </a:effectRef>
+          <a:fontRef idx="minor">
+            <a:schemeClr val="lt1"/>
+          </a:fontRef>
+        </p:style>
+        <p:txBody>
+          <a:bodyPr rtlCol="0" anchor="ctr"/>
+          <a:lstStyle/>
+          <a:p>
+            <a:pPr algn="ctr"/>
+          </a:p>
+        </p:txBody>
+      </p:sp>
+      <p:sp>
+        <p:nvSpPr>
+          <p:cNvPr id="26" name="Rectangle 25"/>
+          <p:cNvSpPr/>
+          <p:nvPr/>
+        </p:nvSpPr>
+        <p:spPr>
+          <a:xfrm>
+            <a:off x="6355080" y="1417320"/>
+            <a:ext cx="329184" cy="329184"/>
+          </a:xfrm>
+          <a:prstGeom prst="rect">
+            <a:avLst/>
+          </a:prstGeom>
+          <a:solidFill>
+            <a:srgbClr val="0078C8"/>
+          </a:solidFill>
+          <a:ln>
+            <a:noFill/>
+          </a:ln>
+        </p:spPr>
+        <p:style>
+          <a:lnRef idx="1">
+            <a:schemeClr val="accent1"/>
+          </a:lnRef>
+          <a:fillRef idx="3">
+            <a:schemeClr val="accent1"/>
+          </a:fillRef>
+          <a:effectRef idx="2">
+            <a:schemeClr val="accent1"/>
+          </a:effectRef>
+          <a:fontRef idx="minor">
+            <a:schemeClr val="lt1"/>
+          </a:fontRef>
+        </p:style>
+        <p:txBody>
+          <a:bodyPr rtlCol="0" anchor="ctr"/>
+          <a:lstStyle/>
+          <a:p>
+            <a:pPr algn="ctr"/>
+          </a:p>
+        </p:txBody>
+      </p:sp>
+      <p:sp>
+        <p:nvSpPr>
+          <p:cNvPr id="27" name="TextBox 26"/>
+          <p:cNvSpPr txBox="1"/>
+          <p:nvPr/>
+        </p:nvSpPr>
+        <p:spPr>
+          <a:xfrm>
+            <a:off x="6400800" y="1435608"/>
+            <a:ext cx="237744" cy="292608"/>
+          </a:xfrm>
+          <a:prstGeom prst="rect">
+            <a:avLst/>
+          </a:prstGeom>
+          <a:noFill/>
+        </p:spPr>
+        <p:txBody>
+          <a:bodyPr wrap="square">
+            <a:spAutoFit/>
+          </a:bodyPr>
+          <a:lstStyle/>
+          <a:p>
+            <a:pPr algn="ctr"/>
+            <a:r>
+              <a:rPr sz="1400" b="1" i="0">
+                <a:solidFill>
+                  <a:srgbClr val="FFFFFF"/>
+                </a:solidFill>
+              </a:rPr>
+              <a:t>4</a:t>
+            </a:r>
+          </a:p>
+        </p:txBody>
+      </p:sp>
+      <p:sp>
+        <p:nvSpPr>
+          <p:cNvPr id="28" name="TextBox 27"/>
+          <p:cNvSpPr txBox="1"/>
+          <p:nvPr/>
+        </p:nvSpPr>
+        <p:spPr>
+          <a:xfrm>
+            <a:off x="6766560" y="1417320"/>
+            <a:ext cx="5074920" cy="384048"/>
+          </a:xfrm>
+          <a:prstGeom prst="rect">
+            <a:avLst/>
+          </a:prstGeom>
+          <a:noFill/>
+        </p:spPr>
+        <p:txBody>
+          <a:bodyPr wrap="square">
+            <a:spAutoFit/>
+          </a:bodyPr>
+          <a:lstStyle/>
+          <a:p>
+            <a:pPr algn="l"/>
+            <a:r>
+              <a:rPr sz="1200" b="1" i="0">
+                <a:solidFill>
+                  <a:srgbClr val="0F1E42"/>
+                </a:solidFill>
+              </a:rPr>
+              <a:t>Stack DRST + KMM inside Prior FT</a:t>
+            </a:r>
+          </a:p>
+        </p:txBody>
+      </p:sp>
+      <p:sp>
+        <p:nvSpPr>
+          <p:cNvPr id="29" name="TextBox 28"/>
+          <p:cNvSpPr txBox="1"/>
+          <p:nvPr/>
+        </p:nvSpPr>
+        <p:spPr>
+          <a:xfrm>
+            <a:off x="6766560" y="1828800"/>
+            <a:ext cx="5074920" cy="777240"/>
+          </a:xfrm>
+          <a:prstGeom prst="rect">
+            <a:avLst/>
+          </a:prstGeom>
+          <a:noFill/>
+        </p:spPr>
+        <p:txBody>
+          <a:bodyPr wrap="square">
+            <a:spAutoFit/>
+          </a:bodyPr>
+          <a:lstStyle/>
+          <a:p>
+            <a:pPr algn="l"/>
+            <a:r>
+              <a:rPr sz="1000" b="0" i="0">
+                <a:solidFill>
+                  <a:srgbClr val="50596E"/>
+                </a:solidFill>
+              </a:rPr>
+              <a:t>Run them as one integrated pipeline rather than three separate methods.</a:t>
+            </a:r>
+          </a:p>
+        </p:txBody>
+      </p:sp>
+      <p:sp>
+        <p:nvSpPr>
+          <p:cNvPr id="30" name="Rectangle 29"/>
+          <p:cNvSpPr/>
+          <p:nvPr/>
+        </p:nvSpPr>
+        <p:spPr>
+          <a:xfrm>
+            <a:off x="6263640" y="2834639"/>
+            <a:ext cx="5669280" cy="1417320"/>
+          </a:xfrm>
+          <a:prstGeom prst="rect">
+            <a:avLst/>
+          </a:prstGeom>
+          <a:solidFill>
+            <a:srgbClr val="F5F6F8"/>
+          </a:solidFill>
+          <a:ln w="9525">
+            <a:solidFill>
+              <a:srgbClr val="D0D5DF"/>
+            </a:solidFill>
+          </a:ln>
+        </p:spPr>
+        <p:style>
+          <a:lnRef idx="1">
+            <a:schemeClr val="accent1"/>
+          </a:lnRef>
+          <a:fillRef idx="3">
+            <a:schemeClr val="accent1"/>
+          </a:fillRef>
+          <a:effectRef idx="2">
+            <a:schemeClr val="accent1"/>
+          </a:effectRef>
+          <a:fontRef idx="minor">
+            <a:schemeClr val="lt1"/>
+          </a:fontRef>
+        </p:style>
+        <p:txBody>
+          <a:bodyPr rtlCol="0" anchor="ctr"/>
+          <a:lstStyle/>
+          <a:p>
+            <a:pPr algn="ctr"/>
+          </a:p>
+        </p:txBody>
+      </p:sp>
+      <p:sp>
+        <p:nvSpPr>
+          <p:cNvPr id="31" name="Rectangle 30"/>
+          <p:cNvSpPr/>
+          <p:nvPr/>
+        </p:nvSpPr>
+        <p:spPr>
+          <a:xfrm>
+            <a:off x="6355080" y="2926079"/>
+            <a:ext cx="329184" cy="329184"/>
+          </a:xfrm>
+          <a:prstGeom prst="rect">
+            <a:avLst/>
+          </a:prstGeom>
+          <a:solidFill>
+            <a:srgbClr val="0078C8"/>
+          </a:solidFill>
+          <a:ln>
+            <a:noFill/>
+          </a:ln>
+        </p:spPr>
+        <p:style>
+          <a:lnRef idx="1">
+            <a:schemeClr val="accent1"/>
+          </a:lnRef>
+          <a:fillRef idx="3">
+            <a:schemeClr val="accent1"/>
+          </a:fillRef>
+          <a:effectRef idx="2">
+            <a:schemeClr val="accent1"/>
+          </a:effectRef>
+          <a:fontRef idx="minor">
+            <a:schemeClr val="lt1"/>
+          </a:fontRef>
+        </p:style>
+        <p:txBody>
+          <a:bodyPr rtlCol="0" anchor="ctr"/>
+          <a:lstStyle/>
+          <a:p>
+            <a:pPr algn="ctr"/>
+          </a:p>
+        </p:txBody>
+      </p:sp>
+      <p:sp>
+        <p:nvSpPr>
+          <p:cNvPr id="32" name="TextBox 31"/>
+          <p:cNvSpPr txBox="1"/>
+          <p:nvPr/>
+        </p:nvSpPr>
+        <p:spPr>
+          <a:xfrm>
+            <a:off x="6400800" y="2944367"/>
+            <a:ext cx="237744" cy="292608"/>
+          </a:xfrm>
+          <a:prstGeom prst="rect">
+            <a:avLst/>
+          </a:prstGeom>
+          <a:noFill/>
+        </p:spPr>
+        <p:txBody>
+          <a:bodyPr wrap="square">
+            <a:spAutoFit/>
+          </a:bodyPr>
+          <a:lstStyle/>
+          <a:p>
+            <a:pPr algn="ctr"/>
+            <a:r>
+              <a:rPr sz="1400" b="1" i="0">
+                <a:solidFill>
+                  <a:srgbClr val="FFFFFF"/>
+                </a:solidFill>
+              </a:rPr>
+              <a:t>5</a:t>
+            </a:r>
+          </a:p>
+        </p:txBody>
+      </p:sp>
+      <p:sp>
+        <p:nvSpPr>
+          <p:cNvPr id="33" name="TextBox 32"/>
+          <p:cNvSpPr txBox="1"/>
+          <p:nvPr/>
+        </p:nvSpPr>
+        <p:spPr>
+          <a:xfrm>
+            <a:off x="6766560" y="2926079"/>
+            <a:ext cx="5074920" cy="384048"/>
+          </a:xfrm>
+          <a:prstGeom prst="rect">
+            <a:avLst/>
+          </a:prstGeom>
+          <a:noFill/>
+        </p:spPr>
+        <p:txBody>
+          <a:bodyPr wrap="square">
+            <a:spAutoFit/>
+          </a:bodyPr>
+          <a:lstStyle/>
+          <a:p>
+            <a:pPr algn="l"/>
+            <a:r>
+              <a:rPr sz="1200" b="1" i="0">
+                <a:solidFill>
+                  <a:srgbClr val="0F1E42"/>
+                </a:solidFill>
+              </a:rPr>
+              <a:t>Neural domain adaptation (DANN, CORAL)</a:t>
+            </a:r>
+          </a:p>
+        </p:txBody>
+      </p:sp>
+      <p:sp>
+        <p:nvSpPr>
+          <p:cNvPr id="34" name="TextBox 33"/>
+          <p:cNvSpPr txBox="1"/>
+          <p:nvPr/>
+        </p:nvSpPr>
+        <p:spPr>
+          <a:xfrm>
+            <a:off x="6766560" y="3337559"/>
+            <a:ext cx="5074920" cy="777240"/>
+          </a:xfrm>
+          <a:prstGeom prst="rect">
+            <a:avLst/>
+          </a:prstGeom>
+          <a:noFill/>
+        </p:spPr>
+        <p:txBody>
+          <a:bodyPr wrap="square">
+            <a:spAutoFit/>
+          </a:bodyPr>
+          <a:lstStyle/>
+          <a:p>
+            <a:pPr algn="l"/>
+            <a:r>
+              <a:rPr sz="1000" b="0" i="0">
+                <a:solidFill>
+                  <a:srgbClr val="50596E"/>
+                </a:solidFill>
+              </a:rPr>
+              <a:t>More powerful once the feature set is richer — currently under-powered.</a:t>
+            </a:r>
+          </a:p>
+        </p:txBody>
+      </p:sp>
+      <p:sp>
+        <p:nvSpPr>
+          <p:cNvPr id="35" name="Rectangle 34"/>
+          <p:cNvSpPr/>
+          <p:nvPr/>
+        </p:nvSpPr>
+        <p:spPr>
+          <a:xfrm>
+            <a:off x="6263640" y="4343400"/>
+            <a:ext cx="5669280" cy="1417320"/>
+          </a:xfrm>
+          <a:prstGeom prst="rect">
+            <a:avLst/>
+          </a:prstGeom>
+          <a:solidFill>
+            <a:srgbClr val="F5F6F8"/>
+          </a:solidFill>
+          <a:ln w="9525">
+            <a:solidFill>
+              <a:srgbClr val="D0D5DF"/>
+            </a:solidFill>
+          </a:ln>
+        </p:spPr>
+        <p:style>
+          <a:lnRef idx="1">
+            <a:schemeClr val="accent1"/>
+          </a:lnRef>
+          <a:fillRef idx="3">
+            <a:schemeClr val="accent1"/>
+          </a:fillRef>
+          <a:effectRef idx="2">
+            <a:schemeClr val="accent1"/>
+          </a:effectRef>
+          <a:fontRef idx="minor">
+            <a:schemeClr val="lt1"/>
+          </a:fontRef>
+        </p:style>
+        <p:txBody>
+          <a:bodyPr rtlCol="0" anchor="ctr"/>
+          <a:lstStyle/>
+          <a:p>
+            <a:pPr algn="ctr"/>
+          </a:p>
+        </p:txBody>
+      </p:sp>
+      <p:sp>
+        <p:nvSpPr>
+          <p:cNvPr id="36" name="Rectangle 35"/>
+          <p:cNvSpPr/>
+          <p:nvPr/>
+        </p:nvSpPr>
+        <p:spPr>
+          <a:xfrm>
+            <a:off x="6355080" y="4434840"/>
+            <a:ext cx="329184" cy="329184"/>
+          </a:xfrm>
+          <a:prstGeom prst="rect">
+            <a:avLst/>
+          </a:prstGeom>
+          <a:solidFill>
+            <a:srgbClr val="0078C8"/>
+          </a:solidFill>
+          <a:ln>
+            <a:noFill/>
+          </a:ln>
+        </p:spPr>
+        <p:style>
+          <a:lnRef idx="1">
+            <a:schemeClr val="accent1"/>
+          </a:lnRef>
+          <a:fillRef idx="3">
+            <a:schemeClr val="accent1"/>
+          </a:fillRef>
+          <a:effectRef idx="2">
+            <a:schemeClr val="accent1"/>
+          </a:effectRef>
+          <a:fontRef idx="minor">
+            <a:schemeClr val="lt1"/>
+          </a:fontRef>
+        </p:style>
+        <p:txBody>
+          <a:bodyPr rtlCol="0" anchor="ctr"/>
+          <a:lstStyle/>
+          <a:p>
+            <a:pPr algn="ctr"/>
+          </a:p>
+        </p:txBody>
+      </p:sp>
+      <p:sp>
+        <p:nvSpPr>
+          <p:cNvPr id="37" name="TextBox 36"/>
+          <p:cNvSpPr txBox="1"/>
+          <p:nvPr/>
+        </p:nvSpPr>
+        <p:spPr>
+          <a:xfrm>
+            <a:off x="6400800" y="4453128"/>
+            <a:ext cx="237744" cy="292608"/>
+          </a:xfrm>
+          <a:prstGeom prst="rect">
+            <a:avLst/>
+          </a:prstGeom>
+          <a:noFill/>
+        </p:spPr>
+        <p:txBody>
+          <a:bodyPr wrap="square">
+            <a:spAutoFit/>
+          </a:bodyPr>
+          <a:lstStyle/>
+          <a:p>
+            <a:pPr algn="ctr"/>
+            <a:r>
+              <a:rPr sz="1400" b="1" i="0">
+                <a:solidFill>
+                  <a:srgbClr val="FFFFFF"/>
+                </a:solidFill>
+              </a:rPr>
+              <a:t>6</a:t>
+            </a:r>
+          </a:p>
+        </p:txBody>
+      </p:sp>
+      <p:sp>
+        <p:nvSpPr>
+          <p:cNvPr id="38" name="TextBox 37"/>
+          <p:cNvSpPr txBox="1"/>
+          <p:nvPr/>
+        </p:nvSpPr>
+        <p:spPr>
+          <a:xfrm>
+            <a:off x="6766560" y="4434840"/>
+            <a:ext cx="5074920" cy="384048"/>
+          </a:xfrm>
+          <a:prstGeom prst="rect">
+            <a:avLst/>
+          </a:prstGeom>
+          <a:noFill/>
+        </p:spPr>
+        <p:txBody>
+          <a:bodyPr wrap="square">
+            <a:spAutoFit/>
+          </a:bodyPr>
+          <a:lstStyle/>
+          <a:p>
+            <a:pPr algn="l"/>
+            <a:r>
+              <a:rPr sz="1200" b="1" i="0">
+                <a:solidFill>
+                  <a:srgbClr val="0F1E42"/>
+                </a:solidFill>
+              </a:rPr>
+              <a:t>Close the active-learning loop</a:t>
+            </a:r>
+          </a:p>
+        </p:txBody>
+      </p:sp>
+      <p:sp>
+        <p:nvSpPr>
+          <p:cNvPr id="39" name="TextBox 38"/>
+          <p:cNvSpPr txBox="1"/>
+          <p:nvPr/>
+        </p:nvSpPr>
+        <p:spPr>
+          <a:xfrm>
+            <a:off x="6766560" y="4846320"/>
+            <a:ext cx="5074920" cy="777240"/>
+          </a:xfrm>
+          <a:prstGeom prst="rect">
+            <a:avLst/>
+          </a:prstGeom>
+          <a:noFill/>
+        </p:spPr>
+        <p:txBody>
+          <a:bodyPr wrap="square">
+            <a:spAutoFit/>
+          </a:bodyPr>
+          <a:lstStyle/>
+          <a:p>
+            <a:pPr algn="l"/>
+            <a:r>
+              <a:rPr sz="1000" b="0" i="0">
+                <a:solidFill>
+                  <a:srgbClr val="50596E"/>
+                </a:solidFill>
+              </a:rPr>
+              <a:t>Model proposes → lab measures → model retrains. Reduces label shift over time.</a:t>
+            </a:r>
+          </a:p>
+        </p:txBody>
+      </p:sp>
+    </p:spTree>
+  </p:cSld>
+  <p:clrMapOvr>
+    <a:masterClrMapping/>
+  </p:clrMapOvr>
+</p:sld>
+</file>
+
+<file path=ppt/slides/slide16.xml><?xml version="1.0" encoding="utf-8"?>
+<p:sld xmlns:a="http://schemas.openxmlformats.org/drawingml/2006/main" xmlns:p="http://schemas.openxmlformats.org/presentationml/2006/main" xmlns:r="http://schemas.openxmlformats.org/officeDocument/2006/relationships">
+  <p:cSld>
+    <p:spTree>
+      <p:nvGrpSpPr>
+        <p:cNvPr id="1" name=""/>
+        <p:cNvGrpSpPr/>
+        <p:nvPr/>
+      </p:nvGrpSpPr>
+      <p:grpSpPr/>
+      <p:sp>
+        <p:nvSpPr>
+          <p:cNvPr id="2" name="Rectangle 1"/>
+          <p:cNvSpPr/>
+          <p:nvPr/>
+        </p:nvSpPr>
+        <p:spPr>
+          <a:xfrm>
+            <a:off x="0" y="0"/>
+            <a:ext cx="12188952" cy="6858000"/>
+          </a:xfrm>
+          <a:prstGeom prst="rect">
+            <a:avLst/>
+          </a:prstGeom>
+          <a:solidFill>
+            <a:srgbClr val="FFFFFF"/>
+          </a:solidFill>
+          <a:ln>
+            <a:noFill/>
+          </a:ln>
+        </p:spPr>
+        <p:style>
+          <a:lnRef idx="1">
+            <a:schemeClr val="accent1"/>
+          </a:lnRef>
+          <a:fillRef idx="3">
+            <a:schemeClr val="accent1"/>
+          </a:fillRef>
+          <a:effectRef idx="2">
+            <a:schemeClr val="accent1"/>
+          </a:effectRef>
+          <a:fontRef idx="minor">
+            <a:schemeClr val="lt1"/>
+          </a:fontRef>
+        </p:style>
+        <p:txBody>
+          <a:bodyPr rtlCol="0" anchor="ctr"/>
+          <a:lstStyle/>
+          <a:p>
+            <a:pPr algn="ctr"/>
+          </a:p>
+        </p:txBody>
+      </p:sp>
+      <p:sp>
+        <p:nvSpPr>
+          <p:cNvPr id="3" name="Rectangle 2"/>
+          <p:cNvSpPr/>
+          <p:nvPr/>
+        </p:nvSpPr>
+        <p:spPr>
+          <a:xfrm>
+            <a:off x="0" y="0"/>
+            <a:ext cx="12188952" cy="868680"/>
+          </a:xfrm>
+          <a:prstGeom prst="rect">
+            <a:avLst/>
+          </a:prstGeom>
+          <a:solidFill>
+            <a:srgbClr val="0F1E42"/>
+          </a:solidFill>
+          <a:ln>
+            <a:noFill/>
+          </a:ln>
+        </p:spPr>
+        <p:style>
+          <a:lnRef idx="1">
+            <a:schemeClr val="accent1"/>
+          </a:lnRef>
+          <a:fillRef idx="3">
+            <a:schemeClr val="accent1"/>
+          </a:fillRef>
+          <a:effectRef idx="2">
+            <a:schemeClr val="accent1"/>
+          </a:effectRef>
+          <a:fontRef idx="minor">
+            <a:schemeClr val="lt1"/>
+          </a:fontRef>
+        </p:style>
+        <p:txBody>
+          <a:bodyPr rtlCol="0" anchor="ctr"/>
+          <a:lstStyle/>
+          <a:p>
+            <a:pPr algn="ctr"/>
+          </a:p>
+        </p:txBody>
+      </p:sp>
+      <p:sp>
+        <p:nvSpPr>
+          <p:cNvPr id="4" name="TextBox 3"/>
+          <p:cNvSpPr txBox="1"/>
+          <p:nvPr/>
+        </p:nvSpPr>
+        <p:spPr>
+          <a:xfrm>
+            <a:off x="365760" y="164592"/>
+            <a:ext cx="11457432" cy="502920"/>
+          </a:xfrm>
+          <a:prstGeom prst="rect">
+            <a:avLst/>
+          </a:prstGeom>
+          <a:noFill/>
+        </p:spPr>
+        <p:txBody>
+          <a:bodyPr wrap="square">
+            <a:spAutoFit/>
+          </a:bodyPr>
+          <a:lstStyle/>
+          <a:p>
+            <a:pPr algn="l"/>
+            <a:r>
+              <a:rPr sz="2200" b="1" i="0">
+                <a:solidFill>
+                  <a:srgbClr val="FFFFFF"/>
+                </a:solidFill>
+              </a:rPr>
+              <a:t>Summary</a:t>
+            </a:r>
+          </a:p>
+        </p:txBody>
+      </p:sp>
+      <p:sp>
+        <p:nvSpPr>
+          <p:cNvPr id="5" name="Rectangle 4"/>
+          <p:cNvSpPr/>
+          <p:nvPr/>
+        </p:nvSpPr>
+        <p:spPr>
+          <a:xfrm>
+            <a:off x="0" y="6510528"/>
+            <a:ext cx="12188952" cy="347472"/>
+          </a:xfrm>
+          <a:prstGeom prst="rect">
+            <a:avLst/>
+          </a:prstGeom>
+          <a:solidFill>
+            <a:srgbClr val="0F1E42"/>
+          </a:solidFill>
+          <a:ln>
+            <a:noFill/>
+          </a:ln>
+        </p:spPr>
+        <p:style>
+          <a:lnRef idx="1">
+            <a:schemeClr val="accent1"/>
+          </a:lnRef>
+          <a:fillRef idx="3">
+            <a:schemeClr val="accent1"/>
+          </a:fillRef>
+          <a:effectRef idx="2">
+            <a:schemeClr val="accent1"/>
+          </a:effectRef>
+          <a:fontRef idx="minor">
+            <a:schemeClr val="lt1"/>
+          </a:fontRef>
+        </p:style>
+        <p:txBody>
+          <a:bodyPr rtlCol="0" anchor="ctr"/>
+          <a:lstStyle/>
+          <a:p>
+            <a:pPr algn="ctr"/>
+          </a:p>
+        </p:txBody>
+      </p:sp>
+      <p:sp>
+        <p:nvSpPr>
+          <p:cNvPr id="6" name="TextBox 5"/>
+          <p:cNvSpPr txBox="1"/>
+          <p:nvPr/>
+        </p:nvSpPr>
+        <p:spPr>
+          <a:xfrm>
+            <a:off x="182880" y="6528816"/>
+            <a:ext cx="11823192" cy="310896"/>
+          </a:xfrm>
+          <a:prstGeom prst="rect">
+            <a:avLst/>
+          </a:prstGeom>
+          <a:noFill/>
+        </p:spPr>
+        <p:txBody>
+          <a:bodyPr wrap="square">
+            <a:spAutoFit/>
+          </a:bodyPr>
+          <a:lstStyle/>
+          <a:p>
+            <a:pPr algn="l"/>
+            <a:r>
+              <a:rPr sz="900" b="0" i="0">
+                <a:solidFill>
+                  <a:srgbClr val="CCCCCC"/>
+                </a:solidFill>
+              </a:rPr>
+              <a:t>OCM Dataset Integration   |   Slide 16 / 16</a:t>
             </a:r>
           </a:p>
         </p:txBody>
@@ -9986,7 +10533,7 @@
                   <a:srgbClr val="1A1A2E"/>
                 </a:solidFill>
               </a:rPr>
-              <a:t>•  Using literature as a PRIOR FEATURE (not a label) gives the biggest gain: −10.6% CV, −45% OOD.</a:t>
+              <a:t>•  Using literature as a PRIOR FEATURE (not a label) gives the biggest gain: −10.6% CV, confirmed 10/10 seeds (p&lt;10⁻¹⁴) and on a held-out test.</a:t>
             </a:r>
           </a:p>
         </p:txBody>
@@ -10382,7 +10929,7 @@
                   <a:srgbClr val="CCCCCC"/>
                 </a:solidFill>
               </a:rPr>
-              <a:t>OCM Dataset Integration   |   Slide 2 / 15</a:t>
+              <a:t>OCM Dataset Integration   |   Slide 2 / 16</a:t>
             </a:r>
           </a:p>
         </p:txBody>
@@ -12001,7 +12548,7 @@
                   <a:srgbClr val="CCCCCC"/>
                 </a:solidFill>
               </a:rPr>
-              <a:t>OCM Dataset Integration   |   Slide 3 / 15</a:t>
+              <a:t>OCM Dataset Integration   |   Slide 3 / 16</a:t>
             </a:r>
           </a:p>
         </p:txBody>
@@ -12634,7 +13181,7 @@
                   <a:srgbClr val="CCCCCC"/>
                 </a:solidFill>
               </a:rPr>
-              <a:t>OCM Dataset Integration   |   Slide 4 / 15</a:t>
+              <a:t>OCM Dataset Integration   |   Slide 4 / 16</a:t>
             </a:r>
           </a:p>
         </p:txBody>
@@ -13267,7 +13814,7 @@
                   <a:srgbClr val="CCCCCC"/>
                 </a:solidFill>
               </a:rPr>
-              <a:t>OCM Dataset Integration   |   Slide 5 / 15</a:t>
+              <a:t>OCM Dataset Integration   |   Slide 5 / 16</a:t>
             </a:r>
           </a:p>
         </p:txBody>
@@ -14559,7 +15106,7 @@
                   <a:srgbClr val="CCCCCC"/>
                 </a:solidFill>
               </a:rPr>
-              <a:t>OCM Dataset Integration   |   Slide 6 / 15</a:t>
+              <a:t>OCM Dataset Integration   |   Slide 6 / 16</a:t>
             </a:r>
           </a:p>
         </p:txBody>
@@ -15843,7 +16390,7 @@
                   <a:srgbClr val="CCCCCC"/>
                 </a:solidFill>
               </a:rPr>
-              <a:t>OCM Dataset Integration   |   Slide 7 / 15</a:t>
+              <a:t>OCM Dataset Integration   |   Slide 7 / 16</a:t>
             </a:r>
           </a:p>
         </p:txBody>
@@ -17254,7 +17801,7 @@
                   <a:srgbClr val="CCCCCC"/>
                 </a:solidFill>
               </a:rPr>
-              <a:t>OCM Dataset Integration   |   Slide 8 / 15</a:t>
+              <a:t>OCM Dataset Integration   |   Slide 8 / 16</a:t>
             </a:r>
           </a:p>
         </p:txBody>
@@ -18385,7 +18932,7 @@
                   <a:srgbClr val="CCCCCC"/>
                 </a:solidFill>
               </a:rPr>
-              <a:t>OCM Dataset Integration   |   Slide 9 / 15</a:t>
+              <a:t>OCM Dataset Integration   |   Slide 9 / 16</a:t>
             </a:r>
           </a:p>
         </p:txBody>

--- a/ocm_presentation.pptx
+++ b/ocm_presentation.pptx
@@ -3782,7 +3782,7 @@
                   <a:srgbClr val="0F1E42"/>
                 </a:solidFill>
               </a:rPr>
-              <a:t>Cross-validation (our data)</a:t>
+              <a:t>Cross-validation (lab data)</a:t>
             </a:r>
           </a:p>
         </p:txBody>
@@ -4040,7 +4040,7 @@
                   <a:srgbClr val="8B1A1A"/>
                 </a:solidFill>
               </a:rPr>
-              <a:t>2.248</a:t>
+              <a:t>2.241</a:t>
             </a:r>
           </a:p>
         </p:txBody>
@@ -4074,7 +4074,7 @@
                   <a:srgbClr val="8B1A1A"/>
                 </a:solidFill>
               </a:rPr>
-              <a:t>+5.4%</a:t>
+              <a:t>+5.1%</a:t>
             </a:r>
           </a:p>
         </p:txBody>
@@ -4241,7 +4241,7 @@
             <a:avLst/>
           </a:prstGeom>
           <a:solidFill>
-            <a:srgbClr val="F5F6F8"/>
+            <a:srgbClr val="FFEBEB"/>
           </a:solidFill>
           <a:ln w="9525">
             <a:solidFill>
@@ -4297,7 +4297,7 @@
             <a:r>
               <a:rPr sz="1100" b="0" i="0">
                 <a:solidFill>
-                  <a:srgbClr val="1A1A2E"/>
+                  <a:srgbClr val="8B1A1A"/>
                 </a:solidFill>
               </a:rPr>
               <a:t>KMM weighted</a:t>
@@ -4331,10 +4331,10 @@
             <a:r>
               <a:rPr sz="1100" b="0" i="0">
                 <a:solidFill>
-                  <a:srgbClr val="1A1A2E"/>
-                </a:solidFill>
-              </a:rPr>
-              <a:t>2.035</a:t>
+                  <a:srgbClr val="8B1A1A"/>
+                </a:solidFill>
+              </a:rPr>
+              <a:t>2.261</a:t>
             </a:r>
           </a:p>
         </p:txBody>
@@ -4365,10 +4365,10 @@
             <a:r>
               <a:rPr sz="1100" b="0" i="0">
                 <a:solidFill>
-                  <a:srgbClr val="1A1A2E"/>
-                </a:solidFill>
-              </a:rPr>
-              <a:t>−4.6%</a:t>
+                  <a:srgbClr val="8B1A1A"/>
+                </a:solidFill>
+              </a:rPr>
+              <a:t>+6.0%</a:t>
             </a:r>
           </a:p>
         </p:txBody>
@@ -4447,7 +4447,7 @@
                   <a:srgbClr val="1A1A2E"/>
                 </a:solidFill>
               </a:rPr>
-              <a:t>DRST (τ=0.30)</a:t>
+              <a:t>DRST (best)</a:t>
             </a:r>
           </a:p>
         </p:txBody>
@@ -4481,7 +4481,7 @@
                   <a:srgbClr val="1A1A2E"/>
                 </a:solidFill>
               </a:rPr>
-              <a:t>2.019</a:t>
+              <a:t>2.127</a:t>
             </a:r>
           </a:p>
         </p:txBody>
@@ -4515,7 +4515,7 @@
                   <a:srgbClr val="1A1A2E"/>
                 </a:solidFill>
               </a:rPr>
-              <a:t>−5.3%</a:t>
+              <a:t>~0%</a:t>
             </a:r>
           </a:p>
         </p:txBody>
@@ -11513,7 +11513,7 @@
                   <a:srgbClr val="FFFFFF"/>
                 </a:solidFill>
               </a:rPr>
-              <a:t>Published Literature (≤2019)</a:t>
+              <a:t>Published Literature Data (≤2019)</a:t>
             </a:r>
           </a:p>
         </p:txBody>
@@ -13959,7 +13959,7 @@
                   <a:srgbClr val="1A1A2E"/>
                 </a:solidFill>
               </a:rPr>
-              <a:t>•  Training fold = 4/5 of our data + any literature</a:t>
+              <a:t>•  Training fold = 4/5 of lab data + any literature</a:t>
             </a:r>
           </a:p>
         </p:txBody>
@@ -13993,7 +13993,7 @@
                   <a:srgbClr val="1A1A2E"/>
                 </a:solidFill>
               </a:rPr>
-              <a:t>•  Validation fold = 1/5 of our data only</a:t>
+              <a:t>•  Validation fold = 1/5 of lab data only</a:t>
             </a:r>
           </a:p>
         </p:txBody>
@@ -14354,7 +14354,7 @@
                   <a:srgbClr val="0F1E42"/>
                 </a:solidFill>
               </a:rPr>
-              <a:t>5-fold split (our data, n=89,074)</a:t>
+              <a:t>5-fold split (lab data, n=89,074)</a:t>
             </a:r>
           </a:p>
         </p:txBody>
@@ -15330,7 +15330,7 @@
                   <a:srgbClr val="1A1A2E"/>
                 </a:solidFill>
               </a:rPr>
-              <a:t>Baseline (our data only)</a:t>
+              <a:t>Baseline (lab data only)</a:t>
             </a:r>
           </a:p>
         </p:txBody>
@@ -15769,7 +15769,7 @@
                   <a:srgbClr val="8B1A1A"/>
                 </a:solidFill>
               </a:rPr>
-              <a:t>2.248</a:t>
+              <a:t>2.241</a:t>
             </a:r>
           </a:p>
         </p:txBody>
@@ -17199,7 +17199,7 @@
             <a:avLst/>
           </a:prstGeom>
           <a:solidFill>
-            <a:srgbClr val="E8F5E9"/>
+            <a:srgbClr val="F5F6F8"/>
           </a:solidFill>
           <a:ln w="9525">
             <a:solidFill>
@@ -17253,12 +17253,12 @@
           <a:p>
             <a:pPr algn="ctr"/>
             <a:r>
-              <a:rPr sz="1100" b="1" i="0">
-                <a:solidFill>
-                  <a:srgbClr val="1B5E20"/>
-                </a:solidFill>
-              </a:rPr>
-              <a:t>τ = 0.30</a:t>
+              <a:rPr sz="1100" b="0" i="0">
+                <a:solidFill>
+                  <a:srgbClr val="1A1A2E"/>
+                </a:solidFill>
+              </a:rPr>
+              <a:t>best τ</a:t>
             </a:r>
           </a:p>
         </p:txBody>
@@ -17287,12 +17287,12 @@
           <a:p>
             <a:pPr algn="ctr"/>
             <a:r>
-              <a:rPr sz="1100" b="1" i="0">
-                <a:solidFill>
-                  <a:srgbClr val="1B5E20"/>
-                </a:solidFill>
-              </a:rPr>
-              <a:t>782 kept</a:t>
+              <a:rPr sz="1100" b="0" i="0">
+                <a:solidFill>
+                  <a:srgbClr val="1A1A2E"/>
+                </a:solidFill>
+              </a:rPr>
+              <a:t>~200 kept</a:t>
             </a:r>
           </a:p>
         </p:txBody>
@@ -17321,12 +17321,12 @@
           <a:p>
             <a:pPr algn="ctr"/>
             <a:r>
-              <a:rPr sz="1100" b="1" i="0">
-                <a:solidFill>
-                  <a:srgbClr val="1B5E20"/>
-                </a:solidFill>
-              </a:rPr>
-              <a:t>2.019</a:t>
+              <a:rPr sz="1100" b="0" i="0">
+                <a:solidFill>
+                  <a:srgbClr val="1A1A2E"/>
+                </a:solidFill>
+              </a:rPr>
+              <a:t>2.127</a:t>
             </a:r>
           </a:p>
         </p:txBody>
@@ -18117,7 +18117,7 @@
                   <a:srgbClr val="50596E"/>
                 </a:solidFill>
               </a:rPr>
-              <a:t>KMM picks weights so the weighted literature cloud matches our data cloud. Samples inside our chemistry earn weight; those outside fade to zero.</a:t>
+              <a:t>KMM picks weights so the weighted literature cloud matches lab data cloud. Samples inside our chemistry earn weight; those outside fade to zero.</a:t>
             </a:r>
           </a:p>
         </p:txBody>
@@ -18264,7 +18264,7 @@
                   <a:srgbClr val="1A1A2E"/>
                 </a:solidFill>
               </a:rPr>
-              <a:t>2.035</a:t>
+              <a:t>2.261</a:t>
             </a:r>
           </a:p>
         </p:txBody>
@@ -18377,7 +18377,7 @@
                   <a:srgbClr val="1A1A2E"/>
                 </a:solidFill>
               </a:rPr>
-              <a:t>−4.6%</a:t>
+              <a:t>+6.0% (worse)</a:t>
             </a:r>
           </a:p>
         </p:txBody>

--- a/ocm_presentation.pptx
+++ b/ocm_presentation.pptx
@@ -3613,7 +3613,7 @@
                   <a:srgbClr val="FFFFFF"/>
                 </a:solidFill>
               </a:rPr>
-              <a:t>Results — All Five Methods at a Glance</a:t>
+              <a:t>Results — The Same Models Under Two Protocols</a:t>
             </a:r>
           </a:p>
         </p:txBody>
@@ -3731,7 +3731,7 @@
       </p:sp>
       <p:pic>
         <p:nvPicPr>
-          <p:cNvPr id="8" name="Picture 7" descr="fig_walkthrough_results.png"/>
+          <p:cNvPr id="8" name="Picture 7" descr="fig_protocol_comparison.png"/>
           <p:cNvPicPr>
             <a:picLocks noChangeAspect="1"/>
           </p:cNvPicPr>
@@ -3746,7 +3746,7 @@
         <p:spPr>
           <a:xfrm>
             <a:off x="274320" y="1143000"/>
-            <a:ext cx="7589520" cy="3329145"/>
+            <a:ext cx="7589520" cy="2739296"/>
           </a:xfrm>
           <a:prstGeom prst="rect">
             <a:avLst/>
@@ -3779,10 +3779,10 @@
             <a:r>
               <a:rPr sz="1400" b="1" i="0">
                 <a:solidFill>
-                  <a:srgbClr val="0F1E42"/>
-                </a:solidFill>
-              </a:rPr>
-              <a:t>Cross-validation (lab data)</a:t>
+                  <a:srgbClr val="8B1A1A"/>
+                </a:solidFill>
+              </a:rPr>
+              <a:t>Row-level CV — HISTORICAL, leaked</a:t>
             </a:r>
           </a:p>
         </p:txBody>
@@ -3941,6 +3941,773 @@
         <p:spPr>
           <a:xfrm>
             <a:off x="8046720" y="1965960"/>
+            <a:ext cx="3840480" cy="365760"/>
+          </a:xfrm>
+          <a:prstGeom prst="rect">
+            <a:avLst/>
+          </a:prstGeom>
+          <a:solidFill>
+            <a:srgbClr val="F5F6F8"/>
+          </a:solidFill>
+          <a:ln w="9525">
+            <a:solidFill>
+              <a:srgbClr val="D0D5DF"/>
+            </a:solidFill>
+          </a:ln>
+        </p:spPr>
+        <p:style>
+          <a:lnRef idx="1">
+            <a:schemeClr val="accent1"/>
+          </a:lnRef>
+          <a:fillRef idx="3">
+            <a:schemeClr val="accent1"/>
+          </a:fillRef>
+          <a:effectRef idx="2">
+            <a:schemeClr val="accent1"/>
+          </a:effectRef>
+          <a:fontRef idx="minor">
+            <a:schemeClr val="lt1"/>
+          </a:fontRef>
+        </p:style>
+        <p:txBody>
+          <a:bodyPr rtlCol="0" anchor="ctr"/>
+          <a:lstStyle/>
+          <a:p>
+            <a:pPr algn="ctr"/>
+          </a:p>
+        </p:txBody>
+      </p:sp>
+      <p:sp>
+        <p:nvSpPr>
+          <p:cNvPr id="15" name="TextBox 14"/>
+          <p:cNvSpPr txBox="1"/>
+          <p:nvPr/>
+        </p:nvSpPr>
+        <p:spPr>
+          <a:xfrm>
+            <a:off x="8138160" y="2002536"/>
+            <a:ext cx="1691640" cy="310896"/>
+          </a:xfrm>
+          <a:prstGeom prst="rect">
+            <a:avLst/>
+          </a:prstGeom>
+          <a:noFill/>
+        </p:spPr>
+        <p:txBody>
+          <a:bodyPr wrap="square">
+            <a:spAutoFit/>
+          </a:bodyPr>
+          <a:lstStyle/>
+          <a:p>
+            <a:pPr algn="l"/>
+            <a:r>
+              <a:rPr sz="1100" b="0" i="0">
+                <a:solidFill>
+                  <a:srgbClr val="1A1A2E"/>
+                </a:solidFill>
+              </a:rPr>
+              <a:t>Baseline</a:t>
+            </a:r>
+          </a:p>
+        </p:txBody>
+      </p:sp>
+      <p:sp>
+        <p:nvSpPr>
+          <p:cNvPr id="16" name="TextBox 15"/>
+          <p:cNvSpPr txBox="1"/>
+          <p:nvPr/>
+        </p:nvSpPr>
+        <p:spPr>
+          <a:xfrm>
+            <a:off x="9875520" y="2002536"/>
+            <a:ext cx="914400" cy="310896"/>
+          </a:xfrm>
+          <a:prstGeom prst="rect">
+            <a:avLst/>
+          </a:prstGeom>
+          <a:noFill/>
+        </p:spPr>
+        <p:txBody>
+          <a:bodyPr wrap="square">
+            <a:spAutoFit/>
+          </a:bodyPr>
+          <a:lstStyle/>
+          <a:p>
+            <a:pPr algn="ctr"/>
+            <a:r>
+              <a:rPr sz="1100" b="0" i="0">
+                <a:solidFill>
+                  <a:srgbClr val="1A1A2E"/>
+                </a:solidFill>
+              </a:rPr>
+              <a:t>2.1184</a:t>
+            </a:r>
+          </a:p>
+        </p:txBody>
+      </p:sp>
+      <p:sp>
+        <p:nvSpPr>
+          <p:cNvPr id="17" name="TextBox 16"/>
+          <p:cNvSpPr txBox="1"/>
+          <p:nvPr/>
+        </p:nvSpPr>
+        <p:spPr>
+          <a:xfrm>
+            <a:off x="10881360" y="2002536"/>
+            <a:ext cx="1005840" cy="310896"/>
+          </a:xfrm>
+          <a:prstGeom prst="rect">
+            <a:avLst/>
+          </a:prstGeom>
+          <a:noFill/>
+        </p:spPr>
+        <p:txBody>
+          <a:bodyPr wrap="square">
+            <a:spAutoFit/>
+          </a:bodyPr>
+          <a:lstStyle/>
+          <a:p>
+            <a:pPr algn="ctr"/>
+            <a:r>
+              <a:rPr sz="1100" b="0" i="0">
+                <a:solidFill>
+                  <a:srgbClr val="1A1A2E"/>
+                </a:solidFill>
+              </a:rPr>
+              <a:t>—</a:t>
+            </a:r>
+          </a:p>
+        </p:txBody>
+      </p:sp>
+      <p:sp>
+        <p:nvSpPr>
+          <p:cNvPr id="18" name="Rectangle 17"/>
+          <p:cNvSpPr/>
+          <p:nvPr/>
+        </p:nvSpPr>
+        <p:spPr>
+          <a:xfrm>
+            <a:off x="8046720" y="2331720"/>
+            <a:ext cx="3840480" cy="365760"/>
+          </a:xfrm>
+          <a:prstGeom prst="rect">
+            <a:avLst/>
+          </a:prstGeom>
+          <a:solidFill>
+            <a:srgbClr val="E8F5E9"/>
+          </a:solidFill>
+          <a:ln w="9525">
+            <a:solidFill>
+              <a:srgbClr val="D0D5DF"/>
+            </a:solidFill>
+          </a:ln>
+        </p:spPr>
+        <p:style>
+          <a:lnRef idx="1">
+            <a:schemeClr val="accent1"/>
+          </a:lnRef>
+          <a:fillRef idx="3">
+            <a:schemeClr val="accent1"/>
+          </a:fillRef>
+          <a:effectRef idx="2">
+            <a:schemeClr val="accent1"/>
+          </a:effectRef>
+          <a:fontRef idx="minor">
+            <a:schemeClr val="lt1"/>
+          </a:fontRef>
+        </p:style>
+        <p:txBody>
+          <a:bodyPr rtlCol="0" anchor="ctr"/>
+          <a:lstStyle/>
+          <a:p>
+            <a:pPr algn="ctr"/>
+          </a:p>
+        </p:txBody>
+      </p:sp>
+      <p:sp>
+        <p:nvSpPr>
+          <p:cNvPr id="19" name="TextBox 18"/>
+          <p:cNvSpPr txBox="1"/>
+          <p:nvPr/>
+        </p:nvSpPr>
+        <p:spPr>
+          <a:xfrm>
+            <a:off x="8138160" y="2368296"/>
+            <a:ext cx="1691640" cy="310896"/>
+          </a:xfrm>
+          <a:prstGeom prst="rect">
+            <a:avLst/>
+          </a:prstGeom>
+          <a:noFill/>
+        </p:spPr>
+        <p:txBody>
+          <a:bodyPr wrap="square">
+            <a:spAutoFit/>
+          </a:bodyPr>
+          <a:lstStyle/>
+          <a:p>
+            <a:pPr algn="l"/>
+            <a:r>
+              <a:rPr sz="1100" b="1" i="0">
+                <a:solidFill>
+                  <a:srgbClr val="1B5E20"/>
+                </a:solidFill>
+              </a:rPr>
+              <a:t>PFT (filtered)</a:t>
+            </a:r>
+          </a:p>
+        </p:txBody>
+      </p:sp>
+      <p:sp>
+        <p:nvSpPr>
+          <p:cNvPr id="20" name="TextBox 19"/>
+          <p:cNvSpPr txBox="1"/>
+          <p:nvPr/>
+        </p:nvSpPr>
+        <p:spPr>
+          <a:xfrm>
+            <a:off x="9875520" y="2368296"/>
+            <a:ext cx="914400" cy="310896"/>
+          </a:xfrm>
+          <a:prstGeom prst="rect">
+            <a:avLst/>
+          </a:prstGeom>
+          <a:noFill/>
+        </p:spPr>
+        <p:txBody>
+          <a:bodyPr wrap="square">
+            <a:spAutoFit/>
+          </a:bodyPr>
+          <a:lstStyle/>
+          <a:p>
+            <a:pPr algn="ctr"/>
+            <a:r>
+              <a:rPr sz="1100" b="1" i="0">
+                <a:solidFill>
+                  <a:srgbClr val="1B5E20"/>
+                </a:solidFill>
+              </a:rPr>
+              <a:t>1.9120</a:t>
+            </a:r>
+          </a:p>
+        </p:txBody>
+      </p:sp>
+      <p:sp>
+        <p:nvSpPr>
+          <p:cNvPr id="21" name="TextBox 20"/>
+          <p:cNvSpPr txBox="1"/>
+          <p:nvPr/>
+        </p:nvSpPr>
+        <p:spPr>
+          <a:xfrm>
+            <a:off x="10881360" y="2368296"/>
+            <a:ext cx="1005840" cy="310896"/>
+          </a:xfrm>
+          <a:prstGeom prst="rect">
+            <a:avLst/>
+          </a:prstGeom>
+          <a:noFill/>
+        </p:spPr>
+        <p:txBody>
+          <a:bodyPr wrap="square">
+            <a:spAutoFit/>
+          </a:bodyPr>
+          <a:lstStyle/>
+          <a:p>
+            <a:pPr algn="ctr"/>
+            <a:r>
+              <a:rPr sz="1100" b="1" i="0">
+                <a:solidFill>
+                  <a:srgbClr val="1B5E20"/>
+                </a:solidFill>
+              </a:rPr>
+              <a:t>−9.7%</a:t>
+            </a:r>
+          </a:p>
+        </p:txBody>
+      </p:sp>
+      <p:sp>
+        <p:nvSpPr>
+          <p:cNvPr id="22" name="Rectangle 21"/>
+          <p:cNvSpPr/>
+          <p:nvPr/>
+        </p:nvSpPr>
+        <p:spPr>
+          <a:xfrm>
+            <a:off x="8046720" y="2697480"/>
+            <a:ext cx="3840480" cy="365760"/>
+          </a:xfrm>
+          <a:prstGeom prst="rect">
+            <a:avLst/>
+          </a:prstGeom>
+          <a:solidFill>
+            <a:srgbClr val="F5F6F8"/>
+          </a:solidFill>
+          <a:ln w="9525">
+            <a:solidFill>
+              <a:srgbClr val="D0D5DF"/>
+            </a:solidFill>
+          </a:ln>
+        </p:spPr>
+        <p:style>
+          <a:lnRef idx="1">
+            <a:schemeClr val="accent1"/>
+          </a:lnRef>
+          <a:fillRef idx="3">
+            <a:schemeClr val="accent1"/>
+          </a:fillRef>
+          <a:effectRef idx="2">
+            <a:schemeClr val="accent1"/>
+          </a:effectRef>
+          <a:fontRef idx="minor">
+            <a:schemeClr val="lt1"/>
+          </a:fontRef>
+        </p:style>
+        <p:txBody>
+          <a:bodyPr rtlCol="0" anchor="ctr"/>
+          <a:lstStyle/>
+          <a:p>
+            <a:pPr algn="ctr"/>
+          </a:p>
+        </p:txBody>
+      </p:sp>
+      <p:sp>
+        <p:nvSpPr>
+          <p:cNvPr id="23" name="TextBox 22"/>
+          <p:cNvSpPr txBox="1"/>
+          <p:nvPr/>
+        </p:nvSpPr>
+        <p:spPr>
+          <a:xfrm>
+            <a:off x="8138160" y="2734056"/>
+            <a:ext cx="1691640" cy="310896"/>
+          </a:xfrm>
+          <a:prstGeom prst="rect">
+            <a:avLst/>
+          </a:prstGeom>
+          <a:noFill/>
+        </p:spPr>
+        <p:txBody>
+          <a:bodyPr wrap="square">
+            <a:spAutoFit/>
+          </a:bodyPr>
+          <a:lstStyle/>
+          <a:p>
+            <a:pPr algn="l"/>
+            <a:r>
+              <a:rPr sz="1100" b="0" i="0">
+                <a:solidFill>
+                  <a:srgbClr val="1A1A2E"/>
+                </a:solidFill>
+              </a:rPr>
+              <a:t>PFT (all lit.)</a:t>
+            </a:r>
+          </a:p>
+        </p:txBody>
+      </p:sp>
+      <p:sp>
+        <p:nvSpPr>
+          <p:cNvPr id="24" name="TextBox 23"/>
+          <p:cNvSpPr txBox="1"/>
+          <p:nvPr/>
+        </p:nvSpPr>
+        <p:spPr>
+          <a:xfrm>
+            <a:off x="9875520" y="2734056"/>
+            <a:ext cx="914400" cy="310896"/>
+          </a:xfrm>
+          <a:prstGeom prst="rect">
+            <a:avLst/>
+          </a:prstGeom>
+          <a:noFill/>
+        </p:spPr>
+        <p:txBody>
+          <a:bodyPr wrap="square">
+            <a:spAutoFit/>
+          </a:bodyPr>
+          <a:lstStyle/>
+          <a:p>
+            <a:pPr algn="ctr"/>
+            <a:r>
+              <a:rPr sz="1100" b="0" i="0">
+                <a:solidFill>
+                  <a:srgbClr val="1A1A2E"/>
+                </a:solidFill>
+              </a:rPr>
+              <a:t>1.9194</a:t>
+            </a:r>
+          </a:p>
+        </p:txBody>
+      </p:sp>
+      <p:sp>
+        <p:nvSpPr>
+          <p:cNvPr id="25" name="TextBox 24"/>
+          <p:cNvSpPr txBox="1"/>
+          <p:nvPr/>
+        </p:nvSpPr>
+        <p:spPr>
+          <a:xfrm>
+            <a:off x="10881360" y="2734056"/>
+            <a:ext cx="1005840" cy="310896"/>
+          </a:xfrm>
+          <a:prstGeom prst="rect">
+            <a:avLst/>
+          </a:prstGeom>
+          <a:noFill/>
+        </p:spPr>
+        <p:txBody>
+          <a:bodyPr wrap="square">
+            <a:spAutoFit/>
+          </a:bodyPr>
+          <a:lstStyle/>
+          <a:p>
+            <a:pPr algn="ctr"/>
+            <a:r>
+              <a:rPr sz="1100" b="0" i="0">
+                <a:solidFill>
+                  <a:srgbClr val="1A1A2E"/>
+                </a:solidFill>
+              </a:rPr>
+              <a:t>−9.4%</a:t>
+            </a:r>
+          </a:p>
+        </p:txBody>
+      </p:sp>
+      <p:sp>
+        <p:nvSpPr>
+          <p:cNvPr id="26" name="TextBox 25"/>
+          <p:cNvSpPr txBox="1"/>
+          <p:nvPr/>
+        </p:nvSpPr>
+        <p:spPr>
+          <a:xfrm>
+            <a:off x="8046720" y="3611880"/>
+            <a:ext cx="3840480" cy="365760"/>
+          </a:xfrm>
+          <a:prstGeom prst="rect">
+            <a:avLst/>
+          </a:prstGeom>
+          <a:noFill/>
+        </p:spPr>
+        <p:txBody>
+          <a:bodyPr wrap="square">
+            <a:spAutoFit/>
+          </a:bodyPr>
+          <a:lstStyle/>
+          <a:p>
+            <a:pPr algn="l"/>
+            <a:r>
+              <a:rPr sz="1400" b="1" i="0">
+                <a:solidFill>
+                  <a:srgbClr val="1B5E20"/>
+                </a:solidFill>
+              </a:rPr>
+              <a:t>Catalyst-grouped CV — DEFAULT</a:t>
+            </a:r>
+          </a:p>
+        </p:txBody>
+      </p:sp>
+      <p:sp>
+        <p:nvSpPr>
+          <p:cNvPr id="27" name="Rectangle 26"/>
+          <p:cNvSpPr/>
+          <p:nvPr/>
+        </p:nvSpPr>
+        <p:spPr>
+          <a:xfrm>
+            <a:off x="8046720" y="4023360"/>
+            <a:ext cx="3840480" cy="365760"/>
+          </a:xfrm>
+          <a:prstGeom prst="rect">
+            <a:avLst/>
+          </a:prstGeom>
+          <a:solidFill>
+            <a:srgbClr val="0F1E42"/>
+          </a:solidFill>
+          <a:ln>
+            <a:noFill/>
+          </a:ln>
+        </p:spPr>
+        <p:style>
+          <a:lnRef idx="1">
+            <a:schemeClr val="accent1"/>
+          </a:lnRef>
+          <a:fillRef idx="3">
+            <a:schemeClr val="accent1"/>
+          </a:fillRef>
+          <a:effectRef idx="2">
+            <a:schemeClr val="accent1"/>
+          </a:effectRef>
+          <a:fontRef idx="minor">
+            <a:schemeClr val="lt1"/>
+          </a:fontRef>
+        </p:style>
+        <p:txBody>
+          <a:bodyPr rtlCol="0" anchor="ctr"/>
+          <a:lstStyle/>
+          <a:p>
+            <a:pPr algn="ctr"/>
+          </a:p>
+        </p:txBody>
+      </p:sp>
+      <p:sp>
+        <p:nvSpPr>
+          <p:cNvPr id="28" name="TextBox 27"/>
+          <p:cNvSpPr txBox="1"/>
+          <p:nvPr/>
+        </p:nvSpPr>
+        <p:spPr>
+          <a:xfrm>
+            <a:off x="8138160" y="4050791"/>
+            <a:ext cx="1691640" cy="310896"/>
+          </a:xfrm>
+          <a:prstGeom prst="rect">
+            <a:avLst/>
+          </a:prstGeom>
+          <a:noFill/>
+        </p:spPr>
+        <p:txBody>
+          <a:bodyPr wrap="square">
+            <a:spAutoFit/>
+          </a:bodyPr>
+          <a:lstStyle/>
+          <a:p>
+            <a:pPr algn="l"/>
+            <a:r>
+              <a:rPr sz="1100" b="1" i="0">
+                <a:solidFill>
+                  <a:srgbClr val="FFFFFF"/>
+                </a:solidFill>
+              </a:rPr>
+              <a:t>Method</a:t>
+            </a:r>
+          </a:p>
+        </p:txBody>
+      </p:sp>
+      <p:sp>
+        <p:nvSpPr>
+          <p:cNvPr id="29" name="TextBox 28"/>
+          <p:cNvSpPr txBox="1"/>
+          <p:nvPr/>
+        </p:nvSpPr>
+        <p:spPr>
+          <a:xfrm>
+            <a:off x="9875520" y="4050791"/>
+            <a:ext cx="914400" cy="310896"/>
+          </a:xfrm>
+          <a:prstGeom prst="rect">
+            <a:avLst/>
+          </a:prstGeom>
+          <a:noFill/>
+        </p:spPr>
+        <p:txBody>
+          <a:bodyPr wrap="square">
+            <a:spAutoFit/>
+          </a:bodyPr>
+          <a:lstStyle/>
+          <a:p>
+            <a:pPr algn="l"/>
+            <a:r>
+              <a:rPr sz="1100" b="1" i="0">
+                <a:solidFill>
+                  <a:srgbClr val="FFFFFF"/>
+                </a:solidFill>
+              </a:rPr>
+              <a:t>RMSE</a:t>
+            </a:r>
+          </a:p>
+        </p:txBody>
+      </p:sp>
+      <p:sp>
+        <p:nvSpPr>
+          <p:cNvPr id="30" name="TextBox 29"/>
+          <p:cNvSpPr txBox="1"/>
+          <p:nvPr/>
+        </p:nvSpPr>
+        <p:spPr>
+          <a:xfrm>
+            <a:off x="10881360" y="4050791"/>
+            <a:ext cx="1005840" cy="310896"/>
+          </a:xfrm>
+          <a:prstGeom prst="rect">
+            <a:avLst/>
+          </a:prstGeom>
+          <a:noFill/>
+        </p:spPr>
+        <p:txBody>
+          <a:bodyPr wrap="square">
+            <a:spAutoFit/>
+          </a:bodyPr>
+          <a:lstStyle/>
+          <a:p>
+            <a:pPr algn="l"/>
+            <a:r>
+              <a:rPr sz="1100" b="1" i="0">
+                <a:solidFill>
+                  <a:srgbClr val="FFFFFF"/>
+                </a:solidFill>
+              </a:rPr>
+              <a:t>Δ</a:t>
+            </a:r>
+          </a:p>
+        </p:txBody>
+      </p:sp>
+      <p:sp>
+        <p:nvSpPr>
+          <p:cNvPr id="31" name="Rectangle 30"/>
+          <p:cNvSpPr/>
+          <p:nvPr/>
+        </p:nvSpPr>
+        <p:spPr>
+          <a:xfrm>
+            <a:off x="8046720" y="4389120"/>
+            <a:ext cx="3840480" cy="365760"/>
+          </a:xfrm>
+          <a:prstGeom prst="rect">
+            <a:avLst/>
+          </a:prstGeom>
+          <a:solidFill>
+            <a:srgbClr val="F5F6F8"/>
+          </a:solidFill>
+          <a:ln w="9525">
+            <a:solidFill>
+              <a:srgbClr val="D0D5DF"/>
+            </a:solidFill>
+          </a:ln>
+        </p:spPr>
+        <p:style>
+          <a:lnRef idx="1">
+            <a:schemeClr val="accent1"/>
+          </a:lnRef>
+          <a:fillRef idx="3">
+            <a:schemeClr val="accent1"/>
+          </a:fillRef>
+          <a:effectRef idx="2">
+            <a:schemeClr val="accent1"/>
+          </a:effectRef>
+          <a:fontRef idx="minor">
+            <a:schemeClr val="lt1"/>
+          </a:fontRef>
+        </p:style>
+        <p:txBody>
+          <a:bodyPr rtlCol="0" anchor="ctr"/>
+          <a:lstStyle/>
+          <a:p>
+            <a:pPr algn="ctr"/>
+          </a:p>
+        </p:txBody>
+      </p:sp>
+      <p:sp>
+        <p:nvSpPr>
+          <p:cNvPr id="32" name="TextBox 31"/>
+          <p:cNvSpPr txBox="1"/>
+          <p:nvPr/>
+        </p:nvSpPr>
+        <p:spPr>
+          <a:xfrm>
+            <a:off x="8138160" y="4425696"/>
+            <a:ext cx="1691640" cy="310896"/>
+          </a:xfrm>
+          <a:prstGeom prst="rect">
+            <a:avLst/>
+          </a:prstGeom>
+          <a:noFill/>
+        </p:spPr>
+        <p:txBody>
+          <a:bodyPr wrap="square">
+            <a:spAutoFit/>
+          </a:bodyPr>
+          <a:lstStyle/>
+          <a:p>
+            <a:pPr algn="l"/>
+            <a:r>
+              <a:rPr sz="1100" b="0" i="0">
+                <a:solidFill>
+                  <a:srgbClr val="1A1A2E"/>
+                </a:solidFill>
+              </a:rPr>
+              <a:t>Baseline</a:t>
+            </a:r>
+          </a:p>
+        </p:txBody>
+      </p:sp>
+      <p:sp>
+        <p:nvSpPr>
+          <p:cNvPr id="33" name="TextBox 32"/>
+          <p:cNvSpPr txBox="1"/>
+          <p:nvPr/>
+        </p:nvSpPr>
+        <p:spPr>
+          <a:xfrm>
+            <a:off x="9875520" y="4425696"/>
+            <a:ext cx="914400" cy="310896"/>
+          </a:xfrm>
+          <a:prstGeom prst="rect">
+            <a:avLst/>
+          </a:prstGeom>
+          <a:noFill/>
+        </p:spPr>
+        <p:txBody>
+          <a:bodyPr wrap="square">
+            <a:spAutoFit/>
+          </a:bodyPr>
+          <a:lstStyle/>
+          <a:p>
+            <a:pPr algn="ctr"/>
+            <a:r>
+              <a:rPr sz="1100" b="0" i="0">
+                <a:solidFill>
+                  <a:srgbClr val="1A1A2E"/>
+                </a:solidFill>
+              </a:rPr>
+              <a:t>2.9425</a:t>
+            </a:r>
+          </a:p>
+        </p:txBody>
+      </p:sp>
+      <p:sp>
+        <p:nvSpPr>
+          <p:cNvPr id="34" name="TextBox 33"/>
+          <p:cNvSpPr txBox="1"/>
+          <p:nvPr/>
+        </p:nvSpPr>
+        <p:spPr>
+          <a:xfrm>
+            <a:off x="10881360" y="4425696"/>
+            <a:ext cx="1005840" cy="310896"/>
+          </a:xfrm>
+          <a:prstGeom prst="rect">
+            <a:avLst/>
+          </a:prstGeom>
+          <a:noFill/>
+        </p:spPr>
+        <p:txBody>
+          <a:bodyPr wrap="square">
+            <a:spAutoFit/>
+          </a:bodyPr>
+          <a:lstStyle/>
+          <a:p>
+            <a:pPr algn="ctr"/>
+            <a:r>
+              <a:rPr sz="1100" b="0" i="0">
+                <a:solidFill>
+                  <a:srgbClr val="1A1A2E"/>
+                </a:solidFill>
+              </a:rPr>
+              <a:t>—</a:t>
+            </a:r>
+          </a:p>
+        </p:txBody>
+      </p:sp>
+      <p:sp>
+        <p:nvSpPr>
+          <p:cNvPr id="35" name="Rectangle 34"/>
+          <p:cNvSpPr/>
+          <p:nvPr/>
+        </p:nvSpPr>
+        <p:spPr>
+          <a:xfrm>
+            <a:off x="8046720" y="4754880"/>
             <a:ext cx="3840480" cy="365760"/>
           </a:xfrm>
           <a:prstGeom prst="rect">
@@ -3979,13 +4746,13 @@
       </p:sp>
       <p:sp>
         <p:nvSpPr>
-          <p:cNvPr id="15" name="TextBox 14"/>
-          <p:cNvSpPr txBox="1"/>
-          <p:nvPr/>
-        </p:nvSpPr>
-        <p:spPr>
-          <a:xfrm>
-            <a:off x="8138160" y="2002536"/>
+          <p:cNvPr id="36" name="TextBox 35"/>
+          <p:cNvSpPr txBox="1"/>
+          <p:nvPr/>
+        </p:nvSpPr>
+        <p:spPr>
+          <a:xfrm>
+            <a:off x="8138160" y="4791456"/>
             <a:ext cx="1691640" cy="310896"/>
           </a:xfrm>
           <a:prstGeom prst="rect">
@@ -4006,20 +4773,20 @@
                   <a:srgbClr val="8B1A1A"/>
                 </a:solidFill>
               </a:rPr>
-              <a:t>Naive merge</a:t>
-            </a:r>
-          </a:p>
-        </p:txBody>
-      </p:sp>
-      <p:sp>
-        <p:nvSpPr>
-          <p:cNvPr id="16" name="TextBox 15"/>
-          <p:cNvSpPr txBox="1"/>
-          <p:nvPr/>
-        </p:nvSpPr>
-        <p:spPr>
-          <a:xfrm>
-            <a:off x="9875520" y="2002536"/>
+              <a:t>PFT (filtered)</a:t>
+            </a:r>
+          </a:p>
+        </p:txBody>
+      </p:sp>
+      <p:sp>
+        <p:nvSpPr>
+          <p:cNvPr id="37" name="TextBox 36"/>
+          <p:cNvSpPr txBox="1"/>
+          <p:nvPr/>
+        </p:nvSpPr>
+        <p:spPr>
+          <a:xfrm>
+            <a:off x="9875520" y="4791456"/>
             <a:ext cx="914400" cy="310896"/>
           </a:xfrm>
           <a:prstGeom prst="rect">
@@ -4040,20 +4807,20 @@
                   <a:srgbClr val="8B1A1A"/>
                 </a:solidFill>
               </a:rPr>
-              <a:t>2.241</a:t>
-            </a:r>
-          </a:p>
-        </p:txBody>
-      </p:sp>
-      <p:sp>
-        <p:nvSpPr>
-          <p:cNvPr id="17" name="TextBox 16"/>
-          <p:cNvSpPr txBox="1"/>
-          <p:nvPr/>
-        </p:nvSpPr>
-        <p:spPr>
-          <a:xfrm>
-            <a:off x="10881360" y="2002536"/>
+              <a:t>2.9955</a:t>
+            </a:r>
+          </a:p>
+        </p:txBody>
+      </p:sp>
+      <p:sp>
+        <p:nvSpPr>
+          <p:cNvPr id="38" name="TextBox 37"/>
+          <p:cNvSpPr txBox="1"/>
+          <p:nvPr/>
+        </p:nvSpPr>
+        <p:spPr>
+          <a:xfrm>
+            <a:off x="10881360" y="4791456"/>
             <a:ext cx="1005840" cy="310896"/>
           </a:xfrm>
           <a:prstGeom prst="rect">
@@ -4074,167 +4841,20 @@
                   <a:srgbClr val="8B1A1A"/>
                 </a:solidFill>
               </a:rPr>
-              <a:t>+5.1%</a:t>
-            </a:r>
-          </a:p>
-        </p:txBody>
-      </p:sp>
-      <p:sp>
-        <p:nvSpPr>
-          <p:cNvPr id="18" name="Rectangle 17"/>
+              <a:t>+1.8%</a:t>
+            </a:r>
+          </a:p>
+        </p:txBody>
+      </p:sp>
+      <p:sp>
+        <p:nvSpPr>
+          <p:cNvPr id="39" name="Rectangle 38"/>
           <p:cNvSpPr/>
           <p:nvPr/>
         </p:nvSpPr>
         <p:spPr>
           <a:xfrm>
-            <a:off x="8046720" y="2331720"/>
-            <a:ext cx="3840480" cy="365760"/>
-          </a:xfrm>
-          <a:prstGeom prst="rect">
-            <a:avLst/>
-          </a:prstGeom>
-          <a:solidFill>
-            <a:srgbClr val="FFFFFF"/>
-          </a:solidFill>
-          <a:ln w="9525">
-            <a:solidFill>
-              <a:srgbClr val="D0D5DF"/>
-            </a:solidFill>
-          </a:ln>
-        </p:spPr>
-        <p:style>
-          <a:lnRef idx="1">
-            <a:schemeClr val="accent1"/>
-          </a:lnRef>
-          <a:fillRef idx="3">
-            <a:schemeClr val="accent1"/>
-          </a:fillRef>
-          <a:effectRef idx="2">
-            <a:schemeClr val="accent1"/>
-          </a:effectRef>
-          <a:fontRef idx="minor">
-            <a:schemeClr val="lt1"/>
-          </a:fontRef>
-        </p:style>
-        <p:txBody>
-          <a:bodyPr rtlCol="0" anchor="ctr"/>
-          <a:lstStyle/>
-          <a:p>
-            <a:pPr algn="ctr"/>
-          </a:p>
-        </p:txBody>
-      </p:sp>
-      <p:sp>
-        <p:nvSpPr>
-          <p:cNvPr id="19" name="TextBox 18"/>
-          <p:cNvSpPr txBox="1"/>
-          <p:nvPr/>
-        </p:nvSpPr>
-        <p:spPr>
-          <a:xfrm>
-            <a:off x="8138160" y="2368296"/>
-            <a:ext cx="1691640" cy="310896"/>
-          </a:xfrm>
-          <a:prstGeom prst="rect">
-            <a:avLst/>
-          </a:prstGeom>
-          <a:noFill/>
-        </p:spPr>
-        <p:txBody>
-          <a:bodyPr wrap="square">
-            <a:spAutoFit/>
-          </a:bodyPr>
-          <a:lstStyle/>
-          <a:p>
-            <a:pPr algn="l"/>
-            <a:r>
-              <a:rPr sz="1100" b="0" i="0">
-                <a:solidFill>
-                  <a:srgbClr val="1A1A2E"/>
-                </a:solidFill>
-              </a:rPr>
-              <a:t>Baseline</a:t>
-            </a:r>
-          </a:p>
-        </p:txBody>
-      </p:sp>
-      <p:sp>
-        <p:nvSpPr>
-          <p:cNvPr id="20" name="TextBox 19"/>
-          <p:cNvSpPr txBox="1"/>
-          <p:nvPr/>
-        </p:nvSpPr>
-        <p:spPr>
-          <a:xfrm>
-            <a:off x="9875520" y="2368296"/>
-            <a:ext cx="914400" cy="310896"/>
-          </a:xfrm>
-          <a:prstGeom prst="rect">
-            <a:avLst/>
-          </a:prstGeom>
-          <a:noFill/>
-        </p:spPr>
-        <p:txBody>
-          <a:bodyPr wrap="square">
-            <a:spAutoFit/>
-          </a:bodyPr>
-          <a:lstStyle/>
-          <a:p>
-            <a:pPr algn="ctr"/>
-            <a:r>
-              <a:rPr sz="1100" b="0" i="0">
-                <a:solidFill>
-                  <a:srgbClr val="1A1A2E"/>
-                </a:solidFill>
-              </a:rPr>
-              <a:t>2.133</a:t>
-            </a:r>
-          </a:p>
-        </p:txBody>
-      </p:sp>
-      <p:sp>
-        <p:nvSpPr>
-          <p:cNvPr id="21" name="TextBox 20"/>
-          <p:cNvSpPr txBox="1"/>
-          <p:nvPr/>
-        </p:nvSpPr>
-        <p:spPr>
-          <a:xfrm>
-            <a:off x="10881360" y="2368296"/>
-            <a:ext cx="1005840" cy="310896"/>
-          </a:xfrm>
-          <a:prstGeom prst="rect">
-            <a:avLst/>
-          </a:prstGeom>
-          <a:noFill/>
-        </p:spPr>
-        <p:txBody>
-          <a:bodyPr wrap="square">
-            <a:spAutoFit/>
-          </a:bodyPr>
-          <a:lstStyle/>
-          <a:p>
-            <a:pPr algn="ctr"/>
-            <a:r>
-              <a:rPr sz="1100" b="0" i="0">
-                <a:solidFill>
-                  <a:srgbClr val="1A1A2E"/>
-                </a:solidFill>
-              </a:rPr>
-              <a:t>—</a:t>
-            </a:r>
-          </a:p>
-        </p:txBody>
-      </p:sp>
-      <p:sp>
-        <p:nvSpPr>
-          <p:cNvPr id="22" name="Rectangle 21"/>
-          <p:cNvSpPr/>
-          <p:nvPr/>
-        </p:nvSpPr>
-        <p:spPr>
-          <a:xfrm>
-            <a:off x="8046720" y="2697480"/>
+            <a:off x="8046720" y="5120640"/>
             <a:ext cx="3840480" cy="365760"/>
           </a:xfrm>
           <a:prstGeom prst="rect">
@@ -4273,13 +4893,13 @@
       </p:sp>
       <p:sp>
         <p:nvSpPr>
-          <p:cNvPr id="23" name="TextBox 22"/>
-          <p:cNvSpPr txBox="1"/>
-          <p:nvPr/>
-        </p:nvSpPr>
-        <p:spPr>
-          <a:xfrm>
-            <a:off x="8138160" y="2734056"/>
+          <p:cNvPr id="40" name="TextBox 39"/>
+          <p:cNvSpPr txBox="1"/>
+          <p:nvPr/>
+        </p:nvSpPr>
+        <p:spPr>
+          <a:xfrm>
+            <a:off x="8138160" y="5157216"/>
             <a:ext cx="1691640" cy="310896"/>
           </a:xfrm>
           <a:prstGeom prst="rect">
@@ -4300,20 +4920,20 @@
                   <a:srgbClr val="8B1A1A"/>
                 </a:solidFill>
               </a:rPr>
-              <a:t>KMM weighted</a:t>
-            </a:r>
-          </a:p>
-        </p:txBody>
-      </p:sp>
-      <p:sp>
-        <p:nvSpPr>
-          <p:cNvPr id="24" name="TextBox 23"/>
-          <p:cNvSpPr txBox="1"/>
-          <p:nvPr/>
-        </p:nvSpPr>
-        <p:spPr>
-          <a:xfrm>
-            <a:off x="9875520" y="2734056"/>
+              <a:t>PFT (all lit.)</a:t>
+            </a:r>
+          </a:p>
+        </p:txBody>
+      </p:sp>
+      <p:sp>
+        <p:nvSpPr>
+          <p:cNvPr id="41" name="TextBox 40"/>
+          <p:cNvSpPr txBox="1"/>
+          <p:nvPr/>
+        </p:nvSpPr>
+        <p:spPr>
+          <a:xfrm>
+            <a:off x="9875520" y="5157216"/>
             <a:ext cx="914400" cy="310896"/>
           </a:xfrm>
           <a:prstGeom prst="rect">
@@ -4334,20 +4954,20 @@
                   <a:srgbClr val="8B1A1A"/>
                 </a:solidFill>
               </a:rPr>
-              <a:t>2.261</a:t>
-            </a:r>
-          </a:p>
-        </p:txBody>
-      </p:sp>
-      <p:sp>
-        <p:nvSpPr>
-          <p:cNvPr id="25" name="TextBox 24"/>
-          <p:cNvSpPr txBox="1"/>
-          <p:nvPr/>
-        </p:nvSpPr>
-        <p:spPr>
-          <a:xfrm>
-            <a:off x="10881360" y="2734056"/>
+              <a:t>2.9817</a:t>
+            </a:r>
+          </a:p>
+        </p:txBody>
+      </p:sp>
+      <p:sp>
+        <p:nvSpPr>
+          <p:cNvPr id="42" name="TextBox 41"/>
+          <p:cNvSpPr txBox="1"/>
+          <p:nvPr/>
+        </p:nvSpPr>
+        <p:spPr>
+          <a:xfrm>
+            <a:off x="10881360" y="5157216"/>
             <a:ext cx="1005840" cy="310896"/>
           </a:xfrm>
           <a:prstGeom prst="rect">
@@ -4368,31 +4988,31 @@
                   <a:srgbClr val="8B1A1A"/>
                 </a:solidFill>
               </a:rPr>
-              <a:t>+6.0%</a:t>
-            </a:r>
-          </a:p>
-        </p:txBody>
-      </p:sp>
-      <p:sp>
-        <p:nvSpPr>
-          <p:cNvPr id="26" name="Rectangle 25"/>
+              <a:t>+1.3%</a:t>
+            </a:r>
+          </a:p>
+        </p:txBody>
+      </p:sp>
+      <p:sp>
+        <p:nvSpPr>
+          <p:cNvPr id="43" name="Rectangle 42"/>
           <p:cNvSpPr/>
           <p:nvPr/>
         </p:nvSpPr>
         <p:spPr>
           <a:xfrm>
-            <a:off x="8046720" y="3063240"/>
-            <a:ext cx="3840480" cy="365760"/>
+            <a:off x="8046720" y="5577840"/>
+            <a:ext cx="3840480" cy="868680"/>
           </a:xfrm>
           <a:prstGeom prst="rect">
             <a:avLst/>
           </a:prstGeom>
           <a:solidFill>
-            <a:srgbClr val="FFFFFF"/>
+            <a:srgbClr val="FFF4E5"/>
           </a:solidFill>
           <a:ln w="9525">
             <a:solidFill>
-              <a:srgbClr val="D0D5DF"/>
+              <a:srgbClr val="E67E22"/>
             </a:solidFill>
           </a:ln>
         </p:spPr>
@@ -4420,654 +5040,34 @@
       </p:sp>
       <p:sp>
         <p:nvSpPr>
-          <p:cNvPr id="27" name="TextBox 26"/>
-          <p:cNvSpPr txBox="1"/>
-          <p:nvPr/>
-        </p:nvSpPr>
-        <p:spPr>
-          <a:xfrm>
-            <a:off x="8138160" y="3099816"/>
-            <a:ext cx="1691640" cy="310896"/>
-          </a:xfrm>
-          <a:prstGeom prst="rect">
-            <a:avLst/>
-          </a:prstGeom>
-          <a:noFill/>
-        </p:spPr>
-        <p:txBody>
-          <a:bodyPr wrap="square">
-            <a:spAutoFit/>
-          </a:bodyPr>
-          <a:lstStyle/>
-          <a:p>
-            <a:pPr algn="l"/>
-            <a:r>
-              <a:rPr sz="1100" b="0" i="0">
-                <a:solidFill>
-                  <a:srgbClr val="1A1A2E"/>
-                </a:solidFill>
-              </a:rPr>
-              <a:t>DRST (best)</a:t>
-            </a:r>
-          </a:p>
-        </p:txBody>
-      </p:sp>
-      <p:sp>
-        <p:nvSpPr>
-          <p:cNvPr id="28" name="TextBox 27"/>
-          <p:cNvSpPr txBox="1"/>
-          <p:nvPr/>
-        </p:nvSpPr>
-        <p:spPr>
-          <a:xfrm>
-            <a:off x="9875520" y="3099816"/>
-            <a:ext cx="914400" cy="310896"/>
-          </a:xfrm>
-          <a:prstGeom prst="rect">
-            <a:avLst/>
-          </a:prstGeom>
-          <a:noFill/>
-        </p:spPr>
-        <p:txBody>
-          <a:bodyPr wrap="square">
-            <a:spAutoFit/>
-          </a:bodyPr>
-          <a:lstStyle/>
-          <a:p>
-            <a:pPr algn="ctr"/>
-            <a:r>
-              <a:rPr sz="1100" b="0" i="0">
-                <a:solidFill>
-                  <a:srgbClr val="1A1A2E"/>
-                </a:solidFill>
-              </a:rPr>
-              <a:t>2.127</a:t>
-            </a:r>
-          </a:p>
-        </p:txBody>
-      </p:sp>
-      <p:sp>
-        <p:nvSpPr>
-          <p:cNvPr id="29" name="TextBox 28"/>
-          <p:cNvSpPr txBox="1"/>
-          <p:nvPr/>
-        </p:nvSpPr>
-        <p:spPr>
-          <a:xfrm>
-            <a:off x="10881360" y="3099816"/>
-            <a:ext cx="1005840" cy="310896"/>
-          </a:xfrm>
-          <a:prstGeom prst="rect">
-            <a:avLst/>
-          </a:prstGeom>
-          <a:noFill/>
-        </p:spPr>
-        <p:txBody>
-          <a:bodyPr wrap="square">
-            <a:spAutoFit/>
-          </a:bodyPr>
-          <a:lstStyle/>
-          <a:p>
-            <a:pPr algn="ctr"/>
-            <a:r>
-              <a:rPr sz="1100" b="0" i="0">
-                <a:solidFill>
-                  <a:srgbClr val="1A1A2E"/>
-                </a:solidFill>
-              </a:rPr>
-              <a:t>~0%</a:t>
-            </a:r>
-          </a:p>
-        </p:txBody>
-      </p:sp>
-      <p:sp>
-        <p:nvSpPr>
-          <p:cNvPr id="30" name="Rectangle 29"/>
-          <p:cNvSpPr/>
-          <p:nvPr/>
-        </p:nvSpPr>
-        <p:spPr>
-          <a:xfrm>
-            <a:off x="8046720" y="3429000"/>
-            <a:ext cx="3840480" cy="365760"/>
-          </a:xfrm>
-          <a:prstGeom prst="rect">
-            <a:avLst/>
-          </a:prstGeom>
-          <a:solidFill>
-            <a:srgbClr val="E8F5E9"/>
-          </a:solidFill>
-          <a:ln w="9525">
-            <a:solidFill>
-              <a:srgbClr val="D0D5DF"/>
-            </a:solidFill>
-          </a:ln>
-        </p:spPr>
-        <p:style>
-          <a:lnRef idx="1">
-            <a:schemeClr val="accent1"/>
-          </a:lnRef>
-          <a:fillRef idx="3">
-            <a:schemeClr val="accent1"/>
-          </a:fillRef>
-          <a:effectRef idx="2">
-            <a:schemeClr val="accent1"/>
-          </a:effectRef>
-          <a:fontRef idx="minor">
-            <a:schemeClr val="lt1"/>
-          </a:fontRef>
-        </p:style>
-        <p:txBody>
-          <a:bodyPr rtlCol="0" anchor="ctr"/>
-          <a:lstStyle/>
-          <a:p>
-            <a:pPr algn="ctr"/>
-          </a:p>
-        </p:txBody>
-      </p:sp>
-      <p:sp>
-        <p:nvSpPr>
-          <p:cNvPr id="31" name="TextBox 30"/>
-          <p:cNvSpPr txBox="1"/>
-          <p:nvPr/>
-        </p:nvSpPr>
-        <p:spPr>
-          <a:xfrm>
-            <a:off x="8138160" y="3465576"/>
-            <a:ext cx="1691640" cy="310896"/>
-          </a:xfrm>
-          <a:prstGeom prst="rect">
-            <a:avLst/>
-          </a:prstGeom>
-          <a:noFill/>
-        </p:spPr>
-        <p:txBody>
-          <a:bodyPr wrap="square">
-            <a:spAutoFit/>
-          </a:bodyPr>
-          <a:lstStyle/>
-          <a:p>
-            <a:pPr algn="l"/>
-            <a:r>
-              <a:rPr sz="1100" b="1" i="0">
-                <a:solidFill>
-                  <a:srgbClr val="1B5E20"/>
-                </a:solidFill>
-              </a:rPr>
-              <a:t>Prior FT  ★</a:t>
-            </a:r>
-          </a:p>
-        </p:txBody>
-      </p:sp>
-      <p:sp>
-        <p:nvSpPr>
-          <p:cNvPr id="32" name="TextBox 31"/>
-          <p:cNvSpPr txBox="1"/>
-          <p:nvPr/>
-        </p:nvSpPr>
-        <p:spPr>
-          <a:xfrm>
-            <a:off x="9875520" y="3465576"/>
-            <a:ext cx="914400" cy="310896"/>
-          </a:xfrm>
-          <a:prstGeom prst="rect">
-            <a:avLst/>
-          </a:prstGeom>
-          <a:noFill/>
-        </p:spPr>
-        <p:txBody>
-          <a:bodyPr wrap="square">
-            <a:spAutoFit/>
-          </a:bodyPr>
-          <a:lstStyle/>
-          <a:p>
-            <a:pPr algn="ctr"/>
-            <a:r>
-              <a:rPr sz="1100" b="1" i="0">
-                <a:solidFill>
-                  <a:srgbClr val="1B5E20"/>
-                </a:solidFill>
-              </a:rPr>
-              <a:t>1.907</a:t>
-            </a:r>
-          </a:p>
-        </p:txBody>
-      </p:sp>
-      <p:sp>
-        <p:nvSpPr>
-          <p:cNvPr id="33" name="TextBox 32"/>
-          <p:cNvSpPr txBox="1"/>
-          <p:nvPr/>
-        </p:nvSpPr>
-        <p:spPr>
-          <a:xfrm>
-            <a:off x="10881360" y="3465576"/>
-            <a:ext cx="1005840" cy="310896"/>
-          </a:xfrm>
-          <a:prstGeom prst="rect">
-            <a:avLst/>
-          </a:prstGeom>
-          <a:noFill/>
-        </p:spPr>
-        <p:txBody>
-          <a:bodyPr wrap="square">
-            <a:spAutoFit/>
-          </a:bodyPr>
-          <a:lstStyle/>
-          <a:p>
-            <a:pPr algn="ctr"/>
-            <a:r>
-              <a:rPr sz="1100" b="1" i="0">
-                <a:solidFill>
-                  <a:srgbClr val="1B5E20"/>
-                </a:solidFill>
-              </a:rPr>
-              <a:t>−10.6%</a:t>
-            </a:r>
-          </a:p>
-        </p:txBody>
-      </p:sp>
-      <p:sp>
-        <p:nvSpPr>
-          <p:cNvPr id="34" name="TextBox 33"/>
-          <p:cNvSpPr txBox="1"/>
-          <p:nvPr/>
-        </p:nvSpPr>
-        <p:spPr>
-          <a:xfrm>
-            <a:off x="8046720" y="4114800"/>
-            <a:ext cx="3840480" cy="365760"/>
-          </a:xfrm>
-          <a:prstGeom prst="rect">
-            <a:avLst/>
-          </a:prstGeom>
-          <a:noFill/>
-        </p:spPr>
-        <p:txBody>
-          <a:bodyPr wrap="square">
-            <a:spAutoFit/>
-          </a:bodyPr>
-          <a:lstStyle/>
-          <a:p>
-            <a:pPr algn="l"/>
-            <a:r>
-              <a:rPr sz="1400" b="1" i="0">
-                <a:solidFill>
-                  <a:srgbClr val="0F1E42"/>
-                </a:solidFill>
-              </a:rPr>
-              <a:t>OOD — leak-free (unseen lit)</a:t>
-            </a:r>
-          </a:p>
-        </p:txBody>
-      </p:sp>
-      <p:sp>
-        <p:nvSpPr>
-          <p:cNvPr id="35" name="Rectangle 34"/>
-          <p:cNvSpPr/>
-          <p:nvPr/>
-        </p:nvSpPr>
-        <p:spPr>
-          <a:xfrm>
-            <a:off x="8046720" y="4526280"/>
-            <a:ext cx="3840480" cy="365760"/>
-          </a:xfrm>
-          <a:prstGeom prst="rect">
-            <a:avLst/>
-          </a:prstGeom>
-          <a:solidFill>
-            <a:srgbClr val="0F1E42"/>
-          </a:solidFill>
-          <a:ln>
-            <a:noFill/>
-          </a:ln>
-        </p:spPr>
-        <p:style>
-          <a:lnRef idx="1">
-            <a:schemeClr val="accent1"/>
-          </a:lnRef>
-          <a:fillRef idx="3">
-            <a:schemeClr val="accent1"/>
-          </a:fillRef>
-          <a:effectRef idx="2">
-            <a:schemeClr val="accent1"/>
-          </a:effectRef>
-          <a:fontRef idx="minor">
-            <a:schemeClr val="lt1"/>
-          </a:fontRef>
-        </p:style>
-        <p:txBody>
-          <a:bodyPr rtlCol="0" anchor="ctr"/>
-          <a:lstStyle/>
-          <a:p>
-            <a:pPr algn="ctr"/>
-          </a:p>
-        </p:txBody>
-      </p:sp>
-      <p:sp>
-        <p:nvSpPr>
-          <p:cNvPr id="36" name="TextBox 35"/>
-          <p:cNvSpPr txBox="1"/>
-          <p:nvPr/>
-        </p:nvSpPr>
-        <p:spPr>
-          <a:xfrm>
-            <a:off x="8138160" y="4553712"/>
-            <a:ext cx="2194560" cy="310896"/>
-          </a:xfrm>
-          <a:prstGeom prst="rect">
-            <a:avLst/>
-          </a:prstGeom>
-          <a:noFill/>
-        </p:spPr>
-        <p:txBody>
-          <a:bodyPr wrap="square">
-            <a:spAutoFit/>
-          </a:bodyPr>
-          <a:lstStyle/>
-          <a:p>
-            <a:pPr algn="l"/>
-            <a:r>
-              <a:rPr sz="1100" b="1" i="0">
-                <a:solidFill>
-                  <a:srgbClr val="FFFFFF"/>
-                </a:solidFill>
-              </a:rPr>
-              <a:t>Method</a:t>
-            </a:r>
-          </a:p>
-        </p:txBody>
-      </p:sp>
-      <p:sp>
-        <p:nvSpPr>
-          <p:cNvPr id="37" name="TextBox 36"/>
-          <p:cNvSpPr txBox="1"/>
-          <p:nvPr/>
-        </p:nvSpPr>
-        <p:spPr>
-          <a:xfrm>
-            <a:off x="10332720" y="4553712"/>
-            <a:ext cx="1508760" cy="310896"/>
-          </a:xfrm>
-          <a:prstGeom prst="rect">
-            <a:avLst/>
-          </a:prstGeom>
-          <a:noFill/>
-        </p:spPr>
-        <p:txBody>
-          <a:bodyPr wrap="square">
-            <a:spAutoFit/>
-          </a:bodyPr>
-          <a:lstStyle/>
-          <a:p>
-            <a:pPr algn="ctr"/>
-            <a:r>
-              <a:rPr sz="1100" b="1" i="0">
-                <a:solidFill>
-                  <a:srgbClr val="FFFFFF"/>
-                </a:solidFill>
-              </a:rPr>
-              <a:t>OOD RMSE</a:t>
-            </a:r>
-          </a:p>
-        </p:txBody>
-      </p:sp>
-      <p:sp>
-        <p:nvSpPr>
-          <p:cNvPr id="38" name="Rectangle 37"/>
-          <p:cNvSpPr/>
-          <p:nvPr/>
-        </p:nvSpPr>
-        <p:spPr>
-          <a:xfrm>
-            <a:off x="8046720" y="4892040"/>
-            <a:ext cx="3840480" cy="384048"/>
-          </a:xfrm>
-          <a:prstGeom prst="rect">
-            <a:avLst/>
-          </a:prstGeom>
-          <a:solidFill>
-            <a:srgbClr val="F5F6F8"/>
-          </a:solidFill>
-          <a:ln w="9525">
-            <a:solidFill>
-              <a:srgbClr val="D0D5DF"/>
-            </a:solidFill>
-          </a:ln>
-        </p:spPr>
-        <p:style>
-          <a:lnRef idx="1">
-            <a:schemeClr val="accent1"/>
-          </a:lnRef>
-          <a:fillRef idx="3">
-            <a:schemeClr val="accent1"/>
-          </a:fillRef>
-          <a:effectRef idx="2">
-            <a:schemeClr val="accent1"/>
-          </a:effectRef>
-          <a:fontRef idx="minor">
-            <a:schemeClr val="lt1"/>
-          </a:fontRef>
-        </p:style>
-        <p:txBody>
-          <a:bodyPr rtlCol="0" anchor="ctr"/>
-          <a:lstStyle/>
-          <a:p>
-            <a:pPr algn="ctr"/>
-          </a:p>
-        </p:txBody>
-      </p:sp>
-      <p:sp>
-        <p:nvSpPr>
-          <p:cNvPr id="39" name="TextBox 38"/>
-          <p:cNvSpPr txBox="1"/>
-          <p:nvPr/>
-        </p:nvSpPr>
-        <p:spPr>
-          <a:xfrm>
-            <a:off x="8138160" y="4937760"/>
-            <a:ext cx="2194560" cy="310896"/>
-          </a:xfrm>
-          <a:prstGeom prst="rect">
-            <a:avLst/>
-          </a:prstGeom>
-          <a:noFill/>
-        </p:spPr>
-        <p:txBody>
-          <a:bodyPr wrap="square">
-            <a:spAutoFit/>
-          </a:bodyPr>
-          <a:lstStyle/>
-          <a:p>
-            <a:pPr algn="l"/>
-            <a:r>
-              <a:rPr sz="1100" b="0" i="0">
-                <a:solidFill>
-                  <a:srgbClr val="1A1A2E"/>
-                </a:solidFill>
-              </a:rPr>
-              <a:t>Baseline</a:t>
-            </a:r>
-          </a:p>
-        </p:txBody>
-      </p:sp>
-      <p:sp>
-        <p:nvSpPr>
-          <p:cNvPr id="40" name="TextBox 39"/>
-          <p:cNvSpPr txBox="1"/>
-          <p:nvPr/>
-        </p:nvSpPr>
-        <p:spPr>
-          <a:xfrm>
-            <a:off x="10332720" y="4937760"/>
-            <a:ext cx="1508760" cy="310896"/>
-          </a:xfrm>
-          <a:prstGeom prst="rect">
-            <a:avLst/>
-          </a:prstGeom>
-          <a:noFill/>
-        </p:spPr>
-        <p:txBody>
-          <a:bodyPr wrap="square">
-            <a:spAutoFit/>
-          </a:bodyPr>
-          <a:lstStyle/>
-          <a:p>
-            <a:pPr algn="ctr"/>
-            <a:r>
-              <a:rPr sz="1100" b="0" i="0">
-                <a:solidFill>
-                  <a:srgbClr val="1A1A2E"/>
-                </a:solidFill>
-              </a:rPr>
-              <a:t>6.53</a:t>
-            </a:r>
-          </a:p>
-        </p:txBody>
-      </p:sp>
-      <p:sp>
-        <p:nvSpPr>
-          <p:cNvPr id="41" name="Rectangle 40"/>
-          <p:cNvSpPr/>
-          <p:nvPr/>
-        </p:nvSpPr>
-        <p:spPr>
-          <a:xfrm>
-            <a:off x="8046720" y="5276088"/>
-            <a:ext cx="3840480" cy="384048"/>
-          </a:xfrm>
-          <a:prstGeom prst="rect">
-            <a:avLst/>
-          </a:prstGeom>
-          <a:solidFill>
-            <a:srgbClr val="F5F6F8"/>
-          </a:solidFill>
-          <a:ln w="9525">
-            <a:solidFill>
-              <a:srgbClr val="D0D5DF"/>
-            </a:solidFill>
-          </a:ln>
-        </p:spPr>
-        <p:style>
-          <a:lnRef idx="1">
-            <a:schemeClr val="accent1"/>
-          </a:lnRef>
-          <a:fillRef idx="3">
-            <a:schemeClr val="accent1"/>
-          </a:fillRef>
-          <a:effectRef idx="2">
-            <a:schemeClr val="accent1"/>
-          </a:effectRef>
-          <a:fontRef idx="minor">
-            <a:schemeClr val="lt1"/>
-          </a:fontRef>
-        </p:style>
-        <p:txBody>
-          <a:bodyPr rtlCol="0" anchor="ctr"/>
-          <a:lstStyle/>
-          <a:p>
-            <a:pPr algn="ctr"/>
-          </a:p>
-        </p:txBody>
-      </p:sp>
-      <p:sp>
-        <p:nvSpPr>
-          <p:cNvPr id="42" name="TextBox 41"/>
-          <p:cNvSpPr txBox="1"/>
-          <p:nvPr/>
-        </p:nvSpPr>
-        <p:spPr>
-          <a:xfrm>
-            <a:off x="8138160" y="5321808"/>
-            <a:ext cx="2194560" cy="310896"/>
-          </a:xfrm>
-          <a:prstGeom prst="rect">
-            <a:avLst/>
-          </a:prstGeom>
-          <a:noFill/>
-        </p:spPr>
-        <p:txBody>
-          <a:bodyPr wrap="square">
-            <a:spAutoFit/>
-          </a:bodyPr>
-          <a:lstStyle/>
-          <a:p>
-            <a:pPr algn="l"/>
-            <a:r>
-              <a:rPr sz="1100" b="0" i="0">
-                <a:solidFill>
-                  <a:srgbClr val="1A1A2E"/>
-                </a:solidFill>
-              </a:rPr>
-              <a:t>Prior FT</a:t>
-            </a:r>
-          </a:p>
-        </p:txBody>
-      </p:sp>
-      <p:sp>
-        <p:nvSpPr>
-          <p:cNvPr id="43" name="TextBox 42"/>
-          <p:cNvSpPr txBox="1"/>
-          <p:nvPr/>
-        </p:nvSpPr>
-        <p:spPr>
-          <a:xfrm>
-            <a:off x="10332720" y="5321808"/>
-            <a:ext cx="1508760" cy="310896"/>
-          </a:xfrm>
-          <a:prstGeom prst="rect">
-            <a:avLst/>
-          </a:prstGeom>
-          <a:noFill/>
-        </p:spPr>
-        <p:txBody>
-          <a:bodyPr wrap="square">
-            <a:spAutoFit/>
-          </a:bodyPr>
-          <a:lstStyle/>
-          <a:p>
-            <a:pPr algn="ctr"/>
-            <a:r>
-              <a:rPr sz="1100" b="0" i="0">
-                <a:solidFill>
-                  <a:srgbClr val="1A1A2E"/>
-                </a:solidFill>
-              </a:rPr>
-              <a:t>6.77</a:t>
-            </a:r>
-          </a:p>
-        </p:txBody>
-      </p:sp>
-      <p:sp>
-        <p:nvSpPr>
           <p:cNvPr id="44" name="TextBox 43"/>
           <p:cNvSpPr txBox="1"/>
           <p:nvPr/>
         </p:nvSpPr>
         <p:spPr>
           <a:xfrm>
-            <a:off x="8046720" y="5715000"/>
-            <a:ext cx="3840480" cy="685800"/>
-          </a:xfrm>
-          <a:prstGeom prst="rect">
-            <a:avLst/>
-          </a:prstGeom>
-          <a:noFill/>
-        </p:spPr>
-        <p:txBody>
-          <a:bodyPr wrap="square">
-            <a:spAutoFit/>
-          </a:bodyPr>
-          <a:lstStyle/>
-          <a:p>
-            <a:pPr algn="l"/>
-            <a:r>
-              <a:rPr sz="900" b="0" i="1">
+            <a:off x="8156448" y="5650992"/>
+            <a:ext cx="3621024" cy="722376"/>
+          </a:xfrm>
+          <a:prstGeom prst="rect">
+            <a:avLst/>
+          </a:prstGeom>
+          <a:noFill/>
+        </p:spPr>
+        <p:txBody>
+          <a:bodyPr wrap="square">
+            <a:spAutoFit/>
+          </a:bodyPr>
+          <a:lstStyle/>
+          <a:p>
+            <a:pPr algn="l"/>
+            <a:r>
+              <a:rPr sz="1000" b="0" i="1">
                 <a:solidFill>
                   <a:srgbClr val="50596E"/>
                 </a:solidFill>
               </a:rPr>
-              <a:t>OOD gain is modest &amp; honest.  Earlier “3.60 (−45%)” was leakage (prior saw test rows).  QN trades OOD for in-dist accuracy — see Rigour slide.</a:t>
+              <a:t>Same models, same data, two protocols. The published −9.7% becomes +1.8% WORSE once a catalyst cannot appear in both train and test. The difference is leakage, not modelling.</a:t>
             </a:r>
           </a:p>
         </p:txBody>
@@ -7236,35 +7236,45 @@
                   <a:srgbClr val="0F1E42"/>
                 </a:solidFill>
               </a:rPr>
-              <a:t>Repeatable across 10 random seeds</a:t>
-            </a:r>
-          </a:p>
-        </p:txBody>
-      </p:sp>
-      <p:pic>
-        <p:nvPicPr>
-          <p:cNvPr id="9" name="Picture 8" descr="fig_repeated_runs.png"/>
-          <p:cNvPicPr>
-            <a:picLocks noChangeAspect="1"/>
-          </p:cNvPicPr>
-          <p:nvPr/>
-        </p:nvPicPr>
-        <p:blipFill>
-          <a:blip r:embed="rId2"/>
-          <a:stretch>
-            <a:fillRect/>
-          </a:stretch>
-        </p:blipFill>
-        <p:spPr>
-          <a:xfrm>
-            <a:off x="274320" y="1508760"/>
-            <a:ext cx="5852160" cy="2243328"/>
-          </a:xfrm>
-          <a:prstGeom prst="rect">
-            <a:avLst/>
-          </a:prstGeom>
-        </p:spPr>
-      </p:pic>
+              <a:t>The headline was coverage-inflated</a:t>
+            </a:r>
+          </a:p>
+        </p:txBody>
+      </p:sp>
+      <p:sp>
+        <p:nvSpPr>
+          <p:cNvPr id="9" name="TextBox 8"/>
+          <p:cNvSpPr txBox="1"/>
+          <p:nvPr/>
+        </p:nvSpPr>
+        <p:spPr>
+          <a:xfrm>
+            <a:off x="320040" y="1554480"/>
+            <a:ext cx="5760720" cy="429768"/>
+          </a:xfrm>
+          <a:prstGeom prst="rect">
+            <a:avLst/>
+          </a:prstGeom>
+          <a:noFill/>
+        </p:spPr>
+        <p:txBody>
+          <a:bodyPr wrap="square">
+            <a:spAutoFit/>
+          </a:bodyPr>
+          <a:lstStyle/>
+          <a:p>
+            <a:pPr algn="l"/>
+            <a:r>
+              <a:rPr sz="1100" b="0" i="0">
+                <a:solidFill>
+                  <a:srgbClr val="1A1A2E"/>
+                </a:solidFill>
+              </a:rPr>
+              <a:t>•  Cells run further contain better yields, so a score over all</a:t>
+            </a:r>
+          </a:p>
+        </p:txBody>
+      </p:sp>
       <p:sp>
         <p:nvSpPr>
           <p:cNvPr id="10" name="TextBox 9"/>
@@ -7273,8 +7283,8 @@
         </p:nvSpPr>
         <p:spPr>
           <a:xfrm>
-            <a:off x="274320" y="4160520"/>
-            <a:ext cx="5852160" cy="429768"/>
+            <a:off x="320040" y="1938528"/>
+            <a:ext cx="5760720" cy="429768"/>
           </a:xfrm>
           <a:prstGeom prst="rect">
             <a:avLst/>
@@ -7294,7 +7304,7 @@
                   <a:srgbClr val="1A1A2E"/>
                 </a:solidFill>
               </a:rPr>
-              <a:t>•  Baseline 2.121 ± 0.006  vs  PFT 1.909 ± 0.002</a:t>
+              <a:t>•  917 catalysts is partly a record of which runs were finished.</a:t>
             </a:r>
           </a:p>
         </p:txBody>
@@ -7307,8 +7317,8 @@
         </p:nvSpPr>
         <p:spPr>
           <a:xfrm>
-            <a:off x="274320" y="4544568"/>
-            <a:ext cx="5852160" cy="429768"/>
+            <a:off x="320040" y="2322576"/>
+            <a:ext cx="5760720" cy="429768"/>
           </a:xfrm>
           <a:prstGeom prst="rect">
             <a:avLst/>
@@ -7328,7 +7338,7 @@
                   <a:srgbClr val="1A1A2E"/>
                 </a:solidFill>
               </a:rPr>
-              <a:t>•  PFT wins 10 / 10 runs — curves never cross</a:t>
+              <a:t>•  All 917:        Spearman 0.767   enrichment 4.35×</a:t>
             </a:r>
           </a:p>
         </p:txBody>
@@ -7341,8 +7351,8 @@
         </p:nvSpPr>
         <p:spPr>
           <a:xfrm>
-            <a:off x="274320" y="4928616"/>
-            <a:ext cx="5852160" cy="429768"/>
+            <a:off x="320040" y="2706624"/>
+            <a:ext cx="5760720" cy="429768"/>
           </a:xfrm>
           <a:prstGeom prst="rect">
             <a:avLst/>
@@ -7362,7 +7372,7 @@
                   <a:srgbClr val="1A1A2E"/>
                 </a:solidFill>
               </a:rPr>
-              <a:t>•  Paired t  p = 3.9×10⁻¹⁵;  held-out 20%: 2.097 → 1.892</a:t>
+              <a:t>•  Equal effort (771):  Spearman 0.724   enrichment 3.77×</a:t>
             </a:r>
           </a:p>
         </p:txBody>
@@ -7370,6 +7380,108 @@
       <p:sp>
         <p:nvSpPr>
           <p:cNvPr id="13" name="TextBox 12"/>
+          <p:cNvSpPr txBox="1"/>
+          <p:nvPr/>
+        </p:nvSpPr>
+        <p:spPr>
+          <a:xfrm>
+            <a:off x="320040" y="3090672"/>
+            <a:ext cx="5760720" cy="429768"/>
+          </a:xfrm>
+          <a:prstGeom prst="rect">
+            <a:avLst/>
+          </a:prstGeom>
+          <a:noFill/>
+        </p:spPr>
+        <p:txBody>
+          <a:bodyPr wrap="square">
+            <a:spAutoFit/>
+          </a:bodyPr>
+          <a:lstStyle/>
+          <a:p>
+            <a:pPr algn="l"/>
+            <a:r>
+              <a:rPr sz="1100" b="0" i="0">
+                <a:solidFill>
+                  <a:srgbClr val="1A1A2E"/>
+                </a:solidFill>
+              </a:rPr>
+              <a:t>•  Coupling removed BY MEASUREMENT: ρ(n_rows, max) +0.293 → +0.003</a:t>
+            </a:r>
+          </a:p>
+        </p:txBody>
+      </p:sp>
+      <p:sp>
+        <p:nvSpPr>
+          <p:cNvPr id="14" name="TextBox 13"/>
+          <p:cNvSpPr txBox="1"/>
+          <p:nvPr/>
+        </p:nvSpPr>
+        <p:spPr>
+          <a:xfrm>
+            <a:off x="320040" y="3474720"/>
+            <a:ext cx="5760720" cy="429768"/>
+          </a:xfrm>
+          <a:prstGeom prst="rect">
+            <a:avLst/>
+          </a:prstGeom>
+          <a:noFill/>
+        </p:spPr>
+        <p:txBody>
+          <a:bodyPr wrap="square">
+            <a:spAutoFit/>
+          </a:bodyPr>
+          <a:lstStyle/>
+          <a:p>
+            <a:pPr algn="l"/>
+            <a:r>
+              <a:rPr sz="1100" b="0" i="0">
+                <a:solidFill>
+                  <a:srgbClr val="1A1A2E"/>
+                </a:solidFill>
+              </a:rPr>
+              <a:t>•  300 random 771-subsets give 0.767 [0.756, 0.780] — 0.724 sits</a:t>
+            </a:r>
+          </a:p>
+        </p:txBody>
+      </p:sp>
+      <p:sp>
+        <p:nvSpPr>
+          <p:cNvPr id="15" name="TextBox 14"/>
+          <p:cNvSpPr txBox="1"/>
+          <p:nvPr/>
+        </p:nvSpPr>
+        <p:spPr>
+          <a:xfrm>
+            <a:off x="320040" y="3858768"/>
+            <a:ext cx="5760720" cy="429768"/>
+          </a:xfrm>
+          <a:prstGeom prst="rect">
+            <a:avLst/>
+          </a:prstGeom>
+          <a:noFill/>
+        </p:spPr>
+        <p:txBody>
+          <a:bodyPr wrap="square">
+            <a:spAutoFit/>
+          </a:bodyPr>
+          <a:lstStyle/>
+          <a:p>
+            <a:pPr algn="l"/>
+            <a:r>
+              <a:rPr sz="1100" b="0" i="0">
+                <a:solidFill>
+                  <a:srgbClr val="1A1A2E"/>
+                </a:solidFill>
+              </a:rPr>
+              <a:t>•  below that interval, so the drop is real, not a smaller-sample effect.</a:t>
+            </a:r>
+          </a:p>
+        </p:txBody>
+      </p:sp>
+      <p:sp>
+        <p:nvSpPr>
+          <p:cNvPr id="16" name="TextBox 15"/>
           <p:cNvSpPr txBox="1"/>
           <p:nvPr/>
         </p:nvSpPr>
@@ -7396,55 +7508,235 @@
                   <a:srgbClr val="0F1E42"/>
                 </a:solidFill>
               </a:rPr>
-              <a:t>Quantile normalisation is a trade-off</a:t>
-            </a:r>
-          </a:p>
-        </p:txBody>
-      </p:sp>
-      <p:pic>
-        <p:nvPicPr>
-          <p:cNvPr id="14" name="Picture 13" descr="fig_qn_tradeoff.png"/>
-          <p:cNvPicPr>
-            <a:picLocks noChangeAspect="1"/>
-          </p:cNvPicPr>
-          <p:nvPr/>
-        </p:nvPicPr>
-        <p:blipFill>
-          <a:blip r:embed="rId3"/>
-          <a:stretch>
-            <a:fillRect/>
-          </a:stretch>
-        </p:blipFill>
-        <p:spPr>
-          <a:xfrm>
-            <a:off x="6309360" y="1508760"/>
-            <a:ext cx="5577840" cy="2231136"/>
-          </a:xfrm>
-          <a:prstGeom prst="rect">
-            <a:avLst/>
-          </a:prstGeom>
-        </p:spPr>
-      </p:pic>
-      <p:sp>
-        <p:nvSpPr>
-          <p:cNvPr id="15" name="Rectangle 14"/>
+              <a:t>The sharpest test we could devise</a:t>
+            </a:r>
+          </a:p>
+        </p:txBody>
+      </p:sp>
+      <p:sp>
+        <p:nvSpPr>
+          <p:cNvPr id="17" name="TextBox 16"/>
+          <p:cNvSpPr txBox="1"/>
+          <p:nvPr/>
+        </p:nvSpPr>
+        <p:spPr>
+          <a:xfrm>
+            <a:off x="6355080" y="1554480"/>
+            <a:ext cx="5486400" cy="429768"/>
+          </a:xfrm>
+          <a:prstGeom prst="rect">
+            <a:avLst/>
+          </a:prstGeom>
+          <a:noFill/>
+        </p:spPr>
+        <p:txBody>
+          <a:bodyPr wrap="square">
+            <a:spAutoFit/>
+          </a:bodyPr>
+          <a:lstStyle/>
+          <a:p>
+            <a:pPr algn="l"/>
+            <a:r>
+              <a:rPr sz="1100" b="0" i="0">
+                <a:solidFill>
+                  <a:srgbClr val="1A1A2E"/>
+                </a:solidFill>
+              </a:rPr>
+              <a:t>•  We retrained the model to predict HOW MANY measurements a</a:t>
+            </a:r>
+          </a:p>
+        </p:txBody>
+      </p:sp>
+      <p:sp>
+        <p:nvSpPr>
+          <p:cNvPr id="18" name="TextBox 17"/>
+          <p:cNvSpPr txBox="1"/>
+          <p:nvPr/>
+        </p:nvSpPr>
+        <p:spPr>
+          <a:xfrm>
+            <a:off x="6355080" y="1938528"/>
+            <a:ext cx="5486400" cy="429768"/>
+          </a:xfrm>
+          <a:prstGeom prst="rect">
+            <a:avLst/>
+          </a:prstGeom>
+          <a:noFill/>
+        </p:spPr>
+        <p:txBody>
+          <a:bodyPr wrap="square">
+            <a:spAutoFit/>
+          </a:bodyPr>
+          <a:lstStyle/>
+          <a:p>
+            <a:pPr algn="l"/>
+            <a:r>
+              <a:rPr sz="1100" b="0" i="0">
+                <a:solidFill>
+                  <a:srgbClr val="1A1A2E"/>
+                </a:solidFill>
+              </a:rPr>
+              <a:t>•  catalyst received. It never sees a yield.</a:t>
+            </a:r>
+          </a:p>
+        </p:txBody>
+      </p:sp>
+      <p:sp>
+        <p:nvSpPr>
+          <p:cNvPr id="19" name="TextBox 18"/>
+          <p:cNvSpPr txBox="1"/>
+          <p:nvPr/>
+        </p:nvSpPr>
+        <p:spPr>
+          <a:xfrm>
+            <a:off x="6355080" y="2322576"/>
+            <a:ext cx="5486400" cy="429768"/>
+          </a:xfrm>
+          <a:prstGeom prst="rect">
+            <a:avLst/>
+          </a:prstGeom>
+          <a:noFill/>
+        </p:spPr>
+        <p:txBody>
+          <a:bodyPr wrap="square">
+            <a:spAutoFit/>
+          </a:bodyPr>
+          <a:lstStyle/>
+          <a:p>
+            <a:pPr algn="l"/>
+            <a:r>
+              <a:rPr sz="1100" b="0" i="0">
+                <a:solidFill>
+                  <a:srgbClr val="1A1A2E"/>
+                </a:solidFill>
+              </a:rPr>
+              <a:t>•  That model reaches Spearman 0.400 against observed max yield…</a:t>
+            </a:r>
+          </a:p>
+        </p:txBody>
+      </p:sp>
+      <p:sp>
+        <p:nvSpPr>
+          <p:cNvPr id="20" name="TextBox 19"/>
+          <p:cNvSpPr txBox="1"/>
+          <p:nvPr/>
+        </p:nvSpPr>
+        <p:spPr>
+          <a:xfrm>
+            <a:off x="6355080" y="2706624"/>
+            <a:ext cx="5486400" cy="429768"/>
+          </a:xfrm>
+          <a:prstGeom prst="rect">
+            <a:avLst/>
+          </a:prstGeom>
+          <a:noFill/>
+        </p:spPr>
+        <p:txBody>
+          <a:bodyPr wrap="square">
+            <a:spAutoFit/>
+          </a:bodyPr>
+          <a:lstStyle/>
+          <a:p>
+            <a:pPr algn="l"/>
+            <a:r>
+              <a:rPr sz="1100" b="0" i="0">
+                <a:solidFill>
+                  <a:srgbClr val="1A1A2E"/>
+                </a:solidFill>
+              </a:rPr>
+              <a:t>•  …but its enrichment is 0.87× — no better than random.</a:t>
+            </a:r>
+          </a:p>
+        </p:txBody>
+      </p:sp>
+      <p:sp>
+        <p:nvSpPr>
+          <p:cNvPr id="21" name="TextBox 20"/>
+          <p:cNvSpPr txBox="1"/>
+          <p:nvPr/>
+        </p:nvSpPr>
+        <p:spPr>
+          <a:xfrm>
+            <a:off x="6355080" y="3090672"/>
+            <a:ext cx="5486400" cy="429768"/>
+          </a:xfrm>
+          <a:prstGeom prst="rect">
+            <a:avLst/>
+          </a:prstGeom>
+          <a:noFill/>
+        </p:spPr>
+        <p:txBody>
+          <a:bodyPr wrap="square">
+            <a:spAutoFit/>
+          </a:bodyPr>
+          <a:lstStyle/>
+          <a:p>
+            <a:pPr algn="l"/>
+            <a:r>
+              <a:rPr sz="1100" b="0" i="0">
+                <a:solidFill>
+                  <a:srgbClr val="1A1A2E"/>
+                </a:solidFill>
+              </a:rPr>
+              <a:t>•  Rank correlation is partly purchasable from experimental effort.</a:t>
+            </a:r>
+          </a:p>
+        </p:txBody>
+      </p:sp>
+      <p:sp>
+        <p:nvSpPr>
+          <p:cNvPr id="22" name="TextBox 21"/>
+          <p:cNvSpPr txBox="1"/>
+          <p:nvPr/>
+        </p:nvSpPr>
+        <p:spPr>
+          <a:xfrm>
+            <a:off x="6355080" y="3474720"/>
+            <a:ext cx="5486400" cy="429768"/>
+          </a:xfrm>
+          <a:prstGeom prst="rect">
+            <a:avLst/>
+          </a:prstGeom>
+          <a:noFill/>
+        </p:spPr>
+        <p:txBody>
+          <a:bodyPr wrap="square">
+            <a:spAutoFit/>
+          </a:bodyPr>
+          <a:lstStyle/>
+          <a:p>
+            <a:pPr algn="l"/>
+            <a:r>
+              <a:rPr sz="1100" b="0" i="0">
+                <a:solidFill>
+                  <a:srgbClr val="1A1A2E"/>
+                </a:solidFill>
+              </a:rPr>
+              <a:t>•  Enrichment is not. That is why enrichment is the primary metric.</a:t>
+            </a:r>
+          </a:p>
+        </p:txBody>
+      </p:sp>
+      <p:sp>
+        <p:nvSpPr>
+          <p:cNvPr id="23" name="Rectangle 22"/>
           <p:cNvSpPr/>
           <p:nvPr/>
         </p:nvSpPr>
         <p:spPr>
           <a:xfrm>
-            <a:off x="6309360" y="3977639"/>
-            <a:ext cx="5577840" cy="1280160"/>
+            <a:off x="320040" y="4709160"/>
+            <a:ext cx="11521440" cy="1371600"/>
           </a:xfrm>
           <a:prstGeom prst="rect">
             <a:avLst/>
           </a:prstGeom>
           <a:solidFill>
-            <a:srgbClr val="FFF4E5"/>
+            <a:srgbClr val="E8F5E9"/>
           </a:solidFill>
           <a:ln w="9525">
             <a:solidFill>
-              <a:srgbClr val="E67E22"/>
+              <a:srgbClr val="10B981"/>
             </a:solidFill>
           </a:ln>
         </p:spPr>
@@ -7472,34 +7764,34 @@
       </p:sp>
       <p:sp>
         <p:nvSpPr>
-          <p:cNvPr id="16" name="TextBox 15"/>
-          <p:cNvSpPr txBox="1"/>
-          <p:nvPr/>
-        </p:nvSpPr>
-        <p:spPr>
-          <a:xfrm>
-            <a:off x="6419088" y="4050791"/>
-            <a:ext cx="5358384" cy="1133856"/>
-          </a:xfrm>
-          <a:prstGeom prst="rect">
-            <a:avLst/>
-          </a:prstGeom>
-          <a:noFill/>
-        </p:spPr>
-        <p:txBody>
-          <a:bodyPr wrap="square">
-            <a:spAutoFit/>
-          </a:bodyPr>
-          <a:lstStyle/>
-          <a:p>
-            <a:pPr algn="l"/>
-            <a:r>
-              <a:rPr sz="1000" b="0" i="1">
-                <a:solidFill>
-                  <a:srgbClr val="50596E"/>
-                </a:solidFill>
-              </a:rPr>
-              <a:t>Honest correction: the earlier “OOD 6.53→3.60 (−45%)” was data leakage — the prior was trained on the OOD test rows. Leak-free OOD is ≈6.0–6.8 (near baseline). QN improves in-distribution accuracy but slightly worsens OOD.</a:t>
+          <p:cNvPr id="24" name="TextBox 23"/>
+          <p:cNvSpPr txBox="1"/>
+          <p:nvPr/>
+        </p:nvSpPr>
+        <p:spPr>
+          <a:xfrm>
+            <a:off x="429768" y="4782312"/>
+            <a:ext cx="11301984" cy="1225296"/>
+          </a:xfrm>
+          <a:prstGeom prst="rect">
+            <a:avLst/>
+          </a:prstGeom>
+          <a:noFill/>
+        </p:spPr>
+        <p:txBody>
+          <a:bodyPr wrap="square">
+            <a:spAutoFit/>
+          </a:bodyPr>
+          <a:lstStyle/>
+          <a:p>
+            <a:pPr algn="l"/>
+            <a:r>
+              <a:rPr sz="1100" b="0" i="1">
+                <a:solidFill>
+                  <a:srgbClr val="1B5E20"/>
+                </a:solidFill>
+              </a:rPr>
+              <a:t>And the open question is bounded: ranking catalysts by their observed FLOOR instead of their ceiling shares only 7 of the top 20, but a ceiling-trained model loses just 0.017 Spearman against floor ground truth — less than seed-averaging alone buys — and never drops below 4.02× enrichment. The answer changes the labels, not the decision.</a:t>
             </a:r>
           </a:p>
         </p:txBody>
@@ -9008,7 +9300,7 @@
                   <a:srgbClr val="1B5E20"/>
                 </a:solidFill>
               </a:rPr>
-              <a:t>Add GHSV, CH₄:O₂, pressure to the feature set</a:t>
+              <a:t>Ask JAIST for the reaction-condition columns</a:t>
             </a:r>
           </a:p>
         </p:txBody>
@@ -9042,7 +9334,7 @@
                   <a:srgbClr val="50596E"/>
                 </a:solidFill>
               </a:rPr>
-              <a:t>Fixes the Y&gt;15% ceiling and likely resolves much of the label shift too.</a:t>
+              <a:t>One email. Converts 19.9% of currently unreachable variance into modellable signal and turns 917 training examples back into 89,074.</a:t>
             </a:r>
           </a:p>
         </p:txBody>
@@ -9133,6 +9425,273 @@
         <p:spPr>
           <a:xfrm>
             <a:off x="365760" y="2834639"/>
+            <a:ext cx="5669280" cy="1417320"/>
+          </a:xfrm>
+          <a:prstGeom prst="rect">
+            <a:avLst/>
+          </a:prstGeom>
+          <a:solidFill>
+            <a:srgbClr val="E8F5E9"/>
+          </a:solidFill>
+          <a:ln w="9525">
+            <a:solidFill>
+              <a:srgbClr val="10B981"/>
+            </a:solidFill>
+          </a:ln>
+        </p:spPr>
+        <p:style>
+          <a:lnRef idx="1">
+            <a:schemeClr val="accent1"/>
+          </a:lnRef>
+          <a:fillRef idx="3">
+            <a:schemeClr val="accent1"/>
+          </a:fillRef>
+          <a:effectRef idx="2">
+            <a:schemeClr val="accent1"/>
+          </a:effectRef>
+          <a:fontRef idx="minor">
+            <a:schemeClr val="lt1"/>
+          </a:fontRef>
+        </p:style>
+        <p:txBody>
+          <a:bodyPr rtlCol="0" anchor="ctr"/>
+          <a:lstStyle/>
+          <a:p>
+            <a:pPr algn="ctr"/>
+          </a:p>
+        </p:txBody>
+      </p:sp>
+      <p:sp>
+        <p:nvSpPr>
+          <p:cNvPr id="16" name="Rectangle 15"/>
+          <p:cNvSpPr/>
+          <p:nvPr/>
+        </p:nvSpPr>
+        <p:spPr>
+          <a:xfrm>
+            <a:off x="457200" y="2926079"/>
+            <a:ext cx="329184" cy="329184"/>
+          </a:xfrm>
+          <a:prstGeom prst="rect">
+            <a:avLst/>
+          </a:prstGeom>
+          <a:solidFill>
+            <a:srgbClr val="10B981"/>
+          </a:solidFill>
+          <a:ln>
+            <a:noFill/>
+          </a:ln>
+        </p:spPr>
+        <p:style>
+          <a:lnRef idx="1">
+            <a:schemeClr val="accent1"/>
+          </a:lnRef>
+          <a:fillRef idx="3">
+            <a:schemeClr val="accent1"/>
+          </a:fillRef>
+          <a:effectRef idx="2">
+            <a:schemeClr val="accent1"/>
+          </a:effectRef>
+          <a:fontRef idx="minor">
+            <a:schemeClr val="lt1"/>
+          </a:fontRef>
+        </p:style>
+        <p:txBody>
+          <a:bodyPr rtlCol="0" anchor="ctr"/>
+          <a:lstStyle/>
+          <a:p>
+            <a:pPr algn="ctr"/>
+          </a:p>
+        </p:txBody>
+      </p:sp>
+      <p:sp>
+        <p:nvSpPr>
+          <p:cNvPr id="17" name="TextBox 16"/>
+          <p:cNvSpPr txBox="1"/>
+          <p:nvPr/>
+        </p:nvSpPr>
+        <p:spPr>
+          <a:xfrm>
+            <a:off x="502920" y="2944367"/>
+            <a:ext cx="237744" cy="292608"/>
+          </a:xfrm>
+          <a:prstGeom prst="rect">
+            <a:avLst/>
+          </a:prstGeom>
+          <a:noFill/>
+        </p:spPr>
+        <p:txBody>
+          <a:bodyPr wrap="square">
+            <a:spAutoFit/>
+          </a:bodyPr>
+          <a:lstStyle/>
+          <a:p>
+            <a:pPr algn="ctr"/>
+            <a:r>
+              <a:rPr sz="1400" b="1" i="0">
+                <a:solidFill>
+                  <a:srgbClr val="FFFFFF"/>
+                </a:solidFill>
+              </a:rPr>
+              <a:t>2</a:t>
+            </a:r>
+          </a:p>
+        </p:txBody>
+      </p:sp>
+      <p:sp>
+        <p:nvSpPr>
+          <p:cNvPr id="18" name="TextBox 17"/>
+          <p:cNvSpPr txBox="1"/>
+          <p:nvPr/>
+        </p:nvSpPr>
+        <p:spPr>
+          <a:xfrm>
+            <a:off x="868680" y="2926079"/>
+            <a:ext cx="5074920" cy="384048"/>
+          </a:xfrm>
+          <a:prstGeom prst="rect">
+            <a:avLst/>
+          </a:prstGeom>
+          <a:noFill/>
+        </p:spPr>
+        <p:txBody>
+          <a:bodyPr wrap="square">
+            <a:spAutoFit/>
+          </a:bodyPr>
+          <a:lstStyle/>
+          <a:p>
+            <a:pPr algn="l"/>
+            <a:r>
+              <a:rPr sz="1200" b="1" i="0">
+                <a:solidFill>
+                  <a:srgbClr val="1B5E20"/>
+                </a:solidFill>
+              </a:rPr>
+              <a:t>Ask whether the 27 slots are conditions or time-on-stream</a:t>
+            </a:r>
+          </a:p>
+        </p:txBody>
+      </p:sp>
+      <p:sp>
+        <p:nvSpPr>
+          <p:cNvPr id="19" name="TextBox 18"/>
+          <p:cNvSpPr txBox="1"/>
+          <p:nvPr/>
+        </p:nvSpPr>
+        <p:spPr>
+          <a:xfrm>
+            <a:off x="868680" y="3337559"/>
+            <a:ext cx="5074920" cy="777240"/>
+          </a:xfrm>
+          <a:prstGeom prst="rect">
+            <a:avLst/>
+          </a:prstGeom>
+          <a:noFill/>
+        </p:spPr>
+        <p:txBody>
+          <a:bodyPr wrap="square">
+            <a:spAutoFit/>
+          </a:bodyPr>
+          <a:lstStyle/>
+          <a:p>
+            <a:pPr algn="l"/>
+            <a:r>
+              <a:rPr sz="1000" b="0" i="0">
+                <a:solidFill>
+                  <a:srgbClr val="50596E"/>
+                </a:solidFill>
+              </a:rPr>
+              <a:t>Provably unanswerable from the file: every cell is stored sorted by yield, so row order records rank, not acquisition sequence. Only the lab can settle it.</a:t>
+            </a:r>
+          </a:p>
+        </p:txBody>
+      </p:sp>
+      <p:sp>
+        <p:nvSpPr>
+          <p:cNvPr id="20" name="Rectangle 19"/>
+          <p:cNvSpPr/>
+          <p:nvPr/>
+        </p:nvSpPr>
+        <p:spPr>
+          <a:xfrm>
+            <a:off x="4343400" y="2926079"/>
+            <a:ext cx="1554480" cy="274320"/>
+          </a:xfrm>
+          <a:prstGeom prst="rect">
+            <a:avLst/>
+          </a:prstGeom>
+          <a:solidFill>
+            <a:srgbClr val="10B981"/>
+          </a:solidFill>
+          <a:ln>
+            <a:noFill/>
+          </a:ln>
+        </p:spPr>
+        <p:style>
+          <a:lnRef idx="1">
+            <a:schemeClr val="accent1"/>
+          </a:lnRef>
+          <a:fillRef idx="3">
+            <a:schemeClr val="accent1"/>
+          </a:fillRef>
+          <a:effectRef idx="2">
+            <a:schemeClr val="accent1"/>
+          </a:effectRef>
+          <a:fontRef idx="minor">
+            <a:schemeClr val="lt1"/>
+          </a:fontRef>
+        </p:style>
+        <p:txBody>
+          <a:bodyPr rtlCol="0" anchor="ctr"/>
+          <a:lstStyle/>
+          <a:p>
+            <a:pPr algn="ctr"/>
+          </a:p>
+        </p:txBody>
+      </p:sp>
+      <p:sp>
+        <p:nvSpPr>
+          <p:cNvPr id="21" name="TextBox 20"/>
+          <p:cNvSpPr txBox="1"/>
+          <p:nvPr/>
+        </p:nvSpPr>
+        <p:spPr>
+          <a:xfrm>
+            <a:off x="4389120" y="2944367"/>
+            <a:ext cx="1463040" cy="237744"/>
+          </a:xfrm>
+          <a:prstGeom prst="rect">
+            <a:avLst/>
+          </a:prstGeom>
+          <a:noFill/>
+        </p:spPr>
+        <p:txBody>
+          <a:bodyPr wrap="square">
+            <a:spAutoFit/>
+          </a:bodyPr>
+          <a:lstStyle/>
+          <a:p>
+            <a:pPr algn="ctr"/>
+            <a:r>
+              <a:rPr sz="900" b="1" i="0">
+                <a:solidFill>
+                  <a:srgbClr val="FFFFFF"/>
+                </a:solidFill>
+              </a:rPr>
+              <a:t>Highest impact</a:t>
+            </a:r>
+          </a:p>
+        </p:txBody>
+      </p:sp>
+      <p:sp>
+        <p:nvSpPr>
+          <p:cNvPr id="22" name="Rectangle 21"/>
+          <p:cNvSpPr/>
+          <p:nvPr/>
+        </p:nvSpPr>
+        <p:spPr>
+          <a:xfrm>
+            <a:off x="365760" y="4343400"/>
             <a:ext cx="5669280" cy="1417320"/>
           </a:xfrm>
           <a:prstGeom prst="rect">
@@ -9171,13 +9730,13 @@
       </p:sp>
       <p:sp>
         <p:nvSpPr>
-          <p:cNvPr id="16" name="Rectangle 15"/>
+          <p:cNvPr id="23" name="Rectangle 22"/>
           <p:cNvSpPr/>
           <p:nvPr/>
         </p:nvSpPr>
         <p:spPr>
           <a:xfrm>
-            <a:off x="457200" y="2926079"/>
+            <a:off x="457200" y="4434840"/>
             <a:ext cx="329184" cy="329184"/>
           </a:xfrm>
           <a:prstGeom prst="rect">
@@ -9214,13 +9773,13 @@
       </p:sp>
       <p:sp>
         <p:nvSpPr>
-          <p:cNvPr id="17" name="TextBox 16"/>
-          <p:cNvSpPr txBox="1"/>
-          <p:nvPr/>
-        </p:nvSpPr>
-        <p:spPr>
-          <a:xfrm>
-            <a:off x="502920" y="2944367"/>
+          <p:cNvPr id="24" name="TextBox 23"/>
+          <p:cNvSpPr txBox="1"/>
+          <p:nvPr/>
+        </p:nvSpPr>
+        <p:spPr>
+          <a:xfrm>
+            <a:off x="502920" y="4453128"/>
             <a:ext cx="237744" cy="292608"/>
           </a:xfrm>
           <a:prstGeom prst="rect">
@@ -9241,20 +9800,20 @@
                   <a:srgbClr val="FFFFFF"/>
                 </a:solidFill>
               </a:rPr>
-              <a:t>2</a:t>
-            </a:r>
-          </a:p>
-        </p:txBody>
-      </p:sp>
-      <p:sp>
-        <p:nvSpPr>
-          <p:cNvPr id="18" name="TextBox 17"/>
-          <p:cNvSpPr txBox="1"/>
-          <p:nvPr/>
-        </p:nvSpPr>
-        <p:spPr>
-          <a:xfrm>
-            <a:off x="868680" y="2926079"/>
+              <a:t>3</a:t>
+            </a:r>
+          </a:p>
+        </p:txBody>
+      </p:sp>
+      <p:sp>
+        <p:nvSpPr>
+          <p:cNvPr id="25" name="TextBox 24"/>
+          <p:cNvSpPr txBox="1"/>
+          <p:nvPr/>
+        </p:nvSpPr>
+        <p:spPr>
+          <a:xfrm>
+            <a:off x="868680" y="4434840"/>
             <a:ext cx="5074920" cy="384048"/>
           </a:xfrm>
           <a:prstGeom prst="rect">
@@ -9275,20 +9834,20 @@
                   <a:srgbClr val="0F1E42"/>
                 </a:solidFill>
               </a:rPr>
-              <a:t>Bag the Stage-1 expert</a:t>
-            </a:r>
-          </a:p>
-        </p:txBody>
-      </p:sp>
-      <p:sp>
-        <p:nvSpPr>
-          <p:cNvPr id="19" name="TextBox 18"/>
-          <p:cNvSpPr txBox="1"/>
-          <p:nvPr/>
-        </p:nvSpPr>
-        <p:spPr>
-          <a:xfrm>
-            <a:off x="868680" y="3337559"/>
+              <a:t>Ask why grid coverage is incomplete</a:t>
+            </a:r>
+          </a:p>
+        </p:txBody>
+      </p:sp>
+      <p:sp>
+        <p:nvSpPr>
+          <p:cNvPr id="26" name="TextBox 25"/>
+          <p:cNvSpPr txBox="1"/>
+          <p:nvPr/>
+        </p:nvSpPr>
+        <p:spPr>
+          <a:xfrm>
+            <a:off x="868680" y="4846320"/>
             <a:ext cx="5074920" cy="777240"/>
           </a:xfrm>
           <a:prstGeom prst="rect">
@@ -9309,20 +9868,20 @@
                   <a:srgbClr val="50596E"/>
                 </a:solidFill>
               </a:rPr>
-              <a:t>Ensemble of XGBoost models reduces high variance from only 782 training samples.</a:t>
-            </a:r>
-          </a:p>
-        </p:txBody>
-      </p:sp>
-      <p:sp>
-        <p:nvSpPr>
-          <p:cNvPr id="20" name="Rectangle 19"/>
+              <a:t>186 catalyst-temperature cells absent; only 811 of 917 catalysts have all five temperatures. Decides whether the bias is correctable or itself informative.</a:t>
+            </a:r>
+          </a:p>
+        </p:txBody>
+      </p:sp>
+      <p:sp>
+        <p:nvSpPr>
+          <p:cNvPr id="27" name="Rectangle 26"/>
           <p:cNvSpPr/>
           <p:nvPr/>
         </p:nvSpPr>
         <p:spPr>
           <a:xfrm>
-            <a:off x="365760" y="4343400"/>
+            <a:off x="6263640" y="1325880"/>
             <a:ext cx="5669280" cy="1417320"/>
           </a:xfrm>
           <a:prstGeom prst="rect">
@@ -9361,13 +9920,13 @@
       </p:sp>
       <p:sp>
         <p:nvSpPr>
-          <p:cNvPr id="21" name="Rectangle 20"/>
+          <p:cNvPr id="28" name="Rectangle 27"/>
           <p:cNvSpPr/>
           <p:nvPr/>
         </p:nvSpPr>
         <p:spPr>
           <a:xfrm>
-            <a:off x="457200" y="4434840"/>
+            <a:off x="6355080" y="1417320"/>
             <a:ext cx="329184" cy="329184"/>
           </a:xfrm>
           <a:prstGeom prst="rect">
@@ -9404,13 +9963,13 @@
       </p:sp>
       <p:sp>
         <p:nvSpPr>
-          <p:cNvPr id="22" name="TextBox 21"/>
-          <p:cNvSpPr txBox="1"/>
-          <p:nvPr/>
-        </p:nvSpPr>
-        <p:spPr>
-          <a:xfrm>
-            <a:off x="502920" y="4453128"/>
+          <p:cNvPr id="29" name="TextBox 28"/>
+          <p:cNvSpPr txBox="1"/>
+          <p:nvPr/>
+        </p:nvSpPr>
+        <p:spPr>
+          <a:xfrm>
+            <a:off x="6400800" y="1435608"/>
             <a:ext cx="237744" cy="292608"/>
           </a:xfrm>
           <a:prstGeom prst="rect">
@@ -9431,20 +9990,20 @@
                   <a:srgbClr val="FFFFFF"/>
                 </a:solidFill>
               </a:rPr>
-              <a:t>3</a:t>
-            </a:r>
-          </a:p>
-        </p:txBody>
-      </p:sp>
-      <p:sp>
-        <p:nvSpPr>
-          <p:cNvPr id="23" name="TextBox 22"/>
-          <p:cNvSpPr txBox="1"/>
-          <p:nvPr/>
-        </p:nvSpPr>
-        <p:spPr>
-          <a:xfrm>
-            <a:off x="868680" y="4434840"/>
+              <a:t>4</a:t>
+            </a:r>
+          </a:p>
+        </p:txBody>
+      </p:sp>
+      <p:sp>
+        <p:nvSpPr>
+          <p:cNvPr id="30" name="TextBox 29"/>
+          <p:cNvSpPr txBox="1"/>
+          <p:nvPr/>
+        </p:nvSpPr>
+        <p:spPr>
+          <a:xfrm>
+            <a:off x="6766560" y="1417320"/>
             <a:ext cx="5074920" cy="384048"/>
           </a:xfrm>
           <a:prstGeom prst="rect">
@@ -9465,20 +10024,20 @@
                   <a:srgbClr val="0F1E42"/>
                 </a:solidFill>
               </a:rPr>
-              <a:t>Add uncertainty quantification</a:t>
-            </a:r>
-          </a:p>
-        </p:txBody>
-      </p:sp>
-      <p:sp>
-        <p:nvSpPr>
-          <p:cNvPr id="24" name="TextBox 23"/>
-          <p:cNvSpPr txBox="1"/>
-          <p:nvPr/>
-        </p:nvSpPr>
-        <p:spPr>
-          <a:xfrm>
-            <a:off x="868680" y="4846320"/>
+              <a:t>Re-scope the campaign before reactor time is spent</a:t>
+            </a:r>
+          </a:p>
+        </p:txBody>
+      </p:sp>
+      <p:sp>
+        <p:nvSpPr>
+          <p:cNvPr id="31" name="TextBox 30"/>
+          <p:cNvSpPr txBox="1"/>
+          <p:nvPr/>
+        </p:nvSpPr>
+        <p:spPr>
+          <a:xfrm>
+            <a:off x="6766560" y="1828800"/>
             <a:ext cx="5074920" cy="777240"/>
           </a:xfrm>
           <a:prstGeom prst="rect">
@@ -9499,20 +10058,20 @@
                   <a:srgbClr val="50596E"/>
                 </a:solidFill>
               </a:rPr>
-              <a:t>Conformal prediction or quantile regression — flag low-confidence picks for the experiment loop.</a:t>
-            </a:r>
-          </a:p>
-        </p:txBody>
-      </p:sp>
-      <p:sp>
-        <p:nvSpPr>
-          <p:cNvPr id="25" name="Rectangle 24"/>
+              <a:t>20 runs per catalyst instead of 135 reproduces the full ranking at ρ = 0.949, buying ~72 catalysts plus a control arm for the budget of 17 exhaustive ones.</a:t>
+            </a:r>
+          </a:p>
+        </p:txBody>
+      </p:sp>
+      <p:sp>
+        <p:nvSpPr>
+          <p:cNvPr id="32" name="Rectangle 31"/>
           <p:cNvSpPr/>
           <p:nvPr/>
         </p:nvSpPr>
         <p:spPr>
           <a:xfrm>
-            <a:off x="6263640" y="1325880"/>
+            <a:off x="6263640" y="2834639"/>
             <a:ext cx="5669280" cy="1417320"/>
           </a:xfrm>
           <a:prstGeom prst="rect">
@@ -9551,13 +10110,13 @@
       </p:sp>
       <p:sp>
         <p:nvSpPr>
-          <p:cNvPr id="26" name="Rectangle 25"/>
+          <p:cNvPr id="33" name="Rectangle 32"/>
           <p:cNvSpPr/>
           <p:nvPr/>
         </p:nvSpPr>
         <p:spPr>
           <a:xfrm>
-            <a:off x="6355080" y="1417320"/>
+            <a:off x="6355080" y="2926079"/>
             <a:ext cx="329184" cy="329184"/>
           </a:xfrm>
           <a:prstGeom prst="rect">
@@ -9594,13 +10153,13 @@
       </p:sp>
       <p:sp>
         <p:nvSpPr>
-          <p:cNvPr id="27" name="TextBox 26"/>
-          <p:cNvSpPr txBox="1"/>
-          <p:nvPr/>
-        </p:nvSpPr>
-        <p:spPr>
-          <a:xfrm>
-            <a:off x="6400800" y="1435608"/>
+          <p:cNvPr id="34" name="TextBox 33"/>
+          <p:cNvSpPr txBox="1"/>
+          <p:nvPr/>
+        </p:nvSpPr>
+        <p:spPr>
+          <a:xfrm>
+            <a:off x="6400800" y="2944367"/>
             <a:ext cx="237744" cy="292608"/>
           </a:xfrm>
           <a:prstGeom prst="rect">
@@ -9621,20 +10180,20 @@
                   <a:srgbClr val="FFFFFF"/>
                 </a:solidFill>
               </a:rPr>
-              <a:t>4</a:t>
-            </a:r>
-          </a:p>
-        </p:txBody>
-      </p:sp>
-      <p:sp>
-        <p:nvSpPr>
-          <p:cNvPr id="28" name="TextBox 27"/>
-          <p:cNvSpPr txBox="1"/>
-          <p:nvPr/>
-        </p:nvSpPr>
-        <p:spPr>
-          <a:xfrm>
-            <a:off x="6766560" y="1417320"/>
+              <a:t>5</a:t>
+            </a:r>
+          </a:p>
+        </p:txBody>
+      </p:sp>
+      <p:sp>
+        <p:nvSpPr>
+          <p:cNvPr id="35" name="TextBox 34"/>
+          <p:cNvSpPr txBox="1"/>
+          <p:nvPr/>
+        </p:nvSpPr>
+        <p:spPr>
+          <a:xfrm>
+            <a:off x="6766560" y="2926079"/>
             <a:ext cx="5074920" cy="384048"/>
           </a:xfrm>
           <a:prstGeom prst="rect">
@@ -9655,20 +10214,20 @@
                   <a:srgbClr val="0F1E42"/>
                 </a:solidFill>
               </a:rPr>
-              <a:t>Stack DRST + KMM inside Prior FT</a:t>
-            </a:r>
-          </a:p>
-        </p:txBody>
-      </p:sp>
-      <p:sp>
-        <p:nvSpPr>
-          <p:cNvPr id="29" name="TextBox 28"/>
-          <p:cNvSpPr txBox="1"/>
-          <p:nvPr/>
-        </p:nvSpPr>
-        <p:spPr>
-          <a:xfrm>
-            <a:off x="6766560" y="1828800"/>
+              <a:t>Send the corrected work note</a:t>
+            </a:r>
+          </a:p>
+        </p:txBody>
+      </p:sp>
+      <p:sp>
+        <p:nvSpPr>
+          <p:cNvPr id="36" name="TextBox 35"/>
+          <p:cNvSpPr txBox="1"/>
+          <p:nvPr/>
+        </p:nvSpPr>
+        <p:spPr>
+          <a:xfrm>
+            <a:off x="6766560" y="3337559"/>
             <a:ext cx="5074920" cy="777240"/>
           </a:xfrm>
           <a:prstGeom prst="rect">
@@ -9689,20 +10248,20 @@
                   <a:srgbClr val="50596E"/>
                 </a:solidFill>
               </a:rPr>
-              <a:t>Run them as one integrated pipeline rather than three separate methods.</a:t>
-            </a:r>
-          </a:p>
-        </p:txBody>
-      </p:sp>
-      <p:sp>
-        <p:nvSpPr>
-          <p:cNvPr id="30" name="Rectangle 29"/>
+              <a:t>Complete and verified. Every number now traces to a JSON written by a committed script.</a:t>
+            </a:r>
+          </a:p>
+        </p:txBody>
+      </p:sp>
+      <p:sp>
+        <p:nvSpPr>
+          <p:cNvPr id="37" name="Rectangle 36"/>
           <p:cNvSpPr/>
           <p:nvPr/>
         </p:nvSpPr>
         <p:spPr>
           <a:xfrm>
-            <a:off x="6263640" y="2834639"/>
+            <a:off x="6263640" y="4343400"/>
             <a:ext cx="5669280" cy="1417320"/>
           </a:xfrm>
           <a:prstGeom prst="rect">
@@ -9741,13 +10300,13 @@
       </p:sp>
       <p:sp>
         <p:nvSpPr>
-          <p:cNvPr id="31" name="Rectangle 30"/>
+          <p:cNvPr id="38" name="Rectangle 37"/>
           <p:cNvSpPr/>
           <p:nvPr/>
         </p:nvSpPr>
         <p:spPr>
           <a:xfrm>
-            <a:off x="6355080" y="2926079"/>
+            <a:off x="6355080" y="4434840"/>
             <a:ext cx="329184" cy="329184"/>
           </a:xfrm>
           <a:prstGeom prst="rect">
@@ -9784,197 +10343,7 @@
       </p:sp>
       <p:sp>
         <p:nvSpPr>
-          <p:cNvPr id="32" name="TextBox 31"/>
-          <p:cNvSpPr txBox="1"/>
-          <p:nvPr/>
-        </p:nvSpPr>
-        <p:spPr>
-          <a:xfrm>
-            <a:off x="6400800" y="2944367"/>
-            <a:ext cx="237744" cy="292608"/>
-          </a:xfrm>
-          <a:prstGeom prst="rect">
-            <a:avLst/>
-          </a:prstGeom>
-          <a:noFill/>
-        </p:spPr>
-        <p:txBody>
-          <a:bodyPr wrap="square">
-            <a:spAutoFit/>
-          </a:bodyPr>
-          <a:lstStyle/>
-          <a:p>
-            <a:pPr algn="ctr"/>
-            <a:r>
-              <a:rPr sz="1400" b="1" i="0">
-                <a:solidFill>
-                  <a:srgbClr val="FFFFFF"/>
-                </a:solidFill>
-              </a:rPr>
-              <a:t>5</a:t>
-            </a:r>
-          </a:p>
-        </p:txBody>
-      </p:sp>
-      <p:sp>
-        <p:nvSpPr>
-          <p:cNvPr id="33" name="TextBox 32"/>
-          <p:cNvSpPr txBox="1"/>
-          <p:nvPr/>
-        </p:nvSpPr>
-        <p:spPr>
-          <a:xfrm>
-            <a:off x="6766560" y="2926079"/>
-            <a:ext cx="5074920" cy="384048"/>
-          </a:xfrm>
-          <a:prstGeom prst="rect">
-            <a:avLst/>
-          </a:prstGeom>
-          <a:noFill/>
-        </p:spPr>
-        <p:txBody>
-          <a:bodyPr wrap="square">
-            <a:spAutoFit/>
-          </a:bodyPr>
-          <a:lstStyle/>
-          <a:p>
-            <a:pPr algn="l"/>
-            <a:r>
-              <a:rPr sz="1200" b="1" i="0">
-                <a:solidFill>
-                  <a:srgbClr val="0F1E42"/>
-                </a:solidFill>
-              </a:rPr>
-              <a:t>Neural domain adaptation (DANN, CORAL)</a:t>
-            </a:r>
-          </a:p>
-        </p:txBody>
-      </p:sp>
-      <p:sp>
-        <p:nvSpPr>
-          <p:cNvPr id="34" name="TextBox 33"/>
-          <p:cNvSpPr txBox="1"/>
-          <p:nvPr/>
-        </p:nvSpPr>
-        <p:spPr>
-          <a:xfrm>
-            <a:off x="6766560" y="3337559"/>
-            <a:ext cx="5074920" cy="777240"/>
-          </a:xfrm>
-          <a:prstGeom prst="rect">
-            <a:avLst/>
-          </a:prstGeom>
-          <a:noFill/>
-        </p:spPr>
-        <p:txBody>
-          <a:bodyPr wrap="square">
-            <a:spAutoFit/>
-          </a:bodyPr>
-          <a:lstStyle/>
-          <a:p>
-            <a:pPr algn="l"/>
-            <a:r>
-              <a:rPr sz="1000" b="0" i="0">
-                <a:solidFill>
-                  <a:srgbClr val="50596E"/>
-                </a:solidFill>
-              </a:rPr>
-              <a:t>More powerful once the feature set is richer — currently under-powered.</a:t>
-            </a:r>
-          </a:p>
-        </p:txBody>
-      </p:sp>
-      <p:sp>
-        <p:nvSpPr>
-          <p:cNvPr id="35" name="Rectangle 34"/>
-          <p:cNvSpPr/>
-          <p:nvPr/>
-        </p:nvSpPr>
-        <p:spPr>
-          <a:xfrm>
-            <a:off x="6263640" y="4343400"/>
-            <a:ext cx="5669280" cy="1417320"/>
-          </a:xfrm>
-          <a:prstGeom prst="rect">
-            <a:avLst/>
-          </a:prstGeom>
-          <a:solidFill>
-            <a:srgbClr val="F5F6F8"/>
-          </a:solidFill>
-          <a:ln w="9525">
-            <a:solidFill>
-              <a:srgbClr val="D0D5DF"/>
-            </a:solidFill>
-          </a:ln>
-        </p:spPr>
-        <p:style>
-          <a:lnRef idx="1">
-            <a:schemeClr val="accent1"/>
-          </a:lnRef>
-          <a:fillRef idx="3">
-            <a:schemeClr val="accent1"/>
-          </a:fillRef>
-          <a:effectRef idx="2">
-            <a:schemeClr val="accent1"/>
-          </a:effectRef>
-          <a:fontRef idx="minor">
-            <a:schemeClr val="lt1"/>
-          </a:fontRef>
-        </p:style>
-        <p:txBody>
-          <a:bodyPr rtlCol="0" anchor="ctr"/>
-          <a:lstStyle/>
-          <a:p>
-            <a:pPr algn="ctr"/>
-          </a:p>
-        </p:txBody>
-      </p:sp>
-      <p:sp>
-        <p:nvSpPr>
-          <p:cNvPr id="36" name="Rectangle 35"/>
-          <p:cNvSpPr/>
-          <p:nvPr/>
-        </p:nvSpPr>
-        <p:spPr>
-          <a:xfrm>
-            <a:off x="6355080" y="4434840"/>
-            <a:ext cx="329184" cy="329184"/>
-          </a:xfrm>
-          <a:prstGeom prst="rect">
-            <a:avLst/>
-          </a:prstGeom>
-          <a:solidFill>
-            <a:srgbClr val="0078C8"/>
-          </a:solidFill>
-          <a:ln>
-            <a:noFill/>
-          </a:ln>
-        </p:spPr>
-        <p:style>
-          <a:lnRef idx="1">
-            <a:schemeClr val="accent1"/>
-          </a:lnRef>
-          <a:fillRef idx="3">
-            <a:schemeClr val="accent1"/>
-          </a:fillRef>
-          <a:effectRef idx="2">
-            <a:schemeClr val="accent1"/>
-          </a:effectRef>
-          <a:fontRef idx="minor">
-            <a:schemeClr val="lt1"/>
-          </a:fontRef>
-        </p:style>
-        <p:txBody>
-          <a:bodyPr rtlCol="0" anchor="ctr"/>
-          <a:lstStyle/>
-          <a:p>
-            <a:pPr algn="ctr"/>
-          </a:p>
-        </p:txBody>
-      </p:sp>
-      <p:sp>
-        <p:nvSpPr>
-          <p:cNvPr id="37" name="TextBox 36"/>
+          <p:cNvPr id="39" name="TextBox 38"/>
           <p:cNvSpPr txBox="1"/>
           <p:nvPr/>
         </p:nvSpPr>
@@ -10008,7 +10377,7 @@
       </p:sp>
       <p:sp>
         <p:nvSpPr>
-          <p:cNvPr id="38" name="TextBox 37"/>
+          <p:cNvPr id="40" name="TextBox 39"/>
           <p:cNvSpPr txBox="1"/>
           <p:nvPr/>
         </p:nvSpPr>
@@ -10035,14 +10404,14 @@
                   <a:srgbClr val="0F1E42"/>
                 </a:solidFill>
               </a:rPr>
-              <a:t>Close the active-learning loop</a:t>
-            </a:r>
-          </a:p>
-        </p:txBody>
-      </p:sp>
-      <p:sp>
-        <p:nvSpPr>
-          <p:cNvPr id="39" name="TextBox 38"/>
+              <a:t>Run the prospective validation</a:t>
+            </a:r>
+          </a:p>
+        </p:txBody>
+      </p:sp>
+      <p:sp>
+        <p:nvSpPr>
+          <p:cNvPr id="41" name="TextBox 40"/>
           <p:cNvSpPr txBox="1"/>
           <p:nvPr/>
         </p:nvSpPr>
@@ -10069,7 +10438,7 @@
                   <a:srgbClr val="50596E"/>
                 </a:solidFill>
               </a:rPr>
-              <a:t>Model proposes → lab measures → model retrains. Reduces label shift over time.</a:t>
+              <a:t>Prof. Taniike offered to synthesise candidates. A shortlist is a set to test, not a league table — the model cannot order within its own top 20.</a:t>
             </a:r>
           </a:p>
         </p:txBody>
@@ -10397,7 +10766,7 @@
                   <a:srgbClr val="50596E"/>
                 </a:solidFill>
               </a:rPr>
-              <a:t>Can published OCM literature improve a lab-data model without harming it?</a:t>
+              <a:t>Can published OCM literature improve a lab-data model — and can we rank UNSEEN catalysts well enough to guide synthesis?</a:t>
             </a:r>
           </a:p>
         </p:txBody>
@@ -10465,7 +10834,7 @@
                   <a:srgbClr val="1A1A2E"/>
                 </a:solidFill>
               </a:rPr>
-              <a:t>•  Naive merging HARMS accuracy (+5.4% RMSE) — the systematic offset corrupts training.</a:t>
+              <a:t>•  The original −9.7% gain was catalyst-identity leakage. Under catalyst-grouped CV the same models are 1.8% WORSE than baseline.</a:t>
             </a:r>
           </a:p>
         </p:txBody>
@@ -10499,7 +10868,7 @@
                   <a:srgbClr val="1A1A2E"/>
                 </a:solidFill>
               </a:rPr>
-              <a:t>•  Selective filtering (DRST / KMM) recovers about 5% improvement — independent methods agree (r=0.79).</a:t>
+              <a:t>•  No literature-integration design beats composition alone in-domain — four pre-registered designs and a 28-family follow-up, all null.</a:t>
             </a:r>
           </a:p>
         </p:txBody>
@@ -10533,7 +10902,7 @@
                   <a:srgbClr val="1A1A2E"/>
                 </a:solidFill>
               </a:rPr>
-              <a:t>•  Using literature as a PRIOR FEATURE (not a label) gives the biggest gain: −10.6% CV, confirmed 10/10 seeds (p&lt;10⁻¹⁴) and on a held-out test.</a:t>
+              <a:t>•  Literature helps only where the lab has NO coverage: on non-impregnation chemistry a plain merge lifts Spearman 0.24 → 0.39 and enrichment 0.42× → 1.34×. Plain merging beats the two-stage machinery — the value is the data, not the method.</a:t>
             </a:r>
           </a:p>
         </p:txBody>
@@ -10567,7 +10936,7 @@
                   <a:srgbClr val="1A1A2E"/>
                 </a:solidFill>
               </a:rPr>
-              <a:t>•  SHAP confirms the model uses real OCM chemistry: temperature, Ba, Mn, La, Ce, and the literature prior drive predictions.</a:t>
+              <a:t>•  The composition-only model still screens unseen catalysts usefully: enrichment 3.77× on the equal-effort set (95% CI 3.04–4.89×), and that conclusion survives either reading of the open data question.</a:t>
             </a:r>
           </a:p>
         </p:txBody>
@@ -10680,7 +11049,7 @@
                   <a:srgbClr val="1B5E20"/>
                 </a:solidFill>
               </a:rPr>
-              <a:t>Add GHSV and CH₄:O₂ to the feature set — the high-yield ceiling is data-bound, not model-bound.</a:t>
+              <a:t>Ask for the reaction-condition columns. One email unlocks more than any modelling change we have tried.</a:t>
             </a:r>
           </a:p>
         </p:txBody>
@@ -13203,7 +13572,7 @@
         <p:spPr>
           <a:xfrm>
             <a:off x="274320" y="1005840"/>
-            <a:ext cx="8229600" cy="2876575"/>
+            <a:ext cx="8229600" cy="2903171"/>
           </a:xfrm>
           <a:prstGeom prst="rect">
             <a:avLst/>
@@ -13703,7 +14072,7 @@
                   <a:srgbClr val="FFFFFF"/>
                 </a:solidFill>
               </a:rPr>
-              <a:t>How We Measure Success — Asymmetric 5-Fold CV</a:t>
+              <a:t>How We Measure Success — Catalyst-Grouped 5-Fold CV</a:t>
             </a:r>
           </a:p>
         </p:txBody>
@@ -13925,7 +14294,7 @@
                   <a:srgbClr val="1A1A2E"/>
                 </a:solidFill>
               </a:rPr>
-              <a:t>•  Our 89,074 samples split into 5 folds</a:t>
+              <a:t>•  The 89,074 rows are only 917 DISTINCT CATALYSTS</a:t>
             </a:r>
           </a:p>
         </p:txBody>
@@ -13959,7 +14328,7 @@
                   <a:srgbClr val="1A1A2E"/>
                 </a:solidFill>
               </a:rPr>
-              <a:t>•  Training fold = 4/5 of lab data + any literature</a:t>
+              <a:t>•  Folds split by catalyst — all rows of a catalyst in one fold</a:t>
             </a:r>
           </a:p>
         </p:txBody>
@@ -13993,7 +14362,7 @@
                   <a:srgbClr val="1A1A2E"/>
                 </a:solidFill>
               </a:rPr>
-              <a:t>•  Validation fold = 1/5 of lab data only</a:t>
+              <a:t>•  Validation fold = catalysts the model has never seen</a:t>
             </a:r>
           </a:p>
         </p:txBody>
@@ -14104,7 +14473,7 @@
                   <a:srgbClr val="FFFFFF"/>
                 </a:solidFill>
               </a:rPr>
-              <a:t>Why asymmetric?</a:t>
+              <a:t>Why grouped, and not by row</a:t>
             </a:r>
           </a:p>
         </p:txBody>
@@ -14138,7 +14507,7 @@
                   <a:srgbClr val="1A1A2E"/>
                 </a:solidFill>
               </a:rPr>
-              <a:t>•  The question: how well does the model predict OUR experiments?</a:t>
+              <a:t>•  A row split puts the SAME catalyst in train and test</a:t>
             </a:r>
           </a:p>
         </p:txBody>
@@ -14172,7 +14541,7 @@
                   <a:srgbClr val="1A1A2E"/>
                 </a:solidFill>
               </a:rPr>
-              <a:t>•  Mixing literature into validation would dilute the answer</a:t>
+              <a:t>•  The model then recalls catalysts instead of predicting new ones</a:t>
             </a:r>
           </a:p>
         </p:txBody>
@@ -14206,7 +14575,7 @@
                   <a:srgbClr val="1A1A2E"/>
                 </a:solidFill>
               </a:rPr>
-              <a:t>•  Same CV harness used for every method — only training data changes</a:t>
+              <a:t>•  Prof. Taniike raised exactly this — grouped CV is now the default</a:t>
             </a:r>
           </a:p>
         </p:txBody>
@@ -14285,7 +14654,7 @@
                   <a:srgbClr val="1B5E20"/>
                 </a:solidFill>
               </a:rPr>
-              <a:t>Metric: RMSE</a:t>
+              <a:t>Primary metric: catalyst-level</a:t>
             </a:r>
           </a:p>
         </p:txBody>
@@ -14319,8 +14688,8 @@
                   <a:srgbClr val="50596E"/>
                 </a:solidFill>
               </a:rPr>
-              <a:t>in units of percentage points of C₂ yield.
-An RMSE of 2.1 means typical error ≈ 2 pp.</a:t>
+              <a:t>Spearman on each catalyst's best yield, and enrichment@10%.
+Row RMSE is secondary — 19.9% of its variance is unreachable.</a:t>
             </a:r>
           </a:p>
         </p:txBody>
@@ -14354,7 +14723,7 @@
                   <a:srgbClr val="0F1E42"/>
                 </a:solidFill>
               </a:rPr>
-              <a:t>5-fold split (lab data, n=89,074)</a:t>
+              <a:t>5-fold split by CATALYST (917 groups)</a:t>
             </a:r>
           </a:p>
         </p:txBody>
@@ -14431,8 +14800,8 @@
                   <a:srgbClr val="FFFFFF"/>
                 </a:solidFill>
               </a:rPr>
-              <a:t>fold 1
-train</a:t>
+              <a:t>~183
+catalysts</a:t>
             </a:r>
           </a:p>
         </p:txBody>
@@ -14509,8 +14878,8 @@
                   <a:srgbClr val="FFFFFF"/>
                 </a:solidFill>
               </a:rPr>
-              <a:t>fold 2
-train</a:t>
+              <a:t>~183
+catalysts</a:t>
             </a:r>
           </a:p>
         </p:txBody>
@@ -14587,8 +14956,8 @@
                   <a:srgbClr val="FFFFFF"/>
                 </a:solidFill>
               </a:rPr>
-              <a:t>fold 3
-VAL</a:t>
+              <a:t>~183
+UNSEEN</a:t>
             </a:r>
           </a:p>
         </p:txBody>
@@ -14665,8 +15034,8 @@
                   <a:srgbClr val="FFFFFF"/>
                 </a:solidFill>
               </a:rPr>
-              <a:t>fold 4
-train</a:t>
+              <a:t>~183
+catalysts</a:t>
             </a:r>
           </a:p>
         </p:txBody>
@@ -14743,8 +15112,8 @@
                   <a:srgbClr val="FFFFFF"/>
                 </a:solidFill>
               </a:rPr>
-              <a:t>fold 5
-train</a:t>
+              <a:t>~183
+catalysts</a:t>
             </a:r>
           </a:p>
         </p:txBody>
@@ -14852,12 +15221,12 @@
           <a:p>
             <a:pPr algn="l"/>
             <a:r>
-              <a:rPr sz="1100" b="0" i="1">
+              <a:rPr sz="1000" b="0" i="1">
                 <a:solidFill>
                   <a:srgbClr val="50596E"/>
                 </a:solidFill>
               </a:rPr>
-              <a:t>Repeat 5 times, rotating which fold is the validation set. Report mean RMSE ± std.</a:t>
+              <a:t>Rotate the held-out fold 5 times. Every number on the following slides uses this protocol; row-level figures appear only where they are labelled as historical.</a:t>
             </a:r>
           </a:p>
         </p:txBody>
@@ -15135,12 +15504,12 @@
           <a:p>
             <a:pPr algn="l"/>
             <a:r>
-              <a:rPr sz="1400" b="1" i="0">
+              <a:rPr sz="1300" b="1" i="0">
                 <a:solidFill>
                   <a:srgbClr val="0F1E42"/>
                 </a:solidFill>
               </a:rPr>
-              <a:t>Step 1 — establish baseline</a:t>
+              <a:t>Step 1 — establish baseline  (ROW-LEVEL CV, historical)</a:t>
             </a:r>
           </a:p>
         </p:txBody>
@@ -15378,7 +15747,7 @@
         <p:spPr>
           <a:xfrm>
             <a:off x="365760" y="2606040"/>
-            <a:ext cx="5669280" cy="365760"/>
+            <a:ext cx="5669280" cy="457200"/>
           </a:xfrm>
           <a:prstGeom prst="rect">
             <a:avLst/>
@@ -15398,7 +15767,7 @@
                   <a:srgbClr val="50596E"/>
                 </a:solidFill>
               </a:rPr>
-              <a:t>Number every method must beat.</a:t>
+              <a:t>Row-level protocol — kept only for comparison with the published numbers. Under catalyst-grouped CV the baseline is 2.9425.</a:t>
             </a:r>
           </a:p>
         </p:txBody>
@@ -15783,27 +16152,27 @@
         <p:spPr>
           <a:xfrm>
             <a:off x="365760" y="5120640"/>
-            <a:ext cx="5669280" cy="365760"/>
-          </a:xfrm>
-          <a:prstGeom prst="rect">
-            <a:avLst/>
-          </a:prstGeom>
-          <a:noFill/>
-        </p:spPr>
-        <p:txBody>
-          <a:bodyPr wrap="square">
-            <a:spAutoFit/>
-          </a:bodyPr>
-          <a:lstStyle/>
-          <a:p>
-            <a:pPr algn="l"/>
-            <a:r>
-              <a:rPr sz="1200" b="1" i="1">
+            <a:ext cx="5669280" cy="548640"/>
+          </a:xfrm>
+          <a:prstGeom prst="rect">
+            <a:avLst/>
+          </a:prstGeom>
+          <a:noFill/>
+        </p:spPr>
+        <p:txBody>
+          <a:bodyPr wrap="square">
+            <a:spAutoFit/>
+          </a:bodyPr>
+          <a:lstStyle/>
+          <a:p>
+            <a:pPr algn="l"/>
+            <a:r>
+              <a:rPr sz="1100" b="1" i="1">
                 <a:solidFill>
                   <a:srgbClr val="8B1A1A"/>
                 </a:solidFill>
               </a:rPr>
-              <a:t>+5.4% worse than baseline.</a:t>
+              <a:t>+5.1% worse than baseline (row-level). Re-tested at catalyst level, a direct merge again sits below the composition-only control (0.7577 vs 0.7606).</a:t>
             </a:r>
           </a:p>
         </p:txBody>
@@ -16412,7 +16781,7 @@
         <p:spPr>
           <a:xfrm>
             <a:off x="274320" y="1143000"/>
-            <a:ext cx="7315200" cy="2647728"/>
+            <a:ext cx="7315200" cy="2676067"/>
           </a:xfrm>
           <a:prstGeom prst="rect">
             <a:avLst/>
@@ -17823,7 +18192,7 @@
         <p:spPr>
           <a:xfrm>
             <a:off x="274320" y="1143000"/>
-            <a:ext cx="7909560" cy="1621407"/>
+            <a:ext cx="7909560" cy="1644506"/>
           </a:xfrm>
           <a:prstGeom prst="rect">
             <a:avLst/>
@@ -18821,7 +19190,7 @@
                   <a:srgbClr val="FFFFFF"/>
                 </a:solidFill>
               </a:rPr>
-              <a:t>Prior Feature Transfer — The Winning Pipeline</a:t>
+              <a:t>Prior Feature Transfer — The Method That Exposed the Leak</a:t>
             </a:r>
           </a:p>
         </p:txBody>
@@ -20084,7 +20453,7 @@
                   <a:srgbClr val="0F1E42"/>
                 </a:solidFill>
               </a:rPr>
-              <a:t>Key property — literature enters as a feature, not a label</a:t>
+              <a:t>The design was sound. The evaluation was not.</a:t>
             </a:r>
           </a:p>
         </p:txBody>
@@ -20118,7 +20487,7 @@
                   <a:srgbClr val="50596E"/>
                 </a:solidFill>
               </a:rPr>
-              <a:t>Stage 2 NEVER sees literature labels. The 3.42 pp offset affects the VALUE of the 68th feature — which Stage 2 can calibrate: "when the expert says 8, my lab gets ~4.5". It does NOT corrupt the training loss, which it could not fix. A corrupted label can't be un-corrupted; a feature value is just another thing to learn around. Stage 1 uses XGBoost (conservative on 782 rows); Stage 2 uses LightGBM (fast on 89,074 rows).</a:t>
+              <a:t>Literature enters as a FEATURE, never as a label, so the 3.42 pp offset cannot corrupt the training loss. That reasoning still holds. But Stage 1 was trained on literature TOGETHER WITH the lab training rows, and under a row-level split those rows included the test catalysts — so the prior feature partly carried each test catalyst's own measured yields. The gain was recall, not prediction. Ruling this out is what produced the protocol on slide 5; the mechanism is named in ocm_eval.stage1_data().</a:t>
             </a:r>
           </a:p>
         </p:txBody>
